--- a/docs/plots/carbo/jx_carbo_linsubhr_ratio_throm3.pptx
+++ b/docs/plots/carbo/jx_carbo_linsubhr_ratio_throm3.pptx
@@ -3003,497 +3003,491 @@
           <p:spPr>
             <a:xfrm>
               <a:off x="817517" y="1896563"/>
-              <a:ext cx="7370972" cy="3649304"/>
+              <a:ext cx="7370972" cy="3651735"/>
             </a:xfrm>
             <a:custGeom>
               <a:avLst/>
               <a:pathLst>
-                <a:path w="7370972" h="3649304">
+                <a:path w="7370972" h="3651735">
                   <a:moveTo>
-                    <a:pt x="2359130" y="0"/>
+                    <a:pt x="2553339" y="0"/>
                   </a:moveTo>
                   <a:lnTo>
-                    <a:pt x="2402393" y="219016"/>
-                  </a:lnTo>
-                  <a:lnTo>
-                    <a:pt x="2480027" y="571667"/>
-                  </a:lnTo>
-                  <a:lnTo>
-                    <a:pt x="2557661" y="888099"/>
-                  </a:lnTo>
-                  <a:lnTo>
-                    <a:pt x="2635295" y="1172032"/>
-                  </a:lnTo>
-                  <a:lnTo>
-                    <a:pt x="2712930" y="1426804"/>
-                  </a:lnTo>
-                  <a:lnTo>
-                    <a:pt x="2790564" y="1655409"/>
-                  </a:lnTo>
-                  <a:lnTo>
-                    <a:pt x="2868198" y="1860535"/>
-                  </a:lnTo>
-                  <a:lnTo>
-                    <a:pt x="2945832" y="2044594"/>
-                  </a:lnTo>
-                  <a:lnTo>
-                    <a:pt x="3023466" y="2209749"/>
-                  </a:lnTo>
-                  <a:lnTo>
-                    <a:pt x="3101100" y="2357942"/>
-                  </a:lnTo>
-                  <a:lnTo>
-                    <a:pt x="3178734" y="2490914"/>
-                  </a:lnTo>
-                  <a:lnTo>
-                    <a:pt x="3256368" y="2610230"/>
-                  </a:lnTo>
-                  <a:lnTo>
-                    <a:pt x="3334002" y="2717291"/>
-                  </a:lnTo>
-                  <a:lnTo>
-                    <a:pt x="3411636" y="2788888"/>
-                  </a:lnTo>
-                  <a:lnTo>
-                    <a:pt x="3489270" y="2806682"/>
-                  </a:lnTo>
-                  <a:lnTo>
-                    <a:pt x="3566904" y="2824109"/>
-                  </a:lnTo>
-                  <a:lnTo>
-                    <a:pt x="3644538" y="2841177"/>
-                  </a:lnTo>
-                  <a:lnTo>
-                    <a:pt x="3722172" y="2857894"/>
-                  </a:lnTo>
-                  <a:lnTo>
-                    <a:pt x="3799806" y="2874266"/>
-                  </a:lnTo>
-                  <a:lnTo>
-                    <a:pt x="3877440" y="2890301"/>
-                  </a:lnTo>
-                  <a:lnTo>
-                    <a:pt x="3955074" y="2906006"/>
-                  </a:lnTo>
-                  <a:lnTo>
-                    <a:pt x="4032708" y="2921387"/>
-                  </a:lnTo>
-                  <a:lnTo>
-                    <a:pt x="4110342" y="2936451"/>
-                  </a:lnTo>
-                  <a:lnTo>
-                    <a:pt x="4187976" y="2951205"/>
-                  </a:lnTo>
-                  <a:lnTo>
-                    <a:pt x="4265610" y="2965655"/>
-                  </a:lnTo>
-                  <a:lnTo>
-                    <a:pt x="4343244" y="2979807"/>
-                  </a:lnTo>
-                  <a:lnTo>
-                    <a:pt x="4420879" y="2993668"/>
-                  </a:lnTo>
-                  <a:lnTo>
-                    <a:pt x="4498513" y="3007243"/>
-                  </a:lnTo>
-                  <a:lnTo>
-                    <a:pt x="4576147" y="3020539"/>
-                  </a:lnTo>
-                  <a:lnTo>
-                    <a:pt x="4653781" y="3033561"/>
-                  </a:lnTo>
-                  <a:lnTo>
-                    <a:pt x="4731415" y="3046314"/>
-                  </a:lnTo>
-                  <a:lnTo>
-                    <a:pt x="4809049" y="3058805"/>
-                  </a:lnTo>
-                  <a:lnTo>
-                    <a:pt x="4886683" y="3071038"/>
-                  </a:lnTo>
-                  <a:lnTo>
-                    <a:pt x="4964317" y="3083020"/>
-                  </a:lnTo>
-                  <a:lnTo>
-                    <a:pt x="5041951" y="3094754"/>
-                  </a:lnTo>
-                  <a:lnTo>
-                    <a:pt x="5119585" y="3106247"/>
-                  </a:lnTo>
-                  <a:lnTo>
-                    <a:pt x="5197219" y="3117503"/>
-                  </a:lnTo>
-                  <a:lnTo>
-                    <a:pt x="5274853" y="3128527"/>
-                  </a:lnTo>
-                  <a:lnTo>
-                    <a:pt x="5352487" y="3139324"/>
-                  </a:lnTo>
-                  <a:lnTo>
-                    <a:pt x="5430121" y="3149899"/>
-                  </a:lnTo>
-                  <a:lnTo>
-                    <a:pt x="5507755" y="3160256"/>
-                  </a:lnTo>
-                  <a:lnTo>
-                    <a:pt x="5585389" y="3170399"/>
-                  </a:lnTo>
-                  <a:lnTo>
-                    <a:pt x="5663023" y="3180334"/>
-                  </a:lnTo>
-                  <a:lnTo>
-                    <a:pt x="5740657" y="3190064"/>
-                  </a:lnTo>
-                  <a:lnTo>
-                    <a:pt x="5818291" y="3199593"/>
-                  </a:lnTo>
-                  <a:lnTo>
-                    <a:pt x="5895925" y="3208926"/>
-                  </a:lnTo>
-                  <a:lnTo>
-                    <a:pt x="5973559" y="3218067"/>
-                  </a:lnTo>
-                  <a:lnTo>
-                    <a:pt x="6051193" y="3227019"/>
-                  </a:lnTo>
-                  <a:lnTo>
-                    <a:pt x="6128827" y="3235787"/>
-                  </a:lnTo>
-                  <a:lnTo>
-                    <a:pt x="6206462" y="3244375"/>
-                  </a:lnTo>
-                  <a:lnTo>
-                    <a:pt x="6284096" y="3252785"/>
-                  </a:lnTo>
-                  <a:lnTo>
-                    <a:pt x="6361730" y="3261023"/>
-                  </a:lnTo>
-                  <a:lnTo>
-                    <a:pt x="6439364" y="3269090"/>
-                  </a:lnTo>
-                  <a:lnTo>
-                    <a:pt x="6516998" y="3276992"/>
-                  </a:lnTo>
-                  <a:lnTo>
-                    <a:pt x="6594632" y="3284730"/>
-                  </a:lnTo>
-                  <a:lnTo>
-                    <a:pt x="6672266" y="3292310"/>
-                  </a:lnTo>
-                  <a:lnTo>
-                    <a:pt x="6749900" y="3299733"/>
-                  </a:lnTo>
-                  <a:lnTo>
-                    <a:pt x="6827534" y="3307003"/>
-                  </a:lnTo>
-                  <a:lnTo>
-                    <a:pt x="6905168" y="3314123"/>
-                  </a:lnTo>
-                  <a:lnTo>
-                    <a:pt x="6982802" y="3321097"/>
-                  </a:lnTo>
-                  <a:lnTo>
-                    <a:pt x="7060436" y="3327927"/>
-                  </a:lnTo>
-                  <a:lnTo>
-                    <a:pt x="7138070" y="3334616"/>
-                  </a:lnTo>
-                  <a:lnTo>
-                    <a:pt x="7215704" y="3341168"/>
-                  </a:lnTo>
-                  <a:lnTo>
-                    <a:pt x="7293338" y="3347584"/>
-                  </a:lnTo>
-                  <a:lnTo>
-                    <a:pt x="7370972" y="3353869"/>
-                  </a:lnTo>
-                  <a:lnTo>
-                    <a:pt x="7370972" y="3649304"/>
-                  </a:lnTo>
-                  <a:lnTo>
-                    <a:pt x="7293338" y="3648922"/>
-                  </a:lnTo>
-                  <a:lnTo>
-                    <a:pt x="7215704" y="3648496"/>
-                  </a:lnTo>
-                  <a:lnTo>
-                    <a:pt x="7138070" y="3648022"/>
-                  </a:lnTo>
-                  <a:lnTo>
-                    <a:pt x="7060436" y="3647493"/>
-                  </a:lnTo>
-                  <a:lnTo>
-                    <a:pt x="6982802" y="3646903"/>
-                  </a:lnTo>
-                  <a:lnTo>
-                    <a:pt x="6905168" y="3646246"/>
-                  </a:lnTo>
-                  <a:lnTo>
-                    <a:pt x="6827534" y="3645514"/>
-                  </a:lnTo>
-                  <a:lnTo>
-                    <a:pt x="6749900" y="3644698"/>
-                  </a:lnTo>
-                  <a:lnTo>
-                    <a:pt x="6672266" y="3643788"/>
-                  </a:lnTo>
-                  <a:lnTo>
-                    <a:pt x="6594632" y="3642775"/>
-                  </a:lnTo>
-                  <a:lnTo>
-                    <a:pt x="6516998" y="3641645"/>
-                  </a:lnTo>
-                  <a:lnTo>
-                    <a:pt x="6439364" y="3640386"/>
-                  </a:lnTo>
-                  <a:lnTo>
-                    <a:pt x="6361730" y="3638983"/>
-                  </a:lnTo>
-                  <a:lnTo>
-                    <a:pt x="6284096" y="3637420"/>
-                  </a:lnTo>
-                  <a:lnTo>
-                    <a:pt x="6206462" y="3635677"/>
-                  </a:lnTo>
-                  <a:lnTo>
-                    <a:pt x="6128827" y="3633735"/>
-                  </a:lnTo>
-                  <a:lnTo>
-                    <a:pt x="6051193" y="3631571"/>
-                  </a:lnTo>
-                  <a:lnTo>
-                    <a:pt x="5973559" y="3629159"/>
-                  </a:lnTo>
-                  <a:lnTo>
-                    <a:pt x="5895925" y="3626471"/>
-                  </a:lnTo>
-                  <a:lnTo>
-                    <a:pt x="5818291" y="3623476"/>
-                  </a:lnTo>
-                  <a:lnTo>
-                    <a:pt x="5740657" y="3620137"/>
-                  </a:lnTo>
-                  <a:lnTo>
-                    <a:pt x="5663023" y="3616416"/>
-                  </a:lnTo>
-                  <a:lnTo>
-                    <a:pt x="5585389" y="3612270"/>
-                  </a:lnTo>
-                  <a:lnTo>
-                    <a:pt x="5507755" y="3607649"/>
-                  </a:lnTo>
-                  <a:lnTo>
-                    <a:pt x="5430121" y="3602499"/>
-                  </a:lnTo>
-                  <a:lnTo>
-                    <a:pt x="5352487" y="3596759"/>
-                  </a:lnTo>
-                  <a:lnTo>
-                    <a:pt x="5274853" y="3590362"/>
-                  </a:lnTo>
-                  <a:lnTo>
-                    <a:pt x="5197219" y="3583234"/>
-                  </a:lnTo>
-                  <a:lnTo>
-                    <a:pt x="5119585" y="3575289"/>
-                  </a:lnTo>
-                  <a:lnTo>
-                    <a:pt x="5041951" y="3566435"/>
-                  </a:lnTo>
-                  <a:lnTo>
-                    <a:pt x="4964317" y="3556568"/>
-                  </a:lnTo>
-                  <a:lnTo>
-                    <a:pt x="4886683" y="3545571"/>
-                  </a:lnTo>
-                  <a:lnTo>
-                    <a:pt x="4809049" y="3533315"/>
-                  </a:lnTo>
-                  <a:lnTo>
-                    <a:pt x="4731415" y="3519657"/>
-                  </a:lnTo>
-                  <a:lnTo>
-                    <a:pt x="4653781" y="3504435"/>
-                  </a:lnTo>
-                  <a:lnTo>
-                    <a:pt x="4576147" y="3487471"/>
-                  </a:lnTo>
-                  <a:lnTo>
-                    <a:pt x="4498513" y="3468565"/>
-                  </a:lnTo>
-                  <a:lnTo>
-                    <a:pt x="4420879" y="3447495"/>
-                  </a:lnTo>
-                  <a:lnTo>
-                    <a:pt x="4343244" y="3424014"/>
-                  </a:lnTo>
-                  <a:lnTo>
-                    <a:pt x="4265610" y="3397845"/>
-                  </a:lnTo>
-                  <a:lnTo>
-                    <a:pt x="4187976" y="3368680"/>
-                  </a:lnTo>
-                  <a:lnTo>
-                    <a:pt x="4110342" y="3336177"/>
-                  </a:lnTo>
-                  <a:lnTo>
-                    <a:pt x="4032708" y="3299954"/>
-                  </a:lnTo>
-                  <a:lnTo>
-                    <a:pt x="3955074" y="3259585"/>
-                  </a:lnTo>
-                  <a:lnTo>
-                    <a:pt x="3877440" y="3214596"/>
-                  </a:lnTo>
-                  <a:lnTo>
-                    <a:pt x="3799806" y="3164456"/>
-                  </a:lnTo>
-                  <a:lnTo>
-                    <a:pt x="3722172" y="3108578"/>
-                  </a:lnTo>
-                  <a:lnTo>
-                    <a:pt x="3644538" y="3046304"/>
-                  </a:lnTo>
-                  <a:lnTo>
-                    <a:pt x="3566904" y="2976902"/>
-                  </a:lnTo>
-                  <a:lnTo>
-                    <a:pt x="3489270" y="2899556"/>
-                  </a:lnTo>
-                  <a:lnTo>
-                    <a:pt x="3411636" y="2813357"/>
-                  </a:lnTo>
-                  <a:lnTo>
-                    <a:pt x="3334002" y="2770720"/>
-                  </a:lnTo>
-                  <a:lnTo>
-                    <a:pt x="3256368" y="2752169"/>
-                  </a:lnTo>
-                  <a:lnTo>
-                    <a:pt x="3178734" y="2733229"/>
-                  </a:lnTo>
-                  <a:lnTo>
-                    <a:pt x="3101100" y="2713890"/>
-                  </a:lnTo>
-                  <a:lnTo>
-                    <a:pt x="3023466" y="2694144"/>
-                  </a:lnTo>
-                  <a:lnTo>
-                    <a:pt x="2945832" y="2673984"/>
-                  </a:lnTo>
-                  <a:lnTo>
-                    <a:pt x="2868198" y="2653399"/>
-                  </a:lnTo>
-                  <a:lnTo>
-                    <a:pt x="2790564" y="2632381"/>
-                  </a:lnTo>
-                  <a:lnTo>
-                    <a:pt x="2712930" y="2610921"/>
-                  </a:lnTo>
-                  <a:lnTo>
-                    <a:pt x="2635295" y="2589009"/>
-                  </a:lnTo>
-                  <a:lnTo>
-                    <a:pt x="2557661" y="2566637"/>
-                  </a:lnTo>
-                  <a:lnTo>
-                    <a:pt x="2480027" y="2543794"/>
-                  </a:lnTo>
-                  <a:lnTo>
-                    <a:pt x="2402393" y="2520471"/>
-                  </a:lnTo>
-                  <a:lnTo>
-                    <a:pt x="2324759" y="2496657"/>
-                  </a:lnTo>
-                  <a:lnTo>
-                    <a:pt x="2247125" y="2472342"/>
-                  </a:lnTo>
-                  <a:lnTo>
-                    <a:pt x="2169491" y="2447515"/>
-                  </a:lnTo>
-                  <a:lnTo>
-                    <a:pt x="2091857" y="2422167"/>
-                  </a:lnTo>
-                  <a:lnTo>
-                    <a:pt x="2014223" y="2396285"/>
-                  </a:lnTo>
-                  <a:lnTo>
-                    <a:pt x="1936589" y="2369859"/>
-                  </a:lnTo>
-                  <a:lnTo>
-                    <a:pt x="1858955" y="2342877"/>
-                  </a:lnTo>
-                  <a:lnTo>
-                    <a:pt x="1781321" y="2315328"/>
-                  </a:lnTo>
-                  <a:lnTo>
-                    <a:pt x="1703687" y="2287199"/>
-                  </a:lnTo>
-                  <a:lnTo>
-                    <a:pt x="1626053" y="2258478"/>
-                  </a:lnTo>
-                  <a:lnTo>
-                    <a:pt x="1548419" y="2229154"/>
-                  </a:lnTo>
-                  <a:lnTo>
-                    <a:pt x="1470785" y="2199212"/>
-                  </a:lnTo>
-                  <a:lnTo>
-                    <a:pt x="1393151" y="2168641"/>
-                  </a:lnTo>
-                  <a:lnTo>
-                    <a:pt x="1315517" y="2137427"/>
-                  </a:lnTo>
-                  <a:lnTo>
-                    <a:pt x="1237883" y="2105556"/>
-                  </a:lnTo>
-                  <a:lnTo>
-                    <a:pt x="1160249" y="2073015"/>
-                  </a:lnTo>
-                  <a:lnTo>
-                    <a:pt x="1082615" y="2039789"/>
-                  </a:lnTo>
-                  <a:lnTo>
-                    <a:pt x="1004981" y="2005865"/>
-                  </a:lnTo>
-                  <a:lnTo>
-                    <a:pt x="927346" y="1971226"/>
-                  </a:lnTo>
-                  <a:lnTo>
-                    <a:pt x="849712" y="1935860"/>
-                  </a:lnTo>
-                  <a:lnTo>
-                    <a:pt x="772078" y="1899749"/>
-                  </a:lnTo>
-                  <a:lnTo>
-                    <a:pt x="694444" y="1862879"/>
-                  </a:lnTo>
-                  <a:lnTo>
-                    <a:pt x="616810" y="1825233"/>
-                  </a:lnTo>
-                  <a:lnTo>
-                    <a:pt x="539176" y="1786796"/>
-                  </a:lnTo>
-                  <a:lnTo>
-                    <a:pt x="461542" y="1747550"/>
-                  </a:lnTo>
-                  <a:lnTo>
-                    <a:pt x="383908" y="1707479"/>
-                  </a:lnTo>
-                  <a:lnTo>
-                    <a:pt x="306274" y="1666564"/>
-                  </a:lnTo>
-                  <a:lnTo>
-                    <a:pt x="228640" y="1624789"/>
-                  </a:lnTo>
-                  <a:lnTo>
-                    <a:pt x="151006" y="1582136"/>
-                  </a:lnTo>
-                  <a:lnTo>
-                    <a:pt x="73372" y="1538585"/>
-                  </a:lnTo>
-                  <a:lnTo>
-                    <a:pt x="0" y="1496559"/>
+                    <a:pt x="2557661" y="28869"/>
+                  </a:lnTo>
+                  <a:lnTo>
+                    <a:pt x="2635295" y="482474"/>
+                  </a:lnTo>
+                  <a:lnTo>
+                    <a:pt x="2712930" y="879299"/>
+                  </a:lnTo>
+                  <a:lnTo>
+                    <a:pt x="2790564" y="1226452"/>
+                  </a:lnTo>
+                  <a:lnTo>
+                    <a:pt x="2868198" y="1530150"/>
+                  </a:lnTo>
+                  <a:lnTo>
+                    <a:pt x="2945832" y="1795833"/>
+                  </a:lnTo>
+                  <a:lnTo>
+                    <a:pt x="3023466" y="2028258"/>
+                  </a:lnTo>
+                  <a:lnTo>
+                    <a:pt x="3101100" y="2231590"/>
+                  </a:lnTo>
+                  <a:lnTo>
+                    <a:pt x="3178734" y="2409470"/>
+                  </a:lnTo>
+                  <a:lnTo>
+                    <a:pt x="3256368" y="2565084"/>
+                  </a:lnTo>
+                  <a:lnTo>
+                    <a:pt x="3334002" y="2701219"/>
+                  </a:lnTo>
+                  <a:lnTo>
+                    <a:pt x="3411636" y="2789920"/>
+                  </a:lnTo>
+                  <a:lnTo>
+                    <a:pt x="3489270" y="2810767"/>
+                  </a:lnTo>
+                  <a:lnTo>
+                    <a:pt x="3566904" y="2831110"/>
+                  </a:lnTo>
+                  <a:lnTo>
+                    <a:pt x="3644538" y="2850961"/>
+                  </a:lnTo>
+                  <a:lnTo>
+                    <a:pt x="3722172" y="2870332"/>
+                  </a:lnTo>
+                  <a:lnTo>
+                    <a:pt x="3799806" y="2889236"/>
+                  </a:lnTo>
+                  <a:lnTo>
+                    <a:pt x="3877440" y="2907683"/>
+                  </a:lnTo>
+                  <a:lnTo>
+                    <a:pt x="3955074" y="2925684"/>
+                  </a:lnTo>
+                  <a:lnTo>
+                    <a:pt x="4032708" y="2943250"/>
+                  </a:lnTo>
+                  <a:lnTo>
+                    <a:pt x="4110342" y="2960391"/>
+                  </a:lnTo>
+                  <a:lnTo>
+                    <a:pt x="4187976" y="2977118"/>
+                  </a:lnTo>
+                  <a:lnTo>
+                    <a:pt x="4265610" y="2993442"/>
+                  </a:lnTo>
+                  <a:lnTo>
+                    <a:pt x="4343244" y="3009370"/>
+                  </a:lnTo>
+                  <a:lnTo>
+                    <a:pt x="4420879" y="3024914"/>
+                  </a:lnTo>
+                  <a:lnTo>
+                    <a:pt x="4498513" y="3040082"/>
+                  </a:lnTo>
+                  <a:lnTo>
+                    <a:pt x="4576147" y="3054884"/>
+                  </a:lnTo>
+                  <a:lnTo>
+                    <a:pt x="4653781" y="3069328"/>
+                  </a:lnTo>
+                  <a:lnTo>
+                    <a:pt x="4731415" y="3083423"/>
+                  </a:lnTo>
+                  <a:lnTo>
+                    <a:pt x="4809049" y="3097177"/>
+                  </a:lnTo>
+                  <a:lnTo>
+                    <a:pt x="4886683" y="3110599"/>
+                  </a:lnTo>
+                  <a:lnTo>
+                    <a:pt x="4964317" y="3123697"/>
+                  </a:lnTo>
+                  <a:lnTo>
+                    <a:pt x="5041951" y="3136478"/>
+                  </a:lnTo>
+                  <a:lnTo>
+                    <a:pt x="5119585" y="3148951"/>
+                  </a:lnTo>
+                  <a:lnTo>
+                    <a:pt x="5197219" y="3161122"/>
+                  </a:lnTo>
+                  <a:lnTo>
+                    <a:pt x="5274853" y="3172999"/>
+                  </a:lnTo>
+                  <a:lnTo>
+                    <a:pt x="5352487" y="3184589"/>
+                  </a:lnTo>
+                  <a:lnTo>
+                    <a:pt x="5430121" y="3195899"/>
+                  </a:lnTo>
+                  <a:lnTo>
+                    <a:pt x="5507755" y="3206935"/>
+                  </a:lnTo>
+                  <a:lnTo>
+                    <a:pt x="5585389" y="3217705"/>
+                  </a:lnTo>
+                  <a:lnTo>
+                    <a:pt x="5663023" y="3228215"/>
+                  </a:lnTo>
+                  <a:lnTo>
+                    <a:pt x="5740657" y="3238471"/>
+                  </a:lnTo>
+                  <a:lnTo>
+                    <a:pt x="5818291" y="3248479"/>
+                  </a:lnTo>
+                  <a:lnTo>
+                    <a:pt x="5895925" y="3258245"/>
+                  </a:lnTo>
+                  <a:lnTo>
+                    <a:pt x="5973559" y="3267775"/>
+                  </a:lnTo>
+                  <a:lnTo>
+                    <a:pt x="6051193" y="3277075"/>
+                  </a:lnTo>
+                  <a:lnTo>
+                    <a:pt x="6128827" y="3286150"/>
+                  </a:lnTo>
+                  <a:lnTo>
+                    <a:pt x="6206462" y="3295005"/>
+                  </a:lnTo>
+                  <a:lnTo>
+                    <a:pt x="6284096" y="3303647"/>
+                  </a:lnTo>
+                  <a:lnTo>
+                    <a:pt x="6361730" y="3312080"/>
+                  </a:lnTo>
+                  <a:lnTo>
+                    <a:pt x="6439364" y="3320310"/>
+                  </a:lnTo>
+                  <a:lnTo>
+                    <a:pt x="6516998" y="3328340"/>
+                  </a:lnTo>
+                  <a:lnTo>
+                    <a:pt x="6594632" y="3336176"/>
+                  </a:lnTo>
+                  <a:lnTo>
+                    <a:pt x="6672266" y="3343823"/>
+                  </a:lnTo>
+                  <a:lnTo>
+                    <a:pt x="6749900" y="3351286"/>
+                  </a:lnTo>
+                  <a:lnTo>
+                    <a:pt x="6827534" y="3358567"/>
+                  </a:lnTo>
+                  <a:lnTo>
+                    <a:pt x="6905168" y="3365673"/>
+                  </a:lnTo>
+                  <a:lnTo>
+                    <a:pt x="6982802" y="3372608"/>
+                  </a:lnTo>
+                  <a:lnTo>
+                    <a:pt x="7060436" y="3379374"/>
+                  </a:lnTo>
+                  <a:lnTo>
+                    <a:pt x="7138070" y="3385977"/>
+                  </a:lnTo>
+                  <a:lnTo>
+                    <a:pt x="7215704" y="3392421"/>
+                  </a:lnTo>
+                  <a:lnTo>
+                    <a:pt x="7293338" y="3398709"/>
+                  </a:lnTo>
+                  <a:lnTo>
+                    <a:pt x="7370972" y="3404845"/>
+                  </a:lnTo>
+                  <a:lnTo>
+                    <a:pt x="7370972" y="3651735"/>
+                  </a:lnTo>
+                  <a:lnTo>
+                    <a:pt x="7293338" y="3651605"/>
+                  </a:lnTo>
+                  <a:lnTo>
+                    <a:pt x="7215704" y="3651456"/>
+                  </a:lnTo>
+                  <a:lnTo>
+                    <a:pt x="7138070" y="3651286"/>
+                  </a:lnTo>
+                  <a:lnTo>
+                    <a:pt x="7060436" y="3651092"/>
+                  </a:lnTo>
+                  <a:lnTo>
+                    <a:pt x="6982802" y="3650870"/>
+                  </a:lnTo>
+                  <a:lnTo>
+                    <a:pt x="6905168" y="3650617"/>
+                  </a:lnTo>
+                  <a:lnTo>
+                    <a:pt x="6827534" y="3650327"/>
+                  </a:lnTo>
+                  <a:lnTo>
+                    <a:pt x="6749900" y="3649995"/>
+                  </a:lnTo>
+                  <a:lnTo>
+                    <a:pt x="6672266" y="3649616"/>
+                  </a:lnTo>
+                  <a:lnTo>
+                    <a:pt x="6594632" y="3649183"/>
+                  </a:lnTo>
+                  <a:lnTo>
+                    <a:pt x="6516998" y="3648688"/>
+                  </a:lnTo>
+                  <a:lnTo>
+                    <a:pt x="6439364" y="3648122"/>
+                  </a:lnTo>
+                  <a:lnTo>
+                    <a:pt x="6361730" y="3647476"/>
+                  </a:lnTo>
+                  <a:lnTo>
+                    <a:pt x="6284096" y="3646736"/>
+                  </a:lnTo>
+                  <a:lnTo>
+                    <a:pt x="6206462" y="3645891"/>
+                  </a:lnTo>
+                  <a:lnTo>
+                    <a:pt x="6128827" y="3644925"/>
+                  </a:lnTo>
+                  <a:lnTo>
+                    <a:pt x="6051193" y="3643820"/>
+                  </a:lnTo>
+                  <a:lnTo>
+                    <a:pt x="5973559" y="3642558"/>
+                  </a:lnTo>
+                  <a:lnTo>
+                    <a:pt x="5895925" y="3641115"/>
+                  </a:lnTo>
+                  <a:lnTo>
+                    <a:pt x="5818291" y="3639465"/>
+                  </a:lnTo>
+                  <a:lnTo>
+                    <a:pt x="5740657" y="3637580"/>
+                  </a:lnTo>
+                  <a:lnTo>
+                    <a:pt x="5663023" y="3635424"/>
+                  </a:lnTo>
+                  <a:lnTo>
+                    <a:pt x="5585389" y="3632960"/>
+                  </a:lnTo>
+                  <a:lnTo>
+                    <a:pt x="5507755" y="3630144"/>
+                  </a:lnTo>
+                  <a:lnTo>
+                    <a:pt x="5430121" y="3626925"/>
+                  </a:lnTo>
+                  <a:lnTo>
+                    <a:pt x="5352487" y="3623245"/>
+                  </a:lnTo>
+                  <a:lnTo>
+                    <a:pt x="5274853" y="3619038"/>
+                  </a:lnTo>
+                  <a:lnTo>
+                    <a:pt x="5197219" y="3614230"/>
+                  </a:lnTo>
+                  <a:lnTo>
+                    <a:pt x="5119585" y="3608733"/>
+                  </a:lnTo>
+                  <a:lnTo>
+                    <a:pt x="5041951" y="3602450"/>
+                  </a:lnTo>
+                  <a:lnTo>
+                    <a:pt x="4964317" y="3595268"/>
+                  </a:lnTo>
+                  <a:lnTo>
+                    <a:pt x="4886683" y="3587059"/>
+                  </a:lnTo>
+                  <a:lnTo>
+                    <a:pt x="4809049" y="3577675"/>
+                  </a:lnTo>
+                  <a:lnTo>
+                    <a:pt x="4731415" y="3566948"/>
+                  </a:lnTo>
+                  <a:lnTo>
+                    <a:pt x="4653781" y="3554686"/>
+                  </a:lnTo>
+                  <a:lnTo>
+                    <a:pt x="4576147" y="3540670"/>
+                  </a:lnTo>
+                  <a:lnTo>
+                    <a:pt x="4498513" y="3524648"/>
+                  </a:lnTo>
+                  <a:lnTo>
+                    <a:pt x="4420879" y="3506334"/>
+                  </a:lnTo>
+                  <a:lnTo>
+                    <a:pt x="4343244" y="3485399"/>
+                  </a:lnTo>
+                  <a:lnTo>
+                    <a:pt x="4265610" y="3461469"/>
+                  </a:lnTo>
+                  <a:lnTo>
+                    <a:pt x="4187976" y="3434115"/>
+                  </a:lnTo>
+                  <a:lnTo>
+                    <a:pt x="4110342" y="3402846"/>
+                  </a:lnTo>
+                  <a:lnTo>
+                    <a:pt x="4032708" y="3367104"/>
+                  </a:lnTo>
+                  <a:lnTo>
+                    <a:pt x="3955074" y="3326248"/>
+                  </a:lnTo>
+                  <a:lnTo>
+                    <a:pt x="3877440" y="3279545"/>
+                  </a:lnTo>
+                  <a:lnTo>
+                    <a:pt x="3799806" y="3226160"/>
+                  </a:lnTo>
+                  <a:lnTo>
+                    <a:pt x="3722172" y="3165137"/>
+                  </a:lnTo>
+                  <a:lnTo>
+                    <a:pt x="3644538" y="3095382"/>
+                  </a:lnTo>
+                  <a:lnTo>
+                    <a:pt x="3566904" y="3015645"/>
+                  </a:lnTo>
+                  <a:lnTo>
+                    <a:pt x="3489270" y="2924500"/>
+                  </a:lnTo>
+                  <a:lnTo>
+                    <a:pt x="3411636" y="2820314"/>
+                  </a:lnTo>
+                  <a:lnTo>
+                    <a:pt x="3334002" y="2768558"/>
+                  </a:lnTo>
+                  <a:lnTo>
+                    <a:pt x="3256368" y="2746666"/>
+                  </a:lnTo>
+                  <a:lnTo>
+                    <a:pt x="3178734" y="2724232"/>
+                  </a:lnTo>
+                  <a:lnTo>
+                    <a:pt x="3101100" y="2701243"/>
+                  </a:lnTo>
+                  <a:lnTo>
+                    <a:pt x="3023466" y="2677684"/>
+                  </a:lnTo>
+                  <a:lnTo>
+                    <a:pt x="2945832" y="2653542"/>
+                  </a:lnTo>
+                  <a:lnTo>
+                    <a:pt x="2868198" y="2628803"/>
+                  </a:lnTo>
+                  <a:lnTo>
+                    <a:pt x="2790564" y="2603450"/>
+                  </a:lnTo>
+                  <a:lnTo>
+                    <a:pt x="2712930" y="2577470"/>
+                  </a:lnTo>
+                  <a:lnTo>
+                    <a:pt x="2635295" y="2550847"/>
+                  </a:lnTo>
+                  <a:lnTo>
+                    <a:pt x="2557661" y="2523564"/>
+                  </a:lnTo>
+                  <a:lnTo>
+                    <a:pt x="2480027" y="2495606"/>
+                  </a:lnTo>
+                  <a:lnTo>
+                    <a:pt x="2402393" y="2466956"/>
+                  </a:lnTo>
+                  <a:lnTo>
+                    <a:pt x="2324759" y="2437596"/>
+                  </a:lnTo>
+                  <a:lnTo>
+                    <a:pt x="2247125" y="2407509"/>
+                  </a:lnTo>
+                  <a:lnTo>
+                    <a:pt x="2169491" y="2376677"/>
+                  </a:lnTo>
+                  <a:lnTo>
+                    <a:pt x="2091857" y="2345081"/>
+                  </a:lnTo>
+                  <a:lnTo>
+                    <a:pt x="2014223" y="2312703"/>
+                  </a:lnTo>
+                  <a:lnTo>
+                    <a:pt x="1936589" y="2279524"/>
+                  </a:lnTo>
+                  <a:lnTo>
+                    <a:pt x="1858955" y="2245523"/>
+                  </a:lnTo>
+                  <a:lnTo>
+                    <a:pt x="1781321" y="2210680"/>
+                  </a:lnTo>
+                  <a:lnTo>
+                    <a:pt x="1703687" y="2174974"/>
+                  </a:lnTo>
+                  <a:lnTo>
+                    <a:pt x="1626053" y="2138384"/>
+                  </a:lnTo>
+                  <a:lnTo>
+                    <a:pt x="1548419" y="2100888"/>
+                  </a:lnTo>
+                  <a:lnTo>
+                    <a:pt x="1470785" y="2062463"/>
+                  </a:lnTo>
+                  <a:lnTo>
+                    <a:pt x="1393151" y="2023087"/>
+                  </a:lnTo>
+                  <a:lnTo>
+                    <a:pt x="1315517" y="1982736"/>
+                  </a:lnTo>
+                  <a:lnTo>
+                    <a:pt x="1237883" y="1941386"/>
+                  </a:lnTo>
+                  <a:lnTo>
+                    <a:pt x="1160249" y="1899012"/>
+                  </a:lnTo>
+                  <a:lnTo>
+                    <a:pt x="1082615" y="1855589"/>
+                  </a:lnTo>
+                  <a:lnTo>
+                    <a:pt x="1004981" y="1811090"/>
+                  </a:lnTo>
+                  <a:lnTo>
+                    <a:pt x="927346" y="1765490"/>
+                  </a:lnTo>
+                  <a:lnTo>
+                    <a:pt x="849712" y="1718760"/>
+                  </a:lnTo>
+                  <a:lnTo>
+                    <a:pt x="772078" y="1670873"/>
+                  </a:lnTo>
+                  <a:lnTo>
+                    <a:pt x="694444" y="1621801"/>
+                  </a:lnTo>
+                  <a:lnTo>
+                    <a:pt x="616810" y="1571513"/>
+                  </a:lnTo>
+                  <a:lnTo>
+                    <a:pt x="539176" y="1519980"/>
+                  </a:lnTo>
+                  <a:lnTo>
+                    <a:pt x="461542" y="1467171"/>
+                  </a:lnTo>
+                  <a:lnTo>
+                    <a:pt x="383908" y="1413055"/>
+                  </a:lnTo>
+                  <a:lnTo>
+                    <a:pt x="306274" y="1357598"/>
+                  </a:lnTo>
+                  <a:lnTo>
+                    <a:pt x="228640" y="1300768"/>
+                  </a:lnTo>
+                  <a:lnTo>
+                    <a:pt x="151006" y="1242531"/>
+                  </a:lnTo>
+                  <a:lnTo>
+                    <a:pt x="73372" y="1182852"/>
+                  </a:lnTo>
+                  <a:lnTo>
+                    <a:pt x="0" y="1125052"/>
                   </a:lnTo>
                   <a:close/>
                 </a:path>
@@ -3519,210 +3513,204 @@
           </p:nvSpPr>
           <p:spPr>
             <a:xfrm>
-              <a:off x="3176648" y="1896563"/>
-              <a:ext cx="5011842" cy="3353869"/>
+              <a:off x="3370857" y="1896563"/>
+              <a:ext cx="4817633" cy="3404845"/>
             </a:xfrm>
             <a:custGeom>
               <a:avLst/>
               <a:pathLst>
-                <a:path w="5011842" h="3353869">
+                <a:path w="4817633" h="3404845">
                   <a:moveTo>
                     <a:pt x="0" y="0"/>
                   </a:moveTo>
                   <a:lnTo>
-                    <a:pt x="43263" y="219016"/>
-                  </a:lnTo>
-                  <a:lnTo>
-                    <a:pt x="120897" y="571667"/>
-                  </a:lnTo>
-                  <a:lnTo>
-                    <a:pt x="198531" y="888099"/>
-                  </a:lnTo>
-                  <a:lnTo>
-                    <a:pt x="276165" y="1172032"/>
-                  </a:lnTo>
-                  <a:lnTo>
-                    <a:pt x="353799" y="1426804"/>
-                  </a:lnTo>
-                  <a:lnTo>
-                    <a:pt x="431433" y="1655409"/>
-                  </a:lnTo>
-                  <a:lnTo>
-                    <a:pt x="509067" y="1860535"/>
-                  </a:lnTo>
-                  <a:lnTo>
-                    <a:pt x="586701" y="2044594"/>
-                  </a:lnTo>
-                  <a:lnTo>
-                    <a:pt x="664335" y="2209749"/>
-                  </a:lnTo>
-                  <a:lnTo>
-                    <a:pt x="741969" y="2357942"/>
-                  </a:lnTo>
-                  <a:lnTo>
-                    <a:pt x="819603" y="2490914"/>
-                  </a:lnTo>
-                  <a:lnTo>
-                    <a:pt x="897237" y="2610230"/>
-                  </a:lnTo>
-                  <a:lnTo>
-                    <a:pt x="974871" y="2717291"/>
-                  </a:lnTo>
-                  <a:lnTo>
-                    <a:pt x="1052505" y="2788888"/>
-                  </a:lnTo>
-                  <a:lnTo>
-                    <a:pt x="1130139" y="2806682"/>
-                  </a:lnTo>
-                  <a:lnTo>
-                    <a:pt x="1207773" y="2824109"/>
-                  </a:lnTo>
-                  <a:lnTo>
-                    <a:pt x="1285407" y="2841177"/>
-                  </a:lnTo>
-                  <a:lnTo>
-                    <a:pt x="1363041" y="2857894"/>
-                  </a:lnTo>
-                  <a:lnTo>
-                    <a:pt x="1440675" y="2874266"/>
-                  </a:lnTo>
-                  <a:lnTo>
-                    <a:pt x="1518309" y="2890301"/>
-                  </a:lnTo>
-                  <a:lnTo>
-                    <a:pt x="1595944" y="2906006"/>
-                  </a:lnTo>
-                  <a:lnTo>
-                    <a:pt x="1673578" y="2921387"/>
-                  </a:lnTo>
-                  <a:lnTo>
-                    <a:pt x="1751212" y="2936451"/>
-                  </a:lnTo>
-                  <a:lnTo>
-                    <a:pt x="1828846" y="2951205"/>
-                  </a:lnTo>
-                  <a:lnTo>
-                    <a:pt x="1906480" y="2965655"/>
-                  </a:lnTo>
-                  <a:lnTo>
-                    <a:pt x="1984114" y="2979807"/>
-                  </a:lnTo>
-                  <a:lnTo>
-                    <a:pt x="2061748" y="2993668"/>
-                  </a:lnTo>
-                  <a:lnTo>
-                    <a:pt x="2139382" y="3007243"/>
-                  </a:lnTo>
-                  <a:lnTo>
-                    <a:pt x="2217016" y="3020539"/>
-                  </a:lnTo>
-                  <a:lnTo>
-                    <a:pt x="2294650" y="3033561"/>
-                  </a:lnTo>
-                  <a:lnTo>
-                    <a:pt x="2372284" y="3046314"/>
-                  </a:lnTo>
-                  <a:lnTo>
-                    <a:pt x="2449918" y="3058805"/>
-                  </a:lnTo>
-                  <a:lnTo>
-                    <a:pt x="2527552" y="3071038"/>
-                  </a:lnTo>
-                  <a:lnTo>
-                    <a:pt x="2605186" y="3083020"/>
-                  </a:lnTo>
-                  <a:lnTo>
-                    <a:pt x="2682820" y="3094754"/>
-                  </a:lnTo>
-                  <a:lnTo>
-                    <a:pt x="2760454" y="3106247"/>
-                  </a:lnTo>
-                  <a:lnTo>
-                    <a:pt x="2838088" y="3117503"/>
-                  </a:lnTo>
-                  <a:lnTo>
-                    <a:pt x="2915722" y="3128527"/>
-                  </a:lnTo>
-                  <a:lnTo>
-                    <a:pt x="2993356" y="3139324"/>
-                  </a:lnTo>
-                  <a:lnTo>
-                    <a:pt x="3070990" y="3149899"/>
-                  </a:lnTo>
-                  <a:lnTo>
-                    <a:pt x="3148624" y="3160256"/>
-                  </a:lnTo>
-                  <a:lnTo>
-                    <a:pt x="3226258" y="3170399"/>
-                  </a:lnTo>
-                  <a:lnTo>
-                    <a:pt x="3303893" y="3180334"/>
-                  </a:lnTo>
-                  <a:lnTo>
-                    <a:pt x="3381527" y="3190064"/>
-                  </a:lnTo>
-                  <a:lnTo>
-                    <a:pt x="3459161" y="3199593"/>
-                  </a:lnTo>
-                  <a:lnTo>
-                    <a:pt x="3536795" y="3208926"/>
-                  </a:lnTo>
-                  <a:lnTo>
-                    <a:pt x="3614429" y="3218067"/>
-                  </a:lnTo>
-                  <a:lnTo>
-                    <a:pt x="3692063" y="3227019"/>
-                  </a:lnTo>
-                  <a:lnTo>
-                    <a:pt x="3769697" y="3235787"/>
-                  </a:lnTo>
-                  <a:lnTo>
-                    <a:pt x="3847331" y="3244375"/>
-                  </a:lnTo>
-                  <a:lnTo>
-                    <a:pt x="3924965" y="3252785"/>
-                  </a:lnTo>
-                  <a:lnTo>
-                    <a:pt x="4002599" y="3261023"/>
-                  </a:lnTo>
-                  <a:lnTo>
-                    <a:pt x="4080233" y="3269090"/>
-                  </a:lnTo>
-                  <a:lnTo>
-                    <a:pt x="4157867" y="3276992"/>
-                  </a:lnTo>
-                  <a:lnTo>
-                    <a:pt x="4235501" y="3284730"/>
-                  </a:lnTo>
-                  <a:lnTo>
-                    <a:pt x="4313135" y="3292310"/>
-                  </a:lnTo>
-                  <a:lnTo>
-                    <a:pt x="4390769" y="3299733"/>
-                  </a:lnTo>
-                  <a:lnTo>
-                    <a:pt x="4468403" y="3307003"/>
-                  </a:lnTo>
-                  <a:lnTo>
-                    <a:pt x="4546037" y="3314123"/>
-                  </a:lnTo>
-                  <a:lnTo>
-                    <a:pt x="4623671" y="3321097"/>
-                  </a:lnTo>
-                  <a:lnTo>
-                    <a:pt x="4701305" y="3327927"/>
-                  </a:lnTo>
-                  <a:lnTo>
-                    <a:pt x="4778939" y="3334616"/>
-                  </a:lnTo>
-                  <a:lnTo>
-                    <a:pt x="4856573" y="3341168"/>
-                  </a:lnTo>
-                  <a:lnTo>
-                    <a:pt x="4934207" y="3347584"/>
-                  </a:lnTo>
-                  <a:lnTo>
-                    <a:pt x="5011842" y="3353869"/>
+                    <a:pt x="4322" y="28869"/>
+                  </a:lnTo>
+                  <a:lnTo>
+                    <a:pt x="81956" y="482474"/>
+                  </a:lnTo>
+                  <a:lnTo>
+                    <a:pt x="159590" y="879299"/>
+                  </a:lnTo>
+                  <a:lnTo>
+                    <a:pt x="237224" y="1226452"/>
+                  </a:lnTo>
+                  <a:lnTo>
+                    <a:pt x="314858" y="1530150"/>
+                  </a:lnTo>
+                  <a:lnTo>
+                    <a:pt x="392492" y="1795833"/>
+                  </a:lnTo>
+                  <a:lnTo>
+                    <a:pt x="470126" y="2028258"/>
+                  </a:lnTo>
+                  <a:lnTo>
+                    <a:pt x="547760" y="2231590"/>
+                  </a:lnTo>
+                  <a:lnTo>
+                    <a:pt x="625394" y="2409470"/>
+                  </a:lnTo>
+                  <a:lnTo>
+                    <a:pt x="703028" y="2565084"/>
+                  </a:lnTo>
+                  <a:lnTo>
+                    <a:pt x="780662" y="2701219"/>
+                  </a:lnTo>
+                  <a:lnTo>
+                    <a:pt x="858296" y="2789920"/>
+                  </a:lnTo>
+                  <a:lnTo>
+                    <a:pt x="935930" y="2810767"/>
+                  </a:lnTo>
+                  <a:lnTo>
+                    <a:pt x="1013565" y="2831110"/>
+                  </a:lnTo>
+                  <a:lnTo>
+                    <a:pt x="1091199" y="2850961"/>
+                  </a:lnTo>
+                  <a:lnTo>
+                    <a:pt x="1168833" y="2870332"/>
+                  </a:lnTo>
+                  <a:lnTo>
+                    <a:pt x="1246467" y="2889236"/>
+                  </a:lnTo>
+                  <a:lnTo>
+                    <a:pt x="1324101" y="2907683"/>
+                  </a:lnTo>
+                  <a:lnTo>
+                    <a:pt x="1401735" y="2925684"/>
+                  </a:lnTo>
+                  <a:lnTo>
+                    <a:pt x="1479369" y="2943250"/>
+                  </a:lnTo>
+                  <a:lnTo>
+                    <a:pt x="1557003" y="2960391"/>
+                  </a:lnTo>
+                  <a:lnTo>
+                    <a:pt x="1634637" y="2977118"/>
+                  </a:lnTo>
+                  <a:lnTo>
+                    <a:pt x="1712271" y="2993442"/>
+                  </a:lnTo>
+                  <a:lnTo>
+                    <a:pt x="1789905" y="3009370"/>
+                  </a:lnTo>
+                  <a:lnTo>
+                    <a:pt x="1867539" y="3024914"/>
+                  </a:lnTo>
+                  <a:lnTo>
+                    <a:pt x="1945173" y="3040082"/>
+                  </a:lnTo>
+                  <a:lnTo>
+                    <a:pt x="2022807" y="3054884"/>
+                  </a:lnTo>
+                  <a:lnTo>
+                    <a:pt x="2100441" y="3069328"/>
+                  </a:lnTo>
+                  <a:lnTo>
+                    <a:pt x="2178075" y="3083423"/>
+                  </a:lnTo>
+                  <a:lnTo>
+                    <a:pt x="2255709" y="3097177"/>
+                  </a:lnTo>
+                  <a:lnTo>
+                    <a:pt x="2333343" y="3110599"/>
+                  </a:lnTo>
+                  <a:lnTo>
+                    <a:pt x="2410977" y="3123697"/>
+                  </a:lnTo>
+                  <a:lnTo>
+                    <a:pt x="2488611" y="3136478"/>
+                  </a:lnTo>
+                  <a:lnTo>
+                    <a:pt x="2566245" y="3148951"/>
+                  </a:lnTo>
+                  <a:lnTo>
+                    <a:pt x="2643879" y="3161122"/>
+                  </a:lnTo>
+                  <a:lnTo>
+                    <a:pt x="2721513" y="3172999"/>
+                  </a:lnTo>
+                  <a:lnTo>
+                    <a:pt x="2799148" y="3184589"/>
+                  </a:lnTo>
+                  <a:lnTo>
+                    <a:pt x="2876782" y="3195899"/>
+                  </a:lnTo>
+                  <a:lnTo>
+                    <a:pt x="2954416" y="3206935"/>
+                  </a:lnTo>
+                  <a:lnTo>
+                    <a:pt x="3032050" y="3217705"/>
+                  </a:lnTo>
+                  <a:lnTo>
+                    <a:pt x="3109684" y="3228215"/>
+                  </a:lnTo>
+                  <a:lnTo>
+                    <a:pt x="3187318" y="3238471"/>
+                  </a:lnTo>
+                  <a:lnTo>
+                    <a:pt x="3264952" y="3248479"/>
+                  </a:lnTo>
+                  <a:lnTo>
+                    <a:pt x="3342586" y="3258245"/>
+                  </a:lnTo>
+                  <a:lnTo>
+                    <a:pt x="3420220" y="3267775"/>
+                  </a:lnTo>
+                  <a:lnTo>
+                    <a:pt x="3497854" y="3277075"/>
+                  </a:lnTo>
+                  <a:lnTo>
+                    <a:pt x="3575488" y="3286150"/>
+                  </a:lnTo>
+                  <a:lnTo>
+                    <a:pt x="3653122" y="3295005"/>
+                  </a:lnTo>
+                  <a:lnTo>
+                    <a:pt x="3730756" y="3303647"/>
+                  </a:lnTo>
+                  <a:lnTo>
+                    <a:pt x="3808390" y="3312080"/>
+                  </a:lnTo>
+                  <a:lnTo>
+                    <a:pt x="3886024" y="3320310"/>
+                  </a:lnTo>
+                  <a:lnTo>
+                    <a:pt x="3963658" y="3328340"/>
+                  </a:lnTo>
+                  <a:lnTo>
+                    <a:pt x="4041292" y="3336176"/>
+                  </a:lnTo>
+                  <a:lnTo>
+                    <a:pt x="4118926" y="3343823"/>
+                  </a:lnTo>
+                  <a:lnTo>
+                    <a:pt x="4196560" y="3351286"/>
+                  </a:lnTo>
+                  <a:lnTo>
+                    <a:pt x="4274194" y="3358567"/>
+                  </a:lnTo>
+                  <a:lnTo>
+                    <a:pt x="4351828" y="3365673"/>
+                  </a:lnTo>
+                  <a:lnTo>
+                    <a:pt x="4429462" y="3372608"/>
+                  </a:lnTo>
+                  <a:lnTo>
+                    <a:pt x="4507097" y="3379374"/>
+                  </a:lnTo>
+                  <a:lnTo>
+                    <a:pt x="4584731" y="3385977"/>
+                  </a:lnTo>
+                  <a:lnTo>
+                    <a:pt x="4662365" y="3392421"/>
+                  </a:lnTo>
+                  <a:lnTo>
+                    <a:pt x="4739999" y="3398709"/>
+                  </a:lnTo>
+                  <a:lnTo>
+                    <a:pt x="4817633" y="3404845"/>
                   </a:lnTo>
                 </a:path>
               </a:pathLst>
@@ -3742,297 +3730,297 @@
           </p:nvSpPr>
           <p:spPr>
             <a:xfrm>
-              <a:off x="817517" y="3393123"/>
-              <a:ext cx="7370972" cy="2152745"/>
+              <a:off x="817517" y="3021616"/>
+              <a:ext cx="7370972" cy="2526682"/>
             </a:xfrm>
             <a:custGeom>
               <a:avLst/>
               <a:pathLst>
-                <a:path w="7370972" h="2152745">
+                <a:path w="7370972" h="2526682">
                   <a:moveTo>
-                    <a:pt x="7370972" y="2152745"/>
+                    <a:pt x="7370972" y="2526682"/>
                   </a:moveTo>
                   <a:lnTo>
-                    <a:pt x="7293338" y="2152363"/>
-                  </a:lnTo>
-                  <a:lnTo>
-                    <a:pt x="7215704" y="2151937"/>
-                  </a:lnTo>
-                  <a:lnTo>
-                    <a:pt x="7138070" y="2151462"/>
-                  </a:lnTo>
-                  <a:lnTo>
-                    <a:pt x="7060436" y="2150933"/>
-                  </a:lnTo>
-                  <a:lnTo>
-                    <a:pt x="6982802" y="2150343"/>
-                  </a:lnTo>
-                  <a:lnTo>
-                    <a:pt x="6905168" y="2149686"/>
-                  </a:lnTo>
-                  <a:lnTo>
-                    <a:pt x="6827534" y="2148954"/>
-                  </a:lnTo>
-                  <a:lnTo>
-                    <a:pt x="6749900" y="2148138"/>
-                  </a:lnTo>
-                  <a:lnTo>
-                    <a:pt x="6672266" y="2147229"/>
-                  </a:lnTo>
-                  <a:lnTo>
-                    <a:pt x="6594632" y="2146215"/>
-                  </a:lnTo>
-                  <a:lnTo>
-                    <a:pt x="6516998" y="2145086"/>
-                  </a:lnTo>
-                  <a:lnTo>
-                    <a:pt x="6439364" y="2143827"/>
-                  </a:lnTo>
-                  <a:lnTo>
-                    <a:pt x="6361730" y="2142424"/>
-                  </a:lnTo>
-                  <a:lnTo>
-                    <a:pt x="6284096" y="2140860"/>
-                  </a:lnTo>
-                  <a:lnTo>
-                    <a:pt x="6206462" y="2139118"/>
-                  </a:lnTo>
-                  <a:lnTo>
-                    <a:pt x="6128827" y="2137176"/>
-                  </a:lnTo>
-                  <a:lnTo>
-                    <a:pt x="6051193" y="2135012"/>
-                  </a:lnTo>
-                  <a:lnTo>
-                    <a:pt x="5973559" y="2132600"/>
-                  </a:lnTo>
-                  <a:lnTo>
-                    <a:pt x="5895925" y="2129912"/>
-                  </a:lnTo>
-                  <a:lnTo>
-                    <a:pt x="5818291" y="2126916"/>
-                  </a:lnTo>
-                  <a:lnTo>
-                    <a:pt x="5740657" y="2123577"/>
-                  </a:lnTo>
-                  <a:lnTo>
-                    <a:pt x="5663023" y="2119857"/>
-                  </a:lnTo>
-                  <a:lnTo>
-                    <a:pt x="5585389" y="2115710"/>
-                  </a:lnTo>
-                  <a:lnTo>
-                    <a:pt x="5507755" y="2111089"/>
-                  </a:lnTo>
-                  <a:lnTo>
-                    <a:pt x="5430121" y="2105939"/>
-                  </a:lnTo>
-                  <a:lnTo>
-                    <a:pt x="5352487" y="2100199"/>
-                  </a:lnTo>
-                  <a:lnTo>
-                    <a:pt x="5274853" y="2093803"/>
-                  </a:lnTo>
-                  <a:lnTo>
-                    <a:pt x="5197219" y="2086674"/>
-                  </a:lnTo>
-                  <a:lnTo>
-                    <a:pt x="5119585" y="2078729"/>
-                  </a:lnTo>
-                  <a:lnTo>
-                    <a:pt x="5041951" y="2069875"/>
-                  </a:lnTo>
-                  <a:lnTo>
-                    <a:pt x="4964317" y="2060008"/>
-                  </a:lnTo>
-                  <a:lnTo>
-                    <a:pt x="4886683" y="2049011"/>
-                  </a:lnTo>
-                  <a:lnTo>
-                    <a:pt x="4809049" y="2036755"/>
-                  </a:lnTo>
-                  <a:lnTo>
-                    <a:pt x="4731415" y="2023097"/>
-                  </a:lnTo>
-                  <a:lnTo>
-                    <a:pt x="4653781" y="2007875"/>
-                  </a:lnTo>
-                  <a:lnTo>
-                    <a:pt x="4576147" y="1990911"/>
-                  </a:lnTo>
-                  <a:lnTo>
-                    <a:pt x="4498513" y="1972005"/>
-                  </a:lnTo>
-                  <a:lnTo>
-                    <a:pt x="4420879" y="1950936"/>
-                  </a:lnTo>
-                  <a:lnTo>
-                    <a:pt x="4343244" y="1927454"/>
-                  </a:lnTo>
-                  <a:lnTo>
-                    <a:pt x="4265610" y="1901285"/>
-                  </a:lnTo>
-                  <a:lnTo>
-                    <a:pt x="4187976" y="1872120"/>
-                  </a:lnTo>
-                  <a:lnTo>
-                    <a:pt x="4110342" y="1839618"/>
-                  </a:lnTo>
-                  <a:lnTo>
-                    <a:pt x="4032708" y="1803395"/>
-                  </a:lnTo>
-                  <a:lnTo>
-                    <a:pt x="3955074" y="1763026"/>
-                  </a:lnTo>
-                  <a:lnTo>
-                    <a:pt x="3877440" y="1718036"/>
-                  </a:lnTo>
-                  <a:lnTo>
-                    <a:pt x="3799806" y="1667897"/>
-                  </a:lnTo>
-                  <a:lnTo>
-                    <a:pt x="3722172" y="1612018"/>
-                  </a:lnTo>
-                  <a:lnTo>
-                    <a:pt x="3644538" y="1549744"/>
-                  </a:lnTo>
-                  <a:lnTo>
-                    <a:pt x="3566904" y="1480342"/>
-                  </a:lnTo>
-                  <a:lnTo>
-                    <a:pt x="3489270" y="1402996"/>
-                  </a:lnTo>
-                  <a:lnTo>
-                    <a:pt x="3411636" y="1316797"/>
-                  </a:lnTo>
-                  <a:lnTo>
-                    <a:pt x="3334002" y="1274160"/>
-                  </a:lnTo>
-                  <a:lnTo>
-                    <a:pt x="3256368" y="1255610"/>
-                  </a:lnTo>
-                  <a:lnTo>
-                    <a:pt x="3178734" y="1236669"/>
-                  </a:lnTo>
-                  <a:lnTo>
-                    <a:pt x="3101100" y="1217330"/>
-                  </a:lnTo>
-                  <a:lnTo>
-                    <a:pt x="3023466" y="1197585"/>
-                  </a:lnTo>
-                  <a:lnTo>
-                    <a:pt x="2945832" y="1177424"/>
-                  </a:lnTo>
-                  <a:lnTo>
-                    <a:pt x="2868198" y="1156839"/>
-                  </a:lnTo>
-                  <a:lnTo>
-                    <a:pt x="2790564" y="1135821"/>
-                  </a:lnTo>
-                  <a:lnTo>
-                    <a:pt x="2712930" y="1114361"/>
-                  </a:lnTo>
-                  <a:lnTo>
-                    <a:pt x="2635295" y="1092449"/>
-                  </a:lnTo>
-                  <a:lnTo>
-                    <a:pt x="2557661" y="1070077"/>
-                  </a:lnTo>
-                  <a:lnTo>
-                    <a:pt x="2480027" y="1047234"/>
-                  </a:lnTo>
-                  <a:lnTo>
-                    <a:pt x="2402393" y="1023911"/>
-                  </a:lnTo>
-                  <a:lnTo>
-                    <a:pt x="2324759" y="1000097"/>
-                  </a:lnTo>
-                  <a:lnTo>
-                    <a:pt x="2247125" y="975782"/>
-                  </a:lnTo>
-                  <a:lnTo>
-                    <a:pt x="2169491" y="950956"/>
-                  </a:lnTo>
-                  <a:lnTo>
-                    <a:pt x="2091857" y="925607"/>
-                  </a:lnTo>
-                  <a:lnTo>
-                    <a:pt x="2014223" y="899726"/>
-                  </a:lnTo>
-                  <a:lnTo>
-                    <a:pt x="1936589" y="873300"/>
-                  </a:lnTo>
-                  <a:lnTo>
-                    <a:pt x="1858955" y="846318"/>
-                  </a:lnTo>
-                  <a:lnTo>
-                    <a:pt x="1781321" y="818768"/>
-                  </a:lnTo>
-                  <a:lnTo>
-                    <a:pt x="1703687" y="790639"/>
-                  </a:lnTo>
-                  <a:lnTo>
-                    <a:pt x="1626053" y="761919"/>
-                  </a:lnTo>
-                  <a:lnTo>
-                    <a:pt x="1548419" y="732594"/>
-                  </a:lnTo>
-                  <a:lnTo>
-                    <a:pt x="1470785" y="702653"/>
-                  </a:lnTo>
-                  <a:lnTo>
-                    <a:pt x="1393151" y="672081"/>
-                  </a:lnTo>
-                  <a:lnTo>
-                    <a:pt x="1315517" y="640867"/>
-                  </a:lnTo>
-                  <a:lnTo>
-                    <a:pt x="1237883" y="608996"/>
-                  </a:lnTo>
-                  <a:lnTo>
-                    <a:pt x="1160249" y="576455"/>
-                  </a:lnTo>
-                  <a:lnTo>
-                    <a:pt x="1082615" y="543229"/>
-                  </a:lnTo>
-                  <a:lnTo>
-                    <a:pt x="1004981" y="509305"/>
-                  </a:lnTo>
-                  <a:lnTo>
-                    <a:pt x="927346" y="474667"/>
-                  </a:lnTo>
-                  <a:lnTo>
-                    <a:pt x="849712" y="439300"/>
-                  </a:lnTo>
-                  <a:lnTo>
-                    <a:pt x="772078" y="403190"/>
-                  </a:lnTo>
-                  <a:lnTo>
-                    <a:pt x="694444" y="366319"/>
-                  </a:lnTo>
-                  <a:lnTo>
-                    <a:pt x="616810" y="328674"/>
-                  </a:lnTo>
-                  <a:lnTo>
-                    <a:pt x="539176" y="290236"/>
-                  </a:lnTo>
-                  <a:lnTo>
-                    <a:pt x="461542" y="250990"/>
-                  </a:lnTo>
-                  <a:lnTo>
-                    <a:pt x="383908" y="210919"/>
-                  </a:lnTo>
-                  <a:lnTo>
-                    <a:pt x="306274" y="170005"/>
-                  </a:lnTo>
-                  <a:lnTo>
-                    <a:pt x="228640" y="128230"/>
-                  </a:lnTo>
-                  <a:lnTo>
-                    <a:pt x="151006" y="85576"/>
-                  </a:lnTo>
-                  <a:lnTo>
-                    <a:pt x="73372" y="42025"/>
+                    <a:pt x="7293338" y="2526552"/>
+                  </a:lnTo>
+                  <a:lnTo>
+                    <a:pt x="7215704" y="2526404"/>
+                  </a:lnTo>
+                  <a:lnTo>
+                    <a:pt x="7138070" y="2526234"/>
+                  </a:lnTo>
+                  <a:lnTo>
+                    <a:pt x="7060436" y="2526040"/>
+                  </a:lnTo>
+                  <a:lnTo>
+                    <a:pt x="6982802" y="2525818"/>
+                  </a:lnTo>
+                  <a:lnTo>
+                    <a:pt x="6905168" y="2525564"/>
+                  </a:lnTo>
+                  <a:lnTo>
+                    <a:pt x="6827534" y="2525274"/>
+                  </a:lnTo>
+                  <a:lnTo>
+                    <a:pt x="6749900" y="2524943"/>
+                  </a:lnTo>
+                  <a:lnTo>
+                    <a:pt x="6672266" y="2524564"/>
+                  </a:lnTo>
+                  <a:lnTo>
+                    <a:pt x="6594632" y="2524131"/>
+                  </a:lnTo>
+                  <a:lnTo>
+                    <a:pt x="6516998" y="2523636"/>
+                  </a:lnTo>
+                  <a:lnTo>
+                    <a:pt x="6439364" y="2523070"/>
+                  </a:lnTo>
+                  <a:lnTo>
+                    <a:pt x="6361730" y="2522423"/>
+                  </a:lnTo>
+                  <a:lnTo>
+                    <a:pt x="6284096" y="2521683"/>
+                  </a:lnTo>
+                  <a:lnTo>
+                    <a:pt x="6206462" y="2520838"/>
+                  </a:lnTo>
+                  <a:lnTo>
+                    <a:pt x="6128827" y="2519872"/>
+                  </a:lnTo>
+                  <a:lnTo>
+                    <a:pt x="6051193" y="2518768"/>
+                  </a:lnTo>
+                  <a:lnTo>
+                    <a:pt x="5973559" y="2517505"/>
+                  </a:lnTo>
+                  <a:lnTo>
+                    <a:pt x="5895925" y="2516062"/>
+                  </a:lnTo>
+                  <a:lnTo>
+                    <a:pt x="5818291" y="2514412"/>
+                  </a:lnTo>
+                  <a:lnTo>
+                    <a:pt x="5740657" y="2512527"/>
+                  </a:lnTo>
+                  <a:lnTo>
+                    <a:pt x="5663023" y="2510371"/>
+                  </a:lnTo>
+                  <a:lnTo>
+                    <a:pt x="5585389" y="2507908"/>
+                  </a:lnTo>
+                  <a:lnTo>
+                    <a:pt x="5507755" y="2505091"/>
+                  </a:lnTo>
+                  <a:lnTo>
+                    <a:pt x="5430121" y="2501872"/>
+                  </a:lnTo>
+                  <a:lnTo>
+                    <a:pt x="5352487" y="2498192"/>
+                  </a:lnTo>
+                  <a:lnTo>
+                    <a:pt x="5274853" y="2493985"/>
+                  </a:lnTo>
+                  <a:lnTo>
+                    <a:pt x="5197219" y="2489177"/>
+                  </a:lnTo>
+                  <a:lnTo>
+                    <a:pt x="5119585" y="2483681"/>
+                  </a:lnTo>
+                  <a:lnTo>
+                    <a:pt x="5041951" y="2477398"/>
+                  </a:lnTo>
+                  <a:lnTo>
+                    <a:pt x="4964317" y="2470216"/>
+                  </a:lnTo>
+                  <a:lnTo>
+                    <a:pt x="4886683" y="2462006"/>
+                  </a:lnTo>
+                  <a:lnTo>
+                    <a:pt x="4809049" y="2452622"/>
+                  </a:lnTo>
+                  <a:lnTo>
+                    <a:pt x="4731415" y="2441895"/>
+                  </a:lnTo>
+                  <a:lnTo>
+                    <a:pt x="4653781" y="2429633"/>
+                  </a:lnTo>
+                  <a:lnTo>
+                    <a:pt x="4576147" y="2415617"/>
+                  </a:lnTo>
+                  <a:lnTo>
+                    <a:pt x="4498513" y="2399595"/>
+                  </a:lnTo>
+                  <a:lnTo>
+                    <a:pt x="4420879" y="2381281"/>
+                  </a:lnTo>
+                  <a:lnTo>
+                    <a:pt x="4343244" y="2360346"/>
+                  </a:lnTo>
+                  <a:lnTo>
+                    <a:pt x="4265610" y="2336416"/>
+                  </a:lnTo>
+                  <a:lnTo>
+                    <a:pt x="4187976" y="2309062"/>
+                  </a:lnTo>
+                  <a:lnTo>
+                    <a:pt x="4110342" y="2277794"/>
+                  </a:lnTo>
+                  <a:lnTo>
+                    <a:pt x="4032708" y="2242051"/>
+                  </a:lnTo>
+                  <a:lnTo>
+                    <a:pt x="3955074" y="2201195"/>
+                  </a:lnTo>
+                  <a:lnTo>
+                    <a:pt x="3877440" y="2154492"/>
+                  </a:lnTo>
+                  <a:lnTo>
+                    <a:pt x="3799806" y="2101107"/>
+                  </a:lnTo>
+                  <a:lnTo>
+                    <a:pt x="3722172" y="2040084"/>
+                  </a:lnTo>
+                  <a:lnTo>
+                    <a:pt x="3644538" y="1970329"/>
+                  </a:lnTo>
+                  <a:lnTo>
+                    <a:pt x="3566904" y="1890593"/>
+                  </a:lnTo>
+                  <a:lnTo>
+                    <a:pt x="3489270" y="1799448"/>
+                  </a:lnTo>
+                  <a:lnTo>
+                    <a:pt x="3411636" y="1695261"/>
+                  </a:lnTo>
+                  <a:lnTo>
+                    <a:pt x="3334002" y="1643505"/>
+                  </a:lnTo>
+                  <a:lnTo>
+                    <a:pt x="3256368" y="1621613"/>
+                  </a:lnTo>
+                  <a:lnTo>
+                    <a:pt x="3178734" y="1599179"/>
+                  </a:lnTo>
+                  <a:lnTo>
+                    <a:pt x="3101100" y="1576190"/>
+                  </a:lnTo>
+                  <a:lnTo>
+                    <a:pt x="3023466" y="1552632"/>
+                  </a:lnTo>
+                  <a:lnTo>
+                    <a:pt x="2945832" y="1528490"/>
+                  </a:lnTo>
+                  <a:lnTo>
+                    <a:pt x="2868198" y="1503750"/>
+                  </a:lnTo>
+                  <a:lnTo>
+                    <a:pt x="2790564" y="1478398"/>
+                  </a:lnTo>
+                  <a:lnTo>
+                    <a:pt x="2712930" y="1452418"/>
+                  </a:lnTo>
+                  <a:lnTo>
+                    <a:pt x="2635295" y="1425794"/>
+                  </a:lnTo>
+                  <a:lnTo>
+                    <a:pt x="2557661" y="1398512"/>
+                  </a:lnTo>
+                  <a:lnTo>
+                    <a:pt x="2480027" y="1370553"/>
+                  </a:lnTo>
+                  <a:lnTo>
+                    <a:pt x="2402393" y="1341903"/>
+                  </a:lnTo>
+                  <a:lnTo>
+                    <a:pt x="2324759" y="1312543"/>
+                  </a:lnTo>
+                  <a:lnTo>
+                    <a:pt x="2247125" y="1282456"/>
+                  </a:lnTo>
+                  <a:lnTo>
+                    <a:pt x="2169491" y="1251624"/>
+                  </a:lnTo>
+                  <a:lnTo>
+                    <a:pt x="2091857" y="1220029"/>
+                  </a:lnTo>
+                  <a:lnTo>
+                    <a:pt x="2014223" y="1187651"/>
+                  </a:lnTo>
+                  <a:lnTo>
+                    <a:pt x="1936589" y="1154471"/>
+                  </a:lnTo>
+                  <a:lnTo>
+                    <a:pt x="1858955" y="1120470"/>
+                  </a:lnTo>
+                  <a:lnTo>
+                    <a:pt x="1781321" y="1085627"/>
+                  </a:lnTo>
+                  <a:lnTo>
+                    <a:pt x="1703687" y="1049921"/>
+                  </a:lnTo>
+                  <a:lnTo>
+                    <a:pt x="1626053" y="1013331"/>
+                  </a:lnTo>
+                  <a:lnTo>
+                    <a:pt x="1548419" y="975835"/>
+                  </a:lnTo>
+                  <a:lnTo>
+                    <a:pt x="1470785" y="937411"/>
+                  </a:lnTo>
+                  <a:lnTo>
+                    <a:pt x="1393151" y="898035"/>
+                  </a:lnTo>
+                  <a:lnTo>
+                    <a:pt x="1315517" y="857684"/>
+                  </a:lnTo>
+                  <a:lnTo>
+                    <a:pt x="1237883" y="816333"/>
+                  </a:lnTo>
+                  <a:lnTo>
+                    <a:pt x="1160249" y="773959"/>
+                  </a:lnTo>
+                  <a:lnTo>
+                    <a:pt x="1082615" y="730536"/>
+                  </a:lnTo>
+                  <a:lnTo>
+                    <a:pt x="1004981" y="686037"/>
+                  </a:lnTo>
+                  <a:lnTo>
+                    <a:pt x="927346" y="640437"/>
+                  </a:lnTo>
+                  <a:lnTo>
+                    <a:pt x="849712" y="593707"/>
+                  </a:lnTo>
+                  <a:lnTo>
+                    <a:pt x="772078" y="545820"/>
+                  </a:lnTo>
+                  <a:lnTo>
+                    <a:pt x="694444" y="496748"/>
+                  </a:lnTo>
+                  <a:lnTo>
+                    <a:pt x="616810" y="446460"/>
+                  </a:lnTo>
+                  <a:lnTo>
+                    <a:pt x="539176" y="394927"/>
+                  </a:lnTo>
+                  <a:lnTo>
+                    <a:pt x="461542" y="342119"/>
+                  </a:lnTo>
+                  <a:lnTo>
+                    <a:pt x="383908" y="288002"/>
+                  </a:lnTo>
+                  <a:lnTo>
+                    <a:pt x="306274" y="232545"/>
+                  </a:lnTo>
+                  <a:lnTo>
+                    <a:pt x="228640" y="175715"/>
+                  </a:lnTo>
+                  <a:lnTo>
+                    <a:pt x="151006" y="117478"/>
+                  </a:lnTo>
+                  <a:lnTo>
+                    <a:pt x="73372" y="57799"/>
                   </a:lnTo>
                   <a:lnTo>
                     <a:pt x="0" y="0"/>
@@ -4055,237 +4043,225 @@
           </p:nvSpPr>
           <p:spPr>
             <a:xfrm>
-              <a:off x="2479479" y="1896563"/>
-              <a:ext cx="5709010" cy="3621059"/>
+              <a:off x="2795874" y="1896563"/>
+              <a:ext cx="5392616" cy="3637640"/>
             </a:xfrm>
             <a:custGeom>
               <a:avLst/>
               <a:pathLst>
-                <a:path w="5709010" h="3621059">
+                <a:path w="5392616" h="3637640">
                   <a:moveTo>
                     <a:pt x="0" y="0"/>
                   </a:moveTo>
                   <a:lnTo>
-                    <a:pt x="41725" y="126456"/>
-                  </a:lnTo>
-                  <a:lnTo>
-                    <a:pt x="119359" y="347024"/>
-                  </a:lnTo>
-                  <a:lnTo>
-                    <a:pt x="196993" y="553795"/>
-                  </a:lnTo>
-                  <a:lnTo>
-                    <a:pt x="274627" y="747632"/>
-                  </a:lnTo>
-                  <a:lnTo>
-                    <a:pt x="352261" y="929344"/>
-                  </a:lnTo>
-                  <a:lnTo>
-                    <a:pt x="429895" y="1099690"/>
-                  </a:lnTo>
-                  <a:lnTo>
-                    <a:pt x="507529" y="1259380"/>
-                  </a:lnTo>
-                  <a:lnTo>
-                    <a:pt x="585163" y="1409082"/>
-                  </a:lnTo>
-                  <a:lnTo>
-                    <a:pt x="662797" y="1549420"/>
-                  </a:lnTo>
-                  <a:lnTo>
-                    <a:pt x="740431" y="1680979"/>
-                  </a:lnTo>
-                  <a:lnTo>
-                    <a:pt x="818065" y="1804309"/>
-                  </a:lnTo>
-                  <a:lnTo>
-                    <a:pt x="895699" y="1919925"/>
-                  </a:lnTo>
-                  <a:lnTo>
-                    <a:pt x="973333" y="2028309"/>
-                  </a:lnTo>
-                  <a:lnTo>
-                    <a:pt x="1050967" y="2129913"/>
-                  </a:lnTo>
-                  <a:lnTo>
-                    <a:pt x="1128602" y="2225162"/>
-                  </a:lnTo>
-                  <a:lnTo>
-                    <a:pt x="1206236" y="2314453"/>
-                  </a:lnTo>
-                  <a:lnTo>
-                    <a:pt x="1283870" y="2398158"/>
-                  </a:lnTo>
-                  <a:lnTo>
-                    <a:pt x="1361504" y="2476628"/>
-                  </a:lnTo>
-                  <a:lnTo>
-                    <a:pt x="1439138" y="2550189"/>
-                  </a:lnTo>
-                  <a:lnTo>
-                    <a:pt x="1516772" y="2619149"/>
-                  </a:lnTo>
-                  <a:lnTo>
-                    <a:pt x="1594406" y="2683795"/>
-                  </a:lnTo>
-                  <a:lnTo>
-                    <a:pt x="1672040" y="2744398"/>
-                  </a:lnTo>
-                  <a:lnTo>
-                    <a:pt x="1749674" y="2801210"/>
-                  </a:lnTo>
-                  <a:lnTo>
-                    <a:pt x="1827308" y="2854468"/>
-                  </a:lnTo>
-                  <a:lnTo>
-                    <a:pt x="1904942" y="2904395"/>
-                  </a:lnTo>
-                  <a:lnTo>
-                    <a:pt x="1982576" y="2951199"/>
-                  </a:lnTo>
-                  <a:lnTo>
-                    <a:pt x="2060210" y="2995075"/>
-                  </a:lnTo>
-                  <a:lnTo>
-                    <a:pt x="2137844" y="3036207"/>
-                  </a:lnTo>
-                  <a:lnTo>
-                    <a:pt x="2215478" y="3074766"/>
-                  </a:lnTo>
-                  <a:lnTo>
-                    <a:pt x="2293112" y="3110913"/>
-                  </a:lnTo>
-                  <a:lnTo>
-                    <a:pt x="2370746" y="3144799"/>
-                  </a:lnTo>
-                  <a:lnTo>
-                    <a:pt x="2448380" y="3176565"/>
-                  </a:lnTo>
-                  <a:lnTo>
-                    <a:pt x="2526014" y="3206344"/>
-                  </a:lnTo>
-                  <a:lnTo>
-                    <a:pt x="2603648" y="3234261"/>
-                  </a:lnTo>
-                  <a:lnTo>
-                    <a:pt x="2681282" y="3260431"/>
-                  </a:lnTo>
-                  <a:lnTo>
-                    <a:pt x="2758916" y="3284965"/>
-                  </a:lnTo>
-                  <a:lnTo>
-                    <a:pt x="2836551" y="3307964"/>
-                  </a:lnTo>
-                  <a:lnTo>
-                    <a:pt x="2914185" y="3329524"/>
-                  </a:lnTo>
-                  <a:lnTo>
-                    <a:pt x="2991819" y="3349735"/>
-                  </a:lnTo>
-                  <a:lnTo>
-                    <a:pt x="3069453" y="3368683"/>
-                  </a:lnTo>
-                  <a:lnTo>
-                    <a:pt x="3147087" y="3386445"/>
-                  </a:lnTo>
-                  <a:lnTo>
-                    <a:pt x="3224721" y="3403096"/>
-                  </a:lnTo>
-                  <a:lnTo>
-                    <a:pt x="3302355" y="3418705"/>
-                  </a:lnTo>
-                  <a:lnTo>
-                    <a:pt x="3379989" y="3433338"/>
-                  </a:lnTo>
-                  <a:lnTo>
-                    <a:pt x="3457623" y="3447056"/>
-                  </a:lnTo>
-                  <a:lnTo>
-                    <a:pt x="3535257" y="3459916"/>
-                  </a:lnTo>
-                  <a:lnTo>
-                    <a:pt x="3612891" y="3471971"/>
-                  </a:lnTo>
-                  <a:lnTo>
-                    <a:pt x="3690525" y="3483273"/>
-                  </a:lnTo>
-                  <a:lnTo>
-                    <a:pt x="3768159" y="3493867"/>
-                  </a:lnTo>
-                  <a:lnTo>
-                    <a:pt x="3845793" y="3503799"/>
-                  </a:lnTo>
-                  <a:lnTo>
-                    <a:pt x="3923427" y="3513109"/>
-                  </a:lnTo>
-                  <a:lnTo>
-                    <a:pt x="4001061" y="3521837"/>
-                  </a:lnTo>
-                  <a:lnTo>
-                    <a:pt x="4078695" y="3530019"/>
-                  </a:lnTo>
-                  <a:lnTo>
-                    <a:pt x="4156329" y="3537689"/>
-                  </a:lnTo>
-                  <a:lnTo>
-                    <a:pt x="4233963" y="3544880"/>
-                  </a:lnTo>
-                  <a:lnTo>
-                    <a:pt x="4311597" y="3551621"/>
-                  </a:lnTo>
-                  <a:lnTo>
-                    <a:pt x="4389231" y="3557940"/>
-                  </a:lnTo>
-                  <a:lnTo>
-                    <a:pt x="4466865" y="3563864"/>
-                  </a:lnTo>
-                  <a:lnTo>
-                    <a:pt x="4544499" y="3569417"/>
-                  </a:lnTo>
-                  <a:lnTo>
-                    <a:pt x="4622134" y="3574623"/>
-                  </a:lnTo>
-                  <a:lnTo>
-                    <a:pt x="4699768" y="3579503"/>
-                  </a:lnTo>
-                  <a:lnTo>
-                    <a:pt x="4777402" y="3584078"/>
-                  </a:lnTo>
-                  <a:lnTo>
-                    <a:pt x="4855036" y="3588367"/>
-                  </a:lnTo>
-                  <a:lnTo>
-                    <a:pt x="4932670" y="3592388"/>
-                  </a:lnTo>
-                  <a:lnTo>
-                    <a:pt x="5010304" y="3596157"/>
-                  </a:lnTo>
-                  <a:lnTo>
-                    <a:pt x="5087938" y="3599690"/>
-                  </a:lnTo>
-                  <a:lnTo>
-                    <a:pt x="5165572" y="3603002"/>
-                  </a:lnTo>
-                  <a:lnTo>
-                    <a:pt x="5243206" y="3606107"/>
-                  </a:lnTo>
-                  <a:lnTo>
-                    <a:pt x="5320840" y="3609018"/>
-                  </a:lnTo>
-                  <a:lnTo>
-                    <a:pt x="5398474" y="3611747"/>
-                  </a:lnTo>
-                  <a:lnTo>
-                    <a:pt x="5476108" y="3614305"/>
-                  </a:lnTo>
-                  <a:lnTo>
-                    <a:pt x="5553742" y="3616703"/>
-                  </a:lnTo>
-                  <a:lnTo>
-                    <a:pt x="5631376" y="3618951"/>
-                  </a:lnTo>
-                  <a:lnTo>
-                    <a:pt x="5709010" y="3621059"/>
+                    <a:pt x="35867" y="133810"/>
+                  </a:lnTo>
+                  <a:lnTo>
+                    <a:pt x="113501" y="401412"/>
+                  </a:lnTo>
+                  <a:lnTo>
+                    <a:pt x="191135" y="648663"/>
+                  </a:lnTo>
+                  <a:lnTo>
+                    <a:pt x="268769" y="877112"/>
+                  </a:lnTo>
+                  <a:lnTo>
+                    <a:pt x="346403" y="1088187"/>
+                  </a:lnTo>
+                  <a:lnTo>
+                    <a:pt x="424037" y="1283210"/>
+                  </a:lnTo>
+                  <a:lnTo>
+                    <a:pt x="501671" y="1463402"/>
+                  </a:lnTo>
+                  <a:lnTo>
+                    <a:pt x="579305" y="1629891"/>
+                  </a:lnTo>
+                  <a:lnTo>
+                    <a:pt x="656939" y="1783718"/>
+                  </a:lnTo>
+                  <a:lnTo>
+                    <a:pt x="734573" y="1925847"/>
+                  </a:lnTo>
+                  <a:lnTo>
+                    <a:pt x="812207" y="2057168"/>
+                  </a:lnTo>
+                  <a:lnTo>
+                    <a:pt x="889841" y="2178501"/>
+                  </a:lnTo>
+                  <a:lnTo>
+                    <a:pt x="967476" y="2290608"/>
+                  </a:lnTo>
+                  <a:lnTo>
+                    <a:pt x="1045110" y="2394188"/>
+                  </a:lnTo>
+                  <a:lnTo>
+                    <a:pt x="1122744" y="2489892"/>
+                  </a:lnTo>
+                  <a:lnTo>
+                    <a:pt x="1200378" y="2578318"/>
+                  </a:lnTo>
+                  <a:lnTo>
+                    <a:pt x="1278012" y="2660019"/>
+                  </a:lnTo>
+                  <a:lnTo>
+                    <a:pt x="1355646" y="2735506"/>
+                  </a:lnTo>
+                  <a:lnTo>
+                    <a:pt x="1433280" y="2805253"/>
+                  </a:lnTo>
+                  <a:lnTo>
+                    <a:pt x="1510914" y="2869696"/>
+                  </a:lnTo>
+                  <a:lnTo>
+                    <a:pt x="1588548" y="2929238"/>
+                  </a:lnTo>
+                  <a:lnTo>
+                    <a:pt x="1666182" y="2984252"/>
+                  </a:lnTo>
+                  <a:lnTo>
+                    <a:pt x="1743816" y="3035082"/>
+                  </a:lnTo>
+                  <a:lnTo>
+                    <a:pt x="1821450" y="3082047"/>
+                  </a:lnTo>
+                  <a:lnTo>
+                    <a:pt x="1899084" y="3125440"/>
+                  </a:lnTo>
+                  <a:lnTo>
+                    <a:pt x="1976718" y="3165533"/>
+                  </a:lnTo>
+                  <a:lnTo>
+                    <a:pt x="2054352" y="3202577"/>
+                  </a:lnTo>
+                  <a:lnTo>
+                    <a:pt x="2131986" y="3236804"/>
+                  </a:lnTo>
+                  <a:lnTo>
+                    <a:pt x="2209620" y="3268428"/>
+                  </a:lnTo>
+                  <a:lnTo>
+                    <a:pt x="2287254" y="3297647"/>
+                  </a:lnTo>
+                  <a:lnTo>
+                    <a:pt x="2364888" y="3324644"/>
+                  </a:lnTo>
+                  <a:lnTo>
+                    <a:pt x="2442522" y="3349588"/>
+                  </a:lnTo>
+                  <a:lnTo>
+                    <a:pt x="2520156" y="3372635"/>
+                  </a:lnTo>
+                  <a:lnTo>
+                    <a:pt x="2597790" y="3393929"/>
+                  </a:lnTo>
+                  <a:lnTo>
+                    <a:pt x="2675424" y="3413604"/>
+                  </a:lnTo>
+                  <a:lnTo>
+                    <a:pt x="2753059" y="3431782"/>
+                  </a:lnTo>
+                  <a:lnTo>
+                    <a:pt x="2830693" y="3448579"/>
+                  </a:lnTo>
+                  <a:lnTo>
+                    <a:pt x="2908327" y="3464097"/>
+                  </a:lnTo>
+                  <a:lnTo>
+                    <a:pt x="2985961" y="3478436"/>
+                  </a:lnTo>
+                  <a:lnTo>
+                    <a:pt x="3063595" y="3491684"/>
+                  </a:lnTo>
+                  <a:lnTo>
+                    <a:pt x="3141229" y="3503925"/>
+                  </a:lnTo>
+                  <a:lnTo>
+                    <a:pt x="3218863" y="3515235"/>
+                  </a:lnTo>
+                  <a:lnTo>
+                    <a:pt x="3296497" y="3525684"/>
+                  </a:lnTo>
+                  <a:lnTo>
+                    <a:pt x="3374131" y="3535340"/>
+                  </a:lnTo>
+                  <a:lnTo>
+                    <a:pt x="3451765" y="3544260"/>
+                  </a:lnTo>
+                  <a:lnTo>
+                    <a:pt x="3529399" y="3552503"/>
+                  </a:lnTo>
+                  <a:lnTo>
+                    <a:pt x="3607033" y="3560118"/>
+                  </a:lnTo>
+                  <a:lnTo>
+                    <a:pt x="3684667" y="3567155"/>
+                  </a:lnTo>
+                  <a:lnTo>
+                    <a:pt x="3762301" y="3573656"/>
+                  </a:lnTo>
+                  <a:lnTo>
+                    <a:pt x="3839935" y="3579663"/>
+                  </a:lnTo>
+                  <a:lnTo>
+                    <a:pt x="3917569" y="3585213"/>
+                  </a:lnTo>
+                  <a:lnTo>
+                    <a:pt x="3995203" y="3590341"/>
+                  </a:lnTo>
+                  <a:lnTo>
+                    <a:pt x="4072837" y="3595079"/>
+                  </a:lnTo>
+                  <a:lnTo>
+                    <a:pt x="4150471" y="3599457"/>
+                  </a:lnTo>
+                  <a:lnTo>
+                    <a:pt x="4228105" y="3603501"/>
+                  </a:lnTo>
+                  <a:lnTo>
+                    <a:pt x="4305739" y="3607238"/>
+                  </a:lnTo>
+                  <a:lnTo>
+                    <a:pt x="4383373" y="3610691"/>
+                  </a:lnTo>
+                  <a:lnTo>
+                    <a:pt x="4461008" y="3613882"/>
+                  </a:lnTo>
+                  <a:lnTo>
+                    <a:pt x="4538642" y="3616830"/>
+                  </a:lnTo>
+                  <a:lnTo>
+                    <a:pt x="4616276" y="3619553"/>
+                  </a:lnTo>
+                  <a:lnTo>
+                    <a:pt x="4693910" y="3622070"/>
+                  </a:lnTo>
+                  <a:lnTo>
+                    <a:pt x="4771544" y="3624395"/>
+                  </a:lnTo>
+                  <a:lnTo>
+                    <a:pt x="4849178" y="3626543"/>
+                  </a:lnTo>
+                  <a:lnTo>
+                    <a:pt x="4926812" y="3628528"/>
+                  </a:lnTo>
+                  <a:lnTo>
+                    <a:pt x="5004446" y="3630362"/>
+                  </a:lnTo>
+                  <a:lnTo>
+                    <a:pt x="5082080" y="3632056"/>
+                  </a:lnTo>
+                  <a:lnTo>
+                    <a:pt x="5159714" y="3633622"/>
+                  </a:lnTo>
+                  <a:lnTo>
+                    <a:pt x="5237348" y="3635068"/>
+                  </a:lnTo>
+                  <a:lnTo>
+                    <a:pt x="5314982" y="3636405"/>
+                  </a:lnTo>
+                  <a:lnTo>
+                    <a:pt x="5392616" y="3637640"/>
                   </a:lnTo>
                 </a:path>
               </a:pathLst>

--- a/docs/plots/carbo/jx_carbo_linsubhr_ratio_throm3.pptx
+++ b/docs/plots/carbo/jx_carbo_linsubhr_ratio_throm3.pptx
@@ -3003,491 +3003,500 @@
           <p:spPr>
             <a:xfrm>
               <a:off x="817517" y="1896563"/>
-              <a:ext cx="7370972" cy="3651735"/>
+              <a:ext cx="7370972" cy="3648175"/>
             </a:xfrm>
             <a:custGeom>
               <a:avLst/>
               <a:pathLst>
-                <a:path w="7370972" h="3651735">
+                <a:path w="7370972" h="3648175">
                   <a:moveTo>
-                    <a:pt x="2553339" y="0"/>
+                    <a:pt x="2302126" y="0"/>
                   </a:moveTo>
                   <a:lnTo>
-                    <a:pt x="2557661" y="28869"/>
-                  </a:lnTo>
-                  <a:lnTo>
-                    <a:pt x="2635295" y="482474"/>
-                  </a:lnTo>
-                  <a:lnTo>
-                    <a:pt x="2712930" y="879299"/>
-                  </a:lnTo>
-                  <a:lnTo>
-                    <a:pt x="2790564" y="1226452"/>
-                  </a:lnTo>
-                  <a:lnTo>
-                    <a:pt x="2868198" y="1530150"/>
-                  </a:lnTo>
-                  <a:lnTo>
-                    <a:pt x="2945832" y="1795833"/>
-                  </a:lnTo>
-                  <a:lnTo>
-                    <a:pt x="3023466" y="2028258"/>
-                  </a:lnTo>
-                  <a:lnTo>
-                    <a:pt x="3101100" y="2231590"/>
-                  </a:lnTo>
-                  <a:lnTo>
-                    <a:pt x="3178734" y="2409470"/>
-                  </a:lnTo>
-                  <a:lnTo>
-                    <a:pt x="3256368" y="2565084"/>
-                  </a:lnTo>
-                  <a:lnTo>
-                    <a:pt x="3334002" y="2701219"/>
-                  </a:lnTo>
-                  <a:lnTo>
-                    <a:pt x="3411636" y="2789920"/>
-                  </a:lnTo>
-                  <a:lnTo>
-                    <a:pt x="3489270" y="2810767"/>
-                  </a:lnTo>
-                  <a:lnTo>
-                    <a:pt x="3566904" y="2831110"/>
-                  </a:lnTo>
-                  <a:lnTo>
-                    <a:pt x="3644538" y="2850961"/>
-                  </a:lnTo>
-                  <a:lnTo>
-                    <a:pt x="3722172" y="2870332"/>
-                  </a:lnTo>
-                  <a:lnTo>
-                    <a:pt x="3799806" y="2889236"/>
-                  </a:lnTo>
-                  <a:lnTo>
-                    <a:pt x="3877440" y="2907683"/>
-                  </a:lnTo>
-                  <a:lnTo>
-                    <a:pt x="3955074" y="2925684"/>
-                  </a:lnTo>
-                  <a:lnTo>
-                    <a:pt x="4032708" y="2943250"/>
-                  </a:lnTo>
-                  <a:lnTo>
-                    <a:pt x="4110342" y="2960391"/>
-                  </a:lnTo>
-                  <a:lnTo>
-                    <a:pt x="4187976" y="2977118"/>
-                  </a:lnTo>
-                  <a:lnTo>
-                    <a:pt x="4265610" y="2993442"/>
-                  </a:lnTo>
-                  <a:lnTo>
-                    <a:pt x="4343244" y="3009370"/>
-                  </a:lnTo>
-                  <a:lnTo>
-                    <a:pt x="4420879" y="3024914"/>
-                  </a:lnTo>
-                  <a:lnTo>
-                    <a:pt x="4498513" y="3040082"/>
-                  </a:lnTo>
-                  <a:lnTo>
-                    <a:pt x="4576147" y="3054884"/>
-                  </a:lnTo>
-                  <a:lnTo>
-                    <a:pt x="4653781" y="3069328"/>
-                  </a:lnTo>
-                  <a:lnTo>
-                    <a:pt x="4731415" y="3083423"/>
-                  </a:lnTo>
-                  <a:lnTo>
-                    <a:pt x="4809049" y="3097177"/>
-                  </a:lnTo>
-                  <a:lnTo>
-                    <a:pt x="4886683" y="3110599"/>
-                  </a:lnTo>
-                  <a:lnTo>
-                    <a:pt x="4964317" y="3123697"/>
-                  </a:lnTo>
-                  <a:lnTo>
-                    <a:pt x="5041951" y="3136478"/>
-                  </a:lnTo>
-                  <a:lnTo>
-                    <a:pt x="5119585" y="3148951"/>
-                  </a:lnTo>
-                  <a:lnTo>
-                    <a:pt x="5197219" y="3161122"/>
-                  </a:lnTo>
-                  <a:lnTo>
-                    <a:pt x="5274853" y="3172999"/>
-                  </a:lnTo>
-                  <a:lnTo>
-                    <a:pt x="5352487" y="3184589"/>
-                  </a:lnTo>
-                  <a:lnTo>
-                    <a:pt x="5430121" y="3195899"/>
-                  </a:lnTo>
-                  <a:lnTo>
-                    <a:pt x="5507755" y="3206935"/>
-                  </a:lnTo>
-                  <a:lnTo>
-                    <a:pt x="5585389" y="3217705"/>
-                  </a:lnTo>
-                  <a:lnTo>
-                    <a:pt x="5663023" y="3228215"/>
-                  </a:lnTo>
-                  <a:lnTo>
-                    <a:pt x="5740657" y="3238471"/>
-                  </a:lnTo>
-                  <a:lnTo>
-                    <a:pt x="5818291" y="3248479"/>
-                  </a:lnTo>
-                  <a:lnTo>
-                    <a:pt x="5895925" y="3258245"/>
-                  </a:lnTo>
-                  <a:lnTo>
-                    <a:pt x="5973559" y="3267775"/>
-                  </a:lnTo>
-                  <a:lnTo>
-                    <a:pt x="6051193" y="3277075"/>
-                  </a:lnTo>
-                  <a:lnTo>
-                    <a:pt x="6128827" y="3286150"/>
-                  </a:lnTo>
-                  <a:lnTo>
-                    <a:pt x="6206462" y="3295005"/>
-                  </a:lnTo>
-                  <a:lnTo>
-                    <a:pt x="6284096" y="3303647"/>
-                  </a:lnTo>
-                  <a:lnTo>
-                    <a:pt x="6361730" y="3312080"/>
-                  </a:lnTo>
-                  <a:lnTo>
-                    <a:pt x="6439364" y="3320310"/>
-                  </a:lnTo>
-                  <a:lnTo>
-                    <a:pt x="6516998" y="3328340"/>
-                  </a:lnTo>
-                  <a:lnTo>
-                    <a:pt x="6594632" y="3336176"/>
-                  </a:lnTo>
-                  <a:lnTo>
-                    <a:pt x="6672266" y="3343823"/>
-                  </a:lnTo>
-                  <a:lnTo>
-                    <a:pt x="6749900" y="3351286"/>
-                  </a:lnTo>
-                  <a:lnTo>
-                    <a:pt x="6827534" y="3358567"/>
-                  </a:lnTo>
-                  <a:lnTo>
-                    <a:pt x="6905168" y="3365673"/>
-                  </a:lnTo>
-                  <a:lnTo>
-                    <a:pt x="6982802" y="3372608"/>
-                  </a:lnTo>
-                  <a:lnTo>
-                    <a:pt x="7060436" y="3379374"/>
-                  </a:lnTo>
-                  <a:lnTo>
-                    <a:pt x="7138070" y="3385977"/>
-                  </a:lnTo>
-                  <a:lnTo>
-                    <a:pt x="7215704" y="3392421"/>
-                  </a:lnTo>
-                  <a:lnTo>
-                    <a:pt x="7293338" y="3398709"/>
-                  </a:lnTo>
-                  <a:lnTo>
-                    <a:pt x="7370972" y="3404845"/>
-                  </a:lnTo>
-                  <a:lnTo>
-                    <a:pt x="7370972" y="3651735"/>
-                  </a:lnTo>
-                  <a:lnTo>
-                    <a:pt x="7293338" y="3651605"/>
-                  </a:lnTo>
-                  <a:lnTo>
-                    <a:pt x="7215704" y="3651456"/>
-                  </a:lnTo>
-                  <a:lnTo>
-                    <a:pt x="7138070" y="3651286"/>
-                  </a:lnTo>
-                  <a:lnTo>
-                    <a:pt x="7060436" y="3651092"/>
-                  </a:lnTo>
-                  <a:lnTo>
-                    <a:pt x="6982802" y="3650870"/>
-                  </a:lnTo>
-                  <a:lnTo>
-                    <a:pt x="6905168" y="3650617"/>
-                  </a:lnTo>
-                  <a:lnTo>
-                    <a:pt x="6827534" y="3650327"/>
-                  </a:lnTo>
-                  <a:lnTo>
-                    <a:pt x="6749900" y="3649995"/>
-                  </a:lnTo>
-                  <a:lnTo>
-                    <a:pt x="6672266" y="3649616"/>
-                  </a:lnTo>
-                  <a:lnTo>
-                    <a:pt x="6594632" y="3649183"/>
-                  </a:lnTo>
-                  <a:lnTo>
-                    <a:pt x="6516998" y="3648688"/>
-                  </a:lnTo>
-                  <a:lnTo>
-                    <a:pt x="6439364" y="3648122"/>
-                  </a:lnTo>
-                  <a:lnTo>
-                    <a:pt x="6361730" y="3647476"/>
-                  </a:lnTo>
-                  <a:lnTo>
-                    <a:pt x="6284096" y="3646736"/>
-                  </a:lnTo>
-                  <a:lnTo>
-                    <a:pt x="6206462" y="3645891"/>
-                  </a:lnTo>
-                  <a:lnTo>
-                    <a:pt x="6128827" y="3644925"/>
-                  </a:lnTo>
-                  <a:lnTo>
-                    <a:pt x="6051193" y="3643820"/>
-                  </a:lnTo>
-                  <a:lnTo>
-                    <a:pt x="5973559" y="3642558"/>
-                  </a:lnTo>
-                  <a:lnTo>
-                    <a:pt x="5895925" y="3641115"/>
-                  </a:lnTo>
-                  <a:lnTo>
-                    <a:pt x="5818291" y="3639465"/>
-                  </a:lnTo>
-                  <a:lnTo>
-                    <a:pt x="5740657" y="3637580"/>
-                  </a:lnTo>
-                  <a:lnTo>
-                    <a:pt x="5663023" y="3635424"/>
-                  </a:lnTo>
-                  <a:lnTo>
-                    <a:pt x="5585389" y="3632960"/>
-                  </a:lnTo>
-                  <a:lnTo>
-                    <a:pt x="5507755" y="3630144"/>
-                  </a:lnTo>
-                  <a:lnTo>
-                    <a:pt x="5430121" y="3626925"/>
-                  </a:lnTo>
-                  <a:lnTo>
-                    <a:pt x="5352487" y="3623245"/>
-                  </a:lnTo>
-                  <a:lnTo>
-                    <a:pt x="5274853" y="3619038"/>
-                  </a:lnTo>
-                  <a:lnTo>
-                    <a:pt x="5197219" y="3614230"/>
-                  </a:lnTo>
-                  <a:lnTo>
-                    <a:pt x="5119585" y="3608733"/>
-                  </a:lnTo>
-                  <a:lnTo>
-                    <a:pt x="5041951" y="3602450"/>
-                  </a:lnTo>
-                  <a:lnTo>
-                    <a:pt x="4964317" y="3595268"/>
-                  </a:lnTo>
-                  <a:lnTo>
-                    <a:pt x="4886683" y="3587059"/>
-                  </a:lnTo>
-                  <a:lnTo>
-                    <a:pt x="4809049" y="3577675"/>
-                  </a:lnTo>
-                  <a:lnTo>
-                    <a:pt x="4731415" y="3566948"/>
-                  </a:lnTo>
-                  <a:lnTo>
-                    <a:pt x="4653781" y="3554686"/>
-                  </a:lnTo>
-                  <a:lnTo>
-                    <a:pt x="4576147" y="3540670"/>
-                  </a:lnTo>
-                  <a:lnTo>
-                    <a:pt x="4498513" y="3524648"/>
-                  </a:lnTo>
-                  <a:lnTo>
-                    <a:pt x="4420879" y="3506334"/>
-                  </a:lnTo>
-                  <a:lnTo>
-                    <a:pt x="4343244" y="3485399"/>
-                  </a:lnTo>
-                  <a:lnTo>
-                    <a:pt x="4265610" y="3461469"/>
-                  </a:lnTo>
-                  <a:lnTo>
-                    <a:pt x="4187976" y="3434115"/>
-                  </a:lnTo>
-                  <a:lnTo>
-                    <a:pt x="4110342" y="3402846"/>
-                  </a:lnTo>
-                  <a:lnTo>
-                    <a:pt x="4032708" y="3367104"/>
-                  </a:lnTo>
-                  <a:lnTo>
-                    <a:pt x="3955074" y="3326248"/>
-                  </a:lnTo>
-                  <a:lnTo>
-                    <a:pt x="3877440" y="3279545"/>
-                  </a:lnTo>
-                  <a:lnTo>
-                    <a:pt x="3799806" y="3226160"/>
-                  </a:lnTo>
-                  <a:lnTo>
-                    <a:pt x="3722172" y="3165137"/>
-                  </a:lnTo>
-                  <a:lnTo>
-                    <a:pt x="3644538" y="3095382"/>
-                  </a:lnTo>
-                  <a:lnTo>
-                    <a:pt x="3566904" y="3015645"/>
-                  </a:lnTo>
-                  <a:lnTo>
-                    <a:pt x="3489270" y="2924500"/>
-                  </a:lnTo>
-                  <a:lnTo>
-                    <a:pt x="3411636" y="2820314"/>
-                  </a:lnTo>
-                  <a:lnTo>
-                    <a:pt x="3334002" y="2768558"/>
-                  </a:lnTo>
-                  <a:lnTo>
-                    <a:pt x="3256368" y="2746666"/>
-                  </a:lnTo>
-                  <a:lnTo>
-                    <a:pt x="3178734" y="2724232"/>
-                  </a:lnTo>
-                  <a:lnTo>
-                    <a:pt x="3101100" y="2701243"/>
-                  </a:lnTo>
-                  <a:lnTo>
-                    <a:pt x="3023466" y="2677684"/>
-                  </a:lnTo>
-                  <a:lnTo>
-                    <a:pt x="2945832" y="2653542"/>
-                  </a:lnTo>
-                  <a:lnTo>
-                    <a:pt x="2868198" y="2628803"/>
-                  </a:lnTo>
-                  <a:lnTo>
-                    <a:pt x="2790564" y="2603450"/>
-                  </a:lnTo>
-                  <a:lnTo>
-                    <a:pt x="2712930" y="2577470"/>
-                  </a:lnTo>
-                  <a:lnTo>
-                    <a:pt x="2635295" y="2550847"/>
-                  </a:lnTo>
-                  <a:lnTo>
-                    <a:pt x="2557661" y="2523564"/>
-                  </a:lnTo>
-                  <a:lnTo>
-                    <a:pt x="2480027" y="2495606"/>
-                  </a:lnTo>
-                  <a:lnTo>
-                    <a:pt x="2402393" y="2466956"/>
-                  </a:lnTo>
-                  <a:lnTo>
-                    <a:pt x="2324759" y="2437596"/>
-                  </a:lnTo>
-                  <a:lnTo>
-                    <a:pt x="2247125" y="2407509"/>
-                  </a:lnTo>
-                  <a:lnTo>
-                    <a:pt x="2169491" y="2376677"/>
-                  </a:lnTo>
-                  <a:lnTo>
-                    <a:pt x="2091857" y="2345081"/>
-                  </a:lnTo>
-                  <a:lnTo>
-                    <a:pt x="2014223" y="2312703"/>
-                  </a:lnTo>
-                  <a:lnTo>
-                    <a:pt x="1936589" y="2279524"/>
-                  </a:lnTo>
-                  <a:lnTo>
-                    <a:pt x="1858955" y="2245523"/>
-                  </a:lnTo>
-                  <a:lnTo>
-                    <a:pt x="1781321" y="2210680"/>
-                  </a:lnTo>
-                  <a:lnTo>
-                    <a:pt x="1703687" y="2174974"/>
-                  </a:lnTo>
-                  <a:lnTo>
-                    <a:pt x="1626053" y="2138384"/>
-                  </a:lnTo>
-                  <a:lnTo>
-                    <a:pt x="1548419" y="2100888"/>
-                  </a:lnTo>
-                  <a:lnTo>
-                    <a:pt x="1470785" y="2062463"/>
-                  </a:lnTo>
-                  <a:lnTo>
-                    <a:pt x="1393151" y="2023087"/>
-                  </a:lnTo>
-                  <a:lnTo>
-                    <a:pt x="1315517" y="1982736"/>
-                  </a:lnTo>
-                  <a:lnTo>
-                    <a:pt x="1237883" y="1941386"/>
-                  </a:lnTo>
-                  <a:lnTo>
-                    <a:pt x="1160249" y="1899012"/>
-                  </a:lnTo>
-                  <a:lnTo>
-                    <a:pt x="1082615" y="1855589"/>
-                  </a:lnTo>
-                  <a:lnTo>
-                    <a:pt x="1004981" y="1811090"/>
-                  </a:lnTo>
-                  <a:lnTo>
-                    <a:pt x="927346" y="1765490"/>
-                  </a:lnTo>
-                  <a:lnTo>
-                    <a:pt x="849712" y="1718760"/>
-                  </a:lnTo>
-                  <a:lnTo>
-                    <a:pt x="772078" y="1670873"/>
-                  </a:lnTo>
-                  <a:lnTo>
-                    <a:pt x="694444" y="1621801"/>
-                  </a:lnTo>
-                  <a:lnTo>
-                    <a:pt x="616810" y="1571513"/>
-                  </a:lnTo>
-                  <a:lnTo>
-                    <a:pt x="539176" y="1519980"/>
-                  </a:lnTo>
-                  <a:lnTo>
-                    <a:pt x="461542" y="1467171"/>
-                  </a:lnTo>
-                  <a:lnTo>
-                    <a:pt x="383908" y="1413055"/>
-                  </a:lnTo>
-                  <a:lnTo>
-                    <a:pt x="306274" y="1357598"/>
-                  </a:lnTo>
-                  <a:lnTo>
-                    <a:pt x="228640" y="1300768"/>
-                  </a:lnTo>
-                  <a:lnTo>
-                    <a:pt x="151006" y="1242531"/>
-                  </a:lnTo>
-                  <a:lnTo>
-                    <a:pt x="73372" y="1182852"/>
-                  </a:lnTo>
-                  <a:lnTo>
-                    <a:pt x="0" y="1125052"/>
+                    <a:pt x="2324759" y="111652"/>
+                  </a:lnTo>
+                  <a:lnTo>
+                    <a:pt x="2402393" y="457249"/>
+                  </a:lnTo>
+                  <a:lnTo>
+                    <a:pt x="2480027" y="769116"/>
+                  </a:lnTo>
+                  <a:lnTo>
+                    <a:pt x="2557661" y="1050545"/>
+                  </a:lnTo>
+                  <a:lnTo>
+                    <a:pt x="2635295" y="1304507"/>
+                  </a:lnTo>
+                  <a:lnTo>
+                    <a:pt x="2712930" y="1533683"/>
+                  </a:lnTo>
+                  <a:lnTo>
+                    <a:pt x="2790564" y="1740491"/>
+                  </a:lnTo>
+                  <a:lnTo>
+                    <a:pt x="2868198" y="1927115"/>
+                  </a:lnTo>
+                  <a:lnTo>
+                    <a:pt x="2945832" y="2095525"/>
+                  </a:lnTo>
+                  <a:lnTo>
+                    <a:pt x="3023466" y="2247498"/>
+                  </a:lnTo>
+                  <a:lnTo>
+                    <a:pt x="3101100" y="2384639"/>
+                  </a:lnTo>
+                  <a:lnTo>
+                    <a:pt x="3178734" y="2508395"/>
+                  </a:lnTo>
+                  <a:lnTo>
+                    <a:pt x="3256368" y="2620072"/>
+                  </a:lnTo>
+                  <a:lnTo>
+                    <a:pt x="3334002" y="2720850"/>
+                  </a:lnTo>
+                  <a:lnTo>
+                    <a:pt x="3411636" y="2787742"/>
+                  </a:lnTo>
+                  <a:lnTo>
+                    <a:pt x="3489270" y="2802132"/>
+                  </a:lnTo>
+                  <a:lnTo>
+                    <a:pt x="3566904" y="2816283"/>
+                  </a:lnTo>
+                  <a:lnTo>
+                    <a:pt x="3644538" y="2830198"/>
+                  </a:lnTo>
+                  <a:lnTo>
+                    <a:pt x="3722172" y="2843882"/>
+                  </a:lnTo>
+                  <a:lnTo>
+                    <a:pt x="3799806" y="2857338"/>
+                  </a:lnTo>
+                  <a:lnTo>
+                    <a:pt x="3877440" y="2870571"/>
+                  </a:lnTo>
+                  <a:lnTo>
+                    <a:pt x="3955074" y="2883583"/>
+                  </a:lnTo>
+                  <a:lnTo>
+                    <a:pt x="4032708" y="2896378"/>
+                  </a:lnTo>
+                  <a:lnTo>
+                    <a:pt x="4110342" y="2908961"/>
+                  </a:lnTo>
+                  <a:lnTo>
+                    <a:pt x="4187976" y="2921334"/>
+                  </a:lnTo>
+                  <a:lnTo>
+                    <a:pt x="4265610" y="2933502"/>
+                  </a:lnTo>
+                  <a:lnTo>
+                    <a:pt x="4343244" y="2945467"/>
+                  </a:lnTo>
+                  <a:lnTo>
+                    <a:pt x="4420879" y="2957233"/>
+                  </a:lnTo>
+                  <a:lnTo>
+                    <a:pt x="4498513" y="2968803"/>
+                  </a:lnTo>
+                  <a:lnTo>
+                    <a:pt x="4576147" y="2980181"/>
+                  </a:lnTo>
+                  <a:lnTo>
+                    <a:pt x="4653781" y="2991369"/>
+                  </a:lnTo>
+                  <a:lnTo>
+                    <a:pt x="4731415" y="3002371"/>
+                  </a:lnTo>
+                  <a:lnTo>
+                    <a:pt x="4809049" y="3013190"/>
+                  </a:lnTo>
+                  <a:lnTo>
+                    <a:pt x="4886683" y="3023830"/>
+                  </a:lnTo>
+                  <a:lnTo>
+                    <a:pt x="4964317" y="3034292"/>
+                  </a:lnTo>
+                  <a:lnTo>
+                    <a:pt x="5041951" y="3044580"/>
+                  </a:lnTo>
+                  <a:lnTo>
+                    <a:pt x="5119585" y="3054697"/>
+                  </a:lnTo>
+                  <a:lnTo>
+                    <a:pt x="5197219" y="3064645"/>
+                  </a:lnTo>
+                  <a:lnTo>
+                    <a:pt x="5274853" y="3074428"/>
+                  </a:lnTo>
+                  <a:lnTo>
+                    <a:pt x="5352487" y="3084049"/>
+                  </a:lnTo>
+                  <a:lnTo>
+                    <a:pt x="5430121" y="3093509"/>
+                  </a:lnTo>
+                  <a:lnTo>
+                    <a:pt x="5507755" y="3102812"/>
+                  </a:lnTo>
+                  <a:lnTo>
+                    <a:pt x="5585389" y="3111960"/>
+                  </a:lnTo>
+                  <a:lnTo>
+                    <a:pt x="5663023" y="3120956"/>
+                  </a:lnTo>
+                  <a:lnTo>
+                    <a:pt x="5740657" y="3129802"/>
+                  </a:lnTo>
+                  <a:lnTo>
+                    <a:pt x="5818291" y="3138501"/>
+                  </a:lnTo>
+                  <a:lnTo>
+                    <a:pt x="5895925" y="3147055"/>
+                  </a:lnTo>
+                  <a:lnTo>
+                    <a:pt x="5973559" y="3155467"/>
+                  </a:lnTo>
+                  <a:lnTo>
+                    <a:pt x="6051193" y="3163739"/>
+                  </a:lnTo>
+                  <a:lnTo>
+                    <a:pt x="6128827" y="3171874"/>
+                  </a:lnTo>
+                  <a:lnTo>
+                    <a:pt x="6206462" y="3179873"/>
+                  </a:lnTo>
+                  <a:lnTo>
+                    <a:pt x="6284096" y="3187738"/>
+                  </a:lnTo>
+                  <a:lnTo>
+                    <a:pt x="6361730" y="3195474"/>
+                  </a:lnTo>
+                  <a:lnTo>
+                    <a:pt x="6439364" y="3203080"/>
+                  </a:lnTo>
+                  <a:lnTo>
+                    <a:pt x="6516998" y="3210560"/>
+                  </a:lnTo>
+                  <a:lnTo>
+                    <a:pt x="6594632" y="3217915"/>
+                  </a:lnTo>
+                  <a:lnTo>
+                    <a:pt x="6672266" y="3225148"/>
+                  </a:lnTo>
+                  <a:lnTo>
+                    <a:pt x="6749900" y="3232261"/>
+                  </a:lnTo>
+                  <a:lnTo>
+                    <a:pt x="6827534" y="3239255"/>
+                  </a:lnTo>
+                  <a:lnTo>
+                    <a:pt x="6905168" y="3246133"/>
+                  </a:lnTo>
+                  <a:lnTo>
+                    <a:pt x="6982802" y="3252896"/>
+                  </a:lnTo>
+                  <a:lnTo>
+                    <a:pt x="7060436" y="3259547"/>
+                  </a:lnTo>
+                  <a:lnTo>
+                    <a:pt x="7138070" y="3266088"/>
+                  </a:lnTo>
+                  <a:lnTo>
+                    <a:pt x="7215704" y="3272519"/>
+                  </a:lnTo>
+                  <a:lnTo>
+                    <a:pt x="7293338" y="3278844"/>
+                  </a:lnTo>
+                  <a:lnTo>
+                    <a:pt x="7370972" y="3285063"/>
+                  </a:lnTo>
+                  <a:lnTo>
+                    <a:pt x="7370972" y="3648175"/>
+                  </a:lnTo>
+                  <a:lnTo>
+                    <a:pt x="7293338" y="3647692"/>
+                  </a:lnTo>
+                  <a:lnTo>
+                    <a:pt x="7215704" y="3647157"/>
+                  </a:lnTo>
+                  <a:lnTo>
+                    <a:pt x="7138070" y="3646563"/>
+                  </a:lnTo>
+                  <a:lnTo>
+                    <a:pt x="7060436" y="3645906"/>
+                  </a:lnTo>
+                  <a:lnTo>
+                    <a:pt x="6982802" y="3645177"/>
+                  </a:lnTo>
+                  <a:lnTo>
+                    <a:pt x="6905168" y="3644370"/>
+                  </a:lnTo>
+                  <a:lnTo>
+                    <a:pt x="6827534" y="3643475"/>
+                  </a:lnTo>
+                  <a:lnTo>
+                    <a:pt x="6749900" y="3642483"/>
+                  </a:lnTo>
+                  <a:lnTo>
+                    <a:pt x="6672266" y="3641384"/>
+                  </a:lnTo>
+                  <a:lnTo>
+                    <a:pt x="6594632" y="3640167"/>
+                  </a:lnTo>
+                  <a:lnTo>
+                    <a:pt x="6516998" y="3638817"/>
+                  </a:lnTo>
+                  <a:lnTo>
+                    <a:pt x="6439364" y="3637322"/>
+                  </a:lnTo>
+                  <a:lnTo>
+                    <a:pt x="6361730" y="3635665"/>
+                  </a:lnTo>
+                  <a:lnTo>
+                    <a:pt x="6284096" y="3633828"/>
+                  </a:lnTo>
+                  <a:lnTo>
+                    <a:pt x="6206462" y="3631793"/>
+                  </a:lnTo>
+                  <a:lnTo>
+                    <a:pt x="6128827" y="3629538"/>
+                  </a:lnTo>
+                  <a:lnTo>
+                    <a:pt x="6051193" y="3627039"/>
+                  </a:lnTo>
+                  <a:lnTo>
+                    <a:pt x="5973559" y="3624270"/>
+                  </a:lnTo>
+                  <a:lnTo>
+                    <a:pt x="5895925" y="3621202"/>
+                  </a:lnTo>
+                  <a:lnTo>
+                    <a:pt x="5818291" y="3617801"/>
+                  </a:lnTo>
+                  <a:lnTo>
+                    <a:pt x="5740657" y="3614033"/>
+                  </a:lnTo>
+                  <a:lnTo>
+                    <a:pt x="5663023" y="3609857"/>
+                  </a:lnTo>
+                  <a:lnTo>
+                    <a:pt x="5585389" y="3605229"/>
+                  </a:lnTo>
+                  <a:lnTo>
+                    <a:pt x="5507755" y="3600101"/>
+                  </a:lnTo>
+                  <a:lnTo>
+                    <a:pt x="5430121" y="3594418"/>
+                  </a:lnTo>
+                  <a:lnTo>
+                    <a:pt x="5352487" y="3588121"/>
+                  </a:lnTo>
+                  <a:lnTo>
+                    <a:pt x="5274853" y="3581143"/>
+                  </a:lnTo>
+                  <a:lnTo>
+                    <a:pt x="5197219" y="3573410"/>
+                  </a:lnTo>
+                  <a:lnTo>
+                    <a:pt x="5119585" y="3564840"/>
+                  </a:lnTo>
+                  <a:lnTo>
+                    <a:pt x="5041951" y="3555344"/>
+                  </a:lnTo>
+                  <a:lnTo>
+                    <a:pt x="4964317" y="3544820"/>
+                  </a:lnTo>
+                  <a:lnTo>
+                    <a:pt x="4886683" y="3533159"/>
+                  </a:lnTo>
+                  <a:lnTo>
+                    <a:pt x="4809049" y="3520236"/>
+                  </a:lnTo>
+                  <a:lnTo>
+                    <a:pt x="4731415" y="3505916"/>
+                  </a:lnTo>
+                  <a:lnTo>
+                    <a:pt x="4653781" y="3490046"/>
+                  </a:lnTo>
+                  <a:lnTo>
+                    <a:pt x="4576147" y="3472461"/>
+                  </a:lnTo>
+                  <a:lnTo>
+                    <a:pt x="4498513" y="3452973"/>
+                  </a:lnTo>
+                  <a:lnTo>
+                    <a:pt x="4420879" y="3431378"/>
+                  </a:lnTo>
+                  <a:lnTo>
+                    <a:pt x="4343244" y="3407447"/>
+                  </a:lnTo>
+                  <a:lnTo>
+                    <a:pt x="4265610" y="3380928"/>
+                  </a:lnTo>
+                  <a:lnTo>
+                    <a:pt x="4187976" y="3351540"/>
+                  </a:lnTo>
+                  <a:lnTo>
+                    <a:pt x="4110342" y="3318974"/>
+                  </a:lnTo>
+                  <a:lnTo>
+                    <a:pt x="4032708" y="3282887"/>
+                  </a:lnTo>
+                  <a:lnTo>
+                    <a:pt x="3955074" y="3242896"/>
+                  </a:lnTo>
+                  <a:lnTo>
+                    <a:pt x="3877440" y="3198580"/>
+                  </a:lnTo>
+                  <a:lnTo>
+                    <a:pt x="3799806" y="3149470"/>
+                  </a:lnTo>
+                  <a:lnTo>
+                    <a:pt x="3722172" y="3095050"/>
+                  </a:lnTo>
+                  <a:lnTo>
+                    <a:pt x="3644538" y="3034744"/>
+                  </a:lnTo>
+                  <a:lnTo>
+                    <a:pt x="3566904" y="2967915"/>
+                  </a:lnTo>
+                  <a:lnTo>
+                    <a:pt x="3489270" y="2893858"/>
+                  </a:lnTo>
+                  <a:lnTo>
+                    <a:pt x="3411636" y="2811792"/>
+                  </a:lnTo>
+                  <a:lnTo>
+                    <a:pt x="3334002" y="2773109"/>
+                  </a:lnTo>
+                  <a:lnTo>
+                    <a:pt x="3256368" y="2758227"/>
+                  </a:lnTo>
+                  <a:lnTo>
+                    <a:pt x="3178734" y="2743094"/>
+                  </a:lnTo>
+                  <a:lnTo>
+                    <a:pt x="3101100" y="2727705"/>
+                  </a:lnTo>
+                  <a:lnTo>
+                    <a:pt x="3023466" y="2712056"/>
+                  </a:lnTo>
+                  <a:lnTo>
+                    <a:pt x="2945832" y="2696142"/>
+                  </a:lnTo>
+                  <a:lnTo>
+                    <a:pt x="2868198" y="2679958"/>
+                  </a:lnTo>
+                  <a:lnTo>
+                    <a:pt x="2790564" y="2663501"/>
+                  </a:lnTo>
+                  <a:lnTo>
+                    <a:pt x="2712930" y="2646765"/>
+                  </a:lnTo>
+                  <a:lnTo>
+                    <a:pt x="2635295" y="2629746"/>
+                  </a:lnTo>
+                  <a:lnTo>
+                    <a:pt x="2557661" y="2612439"/>
+                  </a:lnTo>
+                  <a:lnTo>
+                    <a:pt x="2480027" y="2594840"/>
+                  </a:lnTo>
+                  <a:lnTo>
+                    <a:pt x="2402393" y="2576942"/>
+                  </a:lnTo>
+                  <a:lnTo>
+                    <a:pt x="2324759" y="2558742"/>
+                  </a:lnTo>
+                  <a:lnTo>
+                    <a:pt x="2247125" y="2540234"/>
+                  </a:lnTo>
+                  <a:lnTo>
+                    <a:pt x="2169491" y="2521412"/>
+                  </a:lnTo>
+                  <a:lnTo>
+                    <a:pt x="2091857" y="2502273"/>
+                  </a:lnTo>
+                  <a:lnTo>
+                    <a:pt x="2014223" y="2482809"/>
+                  </a:lnTo>
+                  <a:lnTo>
+                    <a:pt x="1936589" y="2463016"/>
+                  </a:lnTo>
+                  <a:lnTo>
+                    <a:pt x="1858955" y="2442888"/>
+                  </a:lnTo>
+                  <a:lnTo>
+                    <a:pt x="1781321" y="2422420"/>
+                  </a:lnTo>
+                  <a:lnTo>
+                    <a:pt x="1703687" y="2401605"/>
+                  </a:lnTo>
+                  <a:lnTo>
+                    <a:pt x="1626053" y="2380438"/>
+                  </a:lnTo>
+                  <a:lnTo>
+                    <a:pt x="1548419" y="2358913"/>
+                  </a:lnTo>
+                  <a:lnTo>
+                    <a:pt x="1470785" y="2337024"/>
+                  </a:lnTo>
+                  <a:lnTo>
+                    <a:pt x="1393151" y="2314765"/>
+                  </a:lnTo>
+                  <a:lnTo>
+                    <a:pt x="1315517" y="2292128"/>
+                  </a:lnTo>
+                  <a:lnTo>
+                    <a:pt x="1237883" y="2269109"/>
+                  </a:lnTo>
+                  <a:lnTo>
+                    <a:pt x="1160249" y="2245701"/>
+                  </a:lnTo>
+                  <a:lnTo>
+                    <a:pt x="1082615" y="2221896"/>
+                  </a:lnTo>
+                  <a:lnTo>
+                    <a:pt x="1004981" y="2197688"/>
+                  </a:lnTo>
+                  <a:lnTo>
+                    <a:pt x="927346" y="2173071"/>
+                  </a:lnTo>
+                  <a:lnTo>
+                    <a:pt x="849712" y="2148038"/>
+                  </a:lnTo>
+                  <a:lnTo>
+                    <a:pt x="772078" y="2122581"/>
+                  </a:lnTo>
+                  <a:lnTo>
+                    <a:pt x="694444" y="2096693"/>
+                  </a:lnTo>
+                  <a:lnTo>
+                    <a:pt x="616810" y="2070367"/>
+                  </a:lnTo>
+                  <a:lnTo>
+                    <a:pt x="539176" y="2043596"/>
+                  </a:lnTo>
+                  <a:lnTo>
+                    <a:pt x="461542" y="2016372"/>
+                  </a:lnTo>
+                  <a:lnTo>
+                    <a:pt x="383908" y="1988687"/>
+                  </a:lnTo>
+                  <a:lnTo>
+                    <a:pt x="306274" y="1960534"/>
+                  </a:lnTo>
+                  <a:lnTo>
+                    <a:pt x="228640" y="1931904"/>
+                  </a:lnTo>
+                  <a:lnTo>
+                    <a:pt x="151006" y="1902790"/>
+                  </a:lnTo>
+                  <a:lnTo>
+                    <a:pt x="73372" y="1873184"/>
+                  </a:lnTo>
+                  <a:lnTo>
+                    <a:pt x="0" y="1844729"/>
                   </a:lnTo>
                   <a:close/>
                 </a:path>
@@ -3513,204 +3522,213 @@
           </p:nvSpPr>
           <p:spPr>
             <a:xfrm>
-              <a:off x="3370857" y="1896563"/>
-              <a:ext cx="4817633" cy="3404845"/>
+              <a:off x="3119644" y="1896563"/>
+              <a:ext cx="5068846" cy="3285063"/>
             </a:xfrm>
             <a:custGeom>
               <a:avLst/>
               <a:pathLst>
-                <a:path w="4817633" h="3404845">
+                <a:path w="5068846" h="3285063">
                   <a:moveTo>
                     <a:pt x="0" y="0"/>
                   </a:moveTo>
                   <a:lnTo>
-                    <a:pt x="4322" y="28869"/>
-                  </a:lnTo>
-                  <a:lnTo>
-                    <a:pt x="81956" y="482474"/>
-                  </a:lnTo>
-                  <a:lnTo>
-                    <a:pt x="159590" y="879299"/>
-                  </a:lnTo>
-                  <a:lnTo>
-                    <a:pt x="237224" y="1226452"/>
-                  </a:lnTo>
-                  <a:lnTo>
-                    <a:pt x="314858" y="1530150"/>
-                  </a:lnTo>
-                  <a:lnTo>
-                    <a:pt x="392492" y="1795833"/>
-                  </a:lnTo>
-                  <a:lnTo>
-                    <a:pt x="470126" y="2028258"/>
-                  </a:lnTo>
-                  <a:lnTo>
-                    <a:pt x="547760" y="2231590"/>
-                  </a:lnTo>
-                  <a:lnTo>
-                    <a:pt x="625394" y="2409470"/>
-                  </a:lnTo>
-                  <a:lnTo>
-                    <a:pt x="703028" y="2565084"/>
-                  </a:lnTo>
-                  <a:lnTo>
-                    <a:pt x="780662" y="2701219"/>
-                  </a:lnTo>
-                  <a:lnTo>
-                    <a:pt x="858296" y="2789920"/>
-                  </a:lnTo>
-                  <a:lnTo>
-                    <a:pt x="935930" y="2810767"/>
-                  </a:lnTo>
-                  <a:lnTo>
-                    <a:pt x="1013565" y="2831110"/>
-                  </a:lnTo>
-                  <a:lnTo>
-                    <a:pt x="1091199" y="2850961"/>
-                  </a:lnTo>
-                  <a:lnTo>
-                    <a:pt x="1168833" y="2870332"/>
-                  </a:lnTo>
-                  <a:lnTo>
-                    <a:pt x="1246467" y="2889236"/>
-                  </a:lnTo>
-                  <a:lnTo>
-                    <a:pt x="1324101" y="2907683"/>
-                  </a:lnTo>
-                  <a:lnTo>
-                    <a:pt x="1401735" y="2925684"/>
-                  </a:lnTo>
-                  <a:lnTo>
-                    <a:pt x="1479369" y="2943250"/>
-                  </a:lnTo>
-                  <a:lnTo>
-                    <a:pt x="1557003" y="2960391"/>
-                  </a:lnTo>
-                  <a:lnTo>
-                    <a:pt x="1634637" y="2977118"/>
-                  </a:lnTo>
-                  <a:lnTo>
-                    <a:pt x="1712271" y="2993442"/>
-                  </a:lnTo>
-                  <a:lnTo>
-                    <a:pt x="1789905" y="3009370"/>
-                  </a:lnTo>
-                  <a:lnTo>
-                    <a:pt x="1867539" y="3024914"/>
-                  </a:lnTo>
-                  <a:lnTo>
-                    <a:pt x="1945173" y="3040082"/>
-                  </a:lnTo>
-                  <a:lnTo>
-                    <a:pt x="2022807" y="3054884"/>
-                  </a:lnTo>
-                  <a:lnTo>
-                    <a:pt x="2100441" y="3069328"/>
-                  </a:lnTo>
-                  <a:lnTo>
-                    <a:pt x="2178075" y="3083423"/>
-                  </a:lnTo>
-                  <a:lnTo>
-                    <a:pt x="2255709" y="3097177"/>
-                  </a:lnTo>
-                  <a:lnTo>
-                    <a:pt x="2333343" y="3110599"/>
-                  </a:lnTo>
-                  <a:lnTo>
-                    <a:pt x="2410977" y="3123697"/>
-                  </a:lnTo>
-                  <a:lnTo>
-                    <a:pt x="2488611" y="3136478"/>
-                  </a:lnTo>
-                  <a:lnTo>
-                    <a:pt x="2566245" y="3148951"/>
-                  </a:lnTo>
-                  <a:lnTo>
-                    <a:pt x="2643879" y="3161122"/>
-                  </a:lnTo>
-                  <a:lnTo>
-                    <a:pt x="2721513" y="3172999"/>
-                  </a:lnTo>
-                  <a:lnTo>
-                    <a:pt x="2799148" y="3184589"/>
-                  </a:lnTo>
-                  <a:lnTo>
-                    <a:pt x="2876782" y="3195899"/>
-                  </a:lnTo>
-                  <a:lnTo>
-                    <a:pt x="2954416" y="3206935"/>
-                  </a:lnTo>
-                  <a:lnTo>
-                    <a:pt x="3032050" y="3217705"/>
-                  </a:lnTo>
-                  <a:lnTo>
-                    <a:pt x="3109684" y="3228215"/>
-                  </a:lnTo>
-                  <a:lnTo>
-                    <a:pt x="3187318" y="3238471"/>
-                  </a:lnTo>
-                  <a:lnTo>
-                    <a:pt x="3264952" y="3248479"/>
-                  </a:lnTo>
-                  <a:lnTo>
-                    <a:pt x="3342586" y="3258245"/>
-                  </a:lnTo>
-                  <a:lnTo>
-                    <a:pt x="3420220" y="3267775"/>
-                  </a:lnTo>
-                  <a:lnTo>
-                    <a:pt x="3497854" y="3277075"/>
-                  </a:lnTo>
-                  <a:lnTo>
-                    <a:pt x="3575488" y="3286150"/>
-                  </a:lnTo>
-                  <a:lnTo>
-                    <a:pt x="3653122" y="3295005"/>
-                  </a:lnTo>
-                  <a:lnTo>
-                    <a:pt x="3730756" y="3303647"/>
-                  </a:lnTo>
-                  <a:lnTo>
-                    <a:pt x="3808390" y="3312080"/>
-                  </a:lnTo>
-                  <a:lnTo>
-                    <a:pt x="3886024" y="3320310"/>
-                  </a:lnTo>
-                  <a:lnTo>
-                    <a:pt x="3963658" y="3328340"/>
-                  </a:lnTo>
-                  <a:lnTo>
-                    <a:pt x="4041292" y="3336176"/>
-                  </a:lnTo>
-                  <a:lnTo>
-                    <a:pt x="4118926" y="3343823"/>
-                  </a:lnTo>
-                  <a:lnTo>
-                    <a:pt x="4196560" y="3351286"/>
-                  </a:lnTo>
-                  <a:lnTo>
-                    <a:pt x="4274194" y="3358567"/>
-                  </a:lnTo>
-                  <a:lnTo>
-                    <a:pt x="4351828" y="3365673"/>
-                  </a:lnTo>
-                  <a:lnTo>
-                    <a:pt x="4429462" y="3372608"/>
-                  </a:lnTo>
-                  <a:lnTo>
-                    <a:pt x="4507097" y="3379374"/>
-                  </a:lnTo>
-                  <a:lnTo>
-                    <a:pt x="4584731" y="3385977"/>
-                  </a:lnTo>
-                  <a:lnTo>
-                    <a:pt x="4662365" y="3392421"/>
-                  </a:lnTo>
-                  <a:lnTo>
-                    <a:pt x="4739999" y="3398709"/>
-                  </a:lnTo>
-                  <a:lnTo>
-                    <a:pt x="4817633" y="3404845"/>
+                    <a:pt x="22633" y="111652"/>
+                  </a:lnTo>
+                  <a:lnTo>
+                    <a:pt x="100267" y="457249"/>
+                  </a:lnTo>
+                  <a:lnTo>
+                    <a:pt x="177901" y="769116"/>
+                  </a:lnTo>
+                  <a:lnTo>
+                    <a:pt x="255535" y="1050545"/>
+                  </a:lnTo>
+                  <a:lnTo>
+                    <a:pt x="333169" y="1304507"/>
+                  </a:lnTo>
+                  <a:lnTo>
+                    <a:pt x="410803" y="1533683"/>
+                  </a:lnTo>
+                  <a:lnTo>
+                    <a:pt x="488437" y="1740491"/>
+                  </a:lnTo>
+                  <a:lnTo>
+                    <a:pt x="566071" y="1927115"/>
+                  </a:lnTo>
+                  <a:lnTo>
+                    <a:pt x="643705" y="2095525"/>
+                  </a:lnTo>
+                  <a:lnTo>
+                    <a:pt x="721339" y="2247498"/>
+                  </a:lnTo>
+                  <a:lnTo>
+                    <a:pt x="798973" y="2384639"/>
+                  </a:lnTo>
+                  <a:lnTo>
+                    <a:pt x="876607" y="2508395"/>
+                  </a:lnTo>
+                  <a:lnTo>
+                    <a:pt x="954241" y="2620072"/>
+                  </a:lnTo>
+                  <a:lnTo>
+                    <a:pt x="1031875" y="2720850"/>
+                  </a:lnTo>
+                  <a:lnTo>
+                    <a:pt x="1109509" y="2787742"/>
+                  </a:lnTo>
+                  <a:lnTo>
+                    <a:pt x="1187144" y="2802132"/>
+                  </a:lnTo>
+                  <a:lnTo>
+                    <a:pt x="1264778" y="2816283"/>
+                  </a:lnTo>
+                  <a:lnTo>
+                    <a:pt x="1342412" y="2830198"/>
+                  </a:lnTo>
+                  <a:lnTo>
+                    <a:pt x="1420046" y="2843882"/>
+                  </a:lnTo>
+                  <a:lnTo>
+                    <a:pt x="1497680" y="2857338"/>
+                  </a:lnTo>
+                  <a:lnTo>
+                    <a:pt x="1575314" y="2870571"/>
+                  </a:lnTo>
+                  <a:lnTo>
+                    <a:pt x="1652948" y="2883583"/>
+                  </a:lnTo>
+                  <a:lnTo>
+                    <a:pt x="1730582" y="2896378"/>
+                  </a:lnTo>
+                  <a:lnTo>
+                    <a:pt x="1808216" y="2908961"/>
+                  </a:lnTo>
+                  <a:lnTo>
+                    <a:pt x="1885850" y="2921334"/>
+                  </a:lnTo>
+                  <a:lnTo>
+                    <a:pt x="1963484" y="2933502"/>
+                  </a:lnTo>
+                  <a:lnTo>
+                    <a:pt x="2041118" y="2945467"/>
+                  </a:lnTo>
+                  <a:lnTo>
+                    <a:pt x="2118752" y="2957233"/>
+                  </a:lnTo>
+                  <a:lnTo>
+                    <a:pt x="2196386" y="2968803"/>
+                  </a:lnTo>
+                  <a:lnTo>
+                    <a:pt x="2274020" y="2980181"/>
+                  </a:lnTo>
+                  <a:lnTo>
+                    <a:pt x="2351654" y="2991369"/>
+                  </a:lnTo>
+                  <a:lnTo>
+                    <a:pt x="2429288" y="3002371"/>
+                  </a:lnTo>
+                  <a:lnTo>
+                    <a:pt x="2506922" y="3013190"/>
+                  </a:lnTo>
+                  <a:lnTo>
+                    <a:pt x="2584556" y="3023830"/>
+                  </a:lnTo>
+                  <a:lnTo>
+                    <a:pt x="2662190" y="3034292"/>
+                  </a:lnTo>
+                  <a:lnTo>
+                    <a:pt x="2739824" y="3044580"/>
+                  </a:lnTo>
+                  <a:lnTo>
+                    <a:pt x="2817458" y="3054697"/>
+                  </a:lnTo>
+                  <a:lnTo>
+                    <a:pt x="2895093" y="3064645"/>
+                  </a:lnTo>
+                  <a:lnTo>
+                    <a:pt x="2972727" y="3074428"/>
+                  </a:lnTo>
+                  <a:lnTo>
+                    <a:pt x="3050361" y="3084049"/>
+                  </a:lnTo>
+                  <a:lnTo>
+                    <a:pt x="3127995" y="3093509"/>
+                  </a:lnTo>
+                  <a:lnTo>
+                    <a:pt x="3205629" y="3102812"/>
+                  </a:lnTo>
+                  <a:lnTo>
+                    <a:pt x="3283263" y="3111960"/>
+                  </a:lnTo>
+                  <a:lnTo>
+                    <a:pt x="3360897" y="3120956"/>
+                  </a:lnTo>
+                  <a:lnTo>
+                    <a:pt x="3438531" y="3129802"/>
+                  </a:lnTo>
+                  <a:lnTo>
+                    <a:pt x="3516165" y="3138501"/>
+                  </a:lnTo>
+                  <a:lnTo>
+                    <a:pt x="3593799" y="3147055"/>
+                  </a:lnTo>
+                  <a:lnTo>
+                    <a:pt x="3671433" y="3155467"/>
+                  </a:lnTo>
+                  <a:lnTo>
+                    <a:pt x="3749067" y="3163739"/>
+                  </a:lnTo>
+                  <a:lnTo>
+                    <a:pt x="3826701" y="3171874"/>
+                  </a:lnTo>
+                  <a:lnTo>
+                    <a:pt x="3904335" y="3179873"/>
+                  </a:lnTo>
+                  <a:lnTo>
+                    <a:pt x="3981969" y="3187738"/>
+                  </a:lnTo>
+                  <a:lnTo>
+                    <a:pt x="4059603" y="3195474"/>
+                  </a:lnTo>
+                  <a:lnTo>
+                    <a:pt x="4137237" y="3203080"/>
+                  </a:lnTo>
+                  <a:lnTo>
+                    <a:pt x="4214871" y="3210560"/>
+                  </a:lnTo>
+                  <a:lnTo>
+                    <a:pt x="4292505" y="3217915"/>
+                  </a:lnTo>
+                  <a:lnTo>
+                    <a:pt x="4370139" y="3225148"/>
+                  </a:lnTo>
+                  <a:lnTo>
+                    <a:pt x="4447773" y="3232261"/>
+                  </a:lnTo>
+                  <a:lnTo>
+                    <a:pt x="4525407" y="3239255"/>
+                  </a:lnTo>
+                  <a:lnTo>
+                    <a:pt x="4603041" y="3246133"/>
+                  </a:lnTo>
+                  <a:lnTo>
+                    <a:pt x="4680676" y="3252896"/>
+                  </a:lnTo>
+                  <a:lnTo>
+                    <a:pt x="4758310" y="3259547"/>
+                  </a:lnTo>
+                  <a:lnTo>
+                    <a:pt x="4835944" y="3266088"/>
+                  </a:lnTo>
+                  <a:lnTo>
+                    <a:pt x="4913578" y="3272519"/>
+                  </a:lnTo>
+                  <a:lnTo>
+                    <a:pt x="4991212" y="3278844"/>
+                  </a:lnTo>
+                  <a:lnTo>
+                    <a:pt x="5068846" y="3285063"/>
                   </a:lnTo>
                 </a:path>
               </a:pathLst>
@@ -3730,297 +3748,297 @@
           </p:nvSpPr>
           <p:spPr>
             <a:xfrm>
-              <a:off x="817517" y="3021616"/>
-              <a:ext cx="7370972" cy="2526682"/>
+              <a:off x="817517" y="3741292"/>
+              <a:ext cx="7370972" cy="1803446"/>
             </a:xfrm>
             <a:custGeom>
               <a:avLst/>
               <a:pathLst>
-                <a:path w="7370972" h="2526682">
+                <a:path w="7370972" h="1803446">
                   <a:moveTo>
-                    <a:pt x="7370972" y="2526682"/>
+                    <a:pt x="7370972" y="1803446"/>
                   </a:moveTo>
                   <a:lnTo>
-                    <a:pt x="7293338" y="2526552"/>
-                  </a:lnTo>
-                  <a:lnTo>
-                    <a:pt x="7215704" y="2526404"/>
-                  </a:lnTo>
-                  <a:lnTo>
-                    <a:pt x="7138070" y="2526234"/>
-                  </a:lnTo>
-                  <a:lnTo>
-                    <a:pt x="7060436" y="2526040"/>
-                  </a:lnTo>
-                  <a:lnTo>
-                    <a:pt x="6982802" y="2525818"/>
-                  </a:lnTo>
-                  <a:lnTo>
-                    <a:pt x="6905168" y="2525564"/>
-                  </a:lnTo>
-                  <a:lnTo>
-                    <a:pt x="6827534" y="2525274"/>
-                  </a:lnTo>
-                  <a:lnTo>
-                    <a:pt x="6749900" y="2524943"/>
-                  </a:lnTo>
-                  <a:lnTo>
-                    <a:pt x="6672266" y="2524564"/>
-                  </a:lnTo>
-                  <a:lnTo>
-                    <a:pt x="6594632" y="2524131"/>
-                  </a:lnTo>
-                  <a:lnTo>
-                    <a:pt x="6516998" y="2523636"/>
-                  </a:lnTo>
-                  <a:lnTo>
-                    <a:pt x="6439364" y="2523070"/>
-                  </a:lnTo>
-                  <a:lnTo>
-                    <a:pt x="6361730" y="2522423"/>
-                  </a:lnTo>
-                  <a:lnTo>
-                    <a:pt x="6284096" y="2521683"/>
-                  </a:lnTo>
-                  <a:lnTo>
-                    <a:pt x="6206462" y="2520838"/>
-                  </a:lnTo>
-                  <a:lnTo>
-                    <a:pt x="6128827" y="2519872"/>
-                  </a:lnTo>
-                  <a:lnTo>
-                    <a:pt x="6051193" y="2518768"/>
-                  </a:lnTo>
-                  <a:lnTo>
-                    <a:pt x="5973559" y="2517505"/>
-                  </a:lnTo>
-                  <a:lnTo>
-                    <a:pt x="5895925" y="2516062"/>
-                  </a:lnTo>
-                  <a:lnTo>
-                    <a:pt x="5818291" y="2514412"/>
-                  </a:lnTo>
-                  <a:lnTo>
-                    <a:pt x="5740657" y="2512527"/>
-                  </a:lnTo>
-                  <a:lnTo>
-                    <a:pt x="5663023" y="2510371"/>
-                  </a:lnTo>
-                  <a:lnTo>
-                    <a:pt x="5585389" y="2507908"/>
-                  </a:lnTo>
-                  <a:lnTo>
-                    <a:pt x="5507755" y="2505091"/>
-                  </a:lnTo>
-                  <a:lnTo>
-                    <a:pt x="5430121" y="2501872"/>
-                  </a:lnTo>
-                  <a:lnTo>
-                    <a:pt x="5352487" y="2498192"/>
-                  </a:lnTo>
-                  <a:lnTo>
-                    <a:pt x="5274853" y="2493985"/>
-                  </a:lnTo>
-                  <a:lnTo>
-                    <a:pt x="5197219" y="2489177"/>
-                  </a:lnTo>
-                  <a:lnTo>
-                    <a:pt x="5119585" y="2483681"/>
-                  </a:lnTo>
-                  <a:lnTo>
-                    <a:pt x="5041951" y="2477398"/>
-                  </a:lnTo>
-                  <a:lnTo>
-                    <a:pt x="4964317" y="2470216"/>
-                  </a:lnTo>
-                  <a:lnTo>
-                    <a:pt x="4886683" y="2462006"/>
-                  </a:lnTo>
-                  <a:lnTo>
-                    <a:pt x="4809049" y="2452622"/>
-                  </a:lnTo>
-                  <a:lnTo>
-                    <a:pt x="4731415" y="2441895"/>
-                  </a:lnTo>
-                  <a:lnTo>
-                    <a:pt x="4653781" y="2429633"/>
-                  </a:lnTo>
-                  <a:lnTo>
-                    <a:pt x="4576147" y="2415617"/>
-                  </a:lnTo>
-                  <a:lnTo>
-                    <a:pt x="4498513" y="2399595"/>
-                  </a:lnTo>
-                  <a:lnTo>
-                    <a:pt x="4420879" y="2381281"/>
-                  </a:lnTo>
-                  <a:lnTo>
-                    <a:pt x="4343244" y="2360346"/>
-                  </a:lnTo>
-                  <a:lnTo>
-                    <a:pt x="4265610" y="2336416"/>
-                  </a:lnTo>
-                  <a:lnTo>
-                    <a:pt x="4187976" y="2309062"/>
-                  </a:lnTo>
-                  <a:lnTo>
-                    <a:pt x="4110342" y="2277794"/>
-                  </a:lnTo>
-                  <a:lnTo>
-                    <a:pt x="4032708" y="2242051"/>
-                  </a:lnTo>
-                  <a:lnTo>
-                    <a:pt x="3955074" y="2201195"/>
-                  </a:lnTo>
-                  <a:lnTo>
-                    <a:pt x="3877440" y="2154492"/>
-                  </a:lnTo>
-                  <a:lnTo>
-                    <a:pt x="3799806" y="2101107"/>
-                  </a:lnTo>
-                  <a:lnTo>
-                    <a:pt x="3722172" y="2040084"/>
-                  </a:lnTo>
-                  <a:lnTo>
-                    <a:pt x="3644538" y="1970329"/>
-                  </a:lnTo>
-                  <a:lnTo>
-                    <a:pt x="3566904" y="1890593"/>
-                  </a:lnTo>
-                  <a:lnTo>
-                    <a:pt x="3489270" y="1799448"/>
-                  </a:lnTo>
-                  <a:lnTo>
-                    <a:pt x="3411636" y="1695261"/>
-                  </a:lnTo>
-                  <a:lnTo>
-                    <a:pt x="3334002" y="1643505"/>
-                  </a:lnTo>
-                  <a:lnTo>
-                    <a:pt x="3256368" y="1621613"/>
-                  </a:lnTo>
-                  <a:lnTo>
-                    <a:pt x="3178734" y="1599179"/>
-                  </a:lnTo>
-                  <a:lnTo>
-                    <a:pt x="3101100" y="1576190"/>
-                  </a:lnTo>
-                  <a:lnTo>
-                    <a:pt x="3023466" y="1552632"/>
-                  </a:lnTo>
-                  <a:lnTo>
-                    <a:pt x="2945832" y="1528490"/>
-                  </a:lnTo>
-                  <a:lnTo>
-                    <a:pt x="2868198" y="1503750"/>
-                  </a:lnTo>
-                  <a:lnTo>
-                    <a:pt x="2790564" y="1478398"/>
-                  </a:lnTo>
-                  <a:lnTo>
-                    <a:pt x="2712930" y="1452418"/>
-                  </a:lnTo>
-                  <a:lnTo>
-                    <a:pt x="2635295" y="1425794"/>
-                  </a:lnTo>
-                  <a:lnTo>
-                    <a:pt x="2557661" y="1398512"/>
-                  </a:lnTo>
-                  <a:lnTo>
-                    <a:pt x="2480027" y="1370553"/>
-                  </a:lnTo>
-                  <a:lnTo>
-                    <a:pt x="2402393" y="1341903"/>
-                  </a:lnTo>
-                  <a:lnTo>
-                    <a:pt x="2324759" y="1312543"/>
-                  </a:lnTo>
-                  <a:lnTo>
-                    <a:pt x="2247125" y="1282456"/>
-                  </a:lnTo>
-                  <a:lnTo>
-                    <a:pt x="2169491" y="1251624"/>
-                  </a:lnTo>
-                  <a:lnTo>
-                    <a:pt x="2091857" y="1220029"/>
-                  </a:lnTo>
-                  <a:lnTo>
-                    <a:pt x="2014223" y="1187651"/>
-                  </a:lnTo>
-                  <a:lnTo>
-                    <a:pt x="1936589" y="1154471"/>
-                  </a:lnTo>
-                  <a:lnTo>
-                    <a:pt x="1858955" y="1120470"/>
-                  </a:lnTo>
-                  <a:lnTo>
-                    <a:pt x="1781321" y="1085627"/>
-                  </a:lnTo>
-                  <a:lnTo>
-                    <a:pt x="1703687" y="1049921"/>
-                  </a:lnTo>
-                  <a:lnTo>
-                    <a:pt x="1626053" y="1013331"/>
-                  </a:lnTo>
-                  <a:lnTo>
-                    <a:pt x="1548419" y="975835"/>
-                  </a:lnTo>
-                  <a:lnTo>
-                    <a:pt x="1470785" y="937411"/>
-                  </a:lnTo>
-                  <a:lnTo>
-                    <a:pt x="1393151" y="898035"/>
-                  </a:lnTo>
-                  <a:lnTo>
-                    <a:pt x="1315517" y="857684"/>
-                  </a:lnTo>
-                  <a:lnTo>
-                    <a:pt x="1237883" y="816333"/>
-                  </a:lnTo>
-                  <a:lnTo>
-                    <a:pt x="1160249" y="773959"/>
-                  </a:lnTo>
-                  <a:lnTo>
-                    <a:pt x="1082615" y="730536"/>
-                  </a:lnTo>
-                  <a:lnTo>
-                    <a:pt x="1004981" y="686037"/>
-                  </a:lnTo>
-                  <a:lnTo>
-                    <a:pt x="927346" y="640437"/>
-                  </a:lnTo>
-                  <a:lnTo>
-                    <a:pt x="849712" y="593707"/>
-                  </a:lnTo>
-                  <a:lnTo>
-                    <a:pt x="772078" y="545820"/>
-                  </a:lnTo>
-                  <a:lnTo>
-                    <a:pt x="694444" y="496748"/>
-                  </a:lnTo>
-                  <a:lnTo>
-                    <a:pt x="616810" y="446460"/>
-                  </a:lnTo>
-                  <a:lnTo>
-                    <a:pt x="539176" y="394927"/>
-                  </a:lnTo>
-                  <a:lnTo>
-                    <a:pt x="461542" y="342119"/>
-                  </a:lnTo>
-                  <a:lnTo>
-                    <a:pt x="383908" y="288002"/>
-                  </a:lnTo>
-                  <a:lnTo>
-                    <a:pt x="306274" y="232545"/>
-                  </a:lnTo>
-                  <a:lnTo>
-                    <a:pt x="228640" y="175715"/>
-                  </a:lnTo>
-                  <a:lnTo>
-                    <a:pt x="151006" y="117478"/>
-                  </a:lnTo>
-                  <a:lnTo>
-                    <a:pt x="73372" y="57799"/>
+                    <a:pt x="7293338" y="1802963"/>
+                  </a:lnTo>
+                  <a:lnTo>
+                    <a:pt x="7215704" y="1802427"/>
+                  </a:lnTo>
+                  <a:lnTo>
+                    <a:pt x="7138070" y="1801834"/>
+                  </a:lnTo>
+                  <a:lnTo>
+                    <a:pt x="7060436" y="1801176"/>
+                  </a:lnTo>
+                  <a:lnTo>
+                    <a:pt x="6982802" y="1800448"/>
+                  </a:lnTo>
+                  <a:lnTo>
+                    <a:pt x="6905168" y="1799640"/>
+                  </a:lnTo>
+                  <a:lnTo>
+                    <a:pt x="6827534" y="1798745"/>
+                  </a:lnTo>
+                  <a:lnTo>
+                    <a:pt x="6749900" y="1797754"/>
+                  </a:lnTo>
+                  <a:lnTo>
+                    <a:pt x="6672266" y="1796655"/>
+                  </a:lnTo>
+                  <a:lnTo>
+                    <a:pt x="6594632" y="1795437"/>
+                  </a:lnTo>
+                  <a:lnTo>
+                    <a:pt x="6516998" y="1794088"/>
+                  </a:lnTo>
+                  <a:lnTo>
+                    <a:pt x="6439364" y="1792592"/>
+                  </a:lnTo>
+                  <a:lnTo>
+                    <a:pt x="6361730" y="1790935"/>
+                  </a:lnTo>
+                  <a:lnTo>
+                    <a:pt x="6284096" y="1789099"/>
+                  </a:lnTo>
+                  <a:lnTo>
+                    <a:pt x="6206462" y="1787064"/>
+                  </a:lnTo>
+                  <a:lnTo>
+                    <a:pt x="6128827" y="1784809"/>
+                  </a:lnTo>
+                  <a:lnTo>
+                    <a:pt x="6051193" y="1782310"/>
+                  </a:lnTo>
+                  <a:lnTo>
+                    <a:pt x="5973559" y="1779541"/>
+                  </a:lnTo>
+                  <a:lnTo>
+                    <a:pt x="5895925" y="1776472"/>
+                  </a:lnTo>
+                  <a:lnTo>
+                    <a:pt x="5818291" y="1773072"/>
+                  </a:lnTo>
+                  <a:lnTo>
+                    <a:pt x="5740657" y="1769303"/>
+                  </a:lnTo>
+                  <a:lnTo>
+                    <a:pt x="5663023" y="1765127"/>
+                  </a:lnTo>
+                  <a:lnTo>
+                    <a:pt x="5585389" y="1760500"/>
+                  </a:lnTo>
+                  <a:lnTo>
+                    <a:pt x="5507755" y="1755372"/>
+                  </a:lnTo>
+                  <a:lnTo>
+                    <a:pt x="5430121" y="1749689"/>
+                  </a:lnTo>
+                  <a:lnTo>
+                    <a:pt x="5352487" y="1743392"/>
+                  </a:lnTo>
+                  <a:lnTo>
+                    <a:pt x="5274853" y="1736413"/>
+                  </a:lnTo>
+                  <a:lnTo>
+                    <a:pt x="5197219" y="1728680"/>
+                  </a:lnTo>
+                  <a:lnTo>
+                    <a:pt x="5119585" y="1720111"/>
+                  </a:lnTo>
+                  <a:lnTo>
+                    <a:pt x="5041951" y="1710614"/>
+                  </a:lnTo>
+                  <a:lnTo>
+                    <a:pt x="4964317" y="1700091"/>
+                  </a:lnTo>
+                  <a:lnTo>
+                    <a:pt x="4886683" y="1688429"/>
+                  </a:lnTo>
+                  <a:lnTo>
+                    <a:pt x="4809049" y="1675507"/>
+                  </a:lnTo>
+                  <a:lnTo>
+                    <a:pt x="4731415" y="1661186"/>
+                  </a:lnTo>
+                  <a:lnTo>
+                    <a:pt x="4653781" y="1645317"/>
+                  </a:lnTo>
+                  <a:lnTo>
+                    <a:pt x="4576147" y="1627731"/>
+                  </a:lnTo>
+                  <a:lnTo>
+                    <a:pt x="4498513" y="1608244"/>
+                  </a:lnTo>
+                  <a:lnTo>
+                    <a:pt x="4420879" y="1586648"/>
+                  </a:lnTo>
+                  <a:lnTo>
+                    <a:pt x="4343244" y="1562717"/>
+                  </a:lnTo>
+                  <a:lnTo>
+                    <a:pt x="4265610" y="1536198"/>
+                  </a:lnTo>
+                  <a:lnTo>
+                    <a:pt x="4187976" y="1506811"/>
+                  </a:lnTo>
+                  <a:lnTo>
+                    <a:pt x="4110342" y="1474245"/>
+                  </a:lnTo>
+                  <a:lnTo>
+                    <a:pt x="4032708" y="1438157"/>
+                  </a:lnTo>
+                  <a:lnTo>
+                    <a:pt x="3955074" y="1398166"/>
+                  </a:lnTo>
+                  <a:lnTo>
+                    <a:pt x="3877440" y="1353850"/>
+                  </a:lnTo>
+                  <a:lnTo>
+                    <a:pt x="3799806" y="1304741"/>
+                  </a:lnTo>
+                  <a:lnTo>
+                    <a:pt x="3722172" y="1250320"/>
+                  </a:lnTo>
+                  <a:lnTo>
+                    <a:pt x="3644538" y="1190014"/>
+                  </a:lnTo>
+                  <a:lnTo>
+                    <a:pt x="3566904" y="1123185"/>
+                  </a:lnTo>
+                  <a:lnTo>
+                    <a:pt x="3489270" y="1049129"/>
+                  </a:lnTo>
+                  <a:lnTo>
+                    <a:pt x="3411636" y="967063"/>
+                  </a:lnTo>
+                  <a:lnTo>
+                    <a:pt x="3334002" y="928379"/>
+                  </a:lnTo>
+                  <a:lnTo>
+                    <a:pt x="3256368" y="913498"/>
+                  </a:lnTo>
+                  <a:lnTo>
+                    <a:pt x="3178734" y="898365"/>
+                  </a:lnTo>
+                  <a:lnTo>
+                    <a:pt x="3101100" y="882976"/>
+                  </a:lnTo>
+                  <a:lnTo>
+                    <a:pt x="3023466" y="867326"/>
+                  </a:lnTo>
+                  <a:lnTo>
+                    <a:pt x="2945832" y="851412"/>
+                  </a:lnTo>
+                  <a:lnTo>
+                    <a:pt x="2868198" y="835229"/>
+                  </a:lnTo>
+                  <a:lnTo>
+                    <a:pt x="2790564" y="818771"/>
+                  </a:lnTo>
+                  <a:lnTo>
+                    <a:pt x="2712930" y="802036"/>
+                  </a:lnTo>
+                  <a:lnTo>
+                    <a:pt x="2635295" y="785017"/>
+                  </a:lnTo>
+                  <a:lnTo>
+                    <a:pt x="2557661" y="767710"/>
+                  </a:lnTo>
+                  <a:lnTo>
+                    <a:pt x="2480027" y="750110"/>
+                  </a:lnTo>
+                  <a:lnTo>
+                    <a:pt x="2402393" y="732213"/>
+                  </a:lnTo>
+                  <a:lnTo>
+                    <a:pt x="2324759" y="714013"/>
+                  </a:lnTo>
+                  <a:lnTo>
+                    <a:pt x="2247125" y="695504"/>
+                  </a:lnTo>
+                  <a:lnTo>
+                    <a:pt x="2169491" y="676683"/>
+                  </a:lnTo>
+                  <a:lnTo>
+                    <a:pt x="2091857" y="657543"/>
+                  </a:lnTo>
+                  <a:lnTo>
+                    <a:pt x="2014223" y="638080"/>
+                  </a:lnTo>
+                  <a:lnTo>
+                    <a:pt x="1936589" y="618287"/>
+                  </a:lnTo>
+                  <a:lnTo>
+                    <a:pt x="1858955" y="598159"/>
+                  </a:lnTo>
+                  <a:lnTo>
+                    <a:pt x="1781321" y="577690"/>
+                  </a:lnTo>
+                  <a:lnTo>
+                    <a:pt x="1703687" y="556876"/>
+                  </a:lnTo>
+                  <a:lnTo>
+                    <a:pt x="1626053" y="535709"/>
+                  </a:lnTo>
+                  <a:lnTo>
+                    <a:pt x="1548419" y="514184"/>
+                  </a:lnTo>
+                  <a:lnTo>
+                    <a:pt x="1470785" y="492295"/>
+                  </a:lnTo>
+                  <a:lnTo>
+                    <a:pt x="1393151" y="470035"/>
+                  </a:lnTo>
+                  <a:lnTo>
+                    <a:pt x="1315517" y="447399"/>
+                  </a:lnTo>
+                  <a:lnTo>
+                    <a:pt x="1237883" y="424380"/>
+                  </a:lnTo>
+                  <a:lnTo>
+                    <a:pt x="1160249" y="400971"/>
+                  </a:lnTo>
+                  <a:lnTo>
+                    <a:pt x="1082615" y="377166"/>
+                  </a:lnTo>
+                  <a:lnTo>
+                    <a:pt x="1004981" y="352959"/>
+                  </a:lnTo>
+                  <a:lnTo>
+                    <a:pt x="927346" y="328342"/>
+                  </a:lnTo>
+                  <a:lnTo>
+                    <a:pt x="849712" y="303308"/>
+                  </a:lnTo>
+                  <a:lnTo>
+                    <a:pt x="772078" y="277851"/>
+                  </a:lnTo>
+                  <a:lnTo>
+                    <a:pt x="694444" y="251964"/>
+                  </a:lnTo>
+                  <a:lnTo>
+                    <a:pt x="616810" y="225638"/>
+                  </a:lnTo>
+                  <a:lnTo>
+                    <a:pt x="539176" y="198867"/>
+                  </a:lnTo>
+                  <a:lnTo>
+                    <a:pt x="461542" y="171642"/>
+                  </a:lnTo>
+                  <a:lnTo>
+                    <a:pt x="383908" y="143958"/>
+                  </a:lnTo>
+                  <a:lnTo>
+                    <a:pt x="306274" y="115804"/>
+                  </a:lnTo>
+                  <a:lnTo>
+                    <a:pt x="228640" y="87175"/>
+                  </a:lnTo>
+                  <a:lnTo>
+                    <a:pt x="151006" y="58061"/>
+                  </a:lnTo>
+                  <a:lnTo>
+                    <a:pt x="73372" y="28454"/>
                   </a:lnTo>
                   <a:lnTo>
                     <a:pt x="0" y="0"/>
@@ -4043,225 +4061,243 @@
           </p:nvSpPr>
           <p:spPr>
             <a:xfrm>
-              <a:off x="2795874" y="1896563"/>
-              <a:ext cx="5392616" cy="3637640"/>
+              <a:off x="2339170" y="1896563"/>
+              <a:ext cx="5849320" cy="3612118"/>
             </a:xfrm>
             <a:custGeom>
               <a:avLst/>
               <a:pathLst>
-                <a:path w="5392616" h="3637640">
+                <a:path w="5849320" h="3612118">
                   <a:moveTo>
                     <a:pt x="0" y="0"/>
                   </a:moveTo>
                   <a:lnTo>
-                    <a:pt x="35867" y="133810"/>
-                  </a:lnTo>
-                  <a:lnTo>
-                    <a:pt x="113501" y="401412"/>
-                  </a:lnTo>
-                  <a:lnTo>
-                    <a:pt x="191135" y="648663"/>
-                  </a:lnTo>
-                  <a:lnTo>
-                    <a:pt x="268769" y="877112"/>
-                  </a:lnTo>
-                  <a:lnTo>
-                    <a:pt x="346403" y="1088187"/>
-                  </a:lnTo>
-                  <a:lnTo>
-                    <a:pt x="424037" y="1283210"/>
-                  </a:lnTo>
-                  <a:lnTo>
-                    <a:pt x="501671" y="1463402"/>
-                  </a:lnTo>
-                  <a:lnTo>
-                    <a:pt x="579305" y="1629891"/>
-                  </a:lnTo>
-                  <a:lnTo>
-                    <a:pt x="656939" y="1783718"/>
-                  </a:lnTo>
-                  <a:lnTo>
-                    <a:pt x="734573" y="1925847"/>
-                  </a:lnTo>
-                  <a:lnTo>
-                    <a:pt x="812207" y="2057168"/>
-                  </a:lnTo>
-                  <a:lnTo>
-                    <a:pt x="889841" y="2178501"/>
-                  </a:lnTo>
-                  <a:lnTo>
-                    <a:pt x="967476" y="2290608"/>
-                  </a:lnTo>
-                  <a:lnTo>
-                    <a:pt x="1045110" y="2394188"/>
-                  </a:lnTo>
-                  <a:lnTo>
-                    <a:pt x="1122744" y="2489892"/>
-                  </a:lnTo>
-                  <a:lnTo>
-                    <a:pt x="1200378" y="2578318"/>
-                  </a:lnTo>
-                  <a:lnTo>
-                    <a:pt x="1278012" y="2660019"/>
-                  </a:lnTo>
-                  <a:lnTo>
-                    <a:pt x="1355646" y="2735506"/>
-                  </a:lnTo>
-                  <a:lnTo>
-                    <a:pt x="1433280" y="2805253"/>
-                  </a:lnTo>
-                  <a:lnTo>
-                    <a:pt x="1510914" y="2869696"/>
-                  </a:lnTo>
-                  <a:lnTo>
-                    <a:pt x="1588548" y="2929238"/>
-                  </a:lnTo>
-                  <a:lnTo>
-                    <a:pt x="1666182" y="2984252"/>
-                  </a:lnTo>
-                  <a:lnTo>
-                    <a:pt x="1743816" y="3035082"/>
-                  </a:lnTo>
-                  <a:lnTo>
-                    <a:pt x="1821450" y="3082047"/>
-                  </a:lnTo>
-                  <a:lnTo>
-                    <a:pt x="1899084" y="3125440"/>
-                  </a:lnTo>
-                  <a:lnTo>
-                    <a:pt x="1976718" y="3165533"/>
-                  </a:lnTo>
-                  <a:lnTo>
-                    <a:pt x="2054352" y="3202577"/>
-                  </a:lnTo>
-                  <a:lnTo>
-                    <a:pt x="2131986" y="3236804"/>
-                  </a:lnTo>
-                  <a:lnTo>
-                    <a:pt x="2209620" y="3268428"/>
-                  </a:lnTo>
-                  <a:lnTo>
-                    <a:pt x="2287254" y="3297647"/>
-                  </a:lnTo>
-                  <a:lnTo>
-                    <a:pt x="2364888" y="3324644"/>
-                  </a:lnTo>
-                  <a:lnTo>
-                    <a:pt x="2442522" y="3349588"/>
-                  </a:lnTo>
-                  <a:lnTo>
-                    <a:pt x="2520156" y="3372635"/>
-                  </a:lnTo>
-                  <a:lnTo>
-                    <a:pt x="2597790" y="3393929"/>
-                  </a:lnTo>
-                  <a:lnTo>
-                    <a:pt x="2675424" y="3413604"/>
-                  </a:lnTo>
-                  <a:lnTo>
-                    <a:pt x="2753059" y="3431782"/>
-                  </a:lnTo>
-                  <a:lnTo>
-                    <a:pt x="2830693" y="3448579"/>
-                  </a:lnTo>
-                  <a:lnTo>
-                    <a:pt x="2908327" y="3464097"/>
-                  </a:lnTo>
-                  <a:lnTo>
-                    <a:pt x="2985961" y="3478436"/>
-                  </a:lnTo>
-                  <a:lnTo>
-                    <a:pt x="3063595" y="3491684"/>
-                  </a:lnTo>
-                  <a:lnTo>
-                    <a:pt x="3141229" y="3503925"/>
-                  </a:lnTo>
-                  <a:lnTo>
-                    <a:pt x="3218863" y="3515235"/>
-                  </a:lnTo>
-                  <a:lnTo>
-                    <a:pt x="3296497" y="3525684"/>
-                  </a:lnTo>
-                  <a:lnTo>
-                    <a:pt x="3374131" y="3535340"/>
-                  </a:lnTo>
-                  <a:lnTo>
-                    <a:pt x="3451765" y="3544260"/>
-                  </a:lnTo>
-                  <a:lnTo>
-                    <a:pt x="3529399" y="3552503"/>
-                  </a:lnTo>
-                  <a:lnTo>
-                    <a:pt x="3607033" y="3560118"/>
-                  </a:lnTo>
-                  <a:lnTo>
-                    <a:pt x="3684667" y="3567155"/>
-                  </a:lnTo>
-                  <a:lnTo>
-                    <a:pt x="3762301" y="3573656"/>
-                  </a:lnTo>
-                  <a:lnTo>
-                    <a:pt x="3839935" y="3579663"/>
-                  </a:lnTo>
-                  <a:lnTo>
-                    <a:pt x="3917569" y="3585213"/>
-                  </a:lnTo>
-                  <a:lnTo>
-                    <a:pt x="3995203" y="3590341"/>
-                  </a:lnTo>
-                  <a:lnTo>
-                    <a:pt x="4072837" y="3595079"/>
-                  </a:lnTo>
-                  <a:lnTo>
-                    <a:pt x="4150471" y="3599457"/>
-                  </a:lnTo>
-                  <a:lnTo>
-                    <a:pt x="4228105" y="3603501"/>
-                  </a:lnTo>
-                  <a:lnTo>
-                    <a:pt x="4305739" y="3607238"/>
-                  </a:lnTo>
-                  <a:lnTo>
-                    <a:pt x="4383373" y="3610691"/>
-                  </a:lnTo>
-                  <a:lnTo>
-                    <a:pt x="4461008" y="3613882"/>
-                  </a:lnTo>
-                  <a:lnTo>
-                    <a:pt x="4538642" y="3616830"/>
-                  </a:lnTo>
-                  <a:lnTo>
-                    <a:pt x="4616276" y="3619553"/>
-                  </a:lnTo>
-                  <a:lnTo>
-                    <a:pt x="4693910" y="3622070"/>
-                  </a:lnTo>
-                  <a:lnTo>
-                    <a:pt x="4771544" y="3624395"/>
-                  </a:lnTo>
-                  <a:lnTo>
-                    <a:pt x="4849178" y="3626543"/>
-                  </a:lnTo>
-                  <a:lnTo>
-                    <a:pt x="4926812" y="3628528"/>
-                  </a:lnTo>
-                  <a:lnTo>
-                    <a:pt x="5004446" y="3630362"/>
-                  </a:lnTo>
-                  <a:lnTo>
-                    <a:pt x="5082080" y="3632056"/>
-                  </a:lnTo>
-                  <a:lnTo>
-                    <a:pt x="5159714" y="3633622"/>
-                  </a:lnTo>
-                  <a:lnTo>
-                    <a:pt x="5237348" y="3635068"/>
-                  </a:lnTo>
-                  <a:lnTo>
-                    <a:pt x="5314982" y="3636405"/>
-                  </a:lnTo>
-                  <a:lnTo>
-                    <a:pt x="5392616" y="3637640"/>
+                    <a:pt x="26766" y="75912"/>
+                  </a:lnTo>
+                  <a:lnTo>
+                    <a:pt x="104401" y="283319"/>
+                  </a:lnTo>
+                  <a:lnTo>
+                    <a:pt x="182035" y="478699"/>
+                  </a:lnTo>
+                  <a:lnTo>
+                    <a:pt x="259669" y="662749"/>
+                  </a:lnTo>
+                  <a:lnTo>
+                    <a:pt x="337303" y="836126"/>
+                  </a:lnTo>
+                  <a:lnTo>
+                    <a:pt x="414937" y="999450"/>
+                  </a:lnTo>
+                  <a:lnTo>
+                    <a:pt x="492571" y="1153303"/>
+                  </a:lnTo>
+                  <a:lnTo>
+                    <a:pt x="570205" y="1298234"/>
+                  </a:lnTo>
+                  <a:lnTo>
+                    <a:pt x="647839" y="1434761"/>
+                  </a:lnTo>
+                  <a:lnTo>
+                    <a:pt x="725473" y="1563371"/>
+                  </a:lnTo>
+                  <a:lnTo>
+                    <a:pt x="803107" y="1684524"/>
+                  </a:lnTo>
+                  <a:lnTo>
+                    <a:pt x="880741" y="1798650"/>
+                  </a:lnTo>
+                  <a:lnTo>
+                    <a:pt x="958375" y="1906159"/>
+                  </a:lnTo>
+                  <a:lnTo>
+                    <a:pt x="1036009" y="2007434"/>
+                  </a:lnTo>
+                  <a:lnTo>
+                    <a:pt x="1113643" y="2102836"/>
+                  </a:lnTo>
+                  <a:lnTo>
+                    <a:pt x="1191277" y="2192706"/>
+                  </a:lnTo>
+                  <a:lnTo>
+                    <a:pt x="1268911" y="2277365"/>
+                  </a:lnTo>
+                  <a:lnTo>
+                    <a:pt x="1346545" y="2357114"/>
+                  </a:lnTo>
+                  <a:lnTo>
+                    <a:pt x="1424179" y="2432239"/>
+                  </a:lnTo>
+                  <a:lnTo>
+                    <a:pt x="1501813" y="2503008"/>
+                  </a:lnTo>
+                  <a:lnTo>
+                    <a:pt x="1579447" y="2569672"/>
+                  </a:lnTo>
+                  <a:lnTo>
+                    <a:pt x="1657081" y="2632472"/>
+                  </a:lnTo>
+                  <a:lnTo>
+                    <a:pt x="1734715" y="2691629"/>
+                  </a:lnTo>
+                  <a:lnTo>
+                    <a:pt x="1812350" y="2747356"/>
+                  </a:lnTo>
+                  <a:lnTo>
+                    <a:pt x="1889984" y="2799852"/>
+                  </a:lnTo>
+                  <a:lnTo>
+                    <a:pt x="1967618" y="2849303"/>
+                  </a:lnTo>
+                  <a:lnTo>
+                    <a:pt x="2045252" y="2895887"/>
+                  </a:lnTo>
+                  <a:lnTo>
+                    <a:pt x="2122886" y="2939770"/>
+                  </a:lnTo>
+                  <a:lnTo>
+                    <a:pt x="2200520" y="2981108"/>
+                  </a:lnTo>
+                  <a:lnTo>
+                    <a:pt x="2278154" y="3020049"/>
+                  </a:lnTo>
+                  <a:lnTo>
+                    <a:pt x="2355788" y="3056732"/>
+                  </a:lnTo>
+                  <a:lnTo>
+                    <a:pt x="2433422" y="3091287"/>
+                  </a:lnTo>
+                  <a:lnTo>
+                    <a:pt x="2511056" y="3123839"/>
+                  </a:lnTo>
+                  <a:lnTo>
+                    <a:pt x="2588690" y="3154503"/>
+                  </a:lnTo>
+                  <a:lnTo>
+                    <a:pt x="2666324" y="3183389"/>
+                  </a:lnTo>
+                  <a:lnTo>
+                    <a:pt x="2743958" y="3210600"/>
+                  </a:lnTo>
+                  <a:lnTo>
+                    <a:pt x="2821592" y="3236233"/>
+                  </a:lnTo>
+                  <a:lnTo>
+                    <a:pt x="2899226" y="3260380"/>
+                  </a:lnTo>
+                  <a:lnTo>
+                    <a:pt x="2976860" y="3283127"/>
+                  </a:lnTo>
+                  <a:lnTo>
+                    <a:pt x="3054494" y="3304554"/>
+                  </a:lnTo>
+                  <a:lnTo>
+                    <a:pt x="3132128" y="3324739"/>
+                  </a:lnTo>
+                  <a:lnTo>
+                    <a:pt x="3209762" y="3343753"/>
+                  </a:lnTo>
+                  <a:lnTo>
+                    <a:pt x="3287396" y="3361665"/>
+                  </a:lnTo>
+                  <a:lnTo>
+                    <a:pt x="3365030" y="3378538"/>
+                  </a:lnTo>
+                  <a:lnTo>
+                    <a:pt x="3442664" y="3394433"/>
+                  </a:lnTo>
+                  <a:lnTo>
+                    <a:pt x="3520299" y="3409406"/>
+                  </a:lnTo>
+                  <a:lnTo>
+                    <a:pt x="3597933" y="3423511"/>
+                  </a:lnTo>
+                  <a:lnTo>
+                    <a:pt x="3675567" y="3436798"/>
+                  </a:lnTo>
+                  <a:lnTo>
+                    <a:pt x="3753201" y="3449314"/>
+                  </a:lnTo>
+                  <a:lnTo>
+                    <a:pt x="3830835" y="3461105"/>
+                  </a:lnTo>
+                  <a:lnTo>
+                    <a:pt x="3908469" y="3472212"/>
+                  </a:lnTo>
+                  <a:lnTo>
+                    <a:pt x="3986103" y="3482675"/>
+                  </a:lnTo>
+                  <a:lnTo>
+                    <a:pt x="4063737" y="3492531"/>
+                  </a:lnTo>
+                  <a:lnTo>
+                    <a:pt x="4141371" y="3501815"/>
+                  </a:lnTo>
+                  <a:lnTo>
+                    <a:pt x="4219005" y="3510561"/>
+                  </a:lnTo>
+                  <a:lnTo>
+                    <a:pt x="4296639" y="3518800"/>
+                  </a:lnTo>
+                  <a:lnTo>
+                    <a:pt x="4374273" y="3526562"/>
+                  </a:lnTo>
+                  <a:lnTo>
+                    <a:pt x="4451907" y="3533873"/>
+                  </a:lnTo>
+                  <a:lnTo>
+                    <a:pt x="4529541" y="3540760"/>
+                  </a:lnTo>
+                  <a:lnTo>
+                    <a:pt x="4607175" y="3547248"/>
+                  </a:lnTo>
+                  <a:lnTo>
+                    <a:pt x="4684809" y="3553360"/>
+                  </a:lnTo>
+                  <a:lnTo>
+                    <a:pt x="4762443" y="3559117"/>
+                  </a:lnTo>
+                  <a:lnTo>
+                    <a:pt x="4840077" y="3564540"/>
+                  </a:lnTo>
+                  <a:lnTo>
+                    <a:pt x="4917711" y="3569649"/>
+                  </a:lnTo>
+                  <a:lnTo>
+                    <a:pt x="4995345" y="3574462"/>
+                  </a:lnTo>
+                  <a:lnTo>
+                    <a:pt x="5072979" y="3578995"/>
+                  </a:lnTo>
+                  <a:lnTo>
+                    <a:pt x="5150613" y="3583266"/>
+                  </a:lnTo>
+                  <a:lnTo>
+                    <a:pt x="5228247" y="3587289"/>
+                  </a:lnTo>
+                  <a:lnTo>
+                    <a:pt x="5305882" y="3591079"/>
+                  </a:lnTo>
+                  <a:lnTo>
+                    <a:pt x="5383516" y="3594649"/>
+                  </a:lnTo>
+                  <a:lnTo>
+                    <a:pt x="5461150" y="3598012"/>
+                  </a:lnTo>
+                  <a:lnTo>
+                    <a:pt x="5538784" y="3601180"/>
+                  </a:lnTo>
+                  <a:lnTo>
+                    <a:pt x="5616418" y="3604164"/>
+                  </a:lnTo>
+                  <a:lnTo>
+                    <a:pt x="5694052" y="3606975"/>
+                  </a:lnTo>
+                  <a:lnTo>
+                    <a:pt x="5771686" y="3609623"/>
+                  </a:lnTo>
+                  <a:lnTo>
+                    <a:pt x="5849320" y="3612118"/>
                   </a:lnTo>
                 </a:path>
               </a:pathLst>

--- a/docs/plots/carbo/jx_carbo_linsubhr_ratio_throm3.pptx
+++ b/docs/plots/carbo/jx_carbo_linsubhr_ratio_throm3.pptx
@@ -3003,500 +3003,491 @@
           <p:spPr>
             <a:xfrm>
               <a:off x="817517" y="1896563"/>
-              <a:ext cx="7370972" cy="3648175"/>
+              <a:ext cx="7370972" cy="3651735"/>
             </a:xfrm>
             <a:custGeom>
               <a:avLst/>
               <a:pathLst>
-                <a:path w="7370972" h="3648175">
+                <a:path w="7370972" h="3651735">
                   <a:moveTo>
-                    <a:pt x="2302126" y="0"/>
+                    <a:pt x="2553339" y="0"/>
                   </a:moveTo>
                   <a:lnTo>
-                    <a:pt x="2324759" y="111652"/>
-                  </a:lnTo>
-                  <a:lnTo>
-                    <a:pt x="2402393" y="457249"/>
-                  </a:lnTo>
-                  <a:lnTo>
-                    <a:pt x="2480027" y="769116"/>
-                  </a:lnTo>
-                  <a:lnTo>
-                    <a:pt x="2557661" y="1050545"/>
-                  </a:lnTo>
-                  <a:lnTo>
-                    <a:pt x="2635295" y="1304507"/>
-                  </a:lnTo>
-                  <a:lnTo>
-                    <a:pt x="2712930" y="1533683"/>
-                  </a:lnTo>
-                  <a:lnTo>
-                    <a:pt x="2790564" y="1740491"/>
-                  </a:lnTo>
-                  <a:lnTo>
-                    <a:pt x="2868198" y="1927115"/>
-                  </a:lnTo>
-                  <a:lnTo>
-                    <a:pt x="2945832" y="2095525"/>
-                  </a:lnTo>
-                  <a:lnTo>
-                    <a:pt x="3023466" y="2247498"/>
-                  </a:lnTo>
-                  <a:lnTo>
-                    <a:pt x="3101100" y="2384639"/>
-                  </a:lnTo>
-                  <a:lnTo>
-                    <a:pt x="3178734" y="2508395"/>
-                  </a:lnTo>
-                  <a:lnTo>
-                    <a:pt x="3256368" y="2620072"/>
-                  </a:lnTo>
-                  <a:lnTo>
-                    <a:pt x="3334002" y="2720850"/>
-                  </a:lnTo>
-                  <a:lnTo>
-                    <a:pt x="3411636" y="2787742"/>
-                  </a:lnTo>
-                  <a:lnTo>
-                    <a:pt x="3489270" y="2802132"/>
-                  </a:lnTo>
-                  <a:lnTo>
-                    <a:pt x="3566904" y="2816283"/>
-                  </a:lnTo>
-                  <a:lnTo>
-                    <a:pt x="3644538" y="2830198"/>
-                  </a:lnTo>
-                  <a:lnTo>
-                    <a:pt x="3722172" y="2843882"/>
-                  </a:lnTo>
-                  <a:lnTo>
-                    <a:pt x="3799806" y="2857338"/>
-                  </a:lnTo>
-                  <a:lnTo>
-                    <a:pt x="3877440" y="2870571"/>
-                  </a:lnTo>
-                  <a:lnTo>
-                    <a:pt x="3955074" y="2883583"/>
-                  </a:lnTo>
-                  <a:lnTo>
-                    <a:pt x="4032708" y="2896378"/>
-                  </a:lnTo>
-                  <a:lnTo>
-                    <a:pt x="4110342" y="2908961"/>
-                  </a:lnTo>
-                  <a:lnTo>
-                    <a:pt x="4187976" y="2921334"/>
-                  </a:lnTo>
-                  <a:lnTo>
-                    <a:pt x="4265610" y="2933502"/>
-                  </a:lnTo>
-                  <a:lnTo>
-                    <a:pt x="4343244" y="2945467"/>
-                  </a:lnTo>
-                  <a:lnTo>
-                    <a:pt x="4420879" y="2957233"/>
-                  </a:lnTo>
-                  <a:lnTo>
-                    <a:pt x="4498513" y="2968803"/>
-                  </a:lnTo>
-                  <a:lnTo>
-                    <a:pt x="4576147" y="2980181"/>
-                  </a:lnTo>
-                  <a:lnTo>
-                    <a:pt x="4653781" y="2991369"/>
-                  </a:lnTo>
-                  <a:lnTo>
-                    <a:pt x="4731415" y="3002371"/>
-                  </a:lnTo>
-                  <a:lnTo>
-                    <a:pt x="4809049" y="3013190"/>
-                  </a:lnTo>
-                  <a:lnTo>
-                    <a:pt x="4886683" y="3023830"/>
-                  </a:lnTo>
-                  <a:lnTo>
-                    <a:pt x="4964317" y="3034292"/>
-                  </a:lnTo>
-                  <a:lnTo>
-                    <a:pt x="5041951" y="3044580"/>
-                  </a:lnTo>
-                  <a:lnTo>
-                    <a:pt x="5119585" y="3054697"/>
-                  </a:lnTo>
-                  <a:lnTo>
-                    <a:pt x="5197219" y="3064645"/>
-                  </a:lnTo>
-                  <a:lnTo>
-                    <a:pt x="5274853" y="3074428"/>
-                  </a:lnTo>
-                  <a:lnTo>
-                    <a:pt x="5352487" y="3084049"/>
-                  </a:lnTo>
-                  <a:lnTo>
-                    <a:pt x="5430121" y="3093509"/>
-                  </a:lnTo>
-                  <a:lnTo>
-                    <a:pt x="5507755" y="3102812"/>
-                  </a:lnTo>
-                  <a:lnTo>
-                    <a:pt x="5585389" y="3111960"/>
-                  </a:lnTo>
-                  <a:lnTo>
-                    <a:pt x="5663023" y="3120956"/>
-                  </a:lnTo>
-                  <a:lnTo>
-                    <a:pt x="5740657" y="3129802"/>
-                  </a:lnTo>
-                  <a:lnTo>
-                    <a:pt x="5818291" y="3138501"/>
-                  </a:lnTo>
-                  <a:lnTo>
-                    <a:pt x="5895925" y="3147055"/>
-                  </a:lnTo>
-                  <a:lnTo>
-                    <a:pt x="5973559" y="3155467"/>
-                  </a:lnTo>
-                  <a:lnTo>
-                    <a:pt x="6051193" y="3163739"/>
-                  </a:lnTo>
-                  <a:lnTo>
-                    <a:pt x="6128827" y="3171874"/>
-                  </a:lnTo>
-                  <a:lnTo>
-                    <a:pt x="6206462" y="3179873"/>
-                  </a:lnTo>
-                  <a:lnTo>
-                    <a:pt x="6284096" y="3187738"/>
-                  </a:lnTo>
-                  <a:lnTo>
-                    <a:pt x="6361730" y="3195474"/>
-                  </a:lnTo>
-                  <a:lnTo>
-                    <a:pt x="6439364" y="3203080"/>
-                  </a:lnTo>
-                  <a:lnTo>
-                    <a:pt x="6516998" y="3210560"/>
-                  </a:lnTo>
-                  <a:lnTo>
-                    <a:pt x="6594632" y="3217915"/>
-                  </a:lnTo>
-                  <a:lnTo>
-                    <a:pt x="6672266" y="3225148"/>
-                  </a:lnTo>
-                  <a:lnTo>
-                    <a:pt x="6749900" y="3232261"/>
-                  </a:lnTo>
-                  <a:lnTo>
-                    <a:pt x="6827534" y="3239255"/>
-                  </a:lnTo>
-                  <a:lnTo>
-                    <a:pt x="6905168" y="3246133"/>
-                  </a:lnTo>
-                  <a:lnTo>
-                    <a:pt x="6982802" y="3252896"/>
-                  </a:lnTo>
-                  <a:lnTo>
-                    <a:pt x="7060436" y="3259547"/>
-                  </a:lnTo>
-                  <a:lnTo>
-                    <a:pt x="7138070" y="3266088"/>
-                  </a:lnTo>
-                  <a:lnTo>
-                    <a:pt x="7215704" y="3272519"/>
-                  </a:lnTo>
-                  <a:lnTo>
-                    <a:pt x="7293338" y="3278844"/>
-                  </a:lnTo>
-                  <a:lnTo>
-                    <a:pt x="7370972" y="3285063"/>
-                  </a:lnTo>
-                  <a:lnTo>
-                    <a:pt x="7370972" y="3648175"/>
-                  </a:lnTo>
-                  <a:lnTo>
-                    <a:pt x="7293338" y="3647692"/>
-                  </a:lnTo>
-                  <a:lnTo>
-                    <a:pt x="7215704" y="3647157"/>
-                  </a:lnTo>
-                  <a:lnTo>
-                    <a:pt x="7138070" y="3646563"/>
-                  </a:lnTo>
-                  <a:lnTo>
-                    <a:pt x="7060436" y="3645906"/>
-                  </a:lnTo>
-                  <a:lnTo>
-                    <a:pt x="6982802" y="3645177"/>
-                  </a:lnTo>
-                  <a:lnTo>
-                    <a:pt x="6905168" y="3644370"/>
-                  </a:lnTo>
-                  <a:lnTo>
-                    <a:pt x="6827534" y="3643475"/>
-                  </a:lnTo>
-                  <a:lnTo>
-                    <a:pt x="6749900" y="3642483"/>
-                  </a:lnTo>
-                  <a:lnTo>
-                    <a:pt x="6672266" y="3641384"/>
-                  </a:lnTo>
-                  <a:lnTo>
-                    <a:pt x="6594632" y="3640167"/>
-                  </a:lnTo>
-                  <a:lnTo>
-                    <a:pt x="6516998" y="3638817"/>
-                  </a:lnTo>
-                  <a:lnTo>
-                    <a:pt x="6439364" y="3637322"/>
-                  </a:lnTo>
-                  <a:lnTo>
-                    <a:pt x="6361730" y="3635665"/>
-                  </a:lnTo>
-                  <a:lnTo>
-                    <a:pt x="6284096" y="3633828"/>
-                  </a:lnTo>
-                  <a:lnTo>
-                    <a:pt x="6206462" y="3631793"/>
-                  </a:lnTo>
-                  <a:lnTo>
-                    <a:pt x="6128827" y="3629538"/>
-                  </a:lnTo>
-                  <a:lnTo>
-                    <a:pt x="6051193" y="3627039"/>
-                  </a:lnTo>
-                  <a:lnTo>
-                    <a:pt x="5973559" y="3624270"/>
-                  </a:lnTo>
-                  <a:lnTo>
-                    <a:pt x="5895925" y="3621202"/>
-                  </a:lnTo>
-                  <a:lnTo>
-                    <a:pt x="5818291" y="3617801"/>
-                  </a:lnTo>
-                  <a:lnTo>
-                    <a:pt x="5740657" y="3614033"/>
-                  </a:lnTo>
-                  <a:lnTo>
-                    <a:pt x="5663023" y="3609857"/>
-                  </a:lnTo>
-                  <a:lnTo>
-                    <a:pt x="5585389" y="3605229"/>
-                  </a:lnTo>
-                  <a:lnTo>
-                    <a:pt x="5507755" y="3600101"/>
-                  </a:lnTo>
-                  <a:lnTo>
-                    <a:pt x="5430121" y="3594418"/>
-                  </a:lnTo>
-                  <a:lnTo>
-                    <a:pt x="5352487" y="3588121"/>
-                  </a:lnTo>
-                  <a:lnTo>
-                    <a:pt x="5274853" y="3581143"/>
-                  </a:lnTo>
-                  <a:lnTo>
-                    <a:pt x="5197219" y="3573410"/>
-                  </a:lnTo>
-                  <a:lnTo>
-                    <a:pt x="5119585" y="3564840"/>
-                  </a:lnTo>
-                  <a:lnTo>
-                    <a:pt x="5041951" y="3555344"/>
-                  </a:lnTo>
-                  <a:lnTo>
-                    <a:pt x="4964317" y="3544820"/>
-                  </a:lnTo>
-                  <a:lnTo>
-                    <a:pt x="4886683" y="3533159"/>
-                  </a:lnTo>
-                  <a:lnTo>
-                    <a:pt x="4809049" y="3520236"/>
-                  </a:lnTo>
-                  <a:lnTo>
-                    <a:pt x="4731415" y="3505916"/>
-                  </a:lnTo>
-                  <a:lnTo>
-                    <a:pt x="4653781" y="3490046"/>
-                  </a:lnTo>
-                  <a:lnTo>
-                    <a:pt x="4576147" y="3472461"/>
-                  </a:lnTo>
-                  <a:lnTo>
-                    <a:pt x="4498513" y="3452973"/>
-                  </a:lnTo>
-                  <a:lnTo>
-                    <a:pt x="4420879" y="3431378"/>
-                  </a:lnTo>
-                  <a:lnTo>
-                    <a:pt x="4343244" y="3407447"/>
-                  </a:lnTo>
-                  <a:lnTo>
-                    <a:pt x="4265610" y="3380928"/>
-                  </a:lnTo>
-                  <a:lnTo>
-                    <a:pt x="4187976" y="3351540"/>
-                  </a:lnTo>
-                  <a:lnTo>
-                    <a:pt x="4110342" y="3318974"/>
-                  </a:lnTo>
-                  <a:lnTo>
-                    <a:pt x="4032708" y="3282887"/>
-                  </a:lnTo>
-                  <a:lnTo>
-                    <a:pt x="3955074" y="3242896"/>
-                  </a:lnTo>
-                  <a:lnTo>
-                    <a:pt x="3877440" y="3198580"/>
-                  </a:lnTo>
-                  <a:lnTo>
-                    <a:pt x="3799806" y="3149470"/>
-                  </a:lnTo>
-                  <a:lnTo>
-                    <a:pt x="3722172" y="3095050"/>
-                  </a:lnTo>
-                  <a:lnTo>
-                    <a:pt x="3644538" y="3034744"/>
-                  </a:lnTo>
-                  <a:lnTo>
-                    <a:pt x="3566904" y="2967915"/>
-                  </a:lnTo>
-                  <a:lnTo>
-                    <a:pt x="3489270" y="2893858"/>
-                  </a:lnTo>
-                  <a:lnTo>
-                    <a:pt x="3411636" y="2811792"/>
-                  </a:lnTo>
-                  <a:lnTo>
-                    <a:pt x="3334002" y="2773109"/>
-                  </a:lnTo>
-                  <a:lnTo>
-                    <a:pt x="3256368" y="2758227"/>
-                  </a:lnTo>
-                  <a:lnTo>
-                    <a:pt x="3178734" y="2743094"/>
-                  </a:lnTo>
-                  <a:lnTo>
-                    <a:pt x="3101100" y="2727705"/>
-                  </a:lnTo>
-                  <a:lnTo>
-                    <a:pt x="3023466" y="2712056"/>
-                  </a:lnTo>
-                  <a:lnTo>
-                    <a:pt x="2945832" y="2696142"/>
-                  </a:lnTo>
-                  <a:lnTo>
-                    <a:pt x="2868198" y="2679958"/>
-                  </a:lnTo>
-                  <a:lnTo>
-                    <a:pt x="2790564" y="2663501"/>
-                  </a:lnTo>
-                  <a:lnTo>
-                    <a:pt x="2712930" y="2646765"/>
-                  </a:lnTo>
-                  <a:lnTo>
-                    <a:pt x="2635295" y="2629746"/>
-                  </a:lnTo>
-                  <a:lnTo>
-                    <a:pt x="2557661" y="2612439"/>
-                  </a:lnTo>
-                  <a:lnTo>
-                    <a:pt x="2480027" y="2594840"/>
-                  </a:lnTo>
-                  <a:lnTo>
-                    <a:pt x="2402393" y="2576942"/>
-                  </a:lnTo>
-                  <a:lnTo>
-                    <a:pt x="2324759" y="2558742"/>
-                  </a:lnTo>
-                  <a:lnTo>
-                    <a:pt x="2247125" y="2540234"/>
-                  </a:lnTo>
-                  <a:lnTo>
-                    <a:pt x="2169491" y="2521412"/>
-                  </a:lnTo>
-                  <a:lnTo>
-                    <a:pt x="2091857" y="2502273"/>
-                  </a:lnTo>
-                  <a:lnTo>
-                    <a:pt x="2014223" y="2482809"/>
-                  </a:lnTo>
-                  <a:lnTo>
-                    <a:pt x="1936589" y="2463016"/>
-                  </a:lnTo>
-                  <a:lnTo>
-                    <a:pt x="1858955" y="2442888"/>
-                  </a:lnTo>
-                  <a:lnTo>
-                    <a:pt x="1781321" y="2422420"/>
-                  </a:lnTo>
-                  <a:lnTo>
-                    <a:pt x="1703687" y="2401605"/>
-                  </a:lnTo>
-                  <a:lnTo>
-                    <a:pt x="1626053" y="2380438"/>
-                  </a:lnTo>
-                  <a:lnTo>
-                    <a:pt x="1548419" y="2358913"/>
-                  </a:lnTo>
-                  <a:lnTo>
-                    <a:pt x="1470785" y="2337024"/>
-                  </a:lnTo>
-                  <a:lnTo>
-                    <a:pt x="1393151" y="2314765"/>
-                  </a:lnTo>
-                  <a:lnTo>
-                    <a:pt x="1315517" y="2292128"/>
-                  </a:lnTo>
-                  <a:lnTo>
-                    <a:pt x="1237883" y="2269109"/>
-                  </a:lnTo>
-                  <a:lnTo>
-                    <a:pt x="1160249" y="2245701"/>
-                  </a:lnTo>
-                  <a:lnTo>
-                    <a:pt x="1082615" y="2221896"/>
-                  </a:lnTo>
-                  <a:lnTo>
-                    <a:pt x="1004981" y="2197688"/>
-                  </a:lnTo>
-                  <a:lnTo>
-                    <a:pt x="927346" y="2173071"/>
-                  </a:lnTo>
-                  <a:lnTo>
-                    <a:pt x="849712" y="2148038"/>
-                  </a:lnTo>
-                  <a:lnTo>
-                    <a:pt x="772078" y="2122581"/>
-                  </a:lnTo>
-                  <a:lnTo>
-                    <a:pt x="694444" y="2096693"/>
-                  </a:lnTo>
-                  <a:lnTo>
-                    <a:pt x="616810" y="2070367"/>
-                  </a:lnTo>
-                  <a:lnTo>
-                    <a:pt x="539176" y="2043596"/>
-                  </a:lnTo>
-                  <a:lnTo>
-                    <a:pt x="461542" y="2016372"/>
-                  </a:lnTo>
-                  <a:lnTo>
-                    <a:pt x="383908" y="1988687"/>
-                  </a:lnTo>
-                  <a:lnTo>
-                    <a:pt x="306274" y="1960534"/>
-                  </a:lnTo>
-                  <a:lnTo>
-                    <a:pt x="228640" y="1931904"/>
-                  </a:lnTo>
-                  <a:lnTo>
-                    <a:pt x="151006" y="1902790"/>
-                  </a:lnTo>
-                  <a:lnTo>
-                    <a:pt x="73372" y="1873184"/>
-                  </a:lnTo>
-                  <a:lnTo>
-                    <a:pt x="0" y="1844729"/>
+                    <a:pt x="2557661" y="28869"/>
+                  </a:lnTo>
+                  <a:lnTo>
+                    <a:pt x="2635295" y="482474"/>
+                  </a:lnTo>
+                  <a:lnTo>
+                    <a:pt x="2712930" y="879299"/>
+                  </a:lnTo>
+                  <a:lnTo>
+                    <a:pt x="2790564" y="1226452"/>
+                  </a:lnTo>
+                  <a:lnTo>
+                    <a:pt x="2868198" y="1530150"/>
+                  </a:lnTo>
+                  <a:lnTo>
+                    <a:pt x="2945832" y="1795833"/>
+                  </a:lnTo>
+                  <a:lnTo>
+                    <a:pt x="3023466" y="2028258"/>
+                  </a:lnTo>
+                  <a:lnTo>
+                    <a:pt x="3101100" y="2231590"/>
+                  </a:lnTo>
+                  <a:lnTo>
+                    <a:pt x="3178734" y="2409470"/>
+                  </a:lnTo>
+                  <a:lnTo>
+                    <a:pt x="3256368" y="2565084"/>
+                  </a:lnTo>
+                  <a:lnTo>
+                    <a:pt x="3334002" y="2701219"/>
+                  </a:lnTo>
+                  <a:lnTo>
+                    <a:pt x="3411636" y="2789920"/>
+                  </a:lnTo>
+                  <a:lnTo>
+                    <a:pt x="3489270" y="2810767"/>
+                  </a:lnTo>
+                  <a:lnTo>
+                    <a:pt x="3566904" y="2831110"/>
+                  </a:lnTo>
+                  <a:lnTo>
+                    <a:pt x="3644538" y="2850961"/>
+                  </a:lnTo>
+                  <a:lnTo>
+                    <a:pt x="3722172" y="2870332"/>
+                  </a:lnTo>
+                  <a:lnTo>
+                    <a:pt x="3799806" y="2889236"/>
+                  </a:lnTo>
+                  <a:lnTo>
+                    <a:pt x="3877440" y="2907683"/>
+                  </a:lnTo>
+                  <a:lnTo>
+                    <a:pt x="3955074" y="2925684"/>
+                  </a:lnTo>
+                  <a:lnTo>
+                    <a:pt x="4032708" y="2943250"/>
+                  </a:lnTo>
+                  <a:lnTo>
+                    <a:pt x="4110342" y="2960391"/>
+                  </a:lnTo>
+                  <a:lnTo>
+                    <a:pt x="4187976" y="2977118"/>
+                  </a:lnTo>
+                  <a:lnTo>
+                    <a:pt x="4265610" y="2993442"/>
+                  </a:lnTo>
+                  <a:lnTo>
+                    <a:pt x="4343244" y="3009370"/>
+                  </a:lnTo>
+                  <a:lnTo>
+                    <a:pt x="4420879" y="3024914"/>
+                  </a:lnTo>
+                  <a:lnTo>
+                    <a:pt x="4498513" y="3040082"/>
+                  </a:lnTo>
+                  <a:lnTo>
+                    <a:pt x="4576147" y="3054884"/>
+                  </a:lnTo>
+                  <a:lnTo>
+                    <a:pt x="4653781" y="3069328"/>
+                  </a:lnTo>
+                  <a:lnTo>
+                    <a:pt x="4731415" y="3083423"/>
+                  </a:lnTo>
+                  <a:lnTo>
+                    <a:pt x="4809049" y="3097177"/>
+                  </a:lnTo>
+                  <a:lnTo>
+                    <a:pt x="4886683" y="3110599"/>
+                  </a:lnTo>
+                  <a:lnTo>
+                    <a:pt x="4964317" y="3123697"/>
+                  </a:lnTo>
+                  <a:lnTo>
+                    <a:pt x="5041951" y="3136478"/>
+                  </a:lnTo>
+                  <a:lnTo>
+                    <a:pt x="5119585" y="3148951"/>
+                  </a:lnTo>
+                  <a:lnTo>
+                    <a:pt x="5197219" y="3161122"/>
+                  </a:lnTo>
+                  <a:lnTo>
+                    <a:pt x="5274853" y="3172999"/>
+                  </a:lnTo>
+                  <a:lnTo>
+                    <a:pt x="5352487" y="3184589"/>
+                  </a:lnTo>
+                  <a:lnTo>
+                    <a:pt x="5430121" y="3195899"/>
+                  </a:lnTo>
+                  <a:lnTo>
+                    <a:pt x="5507755" y="3206935"/>
+                  </a:lnTo>
+                  <a:lnTo>
+                    <a:pt x="5585389" y="3217705"/>
+                  </a:lnTo>
+                  <a:lnTo>
+                    <a:pt x="5663023" y="3228215"/>
+                  </a:lnTo>
+                  <a:lnTo>
+                    <a:pt x="5740657" y="3238471"/>
+                  </a:lnTo>
+                  <a:lnTo>
+                    <a:pt x="5818291" y="3248479"/>
+                  </a:lnTo>
+                  <a:lnTo>
+                    <a:pt x="5895925" y="3258245"/>
+                  </a:lnTo>
+                  <a:lnTo>
+                    <a:pt x="5973559" y="3267775"/>
+                  </a:lnTo>
+                  <a:lnTo>
+                    <a:pt x="6051193" y="3277075"/>
+                  </a:lnTo>
+                  <a:lnTo>
+                    <a:pt x="6128827" y="3286150"/>
+                  </a:lnTo>
+                  <a:lnTo>
+                    <a:pt x="6206462" y="3295005"/>
+                  </a:lnTo>
+                  <a:lnTo>
+                    <a:pt x="6284096" y="3303647"/>
+                  </a:lnTo>
+                  <a:lnTo>
+                    <a:pt x="6361730" y="3312080"/>
+                  </a:lnTo>
+                  <a:lnTo>
+                    <a:pt x="6439364" y="3320310"/>
+                  </a:lnTo>
+                  <a:lnTo>
+                    <a:pt x="6516998" y="3328340"/>
+                  </a:lnTo>
+                  <a:lnTo>
+                    <a:pt x="6594632" y="3336176"/>
+                  </a:lnTo>
+                  <a:lnTo>
+                    <a:pt x="6672266" y="3343823"/>
+                  </a:lnTo>
+                  <a:lnTo>
+                    <a:pt x="6749900" y="3351286"/>
+                  </a:lnTo>
+                  <a:lnTo>
+                    <a:pt x="6827534" y="3358567"/>
+                  </a:lnTo>
+                  <a:lnTo>
+                    <a:pt x="6905168" y="3365673"/>
+                  </a:lnTo>
+                  <a:lnTo>
+                    <a:pt x="6982802" y="3372608"/>
+                  </a:lnTo>
+                  <a:lnTo>
+                    <a:pt x="7060436" y="3379374"/>
+                  </a:lnTo>
+                  <a:lnTo>
+                    <a:pt x="7138070" y="3385977"/>
+                  </a:lnTo>
+                  <a:lnTo>
+                    <a:pt x="7215704" y="3392421"/>
+                  </a:lnTo>
+                  <a:lnTo>
+                    <a:pt x="7293338" y="3398709"/>
+                  </a:lnTo>
+                  <a:lnTo>
+                    <a:pt x="7370972" y="3404845"/>
+                  </a:lnTo>
+                  <a:lnTo>
+                    <a:pt x="7370972" y="3651735"/>
+                  </a:lnTo>
+                  <a:lnTo>
+                    <a:pt x="7293338" y="3651605"/>
+                  </a:lnTo>
+                  <a:lnTo>
+                    <a:pt x="7215704" y="3651456"/>
+                  </a:lnTo>
+                  <a:lnTo>
+                    <a:pt x="7138070" y="3651286"/>
+                  </a:lnTo>
+                  <a:lnTo>
+                    <a:pt x="7060436" y="3651092"/>
+                  </a:lnTo>
+                  <a:lnTo>
+                    <a:pt x="6982802" y="3650870"/>
+                  </a:lnTo>
+                  <a:lnTo>
+                    <a:pt x="6905168" y="3650617"/>
+                  </a:lnTo>
+                  <a:lnTo>
+                    <a:pt x="6827534" y="3650327"/>
+                  </a:lnTo>
+                  <a:lnTo>
+                    <a:pt x="6749900" y="3649995"/>
+                  </a:lnTo>
+                  <a:lnTo>
+                    <a:pt x="6672266" y="3649616"/>
+                  </a:lnTo>
+                  <a:lnTo>
+                    <a:pt x="6594632" y="3649183"/>
+                  </a:lnTo>
+                  <a:lnTo>
+                    <a:pt x="6516998" y="3648688"/>
+                  </a:lnTo>
+                  <a:lnTo>
+                    <a:pt x="6439364" y="3648122"/>
+                  </a:lnTo>
+                  <a:lnTo>
+                    <a:pt x="6361730" y="3647476"/>
+                  </a:lnTo>
+                  <a:lnTo>
+                    <a:pt x="6284096" y="3646736"/>
+                  </a:lnTo>
+                  <a:lnTo>
+                    <a:pt x="6206462" y="3645891"/>
+                  </a:lnTo>
+                  <a:lnTo>
+                    <a:pt x="6128827" y="3644925"/>
+                  </a:lnTo>
+                  <a:lnTo>
+                    <a:pt x="6051193" y="3643820"/>
+                  </a:lnTo>
+                  <a:lnTo>
+                    <a:pt x="5973559" y="3642558"/>
+                  </a:lnTo>
+                  <a:lnTo>
+                    <a:pt x="5895925" y="3641115"/>
+                  </a:lnTo>
+                  <a:lnTo>
+                    <a:pt x="5818291" y="3639465"/>
+                  </a:lnTo>
+                  <a:lnTo>
+                    <a:pt x="5740657" y="3637580"/>
+                  </a:lnTo>
+                  <a:lnTo>
+                    <a:pt x="5663023" y="3635424"/>
+                  </a:lnTo>
+                  <a:lnTo>
+                    <a:pt x="5585389" y="3632960"/>
+                  </a:lnTo>
+                  <a:lnTo>
+                    <a:pt x="5507755" y="3630144"/>
+                  </a:lnTo>
+                  <a:lnTo>
+                    <a:pt x="5430121" y="3626925"/>
+                  </a:lnTo>
+                  <a:lnTo>
+                    <a:pt x="5352487" y="3623245"/>
+                  </a:lnTo>
+                  <a:lnTo>
+                    <a:pt x="5274853" y="3619038"/>
+                  </a:lnTo>
+                  <a:lnTo>
+                    <a:pt x="5197219" y="3614230"/>
+                  </a:lnTo>
+                  <a:lnTo>
+                    <a:pt x="5119585" y="3608733"/>
+                  </a:lnTo>
+                  <a:lnTo>
+                    <a:pt x="5041951" y="3602450"/>
+                  </a:lnTo>
+                  <a:lnTo>
+                    <a:pt x="4964317" y="3595268"/>
+                  </a:lnTo>
+                  <a:lnTo>
+                    <a:pt x="4886683" y="3587059"/>
+                  </a:lnTo>
+                  <a:lnTo>
+                    <a:pt x="4809049" y="3577675"/>
+                  </a:lnTo>
+                  <a:lnTo>
+                    <a:pt x="4731415" y="3566948"/>
+                  </a:lnTo>
+                  <a:lnTo>
+                    <a:pt x="4653781" y="3554686"/>
+                  </a:lnTo>
+                  <a:lnTo>
+                    <a:pt x="4576147" y="3540670"/>
+                  </a:lnTo>
+                  <a:lnTo>
+                    <a:pt x="4498513" y="3524648"/>
+                  </a:lnTo>
+                  <a:lnTo>
+                    <a:pt x="4420879" y="3506334"/>
+                  </a:lnTo>
+                  <a:lnTo>
+                    <a:pt x="4343244" y="3485399"/>
+                  </a:lnTo>
+                  <a:lnTo>
+                    <a:pt x="4265610" y="3461469"/>
+                  </a:lnTo>
+                  <a:lnTo>
+                    <a:pt x="4187976" y="3434115"/>
+                  </a:lnTo>
+                  <a:lnTo>
+                    <a:pt x="4110342" y="3402846"/>
+                  </a:lnTo>
+                  <a:lnTo>
+                    <a:pt x="4032708" y="3367104"/>
+                  </a:lnTo>
+                  <a:lnTo>
+                    <a:pt x="3955074" y="3326248"/>
+                  </a:lnTo>
+                  <a:lnTo>
+                    <a:pt x="3877440" y="3279545"/>
+                  </a:lnTo>
+                  <a:lnTo>
+                    <a:pt x="3799806" y="3226160"/>
+                  </a:lnTo>
+                  <a:lnTo>
+                    <a:pt x="3722172" y="3165137"/>
+                  </a:lnTo>
+                  <a:lnTo>
+                    <a:pt x="3644538" y="3095382"/>
+                  </a:lnTo>
+                  <a:lnTo>
+                    <a:pt x="3566904" y="3015645"/>
+                  </a:lnTo>
+                  <a:lnTo>
+                    <a:pt x="3489270" y="2924500"/>
+                  </a:lnTo>
+                  <a:lnTo>
+                    <a:pt x="3411636" y="2820314"/>
+                  </a:lnTo>
+                  <a:lnTo>
+                    <a:pt x="3334002" y="2768558"/>
+                  </a:lnTo>
+                  <a:lnTo>
+                    <a:pt x="3256368" y="2746666"/>
+                  </a:lnTo>
+                  <a:lnTo>
+                    <a:pt x="3178734" y="2724232"/>
+                  </a:lnTo>
+                  <a:lnTo>
+                    <a:pt x="3101100" y="2701243"/>
+                  </a:lnTo>
+                  <a:lnTo>
+                    <a:pt x="3023466" y="2677684"/>
+                  </a:lnTo>
+                  <a:lnTo>
+                    <a:pt x="2945832" y="2653542"/>
+                  </a:lnTo>
+                  <a:lnTo>
+                    <a:pt x="2868198" y="2628803"/>
+                  </a:lnTo>
+                  <a:lnTo>
+                    <a:pt x="2790564" y="2603450"/>
+                  </a:lnTo>
+                  <a:lnTo>
+                    <a:pt x="2712930" y="2577470"/>
+                  </a:lnTo>
+                  <a:lnTo>
+                    <a:pt x="2635295" y="2550847"/>
+                  </a:lnTo>
+                  <a:lnTo>
+                    <a:pt x="2557661" y="2523564"/>
+                  </a:lnTo>
+                  <a:lnTo>
+                    <a:pt x="2480027" y="2495606"/>
+                  </a:lnTo>
+                  <a:lnTo>
+                    <a:pt x="2402393" y="2466956"/>
+                  </a:lnTo>
+                  <a:lnTo>
+                    <a:pt x="2324759" y="2437596"/>
+                  </a:lnTo>
+                  <a:lnTo>
+                    <a:pt x="2247125" y="2407509"/>
+                  </a:lnTo>
+                  <a:lnTo>
+                    <a:pt x="2169491" y="2376677"/>
+                  </a:lnTo>
+                  <a:lnTo>
+                    <a:pt x="2091857" y="2345081"/>
+                  </a:lnTo>
+                  <a:lnTo>
+                    <a:pt x="2014223" y="2312703"/>
+                  </a:lnTo>
+                  <a:lnTo>
+                    <a:pt x="1936589" y="2279524"/>
+                  </a:lnTo>
+                  <a:lnTo>
+                    <a:pt x="1858955" y="2245523"/>
+                  </a:lnTo>
+                  <a:lnTo>
+                    <a:pt x="1781321" y="2210680"/>
+                  </a:lnTo>
+                  <a:lnTo>
+                    <a:pt x="1703687" y="2174974"/>
+                  </a:lnTo>
+                  <a:lnTo>
+                    <a:pt x="1626053" y="2138384"/>
+                  </a:lnTo>
+                  <a:lnTo>
+                    <a:pt x="1548419" y="2100888"/>
+                  </a:lnTo>
+                  <a:lnTo>
+                    <a:pt x="1470785" y="2062463"/>
+                  </a:lnTo>
+                  <a:lnTo>
+                    <a:pt x="1393151" y="2023087"/>
+                  </a:lnTo>
+                  <a:lnTo>
+                    <a:pt x="1315517" y="1982736"/>
+                  </a:lnTo>
+                  <a:lnTo>
+                    <a:pt x="1237883" y="1941386"/>
+                  </a:lnTo>
+                  <a:lnTo>
+                    <a:pt x="1160249" y="1899012"/>
+                  </a:lnTo>
+                  <a:lnTo>
+                    <a:pt x="1082615" y="1855589"/>
+                  </a:lnTo>
+                  <a:lnTo>
+                    <a:pt x="1004981" y="1811090"/>
+                  </a:lnTo>
+                  <a:lnTo>
+                    <a:pt x="927346" y="1765490"/>
+                  </a:lnTo>
+                  <a:lnTo>
+                    <a:pt x="849712" y="1718760"/>
+                  </a:lnTo>
+                  <a:lnTo>
+                    <a:pt x="772078" y="1670873"/>
+                  </a:lnTo>
+                  <a:lnTo>
+                    <a:pt x="694444" y="1621801"/>
+                  </a:lnTo>
+                  <a:lnTo>
+                    <a:pt x="616810" y="1571513"/>
+                  </a:lnTo>
+                  <a:lnTo>
+                    <a:pt x="539176" y="1519980"/>
+                  </a:lnTo>
+                  <a:lnTo>
+                    <a:pt x="461542" y="1467171"/>
+                  </a:lnTo>
+                  <a:lnTo>
+                    <a:pt x="383908" y="1413055"/>
+                  </a:lnTo>
+                  <a:lnTo>
+                    <a:pt x="306274" y="1357598"/>
+                  </a:lnTo>
+                  <a:lnTo>
+                    <a:pt x="228640" y="1300768"/>
+                  </a:lnTo>
+                  <a:lnTo>
+                    <a:pt x="151006" y="1242531"/>
+                  </a:lnTo>
+                  <a:lnTo>
+                    <a:pt x="73372" y="1182852"/>
+                  </a:lnTo>
+                  <a:lnTo>
+                    <a:pt x="0" y="1125052"/>
                   </a:lnTo>
                   <a:close/>
                 </a:path>
@@ -3522,213 +3513,204 @@
           </p:nvSpPr>
           <p:spPr>
             <a:xfrm>
-              <a:off x="3119644" y="1896563"/>
-              <a:ext cx="5068846" cy="3285063"/>
+              <a:off x="3370857" y="1896563"/>
+              <a:ext cx="4817633" cy="3404845"/>
             </a:xfrm>
             <a:custGeom>
               <a:avLst/>
               <a:pathLst>
-                <a:path w="5068846" h="3285063">
+                <a:path w="4817633" h="3404845">
                   <a:moveTo>
                     <a:pt x="0" y="0"/>
                   </a:moveTo>
                   <a:lnTo>
-                    <a:pt x="22633" y="111652"/>
-                  </a:lnTo>
-                  <a:lnTo>
-                    <a:pt x="100267" y="457249"/>
-                  </a:lnTo>
-                  <a:lnTo>
-                    <a:pt x="177901" y="769116"/>
-                  </a:lnTo>
-                  <a:lnTo>
-                    <a:pt x="255535" y="1050545"/>
-                  </a:lnTo>
-                  <a:lnTo>
-                    <a:pt x="333169" y="1304507"/>
-                  </a:lnTo>
-                  <a:lnTo>
-                    <a:pt x="410803" y="1533683"/>
-                  </a:lnTo>
-                  <a:lnTo>
-                    <a:pt x="488437" y="1740491"/>
-                  </a:lnTo>
-                  <a:lnTo>
-                    <a:pt x="566071" y="1927115"/>
-                  </a:lnTo>
-                  <a:lnTo>
-                    <a:pt x="643705" y="2095525"/>
-                  </a:lnTo>
-                  <a:lnTo>
-                    <a:pt x="721339" y="2247498"/>
-                  </a:lnTo>
-                  <a:lnTo>
-                    <a:pt x="798973" y="2384639"/>
-                  </a:lnTo>
-                  <a:lnTo>
-                    <a:pt x="876607" y="2508395"/>
-                  </a:lnTo>
-                  <a:lnTo>
-                    <a:pt x="954241" y="2620072"/>
-                  </a:lnTo>
-                  <a:lnTo>
-                    <a:pt x="1031875" y="2720850"/>
-                  </a:lnTo>
-                  <a:lnTo>
-                    <a:pt x="1109509" y="2787742"/>
-                  </a:lnTo>
-                  <a:lnTo>
-                    <a:pt x="1187144" y="2802132"/>
-                  </a:lnTo>
-                  <a:lnTo>
-                    <a:pt x="1264778" y="2816283"/>
-                  </a:lnTo>
-                  <a:lnTo>
-                    <a:pt x="1342412" y="2830198"/>
-                  </a:lnTo>
-                  <a:lnTo>
-                    <a:pt x="1420046" y="2843882"/>
-                  </a:lnTo>
-                  <a:lnTo>
-                    <a:pt x="1497680" y="2857338"/>
-                  </a:lnTo>
-                  <a:lnTo>
-                    <a:pt x="1575314" y="2870571"/>
-                  </a:lnTo>
-                  <a:lnTo>
-                    <a:pt x="1652948" y="2883583"/>
-                  </a:lnTo>
-                  <a:lnTo>
-                    <a:pt x="1730582" y="2896378"/>
-                  </a:lnTo>
-                  <a:lnTo>
-                    <a:pt x="1808216" y="2908961"/>
-                  </a:lnTo>
-                  <a:lnTo>
-                    <a:pt x="1885850" y="2921334"/>
-                  </a:lnTo>
-                  <a:lnTo>
-                    <a:pt x="1963484" y="2933502"/>
-                  </a:lnTo>
-                  <a:lnTo>
-                    <a:pt x="2041118" y="2945467"/>
-                  </a:lnTo>
-                  <a:lnTo>
-                    <a:pt x="2118752" y="2957233"/>
-                  </a:lnTo>
-                  <a:lnTo>
-                    <a:pt x="2196386" y="2968803"/>
-                  </a:lnTo>
-                  <a:lnTo>
-                    <a:pt x="2274020" y="2980181"/>
-                  </a:lnTo>
-                  <a:lnTo>
-                    <a:pt x="2351654" y="2991369"/>
-                  </a:lnTo>
-                  <a:lnTo>
-                    <a:pt x="2429288" y="3002371"/>
-                  </a:lnTo>
-                  <a:lnTo>
-                    <a:pt x="2506922" y="3013190"/>
-                  </a:lnTo>
-                  <a:lnTo>
-                    <a:pt x="2584556" y="3023830"/>
-                  </a:lnTo>
-                  <a:lnTo>
-                    <a:pt x="2662190" y="3034292"/>
-                  </a:lnTo>
-                  <a:lnTo>
-                    <a:pt x="2739824" y="3044580"/>
-                  </a:lnTo>
-                  <a:lnTo>
-                    <a:pt x="2817458" y="3054697"/>
-                  </a:lnTo>
-                  <a:lnTo>
-                    <a:pt x="2895093" y="3064645"/>
-                  </a:lnTo>
-                  <a:lnTo>
-                    <a:pt x="2972727" y="3074428"/>
-                  </a:lnTo>
-                  <a:lnTo>
-                    <a:pt x="3050361" y="3084049"/>
-                  </a:lnTo>
-                  <a:lnTo>
-                    <a:pt x="3127995" y="3093509"/>
-                  </a:lnTo>
-                  <a:lnTo>
-                    <a:pt x="3205629" y="3102812"/>
-                  </a:lnTo>
-                  <a:lnTo>
-                    <a:pt x="3283263" y="3111960"/>
-                  </a:lnTo>
-                  <a:lnTo>
-                    <a:pt x="3360897" y="3120956"/>
-                  </a:lnTo>
-                  <a:lnTo>
-                    <a:pt x="3438531" y="3129802"/>
-                  </a:lnTo>
-                  <a:lnTo>
-                    <a:pt x="3516165" y="3138501"/>
-                  </a:lnTo>
-                  <a:lnTo>
-                    <a:pt x="3593799" y="3147055"/>
-                  </a:lnTo>
-                  <a:lnTo>
-                    <a:pt x="3671433" y="3155467"/>
-                  </a:lnTo>
-                  <a:lnTo>
-                    <a:pt x="3749067" y="3163739"/>
-                  </a:lnTo>
-                  <a:lnTo>
-                    <a:pt x="3826701" y="3171874"/>
-                  </a:lnTo>
-                  <a:lnTo>
-                    <a:pt x="3904335" y="3179873"/>
-                  </a:lnTo>
-                  <a:lnTo>
-                    <a:pt x="3981969" y="3187738"/>
-                  </a:lnTo>
-                  <a:lnTo>
-                    <a:pt x="4059603" y="3195474"/>
-                  </a:lnTo>
-                  <a:lnTo>
-                    <a:pt x="4137237" y="3203080"/>
-                  </a:lnTo>
-                  <a:lnTo>
-                    <a:pt x="4214871" y="3210560"/>
-                  </a:lnTo>
-                  <a:lnTo>
-                    <a:pt x="4292505" y="3217915"/>
-                  </a:lnTo>
-                  <a:lnTo>
-                    <a:pt x="4370139" y="3225148"/>
-                  </a:lnTo>
-                  <a:lnTo>
-                    <a:pt x="4447773" y="3232261"/>
-                  </a:lnTo>
-                  <a:lnTo>
-                    <a:pt x="4525407" y="3239255"/>
-                  </a:lnTo>
-                  <a:lnTo>
-                    <a:pt x="4603041" y="3246133"/>
-                  </a:lnTo>
-                  <a:lnTo>
-                    <a:pt x="4680676" y="3252896"/>
-                  </a:lnTo>
-                  <a:lnTo>
-                    <a:pt x="4758310" y="3259547"/>
-                  </a:lnTo>
-                  <a:lnTo>
-                    <a:pt x="4835944" y="3266088"/>
-                  </a:lnTo>
-                  <a:lnTo>
-                    <a:pt x="4913578" y="3272519"/>
-                  </a:lnTo>
-                  <a:lnTo>
-                    <a:pt x="4991212" y="3278844"/>
-                  </a:lnTo>
-                  <a:lnTo>
-                    <a:pt x="5068846" y="3285063"/>
+                    <a:pt x="4322" y="28869"/>
+                  </a:lnTo>
+                  <a:lnTo>
+                    <a:pt x="81956" y="482474"/>
+                  </a:lnTo>
+                  <a:lnTo>
+                    <a:pt x="159590" y="879299"/>
+                  </a:lnTo>
+                  <a:lnTo>
+                    <a:pt x="237224" y="1226452"/>
+                  </a:lnTo>
+                  <a:lnTo>
+                    <a:pt x="314858" y="1530150"/>
+                  </a:lnTo>
+                  <a:lnTo>
+                    <a:pt x="392492" y="1795833"/>
+                  </a:lnTo>
+                  <a:lnTo>
+                    <a:pt x="470126" y="2028258"/>
+                  </a:lnTo>
+                  <a:lnTo>
+                    <a:pt x="547760" y="2231590"/>
+                  </a:lnTo>
+                  <a:lnTo>
+                    <a:pt x="625394" y="2409470"/>
+                  </a:lnTo>
+                  <a:lnTo>
+                    <a:pt x="703028" y="2565084"/>
+                  </a:lnTo>
+                  <a:lnTo>
+                    <a:pt x="780662" y="2701219"/>
+                  </a:lnTo>
+                  <a:lnTo>
+                    <a:pt x="858296" y="2789920"/>
+                  </a:lnTo>
+                  <a:lnTo>
+                    <a:pt x="935930" y="2810767"/>
+                  </a:lnTo>
+                  <a:lnTo>
+                    <a:pt x="1013565" y="2831110"/>
+                  </a:lnTo>
+                  <a:lnTo>
+                    <a:pt x="1091199" y="2850961"/>
+                  </a:lnTo>
+                  <a:lnTo>
+                    <a:pt x="1168833" y="2870332"/>
+                  </a:lnTo>
+                  <a:lnTo>
+                    <a:pt x="1246467" y="2889236"/>
+                  </a:lnTo>
+                  <a:lnTo>
+                    <a:pt x="1324101" y="2907683"/>
+                  </a:lnTo>
+                  <a:lnTo>
+                    <a:pt x="1401735" y="2925684"/>
+                  </a:lnTo>
+                  <a:lnTo>
+                    <a:pt x="1479369" y="2943250"/>
+                  </a:lnTo>
+                  <a:lnTo>
+                    <a:pt x="1557003" y="2960391"/>
+                  </a:lnTo>
+                  <a:lnTo>
+                    <a:pt x="1634637" y="2977118"/>
+                  </a:lnTo>
+                  <a:lnTo>
+                    <a:pt x="1712271" y="2993442"/>
+                  </a:lnTo>
+                  <a:lnTo>
+                    <a:pt x="1789905" y="3009370"/>
+                  </a:lnTo>
+                  <a:lnTo>
+                    <a:pt x="1867539" y="3024914"/>
+                  </a:lnTo>
+                  <a:lnTo>
+                    <a:pt x="1945173" y="3040082"/>
+                  </a:lnTo>
+                  <a:lnTo>
+                    <a:pt x="2022807" y="3054884"/>
+                  </a:lnTo>
+                  <a:lnTo>
+                    <a:pt x="2100441" y="3069328"/>
+                  </a:lnTo>
+                  <a:lnTo>
+                    <a:pt x="2178075" y="3083423"/>
+                  </a:lnTo>
+                  <a:lnTo>
+                    <a:pt x="2255709" y="3097177"/>
+                  </a:lnTo>
+                  <a:lnTo>
+                    <a:pt x="2333343" y="3110599"/>
+                  </a:lnTo>
+                  <a:lnTo>
+                    <a:pt x="2410977" y="3123697"/>
+                  </a:lnTo>
+                  <a:lnTo>
+                    <a:pt x="2488611" y="3136478"/>
+                  </a:lnTo>
+                  <a:lnTo>
+                    <a:pt x="2566245" y="3148951"/>
+                  </a:lnTo>
+                  <a:lnTo>
+                    <a:pt x="2643879" y="3161122"/>
+                  </a:lnTo>
+                  <a:lnTo>
+                    <a:pt x="2721513" y="3172999"/>
+                  </a:lnTo>
+                  <a:lnTo>
+                    <a:pt x="2799148" y="3184589"/>
+                  </a:lnTo>
+                  <a:lnTo>
+                    <a:pt x="2876782" y="3195899"/>
+                  </a:lnTo>
+                  <a:lnTo>
+                    <a:pt x="2954416" y="3206935"/>
+                  </a:lnTo>
+                  <a:lnTo>
+                    <a:pt x="3032050" y="3217705"/>
+                  </a:lnTo>
+                  <a:lnTo>
+                    <a:pt x="3109684" y="3228215"/>
+                  </a:lnTo>
+                  <a:lnTo>
+                    <a:pt x="3187318" y="3238471"/>
+                  </a:lnTo>
+                  <a:lnTo>
+                    <a:pt x="3264952" y="3248479"/>
+                  </a:lnTo>
+                  <a:lnTo>
+                    <a:pt x="3342586" y="3258245"/>
+                  </a:lnTo>
+                  <a:lnTo>
+                    <a:pt x="3420220" y="3267775"/>
+                  </a:lnTo>
+                  <a:lnTo>
+                    <a:pt x="3497854" y="3277075"/>
+                  </a:lnTo>
+                  <a:lnTo>
+                    <a:pt x="3575488" y="3286150"/>
+                  </a:lnTo>
+                  <a:lnTo>
+                    <a:pt x="3653122" y="3295005"/>
+                  </a:lnTo>
+                  <a:lnTo>
+                    <a:pt x="3730756" y="3303647"/>
+                  </a:lnTo>
+                  <a:lnTo>
+                    <a:pt x="3808390" y="3312080"/>
+                  </a:lnTo>
+                  <a:lnTo>
+                    <a:pt x="3886024" y="3320310"/>
+                  </a:lnTo>
+                  <a:lnTo>
+                    <a:pt x="3963658" y="3328340"/>
+                  </a:lnTo>
+                  <a:lnTo>
+                    <a:pt x="4041292" y="3336176"/>
+                  </a:lnTo>
+                  <a:lnTo>
+                    <a:pt x="4118926" y="3343823"/>
+                  </a:lnTo>
+                  <a:lnTo>
+                    <a:pt x="4196560" y="3351286"/>
+                  </a:lnTo>
+                  <a:lnTo>
+                    <a:pt x="4274194" y="3358567"/>
+                  </a:lnTo>
+                  <a:lnTo>
+                    <a:pt x="4351828" y="3365673"/>
+                  </a:lnTo>
+                  <a:lnTo>
+                    <a:pt x="4429462" y="3372608"/>
+                  </a:lnTo>
+                  <a:lnTo>
+                    <a:pt x="4507097" y="3379374"/>
+                  </a:lnTo>
+                  <a:lnTo>
+                    <a:pt x="4584731" y="3385977"/>
+                  </a:lnTo>
+                  <a:lnTo>
+                    <a:pt x="4662365" y="3392421"/>
+                  </a:lnTo>
+                  <a:lnTo>
+                    <a:pt x="4739999" y="3398709"/>
+                  </a:lnTo>
+                  <a:lnTo>
+                    <a:pt x="4817633" y="3404845"/>
                   </a:lnTo>
                 </a:path>
               </a:pathLst>
@@ -3748,297 +3730,297 @@
           </p:nvSpPr>
           <p:spPr>
             <a:xfrm>
-              <a:off x="817517" y="3741292"/>
-              <a:ext cx="7370972" cy="1803446"/>
+              <a:off x="817517" y="3021616"/>
+              <a:ext cx="7370972" cy="2526682"/>
             </a:xfrm>
             <a:custGeom>
               <a:avLst/>
               <a:pathLst>
-                <a:path w="7370972" h="1803446">
+                <a:path w="7370972" h="2526682">
                   <a:moveTo>
-                    <a:pt x="7370972" y="1803446"/>
+                    <a:pt x="7370972" y="2526682"/>
                   </a:moveTo>
                   <a:lnTo>
-                    <a:pt x="7293338" y="1802963"/>
-                  </a:lnTo>
-                  <a:lnTo>
-                    <a:pt x="7215704" y="1802427"/>
-                  </a:lnTo>
-                  <a:lnTo>
-                    <a:pt x="7138070" y="1801834"/>
-                  </a:lnTo>
-                  <a:lnTo>
-                    <a:pt x="7060436" y="1801176"/>
-                  </a:lnTo>
-                  <a:lnTo>
-                    <a:pt x="6982802" y="1800448"/>
-                  </a:lnTo>
-                  <a:lnTo>
-                    <a:pt x="6905168" y="1799640"/>
-                  </a:lnTo>
-                  <a:lnTo>
-                    <a:pt x="6827534" y="1798745"/>
-                  </a:lnTo>
-                  <a:lnTo>
-                    <a:pt x="6749900" y="1797754"/>
-                  </a:lnTo>
-                  <a:lnTo>
-                    <a:pt x="6672266" y="1796655"/>
-                  </a:lnTo>
-                  <a:lnTo>
-                    <a:pt x="6594632" y="1795437"/>
-                  </a:lnTo>
-                  <a:lnTo>
-                    <a:pt x="6516998" y="1794088"/>
-                  </a:lnTo>
-                  <a:lnTo>
-                    <a:pt x="6439364" y="1792592"/>
-                  </a:lnTo>
-                  <a:lnTo>
-                    <a:pt x="6361730" y="1790935"/>
-                  </a:lnTo>
-                  <a:lnTo>
-                    <a:pt x="6284096" y="1789099"/>
-                  </a:lnTo>
-                  <a:lnTo>
-                    <a:pt x="6206462" y="1787064"/>
-                  </a:lnTo>
-                  <a:lnTo>
-                    <a:pt x="6128827" y="1784809"/>
-                  </a:lnTo>
-                  <a:lnTo>
-                    <a:pt x="6051193" y="1782310"/>
-                  </a:lnTo>
-                  <a:lnTo>
-                    <a:pt x="5973559" y="1779541"/>
-                  </a:lnTo>
-                  <a:lnTo>
-                    <a:pt x="5895925" y="1776472"/>
-                  </a:lnTo>
-                  <a:lnTo>
-                    <a:pt x="5818291" y="1773072"/>
-                  </a:lnTo>
-                  <a:lnTo>
-                    <a:pt x="5740657" y="1769303"/>
-                  </a:lnTo>
-                  <a:lnTo>
-                    <a:pt x="5663023" y="1765127"/>
-                  </a:lnTo>
-                  <a:lnTo>
-                    <a:pt x="5585389" y="1760500"/>
-                  </a:lnTo>
-                  <a:lnTo>
-                    <a:pt x="5507755" y="1755372"/>
-                  </a:lnTo>
-                  <a:lnTo>
-                    <a:pt x="5430121" y="1749689"/>
-                  </a:lnTo>
-                  <a:lnTo>
-                    <a:pt x="5352487" y="1743392"/>
-                  </a:lnTo>
-                  <a:lnTo>
-                    <a:pt x="5274853" y="1736413"/>
-                  </a:lnTo>
-                  <a:lnTo>
-                    <a:pt x="5197219" y="1728680"/>
-                  </a:lnTo>
-                  <a:lnTo>
-                    <a:pt x="5119585" y="1720111"/>
-                  </a:lnTo>
-                  <a:lnTo>
-                    <a:pt x="5041951" y="1710614"/>
-                  </a:lnTo>
-                  <a:lnTo>
-                    <a:pt x="4964317" y="1700091"/>
-                  </a:lnTo>
-                  <a:lnTo>
-                    <a:pt x="4886683" y="1688429"/>
-                  </a:lnTo>
-                  <a:lnTo>
-                    <a:pt x="4809049" y="1675507"/>
-                  </a:lnTo>
-                  <a:lnTo>
-                    <a:pt x="4731415" y="1661186"/>
-                  </a:lnTo>
-                  <a:lnTo>
-                    <a:pt x="4653781" y="1645317"/>
-                  </a:lnTo>
-                  <a:lnTo>
-                    <a:pt x="4576147" y="1627731"/>
-                  </a:lnTo>
-                  <a:lnTo>
-                    <a:pt x="4498513" y="1608244"/>
-                  </a:lnTo>
-                  <a:lnTo>
-                    <a:pt x="4420879" y="1586648"/>
-                  </a:lnTo>
-                  <a:lnTo>
-                    <a:pt x="4343244" y="1562717"/>
-                  </a:lnTo>
-                  <a:lnTo>
-                    <a:pt x="4265610" y="1536198"/>
-                  </a:lnTo>
-                  <a:lnTo>
-                    <a:pt x="4187976" y="1506811"/>
-                  </a:lnTo>
-                  <a:lnTo>
-                    <a:pt x="4110342" y="1474245"/>
-                  </a:lnTo>
-                  <a:lnTo>
-                    <a:pt x="4032708" y="1438157"/>
-                  </a:lnTo>
-                  <a:lnTo>
-                    <a:pt x="3955074" y="1398166"/>
-                  </a:lnTo>
-                  <a:lnTo>
-                    <a:pt x="3877440" y="1353850"/>
-                  </a:lnTo>
-                  <a:lnTo>
-                    <a:pt x="3799806" y="1304741"/>
-                  </a:lnTo>
-                  <a:lnTo>
-                    <a:pt x="3722172" y="1250320"/>
-                  </a:lnTo>
-                  <a:lnTo>
-                    <a:pt x="3644538" y="1190014"/>
-                  </a:lnTo>
-                  <a:lnTo>
-                    <a:pt x="3566904" y="1123185"/>
-                  </a:lnTo>
-                  <a:lnTo>
-                    <a:pt x="3489270" y="1049129"/>
-                  </a:lnTo>
-                  <a:lnTo>
-                    <a:pt x="3411636" y="967063"/>
-                  </a:lnTo>
-                  <a:lnTo>
-                    <a:pt x="3334002" y="928379"/>
-                  </a:lnTo>
-                  <a:lnTo>
-                    <a:pt x="3256368" y="913498"/>
-                  </a:lnTo>
-                  <a:lnTo>
-                    <a:pt x="3178734" y="898365"/>
-                  </a:lnTo>
-                  <a:lnTo>
-                    <a:pt x="3101100" y="882976"/>
-                  </a:lnTo>
-                  <a:lnTo>
-                    <a:pt x="3023466" y="867326"/>
-                  </a:lnTo>
-                  <a:lnTo>
-                    <a:pt x="2945832" y="851412"/>
-                  </a:lnTo>
-                  <a:lnTo>
-                    <a:pt x="2868198" y="835229"/>
-                  </a:lnTo>
-                  <a:lnTo>
-                    <a:pt x="2790564" y="818771"/>
-                  </a:lnTo>
-                  <a:lnTo>
-                    <a:pt x="2712930" y="802036"/>
-                  </a:lnTo>
-                  <a:lnTo>
-                    <a:pt x="2635295" y="785017"/>
-                  </a:lnTo>
-                  <a:lnTo>
-                    <a:pt x="2557661" y="767710"/>
-                  </a:lnTo>
-                  <a:lnTo>
-                    <a:pt x="2480027" y="750110"/>
-                  </a:lnTo>
-                  <a:lnTo>
-                    <a:pt x="2402393" y="732213"/>
-                  </a:lnTo>
-                  <a:lnTo>
-                    <a:pt x="2324759" y="714013"/>
-                  </a:lnTo>
-                  <a:lnTo>
-                    <a:pt x="2247125" y="695504"/>
-                  </a:lnTo>
-                  <a:lnTo>
-                    <a:pt x="2169491" y="676683"/>
-                  </a:lnTo>
-                  <a:lnTo>
-                    <a:pt x="2091857" y="657543"/>
-                  </a:lnTo>
-                  <a:lnTo>
-                    <a:pt x="2014223" y="638080"/>
-                  </a:lnTo>
-                  <a:lnTo>
-                    <a:pt x="1936589" y="618287"/>
-                  </a:lnTo>
-                  <a:lnTo>
-                    <a:pt x="1858955" y="598159"/>
-                  </a:lnTo>
-                  <a:lnTo>
-                    <a:pt x="1781321" y="577690"/>
-                  </a:lnTo>
-                  <a:lnTo>
-                    <a:pt x="1703687" y="556876"/>
-                  </a:lnTo>
-                  <a:lnTo>
-                    <a:pt x="1626053" y="535709"/>
-                  </a:lnTo>
-                  <a:lnTo>
-                    <a:pt x="1548419" y="514184"/>
-                  </a:lnTo>
-                  <a:lnTo>
-                    <a:pt x="1470785" y="492295"/>
-                  </a:lnTo>
-                  <a:lnTo>
-                    <a:pt x="1393151" y="470035"/>
-                  </a:lnTo>
-                  <a:lnTo>
-                    <a:pt x="1315517" y="447399"/>
-                  </a:lnTo>
-                  <a:lnTo>
-                    <a:pt x="1237883" y="424380"/>
-                  </a:lnTo>
-                  <a:lnTo>
-                    <a:pt x="1160249" y="400971"/>
-                  </a:lnTo>
-                  <a:lnTo>
-                    <a:pt x="1082615" y="377166"/>
-                  </a:lnTo>
-                  <a:lnTo>
-                    <a:pt x="1004981" y="352959"/>
-                  </a:lnTo>
-                  <a:lnTo>
-                    <a:pt x="927346" y="328342"/>
-                  </a:lnTo>
-                  <a:lnTo>
-                    <a:pt x="849712" y="303308"/>
-                  </a:lnTo>
-                  <a:lnTo>
-                    <a:pt x="772078" y="277851"/>
-                  </a:lnTo>
-                  <a:lnTo>
-                    <a:pt x="694444" y="251964"/>
-                  </a:lnTo>
-                  <a:lnTo>
-                    <a:pt x="616810" y="225638"/>
-                  </a:lnTo>
-                  <a:lnTo>
-                    <a:pt x="539176" y="198867"/>
-                  </a:lnTo>
-                  <a:lnTo>
-                    <a:pt x="461542" y="171642"/>
-                  </a:lnTo>
-                  <a:lnTo>
-                    <a:pt x="383908" y="143958"/>
-                  </a:lnTo>
-                  <a:lnTo>
-                    <a:pt x="306274" y="115804"/>
-                  </a:lnTo>
-                  <a:lnTo>
-                    <a:pt x="228640" y="87175"/>
-                  </a:lnTo>
-                  <a:lnTo>
-                    <a:pt x="151006" y="58061"/>
-                  </a:lnTo>
-                  <a:lnTo>
-                    <a:pt x="73372" y="28454"/>
+                    <a:pt x="7293338" y="2526552"/>
+                  </a:lnTo>
+                  <a:lnTo>
+                    <a:pt x="7215704" y="2526404"/>
+                  </a:lnTo>
+                  <a:lnTo>
+                    <a:pt x="7138070" y="2526234"/>
+                  </a:lnTo>
+                  <a:lnTo>
+                    <a:pt x="7060436" y="2526040"/>
+                  </a:lnTo>
+                  <a:lnTo>
+                    <a:pt x="6982802" y="2525818"/>
+                  </a:lnTo>
+                  <a:lnTo>
+                    <a:pt x="6905168" y="2525564"/>
+                  </a:lnTo>
+                  <a:lnTo>
+                    <a:pt x="6827534" y="2525274"/>
+                  </a:lnTo>
+                  <a:lnTo>
+                    <a:pt x="6749900" y="2524943"/>
+                  </a:lnTo>
+                  <a:lnTo>
+                    <a:pt x="6672266" y="2524564"/>
+                  </a:lnTo>
+                  <a:lnTo>
+                    <a:pt x="6594632" y="2524131"/>
+                  </a:lnTo>
+                  <a:lnTo>
+                    <a:pt x="6516998" y="2523636"/>
+                  </a:lnTo>
+                  <a:lnTo>
+                    <a:pt x="6439364" y="2523070"/>
+                  </a:lnTo>
+                  <a:lnTo>
+                    <a:pt x="6361730" y="2522423"/>
+                  </a:lnTo>
+                  <a:lnTo>
+                    <a:pt x="6284096" y="2521683"/>
+                  </a:lnTo>
+                  <a:lnTo>
+                    <a:pt x="6206462" y="2520838"/>
+                  </a:lnTo>
+                  <a:lnTo>
+                    <a:pt x="6128827" y="2519872"/>
+                  </a:lnTo>
+                  <a:lnTo>
+                    <a:pt x="6051193" y="2518768"/>
+                  </a:lnTo>
+                  <a:lnTo>
+                    <a:pt x="5973559" y="2517505"/>
+                  </a:lnTo>
+                  <a:lnTo>
+                    <a:pt x="5895925" y="2516062"/>
+                  </a:lnTo>
+                  <a:lnTo>
+                    <a:pt x="5818291" y="2514412"/>
+                  </a:lnTo>
+                  <a:lnTo>
+                    <a:pt x="5740657" y="2512527"/>
+                  </a:lnTo>
+                  <a:lnTo>
+                    <a:pt x="5663023" y="2510371"/>
+                  </a:lnTo>
+                  <a:lnTo>
+                    <a:pt x="5585389" y="2507908"/>
+                  </a:lnTo>
+                  <a:lnTo>
+                    <a:pt x="5507755" y="2505091"/>
+                  </a:lnTo>
+                  <a:lnTo>
+                    <a:pt x="5430121" y="2501872"/>
+                  </a:lnTo>
+                  <a:lnTo>
+                    <a:pt x="5352487" y="2498192"/>
+                  </a:lnTo>
+                  <a:lnTo>
+                    <a:pt x="5274853" y="2493985"/>
+                  </a:lnTo>
+                  <a:lnTo>
+                    <a:pt x="5197219" y="2489177"/>
+                  </a:lnTo>
+                  <a:lnTo>
+                    <a:pt x="5119585" y="2483681"/>
+                  </a:lnTo>
+                  <a:lnTo>
+                    <a:pt x="5041951" y="2477398"/>
+                  </a:lnTo>
+                  <a:lnTo>
+                    <a:pt x="4964317" y="2470216"/>
+                  </a:lnTo>
+                  <a:lnTo>
+                    <a:pt x="4886683" y="2462006"/>
+                  </a:lnTo>
+                  <a:lnTo>
+                    <a:pt x="4809049" y="2452622"/>
+                  </a:lnTo>
+                  <a:lnTo>
+                    <a:pt x="4731415" y="2441895"/>
+                  </a:lnTo>
+                  <a:lnTo>
+                    <a:pt x="4653781" y="2429633"/>
+                  </a:lnTo>
+                  <a:lnTo>
+                    <a:pt x="4576147" y="2415617"/>
+                  </a:lnTo>
+                  <a:lnTo>
+                    <a:pt x="4498513" y="2399595"/>
+                  </a:lnTo>
+                  <a:lnTo>
+                    <a:pt x="4420879" y="2381281"/>
+                  </a:lnTo>
+                  <a:lnTo>
+                    <a:pt x="4343244" y="2360346"/>
+                  </a:lnTo>
+                  <a:lnTo>
+                    <a:pt x="4265610" y="2336416"/>
+                  </a:lnTo>
+                  <a:lnTo>
+                    <a:pt x="4187976" y="2309062"/>
+                  </a:lnTo>
+                  <a:lnTo>
+                    <a:pt x="4110342" y="2277794"/>
+                  </a:lnTo>
+                  <a:lnTo>
+                    <a:pt x="4032708" y="2242051"/>
+                  </a:lnTo>
+                  <a:lnTo>
+                    <a:pt x="3955074" y="2201195"/>
+                  </a:lnTo>
+                  <a:lnTo>
+                    <a:pt x="3877440" y="2154492"/>
+                  </a:lnTo>
+                  <a:lnTo>
+                    <a:pt x="3799806" y="2101107"/>
+                  </a:lnTo>
+                  <a:lnTo>
+                    <a:pt x="3722172" y="2040084"/>
+                  </a:lnTo>
+                  <a:lnTo>
+                    <a:pt x="3644538" y="1970329"/>
+                  </a:lnTo>
+                  <a:lnTo>
+                    <a:pt x="3566904" y="1890593"/>
+                  </a:lnTo>
+                  <a:lnTo>
+                    <a:pt x="3489270" y="1799448"/>
+                  </a:lnTo>
+                  <a:lnTo>
+                    <a:pt x="3411636" y="1695261"/>
+                  </a:lnTo>
+                  <a:lnTo>
+                    <a:pt x="3334002" y="1643505"/>
+                  </a:lnTo>
+                  <a:lnTo>
+                    <a:pt x="3256368" y="1621613"/>
+                  </a:lnTo>
+                  <a:lnTo>
+                    <a:pt x="3178734" y="1599179"/>
+                  </a:lnTo>
+                  <a:lnTo>
+                    <a:pt x="3101100" y="1576190"/>
+                  </a:lnTo>
+                  <a:lnTo>
+                    <a:pt x="3023466" y="1552632"/>
+                  </a:lnTo>
+                  <a:lnTo>
+                    <a:pt x="2945832" y="1528490"/>
+                  </a:lnTo>
+                  <a:lnTo>
+                    <a:pt x="2868198" y="1503750"/>
+                  </a:lnTo>
+                  <a:lnTo>
+                    <a:pt x="2790564" y="1478398"/>
+                  </a:lnTo>
+                  <a:lnTo>
+                    <a:pt x="2712930" y="1452418"/>
+                  </a:lnTo>
+                  <a:lnTo>
+                    <a:pt x="2635295" y="1425794"/>
+                  </a:lnTo>
+                  <a:lnTo>
+                    <a:pt x="2557661" y="1398512"/>
+                  </a:lnTo>
+                  <a:lnTo>
+                    <a:pt x="2480027" y="1370553"/>
+                  </a:lnTo>
+                  <a:lnTo>
+                    <a:pt x="2402393" y="1341903"/>
+                  </a:lnTo>
+                  <a:lnTo>
+                    <a:pt x="2324759" y="1312543"/>
+                  </a:lnTo>
+                  <a:lnTo>
+                    <a:pt x="2247125" y="1282456"/>
+                  </a:lnTo>
+                  <a:lnTo>
+                    <a:pt x="2169491" y="1251624"/>
+                  </a:lnTo>
+                  <a:lnTo>
+                    <a:pt x="2091857" y="1220029"/>
+                  </a:lnTo>
+                  <a:lnTo>
+                    <a:pt x="2014223" y="1187651"/>
+                  </a:lnTo>
+                  <a:lnTo>
+                    <a:pt x="1936589" y="1154471"/>
+                  </a:lnTo>
+                  <a:lnTo>
+                    <a:pt x="1858955" y="1120470"/>
+                  </a:lnTo>
+                  <a:lnTo>
+                    <a:pt x="1781321" y="1085627"/>
+                  </a:lnTo>
+                  <a:lnTo>
+                    <a:pt x="1703687" y="1049921"/>
+                  </a:lnTo>
+                  <a:lnTo>
+                    <a:pt x="1626053" y="1013331"/>
+                  </a:lnTo>
+                  <a:lnTo>
+                    <a:pt x="1548419" y="975835"/>
+                  </a:lnTo>
+                  <a:lnTo>
+                    <a:pt x="1470785" y="937411"/>
+                  </a:lnTo>
+                  <a:lnTo>
+                    <a:pt x="1393151" y="898035"/>
+                  </a:lnTo>
+                  <a:lnTo>
+                    <a:pt x="1315517" y="857684"/>
+                  </a:lnTo>
+                  <a:lnTo>
+                    <a:pt x="1237883" y="816333"/>
+                  </a:lnTo>
+                  <a:lnTo>
+                    <a:pt x="1160249" y="773959"/>
+                  </a:lnTo>
+                  <a:lnTo>
+                    <a:pt x="1082615" y="730536"/>
+                  </a:lnTo>
+                  <a:lnTo>
+                    <a:pt x="1004981" y="686037"/>
+                  </a:lnTo>
+                  <a:lnTo>
+                    <a:pt x="927346" y="640437"/>
+                  </a:lnTo>
+                  <a:lnTo>
+                    <a:pt x="849712" y="593707"/>
+                  </a:lnTo>
+                  <a:lnTo>
+                    <a:pt x="772078" y="545820"/>
+                  </a:lnTo>
+                  <a:lnTo>
+                    <a:pt x="694444" y="496748"/>
+                  </a:lnTo>
+                  <a:lnTo>
+                    <a:pt x="616810" y="446460"/>
+                  </a:lnTo>
+                  <a:lnTo>
+                    <a:pt x="539176" y="394927"/>
+                  </a:lnTo>
+                  <a:lnTo>
+                    <a:pt x="461542" y="342119"/>
+                  </a:lnTo>
+                  <a:lnTo>
+                    <a:pt x="383908" y="288002"/>
+                  </a:lnTo>
+                  <a:lnTo>
+                    <a:pt x="306274" y="232545"/>
+                  </a:lnTo>
+                  <a:lnTo>
+                    <a:pt x="228640" y="175715"/>
+                  </a:lnTo>
+                  <a:lnTo>
+                    <a:pt x="151006" y="117478"/>
+                  </a:lnTo>
+                  <a:lnTo>
+                    <a:pt x="73372" y="57799"/>
                   </a:lnTo>
                   <a:lnTo>
                     <a:pt x="0" y="0"/>
@@ -4061,243 +4043,225 @@
           </p:nvSpPr>
           <p:spPr>
             <a:xfrm>
-              <a:off x="2339170" y="1896563"/>
-              <a:ext cx="5849320" cy="3612118"/>
+              <a:off x="2795874" y="1896563"/>
+              <a:ext cx="5392616" cy="3637640"/>
             </a:xfrm>
             <a:custGeom>
               <a:avLst/>
               <a:pathLst>
-                <a:path w="5849320" h="3612118">
+                <a:path w="5392616" h="3637640">
                   <a:moveTo>
                     <a:pt x="0" y="0"/>
                   </a:moveTo>
                   <a:lnTo>
-                    <a:pt x="26766" y="75912"/>
-                  </a:lnTo>
-                  <a:lnTo>
-                    <a:pt x="104401" y="283319"/>
-                  </a:lnTo>
-                  <a:lnTo>
-                    <a:pt x="182035" y="478699"/>
-                  </a:lnTo>
-                  <a:lnTo>
-                    <a:pt x="259669" y="662749"/>
-                  </a:lnTo>
-                  <a:lnTo>
-                    <a:pt x="337303" y="836126"/>
-                  </a:lnTo>
-                  <a:lnTo>
-                    <a:pt x="414937" y="999450"/>
-                  </a:lnTo>
-                  <a:lnTo>
-                    <a:pt x="492571" y="1153303"/>
-                  </a:lnTo>
-                  <a:lnTo>
-                    <a:pt x="570205" y="1298234"/>
-                  </a:lnTo>
-                  <a:lnTo>
-                    <a:pt x="647839" y="1434761"/>
-                  </a:lnTo>
-                  <a:lnTo>
-                    <a:pt x="725473" y="1563371"/>
-                  </a:lnTo>
-                  <a:lnTo>
-                    <a:pt x="803107" y="1684524"/>
-                  </a:lnTo>
-                  <a:lnTo>
-                    <a:pt x="880741" y="1798650"/>
-                  </a:lnTo>
-                  <a:lnTo>
-                    <a:pt x="958375" y="1906159"/>
-                  </a:lnTo>
-                  <a:lnTo>
-                    <a:pt x="1036009" y="2007434"/>
-                  </a:lnTo>
-                  <a:lnTo>
-                    <a:pt x="1113643" y="2102836"/>
-                  </a:lnTo>
-                  <a:lnTo>
-                    <a:pt x="1191277" y="2192706"/>
-                  </a:lnTo>
-                  <a:lnTo>
-                    <a:pt x="1268911" y="2277365"/>
-                  </a:lnTo>
-                  <a:lnTo>
-                    <a:pt x="1346545" y="2357114"/>
-                  </a:lnTo>
-                  <a:lnTo>
-                    <a:pt x="1424179" y="2432239"/>
-                  </a:lnTo>
-                  <a:lnTo>
-                    <a:pt x="1501813" y="2503008"/>
-                  </a:lnTo>
-                  <a:lnTo>
-                    <a:pt x="1579447" y="2569672"/>
-                  </a:lnTo>
-                  <a:lnTo>
-                    <a:pt x="1657081" y="2632472"/>
-                  </a:lnTo>
-                  <a:lnTo>
-                    <a:pt x="1734715" y="2691629"/>
-                  </a:lnTo>
-                  <a:lnTo>
-                    <a:pt x="1812350" y="2747356"/>
-                  </a:lnTo>
-                  <a:lnTo>
-                    <a:pt x="1889984" y="2799852"/>
-                  </a:lnTo>
-                  <a:lnTo>
-                    <a:pt x="1967618" y="2849303"/>
-                  </a:lnTo>
-                  <a:lnTo>
-                    <a:pt x="2045252" y="2895887"/>
-                  </a:lnTo>
-                  <a:lnTo>
-                    <a:pt x="2122886" y="2939770"/>
-                  </a:lnTo>
-                  <a:lnTo>
-                    <a:pt x="2200520" y="2981108"/>
-                  </a:lnTo>
-                  <a:lnTo>
-                    <a:pt x="2278154" y="3020049"/>
-                  </a:lnTo>
-                  <a:lnTo>
-                    <a:pt x="2355788" y="3056732"/>
-                  </a:lnTo>
-                  <a:lnTo>
-                    <a:pt x="2433422" y="3091287"/>
-                  </a:lnTo>
-                  <a:lnTo>
-                    <a:pt x="2511056" y="3123839"/>
-                  </a:lnTo>
-                  <a:lnTo>
-                    <a:pt x="2588690" y="3154503"/>
-                  </a:lnTo>
-                  <a:lnTo>
-                    <a:pt x="2666324" y="3183389"/>
-                  </a:lnTo>
-                  <a:lnTo>
-                    <a:pt x="2743958" y="3210600"/>
-                  </a:lnTo>
-                  <a:lnTo>
-                    <a:pt x="2821592" y="3236233"/>
-                  </a:lnTo>
-                  <a:lnTo>
-                    <a:pt x="2899226" y="3260380"/>
-                  </a:lnTo>
-                  <a:lnTo>
-                    <a:pt x="2976860" y="3283127"/>
-                  </a:lnTo>
-                  <a:lnTo>
-                    <a:pt x="3054494" y="3304554"/>
-                  </a:lnTo>
-                  <a:lnTo>
-                    <a:pt x="3132128" y="3324739"/>
-                  </a:lnTo>
-                  <a:lnTo>
-                    <a:pt x="3209762" y="3343753"/>
-                  </a:lnTo>
-                  <a:lnTo>
-                    <a:pt x="3287396" y="3361665"/>
-                  </a:lnTo>
-                  <a:lnTo>
-                    <a:pt x="3365030" y="3378538"/>
-                  </a:lnTo>
-                  <a:lnTo>
-                    <a:pt x="3442664" y="3394433"/>
-                  </a:lnTo>
-                  <a:lnTo>
-                    <a:pt x="3520299" y="3409406"/>
-                  </a:lnTo>
-                  <a:lnTo>
-                    <a:pt x="3597933" y="3423511"/>
-                  </a:lnTo>
-                  <a:lnTo>
-                    <a:pt x="3675567" y="3436798"/>
-                  </a:lnTo>
-                  <a:lnTo>
-                    <a:pt x="3753201" y="3449314"/>
-                  </a:lnTo>
-                  <a:lnTo>
-                    <a:pt x="3830835" y="3461105"/>
-                  </a:lnTo>
-                  <a:lnTo>
-                    <a:pt x="3908469" y="3472212"/>
-                  </a:lnTo>
-                  <a:lnTo>
-                    <a:pt x="3986103" y="3482675"/>
-                  </a:lnTo>
-                  <a:lnTo>
-                    <a:pt x="4063737" y="3492531"/>
-                  </a:lnTo>
-                  <a:lnTo>
-                    <a:pt x="4141371" y="3501815"/>
-                  </a:lnTo>
-                  <a:lnTo>
-                    <a:pt x="4219005" y="3510561"/>
-                  </a:lnTo>
-                  <a:lnTo>
-                    <a:pt x="4296639" y="3518800"/>
-                  </a:lnTo>
-                  <a:lnTo>
-                    <a:pt x="4374273" y="3526562"/>
-                  </a:lnTo>
-                  <a:lnTo>
-                    <a:pt x="4451907" y="3533873"/>
-                  </a:lnTo>
-                  <a:lnTo>
-                    <a:pt x="4529541" y="3540760"/>
-                  </a:lnTo>
-                  <a:lnTo>
-                    <a:pt x="4607175" y="3547248"/>
-                  </a:lnTo>
-                  <a:lnTo>
-                    <a:pt x="4684809" y="3553360"/>
-                  </a:lnTo>
-                  <a:lnTo>
-                    <a:pt x="4762443" y="3559117"/>
-                  </a:lnTo>
-                  <a:lnTo>
-                    <a:pt x="4840077" y="3564540"/>
-                  </a:lnTo>
-                  <a:lnTo>
-                    <a:pt x="4917711" y="3569649"/>
-                  </a:lnTo>
-                  <a:lnTo>
-                    <a:pt x="4995345" y="3574462"/>
-                  </a:lnTo>
-                  <a:lnTo>
-                    <a:pt x="5072979" y="3578995"/>
-                  </a:lnTo>
-                  <a:lnTo>
-                    <a:pt x="5150613" y="3583266"/>
-                  </a:lnTo>
-                  <a:lnTo>
-                    <a:pt x="5228247" y="3587289"/>
-                  </a:lnTo>
-                  <a:lnTo>
-                    <a:pt x="5305882" y="3591079"/>
-                  </a:lnTo>
-                  <a:lnTo>
-                    <a:pt x="5383516" y="3594649"/>
-                  </a:lnTo>
-                  <a:lnTo>
-                    <a:pt x="5461150" y="3598012"/>
-                  </a:lnTo>
-                  <a:lnTo>
-                    <a:pt x="5538784" y="3601180"/>
-                  </a:lnTo>
-                  <a:lnTo>
-                    <a:pt x="5616418" y="3604164"/>
-                  </a:lnTo>
-                  <a:lnTo>
-                    <a:pt x="5694052" y="3606975"/>
-                  </a:lnTo>
-                  <a:lnTo>
-                    <a:pt x="5771686" y="3609623"/>
-                  </a:lnTo>
-                  <a:lnTo>
-                    <a:pt x="5849320" y="3612118"/>
+                    <a:pt x="35867" y="133810"/>
+                  </a:lnTo>
+                  <a:lnTo>
+                    <a:pt x="113501" y="401412"/>
+                  </a:lnTo>
+                  <a:lnTo>
+                    <a:pt x="191135" y="648663"/>
+                  </a:lnTo>
+                  <a:lnTo>
+                    <a:pt x="268769" y="877112"/>
+                  </a:lnTo>
+                  <a:lnTo>
+                    <a:pt x="346403" y="1088187"/>
+                  </a:lnTo>
+                  <a:lnTo>
+                    <a:pt x="424037" y="1283210"/>
+                  </a:lnTo>
+                  <a:lnTo>
+                    <a:pt x="501671" y="1463402"/>
+                  </a:lnTo>
+                  <a:lnTo>
+                    <a:pt x="579305" y="1629891"/>
+                  </a:lnTo>
+                  <a:lnTo>
+                    <a:pt x="656939" y="1783718"/>
+                  </a:lnTo>
+                  <a:lnTo>
+                    <a:pt x="734573" y="1925847"/>
+                  </a:lnTo>
+                  <a:lnTo>
+                    <a:pt x="812207" y="2057168"/>
+                  </a:lnTo>
+                  <a:lnTo>
+                    <a:pt x="889841" y="2178501"/>
+                  </a:lnTo>
+                  <a:lnTo>
+                    <a:pt x="967476" y="2290608"/>
+                  </a:lnTo>
+                  <a:lnTo>
+                    <a:pt x="1045110" y="2394188"/>
+                  </a:lnTo>
+                  <a:lnTo>
+                    <a:pt x="1122744" y="2489892"/>
+                  </a:lnTo>
+                  <a:lnTo>
+                    <a:pt x="1200378" y="2578318"/>
+                  </a:lnTo>
+                  <a:lnTo>
+                    <a:pt x="1278012" y="2660019"/>
+                  </a:lnTo>
+                  <a:lnTo>
+                    <a:pt x="1355646" y="2735506"/>
+                  </a:lnTo>
+                  <a:lnTo>
+                    <a:pt x="1433280" y="2805253"/>
+                  </a:lnTo>
+                  <a:lnTo>
+                    <a:pt x="1510914" y="2869696"/>
+                  </a:lnTo>
+                  <a:lnTo>
+                    <a:pt x="1588548" y="2929238"/>
+                  </a:lnTo>
+                  <a:lnTo>
+                    <a:pt x="1666182" y="2984252"/>
+                  </a:lnTo>
+                  <a:lnTo>
+                    <a:pt x="1743816" y="3035082"/>
+                  </a:lnTo>
+                  <a:lnTo>
+                    <a:pt x="1821450" y="3082047"/>
+                  </a:lnTo>
+                  <a:lnTo>
+                    <a:pt x="1899084" y="3125440"/>
+                  </a:lnTo>
+                  <a:lnTo>
+                    <a:pt x="1976718" y="3165533"/>
+                  </a:lnTo>
+                  <a:lnTo>
+                    <a:pt x="2054352" y="3202577"/>
+                  </a:lnTo>
+                  <a:lnTo>
+                    <a:pt x="2131986" y="3236804"/>
+                  </a:lnTo>
+                  <a:lnTo>
+                    <a:pt x="2209620" y="3268428"/>
+                  </a:lnTo>
+                  <a:lnTo>
+                    <a:pt x="2287254" y="3297647"/>
+                  </a:lnTo>
+                  <a:lnTo>
+                    <a:pt x="2364888" y="3324644"/>
+                  </a:lnTo>
+                  <a:lnTo>
+                    <a:pt x="2442522" y="3349588"/>
+                  </a:lnTo>
+                  <a:lnTo>
+                    <a:pt x="2520156" y="3372635"/>
+                  </a:lnTo>
+                  <a:lnTo>
+                    <a:pt x="2597790" y="3393929"/>
+                  </a:lnTo>
+                  <a:lnTo>
+                    <a:pt x="2675424" y="3413604"/>
+                  </a:lnTo>
+                  <a:lnTo>
+                    <a:pt x="2753059" y="3431782"/>
+                  </a:lnTo>
+                  <a:lnTo>
+                    <a:pt x="2830693" y="3448579"/>
+                  </a:lnTo>
+                  <a:lnTo>
+                    <a:pt x="2908327" y="3464097"/>
+                  </a:lnTo>
+                  <a:lnTo>
+                    <a:pt x="2985961" y="3478436"/>
+                  </a:lnTo>
+                  <a:lnTo>
+                    <a:pt x="3063595" y="3491684"/>
+                  </a:lnTo>
+                  <a:lnTo>
+                    <a:pt x="3141229" y="3503925"/>
+                  </a:lnTo>
+                  <a:lnTo>
+                    <a:pt x="3218863" y="3515235"/>
+                  </a:lnTo>
+                  <a:lnTo>
+                    <a:pt x="3296497" y="3525684"/>
+                  </a:lnTo>
+                  <a:lnTo>
+                    <a:pt x="3374131" y="3535340"/>
+                  </a:lnTo>
+                  <a:lnTo>
+                    <a:pt x="3451765" y="3544260"/>
+                  </a:lnTo>
+                  <a:lnTo>
+                    <a:pt x="3529399" y="3552503"/>
+                  </a:lnTo>
+                  <a:lnTo>
+                    <a:pt x="3607033" y="3560118"/>
+                  </a:lnTo>
+                  <a:lnTo>
+                    <a:pt x="3684667" y="3567155"/>
+                  </a:lnTo>
+                  <a:lnTo>
+                    <a:pt x="3762301" y="3573656"/>
+                  </a:lnTo>
+                  <a:lnTo>
+                    <a:pt x="3839935" y="3579663"/>
+                  </a:lnTo>
+                  <a:lnTo>
+                    <a:pt x="3917569" y="3585213"/>
+                  </a:lnTo>
+                  <a:lnTo>
+                    <a:pt x="3995203" y="3590341"/>
+                  </a:lnTo>
+                  <a:lnTo>
+                    <a:pt x="4072837" y="3595079"/>
+                  </a:lnTo>
+                  <a:lnTo>
+                    <a:pt x="4150471" y="3599457"/>
+                  </a:lnTo>
+                  <a:lnTo>
+                    <a:pt x="4228105" y="3603501"/>
+                  </a:lnTo>
+                  <a:lnTo>
+                    <a:pt x="4305739" y="3607238"/>
+                  </a:lnTo>
+                  <a:lnTo>
+                    <a:pt x="4383373" y="3610691"/>
+                  </a:lnTo>
+                  <a:lnTo>
+                    <a:pt x="4461008" y="3613882"/>
+                  </a:lnTo>
+                  <a:lnTo>
+                    <a:pt x="4538642" y="3616830"/>
+                  </a:lnTo>
+                  <a:lnTo>
+                    <a:pt x="4616276" y="3619553"/>
+                  </a:lnTo>
+                  <a:lnTo>
+                    <a:pt x="4693910" y="3622070"/>
+                  </a:lnTo>
+                  <a:lnTo>
+                    <a:pt x="4771544" y="3624395"/>
+                  </a:lnTo>
+                  <a:lnTo>
+                    <a:pt x="4849178" y="3626543"/>
+                  </a:lnTo>
+                  <a:lnTo>
+                    <a:pt x="4926812" y="3628528"/>
+                  </a:lnTo>
+                  <a:lnTo>
+                    <a:pt x="5004446" y="3630362"/>
+                  </a:lnTo>
+                  <a:lnTo>
+                    <a:pt x="5082080" y="3632056"/>
+                  </a:lnTo>
+                  <a:lnTo>
+                    <a:pt x="5159714" y="3633622"/>
+                  </a:lnTo>
+                  <a:lnTo>
+                    <a:pt x="5237348" y="3635068"/>
+                  </a:lnTo>
+                  <a:lnTo>
+                    <a:pt x="5314982" y="3636405"/>
+                  </a:lnTo>
+                  <a:lnTo>
+                    <a:pt x="5392616" y="3637640"/>
                   </a:lnTo>
                 </a:path>
               </a:pathLst>

--- a/docs/plots/carbo/jx_carbo_linsubhr_ratio_throm3.pptx
+++ b/docs/plots/carbo/jx_carbo_linsubhr_ratio_throm3.pptx
@@ -3019,7 +3019,7 @@
                     <a:pt x="2635295" y="482474"/>
                   </a:lnTo>
                   <a:lnTo>
-                    <a:pt x="2712930" y="879299"/>
+                    <a:pt x="2712930" y="879300"/>
                   </a:lnTo>
                   <a:lnTo>
                     <a:pt x="2790564" y="1226452"/>
@@ -3031,13 +3031,13 @@
                     <a:pt x="2945832" y="1795833"/>
                   </a:lnTo>
                   <a:lnTo>
-                    <a:pt x="3023466" y="2028258"/>
-                  </a:lnTo>
-                  <a:lnTo>
-                    <a:pt x="3101100" y="2231590"/>
-                  </a:lnTo>
-                  <a:lnTo>
-                    <a:pt x="3178734" y="2409470"/>
+                    <a:pt x="3023466" y="2028259"/>
+                  </a:lnTo>
+                  <a:lnTo>
+                    <a:pt x="3101100" y="2231591"/>
+                  </a:lnTo>
+                  <a:lnTo>
+                    <a:pt x="3178734" y="2409471"/>
                   </a:lnTo>
                   <a:lnTo>
                     <a:pt x="3256368" y="2565084"/>
@@ -3079,7 +3079,7 @@
                     <a:pt x="4187976" y="2977118"/>
                   </a:lnTo>
                   <a:lnTo>
-                    <a:pt x="4265610" y="2993442"/>
+                    <a:pt x="4265610" y="2993441"/>
                   </a:lnTo>
                   <a:lnTo>
                     <a:pt x="4343244" y="3009370"/>
@@ -3139,7 +3139,7 @@
                     <a:pt x="5740657" y="3238471"/>
                   </a:lnTo>
                   <a:lnTo>
-                    <a:pt x="5818291" y="3248479"/>
+                    <a:pt x="5818291" y="3248478"/>
                   </a:lnTo>
                   <a:lnTo>
                     <a:pt x="5895925" y="3258245"/>
@@ -3148,7 +3148,7 @@
                     <a:pt x="5973559" y="3267775"/>
                   </a:lnTo>
                   <a:lnTo>
-                    <a:pt x="6051193" y="3277075"/>
+                    <a:pt x="6051193" y="3277074"/>
                   </a:lnTo>
                   <a:lnTo>
                     <a:pt x="6128827" y="3286150"/>
@@ -3163,7 +3163,7 @@
                     <a:pt x="6361730" y="3312080"/>
                   </a:lnTo>
                   <a:lnTo>
-                    <a:pt x="6439364" y="3320310"/>
+                    <a:pt x="6439364" y="3320309"/>
                   </a:lnTo>
                   <a:lnTo>
                     <a:pt x="6516998" y="3328340"/>
@@ -3175,7 +3175,7 @@
                     <a:pt x="6672266" y="3343823"/>
                   </a:lnTo>
                   <a:lnTo>
-                    <a:pt x="6749900" y="3351286"/>
+                    <a:pt x="6749900" y="3351285"/>
                   </a:lnTo>
                   <a:lnTo>
                     <a:pt x="6827534" y="3358567"/>
@@ -3184,7 +3184,7 @@
                     <a:pt x="6905168" y="3365673"/>
                   </a:lnTo>
                   <a:lnTo>
-                    <a:pt x="6982802" y="3372608"/>
+                    <a:pt x="6982802" y="3372607"/>
                   </a:lnTo>
                   <a:lnTo>
                     <a:pt x="7060436" y="3379374"/>
@@ -3346,7 +3346,7 @@
                     <a:pt x="3722172" y="3165137"/>
                   </a:lnTo>
                   <a:lnTo>
-                    <a:pt x="3644538" y="3095382"/>
+                    <a:pt x="3644538" y="3095381"/>
                   </a:lnTo>
                   <a:lnTo>
                     <a:pt x="3566904" y="3015645"/>
@@ -3379,7 +3379,7 @@
                     <a:pt x="2868198" y="2628803"/>
                   </a:lnTo>
                   <a:lnTo>
-                    <a:pt x="2790564" y="2603450"/>
+                    <a:pt x="2790564" y="2603451"/>
                   </a:lnTo>
                   <a:lnTo>
                     <a:pt x="2712930" y="2577470"/>
@@ -3409,7 +3409,7 @@
                     <a:pt x="2091857" y="2345081"/>
                   </a:lnTo>
                   <a:lnTo>
-                    <a:pt x="2014223" y="2312703"/>
+                    <a:pt x="2014223" y="2312704"/>
                   </a:lnTo>
                   <a:lnTo>
                     <a:pt x="1936589" y="2279524"/>
@@ -3430,13 +3430,13 @@
                     <a:pt x="1548419" y="2100888"/>
                   </a:lnTo>
                   <a:lnTo>
-                    <a:pt x="1470785" y="2062463"/>
-                  </a:lnTo>
-                  <a:lnTo>
-                    <a:pt x="1393151" y="2023087"/>
-                  </a:lnTo>
-                  <a:lnTo>
-                    <a:pt x="1315517" y="1982736"/>
+                    <a:pt x="1470785" y="2062464"/>
+                  </a:lnTo>
+                  <a:lnTo>
+                    <a:pt x="1393151" y="2023088"/>
+                  </a:lnTo>
+                  <a:lnTo>
+                    <a:pt x="1315517" y="1982737"/>
                   </a:lnTo>
                   <a:lnTo>
                     <a:pt x="1237883" y="1941386"/>
@@ -3448,7 +3448,7 @@
                     <a:pt x="1082615" y="1855589"/>
                   </a:lnTo>
                   <a:lnTo>
-                    <a:pt x="1004981" y="1811090"/>
+                    <a:pt x="1004981" y="1811091"/>
                   </a:lnTo>
                   <a:lnTo>
                     <a:pt x="927346" y="1765490"/>
@@ -3457,37 +3457,37 @@
                     <a:pt x="849712" y="1718760"/>
                   </a:lnTo>
                   <a:lnTo>
-                    <a:pt x="772078" y="1670873"/>
+                    <a:pt x="772078" y="1670874"/>
                   </a:lnTo>
                   <a:lnTo>
                     <a:pt x="694444" y="1621801"/>
                   </a:lnTo>
                   <a:lnTo>
-                    <a:pt x="616810" y="1571513"/>
-                  </a:lnTo>
-                  <a:lnTo>
-                    <a:pt x="539176" y="1519980"/>
-                  </a:lnTo>
-                  <a:lnTo>
-                    <a:pt x="461542" y="1467171"/>
+                    <a:pt x="616810" y="1571514"/>
+                  </a:lnTo>
+                  <a:lnTo>
+                    <a:pt x="539176" y="1519981"/>
+                  </a:lnTo>
+                  <a:lnTo>
+                    <a:pt x="461542" y="1467172"/>
                   </a:lnTo>
                   <a:lnTo>
                     <a:pt x="383908" y="1413055"/>
                   </a:lnTo>
                   <a:lnTo>
-                    <a:pt x="306274" y="1357598"/>
-                  </a:lnTo>
-                  <a:lnTo>
-                    <a:pt x="228640" y="1300768"/>
-                  </a:lnTo>
-                  <a:lnTo>
-                    <a:pt x="151006" y="1242531"/>
-                  </a:lnTo>
-                  <a:lnTo>
-                    <a:pt x="73372" y="1182852"/>
-                  </a:lnTo>
-                  <a:lnTo>
-                    <a:pt x="0" y="1125052"/>
+                    <a:pt x="306274" y="1357599"/>
+                  </a:lnTo>
+                  <a:lnTo>
+                    <a:pt x="228640" y="1300769"/>
+                  </a:lnTo>
+                  <a:lnTo>
+                    <a:pt x="151006" y="1242532"/>
+                  </a:lnTo>
+                  <a:lnTo>
+                    <a:pt x="73372" y="1182853"/>
+                  </a:lnTo>
+                  <a:lnTo>
+                    <a:pt x="0" y="1125053"/>
                   </a:lnTo>
                   <a:close/>
                 </a:path>
@@ -3530,7 +3530,7 @@
                     <a:pt x="81956" y="482474"/>
                   </a:lnTo>
                   <a:lnTo>
-                    <a:pt x="159590" y="879299"/>
+                    <a:pt x="159590" y="879300"/>
                   </a:lnTo>
                   <a:lnTo>
                     <a:pt x="237224" y="1226452"/>
@@ -3542,13 +3542,13 @@
                     <a:pt x="392492" y="1795833"/>
                   </a:lnTo>
                   <a:lnTo>
-                    <a:pt x="470126" y="2028258"/>
-                  </a:lnTo>
-                  <a:lnTo>
-                    <a:pt x="547760" y="2231590"/>
-                  </a:lnTo>
-                  <a:lnTo>
-                    <a:pt x="625394" y="2409470"/>
+                    <a:pt x="470126" y="2028259"/>
+                  </a:lnTo>
+                  <a:lnTo>
+                    <a:pt x="547760" y="2231591"/>
+                  </a:lnTo>
+                  <a:lnTo>
+                    <a:pt x="625394" y="2409471"/>
                   </a:lnTo>
                   <a:lnTo>
                     <a:pt x="703028" y="2565084"/>
@@ -3557,10 +3557,10 @@
                     <a:pt x="780662" y="2701219"/>
                   </a:lnTo>
                   <a:lnTo>
-                    <a:pt x="858296" y="2789920"/>
-                  </a:lnTo>
-                  <a:lnTo>
-                    <a:pt x="935930" y="2810767"/>
+                    <a:pt x="858297" y="2789920"/>
+                  </a:lnTo>
+                  <a:lnTo>
+                    <a:pt x="935931" y="2810767"/>
                   </a:lnTo>
                   <a:lnTo>
                     <a:pt x="1013565" y="2831110"/>
@@ -3590,7 +3590,7 @@
                     <a:pt x="1634637" y="2977118"/>
                   </a:lnTo>
                   <a:lnTo>
-                    <a:pt x="1712271" y="2993442"/>
+                    <a:pt x="1712271" y="2993441"/>
                   </a:lnTo>
                   <a:lnTo>
                     <a:pt x="1789905" y="3009370"/>
@@ -3623,13 +3623,13 @@
                     <a:pt x="2488611" y="3136478"/>
                   </a:lnTo>
                   <a:lnTo>
-                    <a:pt x="2566245" y="3148951"/>
-                  </a:lnTo>
-                  <a:lnTo>
-                    <a:pt x="2643879" y="3161122"/>
-                  </a:lnTo>
-                  <a:lnTo>
-                    <a:pt x="2721513" y="3172999"/>
+                    <a:pt x="2566246" y="3148951"/>
+                  </a:lnTo>
+                  <a:lnTo>
+                    <a:pt x="2643880" y="3161122"/>
+                  </a:lnTo>
+                  <a:lnTo>
+                    <a:pt x="2721514" y="3172999"/>
                   </a:lnTo>
                   <a:lnTo>
                     <a:pt x="2799148" y="3184589"/>
@@ -3650,7 +3650,7 @@
                     <a:pt x="3187318" y="3238471"/>
                   </a:lnTo>
                   <a:lnTo>
-                    <a:pt x="3264952" y="3248479"/>
+                    <a:pt x="3264952" y="3248478"/>
                   </a:lnTo>
                   <a:lnTo>
                     <a:pt x="3342586" y="3258245"/>
@@ -3659,7 +3659,7 @@
                     <a:pt x="3420220" y="3267775"/>
                   </a:lnTo>
                   <a:lnTo>
-                    <a:pt x="3497854" y="3277075"/>
+                    <a:pt x="3497854" y="3277074"/>
                   </a:lnTo>
                   <a:lnTo>
                     <a:pt x="3575488" y="3286150"/>
@@ -3674,7 +3674,7 @@
                     <a:pt x="3808390" y="3312080"/>
                   </a:lnTo>
                   <a:lnTo>
-                    <a:pt x="3886024" y="3320310"/>
+                    <a:pt x="3886024" y="3320309"/>
                   </a:lnTo>
                   <a:lnTo>
                     <a:pt x="3963658" y="3328340"/>
@@ -3686,16 +3686,16 @@
                     <a:pt x="4118926" y="3343823"/>
                   </a:lnTo>
                   <a:lnTo>
-                    <a:pt x="4196560" y="3351286"/>
-                  </a:lnTo>
-                  <a:lnTo>
-                    <a:pt x="4274194" y="3358567"/>
-                  </a:lnTo>
-                  <a:lnTo>
-                    <a:pt x="4351828" y="3365673"/>
-                  </a:lnTo>
-                  <a:lnTo>
-                    <a:pt x="4429462" y="3372608"/>
+                    <a:pt x="4196560" y="3351285"/>
+                  </a:lnTo>
+                  <a:lnTo>
+                    <a:pt x="4274195" y="3358567"/>
+                  </a:lnTo>
+                  <a:lnTo>
+                    <a:pt x="4351829" y="3365673"/>
+                  </a:lnTo>
+                  <a:lnTo>
+                    <a:pt x="4429463" y="3372607"/>
                   </a:lnTo>
                   <a:lnTo>
                     <a:pt x="4507097" y="3379374"/>
@@ -3730,147 +3730,147 @@
           </p:nvSpPr>
           <p:spPr>
             <a:xfrm>
-              <a:off x="817517" y="3021616"/>
-              <a:ext cx="7370972" cy="2526682"/>
+              <a:off x="817517" y="3021617"/>
+              <a:ext cx="7370972" cy="2526681"/>
             </a:xfrm>
             <a:custGeom>
               <a:avLst/>
               <a:pathLst>
-                <a:path w="7370972" h="2526682">
+                <a:path w="7370972" h="2526681">
                   <a:moveTo>
-                    <a:pt x="7370972" y="2526682"/>
+                    <a:pt x="7370972" y="2526681"/>
                   </a:moveTo>
                   <a:lnTo>
-                    <a:pt x="7293338" y="2526552"/>
-                  </a:lnTo>
-                  <a:lnTo>
-                    <a:pt x="7215704" y="2526404"/>
-                  </a:lnTo>
-                  <a:lnTo>
-                    <a:pt x="7138070" y="2526234"/>
-                  </a:lnTo>
-                  <a:lnTo>
-                    <a:pt x="7060436" y="2526040"/>
-                  </a:lnTo>
-                  <a:lnTo>
-                    <a:pt x="6982802" y="2525818"/>
-                  </a:lnTo>
-                  <a:lnTo>
-                    <a:pt x="6905168" y="2525564"/>
-                  </a:lnTo>
-                  <a:lnTo>
-                    <a:pt x="6827534" y="2525274"/>
-                  </a:lnTo>
-                  <a:lnTo>
-                    <a:pt x="6749900" y="2524943"/>
-                  </a:lnTo>
-                  <a:lnTo>
-                    <a:pt x="6672266" y="2524564"/>
-                  </a:lnTo>
-                  <a:lnTo>
-                    <a:pt x="6594632" y="2524131"/>
-                  </a:lnTo>
-                  <a:lnTo>
-                    <a:pt x="6516998" y="2523636"/>
-                  </a:lnTo>
-                  <a:lnTo>
-                    <a:pt x="6439364" y="2523070"/>
-                  </a:lnTo>
-                  <a:lnTo>
-                    <a:pt x="6361730" y="2522423"/>
+                    <a:pt x="7293338" y="2526551"/>
+                  </a:lnTo>
+                  <a:lnTo>
+                    <a:pt x="7215704" y="2526403"/>
+                  </a:lnTo>
+                  <a:lnTo>
+                    <a:pt x="7138070" y="2526233"/>
+                  </a:lnTo>
+                  <a:lnTo>
+                    <a:pt x="7060436" y="2526039"/>
+                  </a:lnTo>
+                  <a:lnTo>
+                    <a:pt x="6982802" y="2525817"/>
+                  </a:lnTo>
+                  <a:lnTo>
+                    <a:pt x="6905168" y="2525563"/>
+                  </a:lnTo>
+                  <a:lnTo>
+                    <a:pt x="6827534" y="2525273"/>
+                  </a:lnTo>
+                  <a:lnTo>
+                    <a:pt x="6749900" y="2524942"/>
+                  </a:lnTo>
+                  <a:lnTo>
+                    <a:pt x="6672266" y="2524563"/>
+                  </a:lnTo>
+                  <a:lnTo>
+                    <a:pt x="6594632" y="2524130"/>
+                  </a:lnTo>
+                  <a:lnTo>
+                    <a:pt x="6516998" y="2523635"/>
+                  </a:lnTo>
+                  <a:lnTo>
+                    <a:pt x="6439364" y="2523069"/>
+                  </a:lnTo>
+                  <a:lnTo>
+                    <a:pt x="6361730" y="2522422"/>
                   </a:lnTo>
                   <a:lnTo>
                     <a:pt x="6284096" y="2521683"/>
                   </a:lnTo>
                   <a:lnTo>
-                    <a:pt x="6206462" y="2520838"/>
-                  </a:lnTo>
-                  <a:lnTo>
-                    <a:pt x="6128827" y="2519872"/>
-                  </a:lnTo>
-                  <a:lnTo>
-                    <a:pt x="6051193" y="2518768"/>
-                  </a:lnTo>
-                  <a:lnTo>
-                    <a:pt x="5973559" y="2517505"/>
-                  </a:lnTo>
-                  <a:lnTo>
-                    <a:pt x="5895925" y="2516062"/>
+                    <a:pt x="6206462" y="2520837"/>
+                  </a:lnTo>
+                  <a:lnTo>
+                    <a:pt x="6128827" y="2519871"/>
+                  </a:lnTo>
+                  <a:lnTo>
+                    <a:pt x="6051193" y="2518767"/>
+                  </a:lnTo>
+                  <a:lnTo>
+                    <a:pt x="5973559" y="2517504"/>
+                  </a:lnTo>
+                  <a:lnTo>
+                    <a:pt x="5895925" y="2516061"/>
                   </a:lnTo>
                   <a:lnTo>
                     <a:pt x="5818291" y="2514412"/>
                   </a:lnTo>
                   <a:lnTo>
-                    <a:pt x="5740657" y="2512527"/>
+                    <a:pt x="5740657" y="2512526"/>
                   </a:lnTo>
                   <a:lnTo>
                     <a:pt x="5663023" y="2510371"/>
                   </a:lnTo>
                   <a:lnTo>
-                    <a:pt x="5585389" y="2507908"/>
-                  </a:lnTo>
-                  <a:lnTo>
-                    <a:pt x="5507755" y="2505091"/>
-                  </a:lnTo>
-                  <a:lnTo>
-                    <a:pt x="5430121" y="2501872"/>
-                  </a:lnTo>
-                  <a:lnTo>
-                    <a:pt x="5352487" y="2498192"/>
+                    <a:pt x="5585389" y="2507907"/>
+                  </a:lnTo>
+                  <a:lnTo>
+                    <a:pt x="5507755" y="2505090"/>
+                  </a:lnTo>
+                  <a:lnTo>
+                    <a:pt x="5430121" y="2501871"/>
+                  </a:lnTo>
+                  <a:lnTo>
+                    <a:pt x="5352487" y="2498191"/>
                   </a:lnTo>
                   <a:lnTo>
                     <a:pt x="5274853" y="2493985"/>
                   </a:lnTo>
                   <a:lnTo>
-                    <a:pt x="5197219" y="2489177"/>
-                  </a:lnTo>
-                  <a:lnTo>
-                    <a:pt x="5119585" y="2483681"/>
-                  </a:lnTo>
-                  <a:lnTo>
-                    <a:pt x="5041951" y="2477398"/>
-                  </a:lnTo>
-                  <a:lnTo>
-                    <a:pt x="4964317" y="2470216"/>
-                  </a:lnTo>
-                  <a:lnTo>
-                    <a:pt x="4886683" y="2462006"/>
-                  </a:lnTo>
-                  <a:lnTo>
-                    <a:pt x="4809049" y="2452622"/>
-                  </a:lnTo>
-                  <a:lnTo>
-                    <a:pt x="4731415" y="2441895"/>
+                    <a:pt x="5197219" y="2489176"/>
+                  </a:lnTo>
+                  <a:lnTo>
+                    <a:pt x="5119585" y="2483680"/>
+                  </a:lnTo>
+                  <a:lnTo>
+                    <a:pt x="5041951" y="2477397"/>
+                  </a:lnTo>
+                  <a:lnTo>
+                    <a:pt x="4964317" y="2470215"/>
+                  </a:lnTo>
+                  <a:lnTo>
+                    <a:pt x="4886683" y="2462005"/>
+                  </a:lnTo>
+                  <a:lnTo>
+                    <a:pt x="4809049" y="2452621"/>
+                  </a:lnTo>
+                  <a:lnTo>
+                    <a:pt x="4731415" y="2441894"/>
                   </a:lnTo>
                   <a:lnTo>
                     <a:pt x="4653781" y="2429633"/>
                   </a:lnTo>
                   <a:lnTo>
-                    <a:pt x="4576147" y="2415617"/>
+                    <a:pt x="4576147" y="2415616"/>
                   </a:lnTo>
                   <a:lnTo>
                     <a:pt x="4498513" y="2399595"/>
                   </a:lnTo>
                   <a:lnTo>
-                    <a:pt x="4420879" y="2381281"/>
+                    <a:pt x="4420879" y="2381280"/>
                   </a:lnTo>
                   <a:lnTo>
                     <a:pt x="4343244" y="2360346"/>
                   </a:lnTo>
                   <a:lnTo>
-                    <a:pt x="4265610" y="2336416"/>
-                  </a:lnTo>
-                  <a:lnTo>
-                    <a:pt x="4187976" y="2309062"/>
-                  </a:lnTo>
-                  <a:lnTo>
-                    <a:pt x="4110342" y="2277794"/>
+                    <a:pt x="4265610" y="2336415"/>
+                  </a:lnTo>
+                  <a:lnTo>
+                    <a:pt x="4187976" y="2309061"/>
+                  </a:lnTo>
+                  <a:lnTo>
+                    <a:pt x="4110342" y="2277793"/>
                   </a:lnTo>
                   <a:lnTo>
                     <a:pt x="4032708" y="2242051"/>
                   </a:lnTo>
                   <a:lnTo>
-                    <a:pt x="3955074" y="2201195"/>
+                    <a:pt x="3955074" y="2201194"/>
                   </a:lnTo>
                   <a:lnTo>
                     <a:pt x="3877440" y="2154492"/>
@@ -3879,82 +3879,82 @@
                     <a:pt x="3799806" y="2101107"/>
                   </a:lnTo>
                   <a:lnTo>
-                    <a:pt x="3722172" y="2040084"/>
-                  </a:lnTo>
-                  <a:lnTo>
-                    <a:pt x="3644538" y="1970329"/>
-                  </a:lnTo>
-                  <a:lnTo>
-                    <a:pt x="3566904" y="1890593"/>
-                  </a:lnTo>
-                  <a:lnTo>
-                    <a:pt x="3489270" y="1799448"/>
-                  </a:lnTo>
-                  <a:lnTo>
-                    <a:pt x="3411636" y="1695261"/>
-                  </a:lnTo>
-                  <a:lnTo>
-                    <a:pt x="3334002" y="1643505"/>
-                  </a:lnTo>
-                  <a:lnTo>
-                    <a:pt x="3256368" y="1621613"/>
+                    <a:pt x="3722172" y="2040083"/>
+                  </a:lnTo>
+                  <a:lnTo>
+                    <a:pt x="3644538" y="1970328"/>
+                  </a:lnTo>
+                  <a:lnTo>
+                    <a:pt x="3566904" y="1890592"/>
+                  </a:lnTo>
+                  <a:lnTo>
+                    <a:pt x="3489270" y="1799447"/>
+                  </a:lnTo>
+                  <a:lnTo>
+                    <a:pt x="3411636" y="1695260"/>
+                  </a:lnTo>
+                  <a:lnTo>
+                    <a:pt x="3334002" y="1643504"/>
+                  </a:lnTo>
+                  <a:lnTo>
+                    <a:pt x="3256368" y="1621612"/>
                   </a:lnTo>
                   <a:lnTo>
                     <a:pt x="3178734" y="1599179"/>
                   </a:lnTo>
                   <a:lnTo>
-                    <a:pt x="3101100" y="1576190"/>
-                  </a:lnTo>
-                  <a:lnTo>
-                    <a:pt x="3023466" y="1552632"/>
-                  </a:lnTo>
-                  <a:lnTo>
-                    <a:pt x="2945832" y="1528490"/>
-                  </a:lnTo>
-                  <a:lnTo>
-                    <a:pt x="2868198" y="1503750"/>
-                  </a:lnTo>
-                  <a:lnTo>
-                    <a:pt x="2790564" y="1478398"/>
-                  </a:lnTo>
-                  <a:lnTo>
-                    <a:pt x="2712930" y="1452418"/>
-                  </a:lnTo>
-                  <a:lnTo>
-                    <a:pt x="2635295" y="1425794"/>
-                  </a:lnTo>
-                  <a:lnTo>
-                    <a:pt x="2557661" y="1398512"/>
+                    <a:pt x="3101100" y="1576189"/>
+                  </a:lnTo>
+                  <a:lnTo>
+                    <a:pt x="3023466" y="1552631"/>
+                  </a:lnTo>
+                  <a:lnTo>
+                    <a:pt x="2945832" y="1528489"/>
+                  </a:lnTo>
+                  <a:lnTo>
+                    <a:pt x="2868198" y="1503749"/>
+                  </a:lnTo>
+                  <a:lnTo>
+                    <a:pt x="2790564" y="1478397"/>
+                  </a:lnTo>
+                  <a:lnTo>
+                    <a:pt x="2712930" y="1452417"/>
+                  </a:lnTo>
+                  <a:lnTo>
+                    <a:pt x="2635295" y="1425793"/>
+                  </a:lnTo>
+                  <a:lnTo>
+                    <a:pt x="2557661" y="1398511"/>
                   </a:lnTo>
                   <a:lnTo>
                     <a:pt x="2480027" y="1370553"/>
                   </a:lnTo>
                   <a:lnTo>
-                    <a:pt x="2402393" y="1341903"/>
-                  </a:lnTo>
-                  <a:lnTo>
-                    <a:pt x="2324759" y="1312543"/>
-                  </a:lnTo>
-                  <a:lnTo>
-                    <a:pt x="2247125" y="1282456"/>
-                  </a:lnTo>
-                  <a:lnTo>
-                    <a:pt x="2169491" y="1251624"/>
-                  </a:lnTo>
-                  <a:lnTo>
-                    <a:pt x="2091857" y="1220029"/>
-                  </a:lnTo>
-                  <a:lnTo>
-                    <a:pt x="2014223" y="1187651"/>
+                    <a:pt x="2402393" y="1341902"/>
+                  </a:lnTo>
+                  <a:lnTo>
+                    <a:pt x="2324759" y="1312542"/>
+                  </a:lnTo>
+                  <a:lnTo>
+                    <a:pt x="2247125" y="1282455"/>
+                  </a:lnTo>
+                  <a:lnTo>
+                    <a:pt x="2169491" y="1251623"/>
+                  </a:lnTo>
+                  <a:lnTo>
+                    <a:pt x="2091857" y="1220028"/>
+                  </a:lnTo>
+                  <a:lnTo>
+                    <a:pt x="2014223" y="1187650"/>
                   </a:lnTo>
                   <a:lnTo>
                     <a:pt x="1936589" y="1154471"/>
                   </a:lnTo>
                   <a:lnTo>
-                    <a:pt x="1858955" y="1120470"/>
-                  </a:lnTo>
-                  <a:lnTo>
-                    <a:pt x="1781321" y="1085627"/>
+                    <a:pt x="1858955" y="1120469"/>
+                  </a:lnTo>
+                  <a:lnTo>
+                    <a:pt x="1781321" y="1085626"/>
                   </a:lnTo>
                   <a:lnTo>
                     <a:pt x="1703687" y="1049921"/>
@@ -3966,13 +3966,13 @@
                     <a:pt x="1548419" y="975835"/>
                   </a:lnTo>
                   <a:lnTo>
-                    <a:pt x="1470785" y="937411"/>
-                  </a:lnTo>
-                  <a:lnTo>
-                    <a:pt x="1393151" y="898035"/>
-                  </a:lnTo>
-                  <a:lnTo>
-                    <a:pt x="1315517" y="857684"/>
+                    <a:pt x="1470785" y="937410"/>
+                  </a:lnTo>
+                  <a:lnTo>
+                    <a:pt x="1393151" y="898034"/>
+                  </a:lnTo>
+                  <a:lnTo>
+                    <a:pt x="1315517" y="857683"/>
                   </a:lnTo>
                   <a:lnTo>
                     <a:pt x="1237883" y="816333"/>
@@ -3987,7 +3987,7 @@
                     <a:pt x="1004981" y="686037"/>
                   </a:lnTo>
                   <a:lnTo>
-                    <a:pt x="927346" y="640437"/>
+                    <a:pt x="927346" y="640436"/>
                   </a:lnTo>
                   <a:lnTo>
                     <a:pt x="849712" y="593707"/>
@@ -4005,7 +4005,7 @@
                     <a:pt x="539176" y="394927"/>
                   </a:lnTo>
                   <a:lnTo>
-                    <a:pt x="461542" y="342119"/>
+                    <a:pt x="461542" y="342118"/>
                   </a:lnTo>
                   <a:lnTo>
                     <a:pt x="383908" y="288002"/>
@@ -4043,7 +4043,7 @@
           </p:nvSpPr>
           <p:spPr>
             <a:xfrm>
-              <a:off x="2795874" y="1896563"/>
+              <a:off x="2795873" y="1896563"/>
               <a:ext cx="5392616" cy="3637640"/>
             </a:xfrm>
             <a:custGeom>
@@ -4057,10 +4057,10 @@
                     <a:pt x="35867" y="133810"/>
                   </a:lnTo>
                   <a:lnTo>
-                    <a:pt x="113501" y="401412"/>
-                  </a:lnTo>
-                  <a:lnTo>
-                    <a:pt x="191135" y="648663"/>
+                    <a:pt x="113501" y="401413"/>
+                  </a:lnTo>
+                  <a:lnTo>
+                    <a:pt x="191135" y="648664"/>
                   </a:lnTo>
                   <a:lnTo>
                     <a:pt x="268769" y="877112"/>
@@ -4069,31 +4069,31 @@
                     <a:pt x="346403" y="1088187"/>
                   </a:lnTo>
                   <a:lnTo>
-                    <a:pt x="424037" y="1283210"/>
+                    <a:pt x="424037" y="1283211"/>
                   </a:lnTo>
                   <a:lnTo>
                     <a:pt x="501671" y="1463402"/>
                   </a:lnTo>
                   <a:lnTo>
-                    <a:pt x="579305" y="1629891"/>
-                  </a:lnTo>
-                  <a:lnTo>
-                    <a:pt x="656939" y="1783718"/>
-                  </a:lnTo>
-                  <a:lnTo>
-                    <a:pt x="734573" y="1925847"/>
-                  </a:lnTo>
-                  <a:lnTo>
-                    <a:pt x="812207" y="2057168"/>
-                  </a:lnTo>
-                  <a:lnTo>
-                    <a:pt x="889841" y="2178501"/>
+                    <a:pt x="579306" y="1629891"/>
+                  </a:lnTo>
+                  <a:lnTo>
+                    <a:pt x="656940" y="1783718"/>
+                  </a:lnTo>
+                  <a:lnTo>
+                    <a:pt x="734574" y="1925847"/>
+                  </a:lnTo>
+                  <a:lnTo>
+                    <a:pt x="812208" y="2057168"/>
+                  </a:lnTo>
+                  <a:lnTo>
+                    <a:pt x="889842" y="2178501"/>
                   </a:lnTo>
                   <a:lnTo>
                     <a:pt x="967476" y="2290608"/>
                   </a:lnTo>
                   <a:lnTo>
-                    <a:pt x="1045110" y="2394188"/>
+                    <a:pt x="1045110" y="2394189"/>
                   </a:lnTo>
                   <a:lnTo>
                     <a:pt x="1122744" y="2489892"/>
@@ -4141,28 +4141,28 @@
                     <a:pt x="2209620" y="3268428"/>
                   </a:lnTo>
                   <a:lnTo>
-                    <a:pt x="2287254" y="3297647"/>
-                  </a:lnTo>
-                  <a:lnTo>
-                    <a:pt x="2364888" y="3324644"/>
-                  </a:lnTo>
-                  <a:lnTo>
-                    <a:pt x="2442522" y="3349588"/>
-                  </a:lnTo>
-                  <a:lnTo>
-                    <a:pt x="2520156" y="3372635"/>
-                  </a:lnTo>
-                  <a:lnTo>
-                    <a:pt x="2597790" y="3393929"/>
-                  </a:lnTo>
-                  <a:lnTo>
-                    <a:pt x="2675424" y="3413604"/>
+                    <a:pt x="2287255" y="3297647"/>
+                  </a:lnTo>
+                  <a:lnTo>
+                    <a:pt x="2364889" y="3324644"/>
+                  </a:lnTo>
+                  <a:lnTo>
+                    <a:pt x="2442523" y="3349588"/>
+                  </a:lnTo>
+                  <a:lnTo>
+                    <a:pt x="2520157" y="3372635"/>
+                  </a:lnTo>
+                  <a:lnTo>
+                    <a:pt x="2597791" y="3393929"/>
+                  </a:lnTo>
+                  <a:lnTo>
+                    <a:pt x="2675425" y="3413604"/>
                   </a:lnTo>
                   <a:lnTo>
                     <a:pt x="2753059" y="3431782"/>
                   </a:lnTo>
                   <a:lnTo>
-                    <a:pt x="2830693" y="3448579"/>
+                    <a:pt x="2830693" y="3448578"/>
                   </a:lnTo>
                   <a:lnTo>
                     <a:pt x="2908327" y="3464097"/>
@@ -4183,7 +4183,7 @@
                     <a:pt x="3296497" y="3525684"/>
                   </a:lnTo>
                   <a:lnTo>
-                    <a:pt x="3374131" y="3535340"/>
+                    <a:pt x="3374131" y="3535339"/>
                   </a:lnTo>
                   <a:lnTo>
                     <a:pt x="3451765" y="3544260"/>
@@ -4210,19 +4210,19 @@
                     <a:pt x="3995203" y="3590341"/>
                   </a:lnTo>
                   <a:lnTo>
-                    <a:pt x="4072837" y="3595079"/>
-                  </a:lnTo>
-                  <a:lnTo>
-                    <a:pt x="4150471" y="3599457"/>
-                  </a:lnTo>
-                  <a:lnTo>
-                    <a:pt x="4228105" y="3603501"/>
-                  </a:lnTo>
-                  <a:lnTo>
-                    <a:pt x="4305739" y="3607238"/>
-                  </a:lnTo>
-                  <a:lnTo>
-                    <a:pt x="4383373" y="3610691"/>
+                    <a:pt x="4072838" y="3595079"/>
+                  </a:lnTo>
+                  <a:lnTo>
+                    <a:pt x="4150472" y="3599457"/>
+                  </a:lnTo>
+                  <a:lnTo>
+                    <a:pt x="4228106" y="3603501"/>
+                  </a:lnTo>
+                  <a:lnTo>
+                    <a:pt x="4305740" y="3607238"/>
+                  </a:lnTo>
+                  <a:lnTo>
+                    <a:pt x="4383374" y="3610691"/>
                   </a:lnTo>
                   <a:lnTo>
                     <a:pt x="4461008" y="3613882"/>

--- a/docs/plots/carbo/jx_carbo_linsubhr_ratio_throm3.pptx
+++ b/docs/plots/carbo/jx_carbo_linsubhr_ratio_throm3.pptx
@@ -2271,7 +2271,7 @@
           </p:nvSpPr>
           <p:spPr>
             <a:xfrm>
-              <a:off x="817517" y="5114368"/>
+              <a:off x="817517" y="5142518"/>
               <a:ext cx="7799693" cy="0"/>
             </a:xfrm>
             <a:custGeom>
@@ -2314,7 +2314,7 @@
           </p:nvSpPr>
           <p:spPr>
             <a:xfrm>
-              <a:off x="817517" y="4244691"/>
+              <a:off x="817517" y="4313054"/>
               <a:ext cx="7799693" cy="0"/>
             </a:xfrm>
             <a:custGeom>
@@ -2357,7 +2357,7 @@
           </p:nvSpPr>
           <p:spPr>
             <a:xfrm>
-              <a:off x="817517" y="3375014"/>
+              <a:off x="817517" y="3483591"/>
               <a:ext cx="7799693" cy="0"/>
             </a:xfrm>
             <a:custGeom>
@@ -2400,7 +2400,7 @@
           </p:nvSpPr>
           <p:spPr>
             <a:xfrm>
-              <a:off x="817517" y="2505337"/>
+              <a:off x="817517" y="2654127"/>
               <a:ext cx="7799693" cy="0"/>
             </a:xfrm>
             <a:custGeom>
@@ -2443,15 +2443,15 @@
           </p:nvSpPr>
           <p:spPr>
             <a:xfrm>
-              <a:off x="1615213" y="1896563"/>
-              <a:ext cx="0" cy="3826579"/>
+              <a:off x="1615213" y="2073503"/>
+              <a:ext cx="0" cy="3649639"/>
             </a:xfrm>
             <a:custGeom>
               <a:avLst/>
               <a:pathLst>
-                <a:path w="0" h="3826579">
+                <a:path w="0" h="3649639">
                   <a:moveTo>
-                    <a:pt x="0" y="3826579"/>
+                    <a:pt x="0" y="3649639"/>
                   </a:moveTo>
                   <a:lnTo>
                     <a:pt x="0" y="0"/>
@@ -2486,15 +2486,15 @@
           </p:nvSpPr>
           <p:spPr>
             <a:xfrm>
-              <a:off x="3387871" y="1896563"/>
-              <a:ext cx="0" cy="3826579"/>
+              <a:off x="3387871" y="2073503"/>
+              <a:ext cx="0" cy="3649639"/>
             </a:xfrm>
             <a:custGeom>
               <a:avLst/>
               <a:pathLst>
-                <a:path w="0" h="3826579">
+                <a:path w="0" h="3649639">
                   <a:moveTo>
-                    <a:pt x="0" y="3826579"/>
+                    <a:pt x="0" y="3649639"/>
                   </a:moveTo>
                   <a:lnTo>
                     <a:pt x="0" y="0"/>
@@ -2529,15 +2529,15 @@
           </p:nvSpPr>
           <p:spPr>
             <a:xfrm>
-              <a:off x="5160528" y="1896563"/>
-              <a:ext cx="0" cy="3826579"/>
+              <a:off x="5160528" y="2073503"/>
+              <a:ext cx="0" cy="3649639"/>
             </a:xfrm>
             <a:custGeom>
               <a:avLst/>
               <a:pathLst>
-                <a:path w="0" h="3826579">
+                <a:path w="0" h="3649639">
                   <a:moveTo>
-                    <a:pt x="0" y="3826579"/>
+                    <a:pt x="0" y="3649639"/>
                   </a:moveTo>
                   <a:lnTo>
                     <a:pt x="0" y="0"/>
@@ -2572,15 +2572,15 @@
           </p:nvSpPr>
           <p:spPr>
             <a:xfrm>
-              <a:off x="6933186" y="1896563"/>
-              <a:ext cx="0" cy="3826579"/>
+              <a:off x="6933186" y="2073503"/>
+              <a:ext cx="0" cy="3649639"/>
             </a:xfrm>
             <a:custGeom>
               <a:avLst/>
               <a:pathLst>
-                <a:path w="0" h="3826579">
+                <a:path w="0" h="3649639">
                   <a:moveTo>
-                    <a:pt x="0" y="3826579"/>
+                    <a:pt x="0" y="3649639"/>
                   </a:moveTo>
                   <a:lnTo>
                     <a:pt x="0" y="0"/>
@@ -2615,7 +2615,7 @@
           </p:nvSpPr>
           <p:spPr>
             <a:xfrm>
-              <a:off x="817517" y="5549207"/>
+              <a:off x="817517" y="5557249"/>
               <a:ext cx="7799693" cy="0"/>
             </a:xfrm>
             <a:custGeom>
@@ -2658,7 +2658,7 @@
           </p:nvSpPr>
           <p:spPr>
             <a:xfrm>
-              <a:off x="817517" y="4679530"/>
+              <a:off x="817517" y="4727786"/>
               <a:ext cx="7799693" cy="0"/>
             </a:xfrm>
             <a:custGeom>
@@ -2701,7 +2701,7 @@
           </p:nvSpPr>
           <p:spPr>
             <a:xfrm>
-              <a:off x="817517" y="3809853"/>
+              <a:off x="817517" y="3898322"/>
               <a:ext cx="7799693" cy="0"/>
             </a:xfrm>
             <a:custGeom>
@@ -2744,7 +2744,7 @@
           </p:nvSpPr>
           <p:spPr>
             <a:xfrm>
-              <a:off x="817517" y="2940175"/>
+              <a:off x="817517" y="3068859"/>
               <a:ext cx="7799693" cy="0"/>
             </a:xfrm>
             <a:custGeom>
@@ -2787,7 +2787,7 @@
           </p:nvSpPr>
           <p:spPr>
             <a:xfrm>
-              <a:off x="817517" y="2070498"/>
+              <a:off x="817517" y="2239395"/>
               <a:ext cx="7799693" cy="0"/>
             </a:xfrm>
             <a:custGeom>
@@ -2830,15 +2830,15 @@
           </p:nvSpPr>
           <p:spPr>
             <a:xfrm>
-              <a:off x="2501542" y="1896563"/>
-              <a:ext cx="0" cy="3826579"/>
+              <a:off x="2501542" y="2073503"/>
+              <a:ext cx="0" cy="3649639"/>
             </a:xfrm>
             <a:custGeom>
               <a:avLst/>
               <a:pathLst>
-                <a:path w="0" h="3826579">
+                <a:path w="0" h="3649639">
                   <a:moveTo>
-                    <a:pt x="0" y="3826579"/>
+                    <a:pt x="0" y="3649639"/>
                   </a:moveTo>
                   <a:lnTo>
                     <a:pt x="0" y="0"/>
@@ -2873,15 +2873,15 @@
           </p:nvSpPr>
           <p:spPr>
             <a:xfrm>
-              <a:off x="4274200" y="1896563"/>
-              <a:ext cx="0" cy="3826579"/>
+              <a:off x="4274200" y="2073503"/>
+              <a:ext cx="0" cy="3649639"/>
             </a:xfrm>
             <a:custGeom>
               <a:avLst/>
               <a:pathLst>
-                <a:path w="0" h="3826579">
+                <a:path w="0" h="3649639">
                   <a:moveTo>
-                    <a:pt x="0" y="3826579"/>
+                    <a:pt x="0" y="3649639"/>
                   </a:moveTo>
                   <a:lnTo>
                     <a:pt x="0" y="0"/>
@@ -2916,15 +2916,15 @@
           </p:nvSpPr>
           <p:spPr>
             <a:xfrm>
-              <a:off x="6046857" y="1896563"/>
-              <a:ext cx="0" cy="3826579"/>
+              <a:off x="6046857" y="2073503"/>
+              <a:ext cx="0" cy="3649639"/>
             </a:xfrm>
             <a:custGeom>
               <a:avLst/>
               <a:pathLst>
-                <a:path w="0" h="3826579">
+                <a:path w="0" h="3649639">
                   <a:moveTo>
-                    <a:pt x="0" y="3826579"/>
+                    <a:pt x="0" y="3649639"/>
                   </a:moveTo>
                   <a:lnTo>
                     <a:pt x="0" y="0"/>
@@ -2959,15 +2959,15 @@
           </p:nvSpPr>
           <p:spPr>
             <a:xfrm>
-              <a:off x="7819515" y="1896563"/>
-              <a:ext cx="0" cy="3826579"/>
+              <a:off x="7819515" y="2073503"/>
+              <a:ext cx="0" cy="3649639"/>
             </a:xfrm>
             <a:custGeom>
               <a:avLst/>
               <a:pathLst>
-                <a:path w="0" h="3826579">
+                <a:path w="0" h="3649639">
                   <a:moveTo>
-                    <a:pt x="0" y="3826579"/>
+                    <a:pt x="0" y="3649639"/>
                   </a:moveTo>
                   <a:lnTo>
                     <a:pt x="0" y="0"/>
@@ -3002,492 +3002,492 @@
           </p:nvSpPr>
           <p:spPr>
             <a:xfrm>
-              <a:off x="817517" y="1896563"/>
-              <a:ext cx="7370972" cy="3651735"/>
+              <a:off x="817517" y="2073503"/>
+              <a:ext cx="7370972" cy="3482880"/>
             </a:xfrm>
             <a:custGeom>
               <a:avLst/>
               <a:pathLst>
-                <a:path w="7370972" h="3651735">
+                <a:path w="7370972" h="3482880">
                   <a:moveTo>
                     <a:pt x="2553339" y="0"/>
                   </a:moveTo>
                   <a:lnTo>
-                    <a:pt x="2557661" y="28869"/>
-                  </a:lnTo>
-                  <a:lnTo>
-                    <a:pt x="2635295" y="482474"/>
-                  </a:lnTo>
-                  <a:lnTo>
-                    <a:pt x="2712930" y="879300"/>
-                  </a:lnTo>
-                  <a:lnTo>
-                    <a:pt x="2790564" y="1226452"/>
-                  </a:lnTo>
-                  <a:lnTo>
-                    <a:pt x="2868198" y="1530150"/>
-                  </a:lnTo>
-                  <a:lnTo>
-                    <a:pt x="2945832" y="1795833"/>
-                  </a:lnTo>
-                  <a:lnTo>
-                    <a:pt x="3023466" y="2028259"/>
-                  </a:lnTo>
-                  <a:lnTo>
-                    <a:pt x="3101100" y="2231591"/>
-                  </a:lnTo>
-                  <a:lnTo>
-                    <a:pt x="3178734" y="2409471"/>
-                  </a:lnTo>
-                  <a:lnTo>
-                    <a:pt x="3256368" y="2565084"/>
-                  </a:lnTo>
-                  <a:lnTo>
-                    <a:pt x="3334002" y="2701219"/>
-                  </a:lnTo>
-                  <a:lnTo>
-                    <a:pt x="3411636" y="2789920"/>
-                  </a:lnTo>
-                  <a:lnTo>
-                    <a:pt x="3489270" y="2810767"/>
-                  </a:lnTo>
-                  <a:lnTo>
-                    <a:pt x="3566904" y="2831110"/>
-                  </a:lnTo>
-                  <a:lnTo>
-                    <a:pt x="3644538" y="2850961"/>
-                  </a:lnTo>
-                  <a:lnTo>
-                    <a:pt x="3722172" y="2870332"/>
-                  </a:lnTo>
-                  <a:lnTo>
-                    <a:pt x="3799806" y="2889236"/>
-                  </a:lnTo>
-                  <a:lnTo>
-                    <a:pt x="3877440" y="2907683"/>
-                  </a:lnTo>
-                  <a:lnTo>
-                    <a:pt x="3955074" y="2925684"/>
-                  </a:lnTo>
-                  <a:lnTo>
-                    <a:pt x="4032708" y="2943250"/>
-                  </a:lnTo>
-                  <a:lnTo>
-                    <a:pt x="4110342" y="2960391"/>
-                  </a:lnTo>
-                  <a:lnTo>
-                    <a:pt x="4187976" y="2977118"/>
-                  </a:lnTo>
-                  <a:lnTo>
-                    <a:pt x="4265610" y="2993441"/>
-                  </a:lnTo>
-                  <a:lnTo>
-                    <a:pt x="4343244" y="3009370"/>
-                  </a:lnTo>
-                  <a:lnTo>
-                    <a:pt x="4420879" y="3024914"/>
-                  </a:lnTo>
-                  <a:lnTo>
-                    <a:pt x="4498513" y="3040082"/>
-                  </a:lnTo>
-                  <a:lnTo>
-                    <a:pt x="4576147" y="3054884"/>
-                  </a:lnTo>
-                  <a:lnTo>
-                    <a:pt x="4653781" y="3069328"/>
-                  </a:lnTo>
-                  <a:lnTo>
-                    <a:pt x="4731415" y="3083423"/>
-                  </a:lnTo>
-                  <a:lnTo>
-                    <a:pt x="4809049" y="3097177"/>
-                  </a:lnTo>
-                  <a:lnTo>
-                    <a:pt x="4886683" y="3110599"/>
-                  </a:lnTo>
-                  <a:lnTo>
-                    <a:pt x="4964317" y="3123697"/>
-                  </a:lnTo>
-                  <a:lnTo>
-                    <a:pt x="5041951" y="3136478"/>
-                  </a:lnTo>
-                  <a:lnTo>
-                    <a:pt x="5119585" y="3148951"/>
-                  </a:lnTo>
-                  <a:lnTo>
-                    <a:pt x="5197219" y="3161122"/>
-                  </a:lnTo>
-                  <a:lnTo>
-                    <a:pt x="5274853" y="3172999"/>
-                  </a:lnTo>
-                  <a:lnTo>
-                    <a:pt x="5352487" y="3184589"/>
-                  </a:lnTo>
-                  <a:lnTo>
-                    <a:pt x="5430121" y="3195899"/>
-                  </a:lnTo>
-                  <a:lnTo>
-                    <a:pt x="5507755" y="3206935"/>
-                  </a:lnTo>
-                  <a:lnTo>
-                    <a:pt x="5585389" y="3217705"/>
-                  </a:lnTo>
-                  <a:lnTo>
-                    <a:pt x="5663023" y="3228215"/>
-                  </a:lnTo>
-                  <a:lnTo>
-                    <a:pt x="5740657" y="3238471"/>
-                  </a:lnTo>
-                  <a:lnTo>
-                    <a:pt x="5818291" y="3248478"/>
-                  </a:lnTo>
-                  <a:lnTo>
-                    <a:pt x="5895925" y="3258245"/>
-                  </a:lnTo>
-                  <a:lnTo>
-                    <a:pt x="5973559" y="3267775"/>
-                  </a:lnTo>
-                  <a:lnTo>
-                    <a:pt x="6051193" y="3277074"/>
-                  </a:lnTo>
-                  <a:lnTo>
-                    <a:pt x="6128827" y="3286150"/>
-                  </a:lnTo>
-                  <a:lnTo>
-                    <a:pt x="6206462" y="3295005"/>
-                  </a:lnTo>
-                  <a:lnTo>
-                    <a:pt x="6284096" y="3303647"/>
-                  </a:lnTo>
-                  <a:lnTo>
-                    <a:pt x="6361730" y="3312080"/>
-                  </a:lnTo>
-                  <a:lnTo>
-                    <a:pt x="6439364" y="3320309"/>
-                  </a:lnTo>
-                  <a:lnTo>
-                    <a:pt x="6516998" y="3328340"/>
-                  </a:lnTo>
-                  <a:lnTo>
-                    <a:pt x="6594632" y="3336176"/>
-                  </a:lnTo>
-                  <a:lnTo>
-                    <a:pt x="6672266" y="3343823"/>
-                  </a:lnTo>
-                  <a:lnTo>
-                    <a:pt x="6749900" y="3351285"/>
-                  </a:lnTo>
-                  <a:lnTo>
-                    <a:pt x="6827534" y="3358567"/>
-                  </a:lnTo>
-                  <a:lnTo>
-                    <a:pt x="6905168" y="3365673"/>
-                  </a:lnTo>
-                  <a:lnTo>
-                    <a:pt x="6982802" y="3372607"/>
-                  </a:lnTo>
-                  <a:lnTo>
-                    <a:pt x="7060436" y="3379374"/>
-                  </a:lnTo>
-                  <a:lnTo>
-                    <a:pt x="7138070" y="3385977"/>
-                  </a:lnTo>
-                  <a:lnTo>
-                    <a:pt x="7215704" y="3392421"/>
-                  </a:lnTo>
-                  <a:lnTo>
-                    <a:pt x="7293338" y="3398709"/>
-                  </a:lnTo>
-                  <a:lnTo>
-                    <a:pt x="7370972" y="3404845"/>
-                  </a:lnTo>
-                  <a:lnTo>
-                    <a:pt x="7370972" y="3651735"/>
-                  </a:lnTo>
-                  <a:lnTo>
-                    <a:pt x="7293338" y="3651605"/>
-                  </a:lnTo>
-                  <a:lnTo>
-                    <a:pt x="7215704" y="3651456"/>
-                  </a:lnTo>
-                  <a:lnTo>
-                    <a:pt x="7138070" y="3651286"/>
-                  </a:lnTo>
-                  <a:lnTo>
-                    <a:pt x="7060436" y="3651092"/>
-                  </a:lnTo>
-                  <a:lnTo>
-                    <a:pt x="6982802" y="3650870"/>
-                  </a:lnTo>
-                  <a:lnTo>
-                    <a:pt x="6905168" y="3650617"/>
-                  </a:lnTo>
-                  <a:lnTo>
-                    <a:pt x="6827534" y="3650327"/>
-                  </a:lnTo>
-                  <a:lnTo>
-                    <a:pt x="6749900" y="3649995"/>
-                  </a:lnTo>
-                  <a:lnTo>
-                    <a:pt x="6672266" y="3649616"/>
-                  </a:lnTo>
-                  <a:lnTo>
-                    <a:pt x="6594632" y="3649183"/>
-                  </a:lnTo>
-                  <a:lnTo>
-                    <a:pt x="6516998" y="3648688"/>
-                  </a:lnTo>
-                  <a:lnTo>
-                    <a:pt x="6439364" y="3648122"/>
-                  </a:lnTo>
-                  <a:lnTo>
-                    <a:pt x="6361730" y="3647476"/>
-                  </a:lnTo>
-                  <a:lnTo>
-                    <a:pt x="6284096" y="3646736"/>
-                  </a:lnTo>
-                  <a:lnTo>
-                    <a:pt x="6206462" y="3645891"/>
-                  </a:lnTo>
-                  <a:lnTo>
-                    <a:pt x="6128827" y="3644925"/>
-                  </a:lnTo>
-                  <a:lnTo>
-                    <a:pt x="6051193" y="3643820"/>
-                  </a:lnTo>
-                  <a:lnTo>
-                    <a:pt x="5973559" y="3642558"/>
-                  </a:lnTo>
-                  <a:lnTo>
-                    <a:pt x="5895925" y="3641115"/>
-                  </a:lnTo>
-                  <a:lnTo>
-                    <a:pt x="5818291" y="3639465"/>
-                  </a:lnTo>
-                  <a:lnTo>
-                    <a:pt x="5740657" y="3637580"/>
-                  </a:lnTo>
-                  <a:lnTo>
-                    <a:pt x="5663023" y="3635424"/>
-                  </a:lnTo>
-                  <a:lnTo>
-                    <a:pt x="5585389" y="3632960"/>
-                  </a:lnTo>
-                  <a:lnTo>
-                    <a:pt x="5507755" y="3630144"/>
-                  </a:lnTo>
-                  <a:lnTo>
-                    <a:pt x="5430121" y="3626925"/>
-                  </a:lnTo>
-                  <a:lnTo>
-                    <a:pt x="5352487" y="3623245"/>
-                  </a:lnTo>
-                  <a:lnTo>
-                    <a:pt x="5274853" y="3619038"/>
-                  </a:lnTo>
-                  <a:lnTo>
-                    <a:pt x="5197219" y="3614230"/>
-                  </a:lnTo>
-                  <a:lnTo>
-                    <a:pt x="5119585" y="3608733"/>
-                  </a:lnTo>
-                  <a:lnTo>
-                    <a:pt x="5041951" y="3602450"/>
-                  </a:lnTo>
-                  <a:lnTo>
-                    <a:pt x="4964317" y="3595268"/>
-                  </a:lnTo>
-                  <a:lnTo>
-                    <a:pt x="4886683" y="3587059"/>
-                  </a:lnTo>
-                  <a:lnTo>
-                    <a:pt x="4809049" y="3577675"/>
-                  </a:lnTo>
-                  <a:lnTo>
-                    <a:pt x="4731415" y="3566948"/>
-                  </a:lnTo>
-                  <a:lnTo>
-                    <a:pt x="4653781" y="3554686"/>
-                  </a:lnTo>
-                  <a:lnTo>
-                    <a:pt x="4576147" y="3540670"/>
-                  </a:lnTo>
-                  <a:lnTo>
-                    <a:pt x="4498513" y="3524648"/>
-                  </a:lnTo>
-                  <a:lnTo>
-                    <a:pt x="4420879" y="3506334"/>
-                  </a:lnTo>
-                  <a:lnTo>
-                    <a:pt x="4343244" y="3485399"/>
-                  </a:lnTo>
-                  <a:lnTo>
-                    <a:pt x="4265610" y="3461469"/>
-                  </a:lnTo>
-                  <a:lnTo>
-                    <a:pt x="4187976" y="3434115"/>
-                  </a:lnTo>
-                  <a:lnTo>
-                    <a:pt x="4110342" y="3402846"/>
-                  </a:lnTo>
-                  <a:lnTo>
-                    <a:pt x="4032708" y="3367104"/>
-                  </a:lnTo>
-                  <a:lnTo>
-                    <a:pt x="3955074" y="3326248"/>
-                  </a:lnTo>
-                  <a:lnTo>
-                    <a:pt x="3877440" y="3279545"/>
-                  </a:lnTo>
-                  <a:lnTo>
-                    <a:pt x="3799806" y="3226160"/>
-                  </a:lnTo>
-                  <a:lnTo>
-                    <a:pt x="3722172" y="3165137"/>
-                  </a:lnTo>
-                  <a:lnTo>
-                    <a:pt x="3644538" y="3095381"/>
-                  </a:lnTo>
-                  <a:lnTo>
-                    <a:pt x="3566904" y="3015645"/>
-                  </a:lnTo>
-                  <a:lnTo>
-                    <a:pt x="3489270" y="2924500"/>
-                  </a:lnTo>
-                  <a:lnTo>
-                    <a:pt x="3411636" y="2820314"/>
-                  </a:lnTo>
-                  <a:lnTo>
-                    <a:pt x="3334002" y="2768558"/>
-                  </a:lnTo>
-                  <a:lnTo>
-                    <a:pt x="3256368" y="2746666"/>
-                  </a:lnTo>
-                  <a:lnTo>
-                    <a:pt x="3178734" y="2724232"/>
-                  </a:lnTo>
-                  <a:lnTo>
-                    <a:pt x="3101100" y="2701243"/>
-                  </a:lnTo>
-                  <a:lnTo>
-                    <a:pt x="3023466" y="2677684"/>
-                  </a:lnTo>
-                  <a:lnTo>
-                    <a:pt x="2945832" y="2653542"/>
-                  </a:lnTo>
-                  <a:lnTo>
-                    <a:pt x="2868198" y="2628803"/>
-                  </a:lnTo>
-                  <a:lnTo>
-                    <a:pt x="2790564" y="2603451"/>
-                  </a:lnTo>
-                  <a:lnTo>
-                    <a:pt x="2712930" y="2577470"/>
-                  </a:lnTo>
-                  <a:lnTo>
-                    <a:pt x="2635295" y="2550847"/>
-                  </a:lnTo>
-                  <a:lnTo>
-                    <a:pt x="2557661" y="2523564"/>
-                  </a:lnTo>
-                  <a:lnTo>
-                    <a:pt x="2480027" y="2495606"/>
-                  </a:lnTo>
-                  <a:lnTo>
-                    <a:pt x="2402393" y="2466956"/>
-                  </a:lnTo>
-                  <a:lnTo>
-                    <a:pt x="2324759" y="2437596"/>
-                  </a:lnTo>
-                  <a:lnTo>
-                    <a:pt x="2247125" y="2407509"/>
-                  </a:lnTo>
-                  <a:lnTo>
-                    <a:pt x="2169491" y="2376677"/>
-                  </a:lnTo>
-                  <a:lnTo>
-                    <a:pt x="2091857" y="2345081"/>
-                  </a:lnTo>
-                  <a:lnTo>
-                    <a:pt x="2014223" y="2312704"/>
-                  </a:lnTo>
-                  <a:lnTo>
-                    <a:pt x="1936589" y="2279524"/>
-                  </a:lnTo>
-                  <a:lnTo>
-                    <a:pt x="1858955" y="2245523"/>
-                  </a:lnTo>
-                  <a:lnTo>
-                    <a:pt x="1781321" y="2210680"/>
-                  </a:lnTo>
-                  <a:lnTo>
-                    <a:pt x="1703687" y="2174974"/>
-                  </a:lnTo>
-                  <a:lnTo>
-                    <a:pt x="1626053" y="2138384"/>
-                  </a:lnTo>
-                  <a:lnTo>
-                    <a:pt x="1548419" y="2100888"/>
-                  </a:lnTo>
-                  <a:lnTo>
-                    <a:pt x="1470785" y="2062464"/>
-                  </a:lnTo>
-                  <a:lnTo>
-                    <a:pt x="1393151" y="2023088"/>
-                  </a:lnTo>
-                  <a:lnTo>
-                    <a:pt x="1315517" y="1982737"/>
-                  </a:lnTo>
-                  <a:lnTo>
-                    <a:pt x="1237883" y="1941386"/>
-                  </a:lnTo>
-                  <a:lnTo>
-                    <a:pt x="1160249" y="1899012"/>
-                  </a:lnTo>
-                  <a:lnTo>
-                    <a:pt x="1082615" y="1855589"/>
-                  </a:lnTo>
-                  <a:lnTo>
-                    <a:pt x="1004981" y="1811091"/>
-                  </a:lnTo>
-                  <a:lnTo>
-                    <a:pt x="927346" y="1765490"/>
-                  </a:lnTo>
-                  <a:lnTo>
-                    <a:pt x="849712" y="1718760"/>
-                  </a:lnTo>
-                  <a:lnTo>
-                    <a:pt x="772078" y="1670874"/>
-                  </a:lnTo>
-                  <a:lnTo>
-                    <a:pt x="694444" y="1621801"/>
-                  </a:lnTo>
-                  <a:lnTo>
-                    <a:pt x="616810" y="1571514"/>
-                  </a:lnTo>
-                  <a:lnTo>
-                    <a:pt x="539176" y="1519981"/>
-                  </a:lnTo>
-                  <a:lnTo>
-                    <a:pt x="461542" y="1467172"/>
-                  </a:lnTo>
-                  <a:lnTo>
-                    <a:pt x="383908" y="1413055"/>
-                  </a:lnTo>
-                  <a:lnTo>
-                    <a:pt x="306274" y="1357599"/>
-                  </a:lnTo>
-                  <a:lnTo>
-                    <a:pt x="228640" y="1300769"/>
-                  </a:lnTo>
-                  <a:lnTo>
-                    <a:pt x="151006" y="1242532"/>
-                  </a:lnTo>
-                  <a:lnTo>
-                    <a:pt x="73372" y="1182853"/>
-                  </a:lnTo>
-                  <a:lnTo>
-                    <a:pt x="0" y="1125053"/>
+                    <a:pt x="2557661" y="27534"/>
+                  </a:lnTo>
+                  <a:lnTo>
+                    <a:pt x="2635295" y="460165"/>
+                  </a:lnTo>
+                  <a:lnTo>
+                    <a:pt x="2712930" y="838641"/>
+                  </a:lnTo>
+                  <a:lnTo>
+                    <a:pt x="2790564" y="1169741"/>
+                  </a:lnTo>
+                  <a:lnTo>
+                    <a:pt x="2868198" y="1459397"/>
+                  </a:lnTo>
+                  <a:lnTo>
+                    <a:pt x="2945832" y="1712794"/>
+                  </a:lnTo>
+                  <a:lnTo>
+                    <a:pt x="3023466" y="1934473"/>
+                  </a:lnTo>
+                  <a:lnTo>
+                    <a:pt x="3101100" y="2128403"/>
+                  </a:lnTo>
+                  <a:lnTo>
+                    <a:pt x="3178734" y="2298057"/>
+                  </a:lnTo>
+                  <a:lnTo>
+                    <a:pt x="3256368" y="2446476"/>
+                  </a:lnTo>
+                  <a:lnTo>
+                    <a:pt x="3334002" y="2576316"/>
+                  </a:lnTo>
+                  <a:lnTo>
+                    <a:pt x="3411636" y="2660915"/>
+                  </a:lnTo>
+                  <a:lnTo>
+                    <a:pt x="3489270" y="2680798"/>
+                  </a:lnTo>
+                  <a:lnTo>
+                    <a:pt x="3566904" y="2700200"/>
+                  </a:lnTo>
+                  <a:lnTo>
+                    <a:pt x="3644538" y="2719133"/>
+                  </a:lnTo>
+                  <a:lnTo>
+                    <a:pt x="3722172" y="2737609"/>
+                  </a:lnTo>
+                  <a:lnTo>
+                    <a:pt x="3799806" y="2755639"/>
+                  </a:lnTo>
+                  <a:lnTo>
+                    <a:pt x="3877440" y="2773232"/>
+                  </a:lnTo>
+                  <a:lnTo>
+                    <a:pt x="3955074" y="2790401"/>
+                  </a:lnTo>
+                  <a:lnTo>
+                    <a:pt x="4032708" y="2807155"/>
+                  </a:lnTo>
+                  <a:lnTo>
+                    <a:pt x="4110342" y="2823504"/>
+                  </a:lnTo>
+                  <a:lnTo>
+                    <a:pt x="4187976" y="2839457"/>
+                  </a:lnTo>
+                  <a:lnTo>
+                    <a:pt x="4265610" y="2855026"/>
+                  </a:lnTo>
+                  <a:lnTo>
+                    <a:pt x="4343244" y="2870218"/>
+                  </a:lnTo>
+                  <a:lnTo>
+                    <a:pt x="4420879" y="2885043"/>
+                  </a:lnTo>
+                  <a:lnTo>
+                    <a:pt x="4498513" y="2899510"/>
+                  </a:lnTo>
+                  <a:lnTo>
+                    <a:pt x="4576147" y="2913627"/>
+                  </a:lnTo>
+                  <a:lnTo>
+                    <a:pt x="4653781" y="2927403"/>
+                  </a:lnTo>
+                  <a:lnTo>
+                    <a:pt x="4731415" y="2940847"/>
+                  </a:lnTo>
+                  <a:lnTo>
+                    <a:pt x="4809049" y="2953965"/>
+                  </a:lnTo>
+                  <a:lnTo>
+                    <a:pt x="4886683" y="2966766"/>
+                  </a:lnTo>
+                  <a:lnTo>
+                    <a:pt x="4964317" y="2979259"/>
+                  </a:lnTo>
+                  <a:lnTo>
+                    <a:pt x="5041951" y="2991449"/>
+                  </a:lnTo>
+                  <a:lnTo>
+                    <a:pt x="5119585" y="3003344"/>
+                  </a:lnTo>
+                  <a:lnTo>
+                    <a:pt x="5197219" y="3014953"/>
+                  </a:lnTo>
+                  <a:lnTo>
+                    <a:pt x="5274853" y="3026280"/>
+                  </a:lnTo>
+                  <a:lnTo>
+                    <a:pt x="5352487" y="3037335"/>
+                  </a:lnTo>
+                  <a:lnTo>
+                    <a:pt x="5430121" y="3048121"/>
+                  </a:lnTo>
+                  <a:lnTo>
+                    <a:pt x="5507755" y="3058648"/>
+                  </a:lnTo>
+                  <a:lnTo>
+                    <a:pt x="5585389" y="3068920"/>
+                  </a:lnTo>
+                  <a:lnTo>
+                    <a:pt x="5663023" y="3078943"/>
+                  </a:lnTo>
+                  <a:lnTo>
+                    <a:pt x="5740657" y="3088725"/>
+                  </a:lnTo>
+                  <a:lnTo>
+                    <a:pt x="5818291" y="3098270"/>
+                  </a:lnTo>
+                  <a:lnTo>
+                    <a:pt x="5895925" y="3107585"/>
+                  </a:lnTo>
+                  <a:lnTo>
+                    <a:pt x="5973559" y="3116674"/>
+                  </a:lnTo>
+                  <a:lnTo>
+                    <a:pt x="6051193" y="3125544"/>
+                  </a:lnTo>
+                  <a:lnTo>
+                    <a:pt x="6128827" y="3134199"/>
+                  </a:lnTo>
+                  <a:lnTo>
+                    <a:pt x="6206462" y="3142646"/>
+                  </a:lnTo>
+                  <a:lnTo>
+                    <a:pt x="6284096" y="3150888"/>
+                  </a:lnTo>
+                  <a:lnTo>
+                    <a:pt x="6361730" y="3158931"/>
+                  </a:lnTo>
+                  <a:lnTo>
+                    <a:pt x="6439364" y="3166780"/>
+                  </a:lnTo>
+                  <a:lnTo>
+                    <a:pt x="6516998" y="3174439"/>
+                  </a:lnTo>
+                  <a:lnTo>
+                    <a:pt x="6594632" y="3181913"/>
+                  </a:lnTo>
+                  <a:lnTo>
+                    <a:pt x="6672266" y="3189206"/>
+                  </a:lnTo>
+                  <a:lnTo>
+                    <a:pt x="6749900" y="3196323"/>
+                  </a:lnTo>
+                  <a:lnTo>
+                    <a:pt x="6827534" y="3203268"/>
+                  </a:lnTo>
+                  <a:lnTo>
+                    <a:pt x="6905168" y="3210046"/>
+                  </a:lnTo>
+                  <a:lnTo>
+                    <a:pt x="6982802" y="3216659"/>
+                  </a:lnTo>
+                  <a:lnTo>
+                    <a:pt x="7060436" y="3223113"/>
+                  </a:lnTo>
+                  <a:lnTo>
+                    <a:pt x="7138070" y="3229411"/>
+                  </a:lnTo>
+                  <a:lnTo>
+                    <a:pt x="7215704" y="3235557"/>
+                  </a:lnTo>
+                  <a:lnTo>
+                    <a:pt x="7293338" y="3241554"/>
+                  </a:lnTo>
+                  <a:lnTo>
+                    <a:pt x="7370972" y="3247406"/>
+                  </a:lnTo>
+                  <a:lnTo>
+                    <a:pt x="7370972" y="3482880"/>
+                  </a:lnTo>
+                  <a:lnTo>
+                    <a:pt x="7293338" y="3482756"/>
+                  </a:lnTo>
+                  <a:lnTo>
+                    <a:pt x="7215704" y="3482614"/>
+                  </a:lnTo>
+                  <a:lnTo>
+                    <a:pt x="7138070" y="3482452"/>
+                  </a:lnTo>
+                  <a:lnTo>
+                    <a:pt x="7060436" y="3482267"/>
+                  </a:lnTo>
+                  <a:lnTo>
+                    <a:pt x="6982802" y="3482056"/>
+                  </a:lnTo>
+                  <a:lnTo>
+                    <a:pt x="6905168" y="3481814"/>
+                  </a:lnTo>
+                  <a:lnTo>
+                    <a:pt x="6827534" y="3481537"/>
+                  </a:lnTo>
+                  <a:lnTo>
+                    <a:pt x="6749900" y="3481221"/>
+                  </a:lnTo>
+                  <a:lnTo>
+                    <a:pt x="6672266" y="3480860"/>
+                  </a:lnTo>
+                  <a:lnTo>
+                    <a:pt x="6594632" y="3480446"/>
+                  </a:lnTo>
+                  <a:lnTo>
+                    <a:pt x="6516998" y="3479974"/>
+                  </a:lnTo>
+                  <a:lnTo>
+                    <a:pt x="6439364" y="3479435"/>
+                  </a:lnTo>
+                  <a:lnTo>
+                    <a:pt x="6361730" y="3478818"/>
+                  </a:lnTo>
+                  <a:lnTo>
+                    <a:pt x="6284096" y="3478112"/>
+                  </a:lnTo>
+                  <a:lnTo>
+                    <a:pt x="6206462" y="3477306"/>
+                  </a:lnTo>
+                  <a:lnTo>
+                    <a:pt x="6128827" y="3476385"/>
+                  </a:lnTo>
+                  <a:lnTo>
+                    <a:pt x="6051193" y="3475331"/>
+                  </a:lnTo>
+                  <a:lnTo>
+                    <a:pt x="5973559" y="3474127"/>
+                  </a:lnTo>
+                  <a:lnTo>
+                    <a:pt x="5895925" y="3472751"/>
+                  </a:lnTo>
+                  <a:lnTo>
+                    <a:pt x="5818291" y="3471178"/>
+                  </a:lnTo>
+                  <a:lnTo>
+                    <a:pt x="5740657" y="3469379"/>
+                  </a:lnTo>
+                  <a:lnTo>
+                    <a:pt x="5663023" y="3467323"/>
+                  </a:lnTo>
+                  <a:lnTo>
+                    <a:pt x="5585389" y="3464974"/>
+                  </a:lnTo>
+                  <a:lnTo>
+                    <a:pt x="5507755" y="3462287"/>
+                  </a:lnTo>
+                  <a:lnTo>
+                    <a:pt x="5430121" y="3459217"/>
+                  </a:lnTo>
+                  <a:lnTo>
+                    <a:pt x="5352487" y="3455707"/>
+                  </a:lnTo>
+                  <a:lnTo>
+                    <a:pt x="5274853" y="3451695"/>
+                  </a:lnTo>
+                  <a:lnTo>
+                    <a:pt x="5197219" y="3447109"/>
+                  </a:lnTo>
+                  <a:lnTo>
+                    <a:pt x="5119585" y="3441867"/>
+                  </a:lnTo>
+                  <a:lnTo>
+                    <a:pt x="5041951" y="3435874"/>
+                  </a:lnTo>
+                  <a:lnTo>
+                    <a:pt x="4964317" y="3429025"/>
+                  </a:lnTo>
+                  <a:lnTo>
+                    <a:pt x="4886683" y="3421195"/>
+                  </a:lnTo>
+                  <a:lnTo>
+                    <a:pt x="4809049" y="3412244"/>
+                  </a:lnTo>
+                  <a:lnTo>
+                    <a:pt x="4731415" y="3402014"/>
+                  </a:lnTo>
+                  <a:lnTo>
+                    <a:pt x="4653781" y="3390319"/>
+                  </a:lnTo>
+                  <a:lnTo>
+                    <a:pt x="4576147" y="3376951"/>
+                  </a:lnTo>
+                  <a:lnTo>
+                    <a:pt x="4498513" y="3361670"/>
+                  </a:lnTo>
+                  <a:lnTo>
+                    <a:pt x="4420879" y="3344202"/>
+                  </a:lnTo>
+                  <a:lnTo>
+                    <a:pt x="4343244" y="3324236"/>
+                  </a:lnTo>
+                  <a:lnTo>
+                    <a:pt x="4265610" y="3301412"/>
+                  </a:lnTo>
+                  <a:lnTo>
+                    <a:pt x="4187976" y="3275322"/>
+                  </a:lnTo>
+                  <a:lnTo>
+                    <a:pt x="4110342" y="3245500"/>
+                  </a:lnTo>
+                  <a:lnTo>
+                    <a:pt x="4032708" y="3211410"/>
+                  </a:lnTo>
+                  <a:lnTo>
+                    <a:pt x="3955074" y="3172443"/>
+                  </a:lnTo>
+                  <a:lnTo>
+                    <a:pt x="3877440" y="3127900"/>
+                  </a:lnTo>
+                  <a:lnTo>
+                    <a:pt x="3799806" y="3076984"/>
+                  </a:lnTo>
+                  <a:lnTo>
+                    <a:pt x="3722172" y="3018782"/>
+                  </a:lnTo>
+                  <a:lnTo>
+                    <a:pt x="3644538" y="2952252"/>
+                  </a:lnTo>
+                  <a:lnTo>
+                    <a:pt x="3566904" y="2876203"/>
+                  </a:lnTo>
+                  <a:lnTo>
+                    <a:pt x="3489270" y="2789272"/>
+                  </a:lnTo>
+                  <a:lnTo>
+                    <a:pt x="3411636" y="2689903"/>
+                  </a:lnTo>
+                  <a:lnTo>
+                    <a:pt x="3334002" y="2640541"/>
+                  </a:lnTo>
+                  <a:lnTo>
+                    <a:pt x="3256368" y="2619661"/>
+                  </a:lnTo>
+                  <a:lnTo>
+                    <a:pt x="3178734" y="2598265"/>
+                  </a:lnTo>
+                  <a:lnTo>
+                    <a:pt x="3101100" y="2576338"/>
+                  </a:lnTo>
+                  <a:lnTo>
+                    <a:pt x="3023466" y="2553869"/>
+                  </a:lnTo>
+                  <a:lnTo>
+                    <a:pt x="2945832" y="2530844"/>
+                  </a:lnTo>
+                  <a:lnTo>
+                    <a:pt x="2868198" y="2507248"/>
+                  </a:lnTo>
+                  <a:lnTo>
+                    <a:pt x="2790564" y="2483068"/>
+                  </a:lnTo>
+                  <a:lnTo>
+                    <a:pt x="2712930" y="2458289"/>
+                  </a:lnTo>
+                  <a:lnTo>
+                    <a:pt x="2635295" y="2432897"/>
+                  </a:lnTo>
+                  <a:lnTo>
+                    <a:pt x="2557661" y="2406876"/>
+                  </a:lnTo>
+                  <a:lnTo>
+                    <a:pt x="2480027" y="2380210"/>
+                  </a:lnTo>
+                  <a:lnTo>
+                    <a:pt x="2402393" y="2352885"/>
+                  </a:lnTo>
+                  <a:lnTo>
+                    <a:pt x="2324759" y="2324882"/>
+                  </a:lnTo>
+                  <a:lnTo>
+                    <a:pt x="2247125" y="2296186"/>
+                  </a:lnTo>
+                  <a:lnTo>
+                    <a:pt x="2169491" y="2266780"/>
+                  </a:lnTo>
+                  <a:lnTo>
+                    <a:pt x="2091857" y="2236646"/>
+                  </a:lnTo>
+                  <a:lnTo>
+                    <a:pt x="2014223" y="2205765"/>
+                  </a:lnTo>
+                  <a:lnTo>
+                    <a:pt x="1936589" y="2174120"/>
+                  </a:lnTo>
+                  <a:lnTo>
+                    <a:pt x="1858955" y="2141691"/>
+                  </a:lnTo>
+                  <a:lnTo>
+                    <a:pt x="1781321" y="2108459"/>
+                  </a:lnTo>
+                  <a:lnTo>
+                    <a:pt x="1703687" y="2074404"/>
+                  </a:lnTo>
+                  <a:lnTo>
+                    <a:pt x="1626053" y="2039506"/>
+                  </a:lnTo>
+                  <a:lnTo>
+                    <a:pt x="1548419" y="2003744"/>
+                  </a:lnTo>
+                  <a:lnTo>
+                    <a:pt x="1470785" y="1967096"/>
+                  </a:lnTo>
+                  <a:lnTo>
+                    <a:pt x="1393151" y="1929541"/>
+                  </a:lnTo>
+                  <a:lnTo>
+                    <a:pt x="1315517" y="1891056"/>
+                  </a:lnTo>
+                  <a:lnTo>
+                    <a:pt x="1237883" y="1851617"/>
+                  </a:lnTo>
+                  <a:lnTo>
+                    <a:pt x="1160249" y="1811203"/>
+                  </a:lnTo>
+                  <a:lnTo>
+                    <a:pt x="1082615" y="1769787"/>
+                  </a:lnTo>
+                  <a:lnTo>
+                    <a:pt x="1004981" y="1727346"/>
+                  </a:lnTo>
+                  <a:lnTo>
+                    <a:pt x="927346" y="1683854"/>
+                  </a:lnTo>
+                  <a:lnTo>
+                    <a:pt x="849712" y="1639286"/>
+                  </a:lnTo>
+                  <a:lnTo>
+                    <a:pt x="772078" y="1593613"/>
+                  </a:lnTo>
+                  <a:lnTo>
+                    <a:pt x="694444" y="1546810"/>
+                  </a:lnTo>
+                  <a:lnTo>
+                    <a:pt x="616810" y="1498847"/>
+                  </a:lnTo>
+                  <a:lnTo>
+                    <a:pt x="539176" y="1449697"/>
+                  </a:lnTo>
+                  <a:lnTo>
+                    <a:pt x="461542" y="1399330"/>
+                  </a:lnTo>
+                  <a:lnTo>
+                    <a:pt x="383908" y="1347716"/>
+                  </a:lnTo>
+                  <a:lnTo>
+                    <a:pt x="306274" y="1294824"/>
+                  </a:lnTo>
+                  <a:lnTo>
+                    <a:pt x="228640" y="1240622"/>
+                  </a:lnTo>
+                  <a:lnTo>
+                    <a:pt x="151006" y="1185078"/>
+                  </a:lnTo>
+                  <a:lnTo>
+                    <a:pt x="73372" y="1128158"/>
+                  </a:lnTo>
+                  <a:lnTo>
+                    <a:pt x="0" y="1073031"/>
                   </a:lnTo>
                   <a:close/>
                 </a:path>
@@ -3513,204 +3513,204 @@
           </p:nvSpPr>
           <p:spPr>
             <a:xfrm>
-              <a:off x="3370857" y="1896563"/>
-              <a:ext cx="4817633" cy="3404845"/>
+              <a:off x="3370857" y="2073503"/>
+              <a:ext cx="4817633" cy="3247406"/>
             </a:xfrm>
             <a:custGeom>
               <a:avLst/>
               <a:pathLst>
-                <a:path w="4817633" h="3404845">
+                <a:path w="4817633" h="3247406">
                   <a:moveTo>
                     <a:pt x="0" y="0"/>
                   </a:moveTo>
                   <a:lnTo>
-                    <a:pt x="4322" y="28869"/>
-                  </a:lnTo>
-                  <a:lnTo>
-                    <a:pt x="81956" y="482474"/>
-                  </a:lnTo>
-                  <a:lnTo>
-                    <a:pt x="159590" y="879300"/>
-                  </a:lnTo>
-                  <a:lnTo>
-                    <a:pt x="237224" y="1226452"/>
-                  </a:lnTo>
-                  <a:lnTo>
-                    <a:pt x="314858" y="1530150"/>
-                  </a:lnTo>
-                  <a:lnTo>
-                    <a:pt x="392492" y="1795833"/>
-                  </a:lnTo>
-                  <a:lnTo>
-                    <a:pt x="470126" y="2028259"/>
-                  </a:lnTo>
-                  <a:lnTo>
-                    <a:pt x="547760" y="2231591"/>
-                  </a:lnTo>
-                  <a:lnTo>
-                    <a:pt x="625394" y="2409471"/>
-                  </a:lnTo>
-                  <a:lnTo>
-                    <a:pt x="703028" y="2565084"/>
-                  </a:lnTo>
-                  <a:lnTo>
-                    <a:pt x="780662" y="2701219"/>
-                  </a:lnTo>
-                  <a:lnTo>
-                    <a:pt x="858297" y="2789920"/>
-                  </a:lnTo>
-                  <a:lnTo>
-                    <a:pt x="935931" y="2810767"/>
-                  </a:lnTo>
-                  <a:lnTo>
-                    <a:pt x="1013565" y="2831110"/>
-                  </a:lnTo>
-                  <a:lnTo>
-                    <a:pt x="1091199" y="2850961"/>
-                  </a:lnTo>
-                  <a:lnTo>
-                    <a:pt x="1168833" y="2870332"/>
-                  </a:lnTo>
-                  <a:lnTo>
-                    <a:pt x="1246467" y="2889236"/>
-                  </a:lnTo>
-                  <a:lnTo>
-                    <a:pt x="1324101" y="2907683"/>
-                  </a:lnTo>
-                  <a:lnTo>
-                    <a:pt x="1401735" y="2925684"/>
-                  </a:lnTo>
-                  <a:lnTo>
-                    <a:pt x="1479369" y="2943250"/>
-                  </a:lnTo>
-                  <a:lnTo>
-                    <a:pt x="1557003" y="2960391"/>
-                  </a:lnTo>
-                  <a:lnTo>
-                    <a:pt x="1634637" y="2977118"/>
-                  </a:lnTo>
-                  <a:lnTo>
-                    <a:pt x="1712271" y="2993441"/>
-                  </a:lnTo>
-                  <a:lnTo>
-                    <a:pt x="1789905" y="3009370"/>
-                  </a:lnTo>
-                  <a:lnTo>
-                    <a:pt x="1867539" y="3024914"/>
-                  </a:lnTo>
-                  <a:lnTo>
-                    <a:pt x="1945173" y="3040082"/>
-                  </a:lnTo>
-                  <a:lnTo>
-                    <a:pt x="2022807" y="3054884"/>
-                  </a:lnTo>
-                  <a:lnTo>
-                    <a:pt x="2100441" y="3069328"/>
-                  </a:lnTo>
-                  <a:lnTo>
-                    <a:pt x="2178075" y="3083423"/>
-                  </a:lnTo>
-                  <a:lnTo>
-                    <a:pt x="2255709" y="3097177"/>
-                  </a:lnTo>
-                  <a:lnTo>
-                    <a:pt x="2333343" y="3110599"/>
-                  </a:lnTo>
-                  <a:lnTo>
-                    <a:pt x="2410977" y="3123697"/>
-                  </a:lnTo>
-                  <a:lnTo>
-                    <a:pt x="2488611" y="3136478"/>
-                  </a:lnTo>
-                  <a:lnTo>
-                    <a:pt x="2566246" y="3148951"/>
-                  </a:lnTo>
-                  <a:lnTo>
-                    <a:pt x="2643880" y="3161122"/>
-                  </a:lnTo>
-                  <a:lnTo>
-                    <a:pt x="2721514" y="3172999"/>
-                  </a:lnTo>
-                  <a:lnTo>
-                    <a:pt x="2799148" y="3184589"/>
-                  </a:lnTo>
-                  <a:lnTo>
-                    <a:pt x="2876782" y="3195899"/>
-                  </a:lnTo>
-                  <a:lnTo>
-                    <a:pt x="2954416" y="3206935"/>
-                  </a:lnTo>
-                  <a:lnTo>
-                    <a:pt x="3032050" y="3217705"/>
-                  </a:lnTo>
-                  <a:lnTo>
-                    <a:pt x="3109684" y="3228215"/>
-                  </a:lnTo>
-                  <a:lnTo>
-                    <a:pt x="3187318" y="3238471"/>
-                  </a:lnTo>
-                  <a:lnTo>
-                    <a:pt x="3264952" y="3248478"/>
-                  </a:lnTo>
-                  <a:lnTo>
-                    <a:pt x="3342586" y="3258245"/>
-                  </a:lnTo>
-                  <a:lnTo>
-                    <a:pt x="3420220" y="3267775"/>
-                  </a:lnTo>
-                  <a:lnTo>
-                    <a:pt x="3497854" y="3277074"/>
-                  </a:lnTo>
-                  <a:lnTo>
-                    <a:pt x="3575488" y="3286150"/>
-                  </a:lnTo>
-                  <a:lnTo>
-                    <a:pt x="3653122" y="3295005"/>
-                  </a:lnTo>
-                  <a:lnTo>
-                    <a:pt x="3730756" y="3303647"/>
-                  </a:lnTo>
-                  <a:lnTo>
-                    <a:pt x="3808390" y="3312080"/>
-                  </a:lnTo>
-                  <a:lnTo>
-                    <a:pt x="3886024" y="3320309"/>
-                  </a:lnTo>
-                  <a:lnTo>
-                    <a:pt x="3963658" y="3328340"/>
-                  </a:lnTo>
-                  <a:lnTo>
-                    <a:pt x="4041292" y="3336176"/>
-                  </a:lnTo>
-                  <a:lnTo>
-                    <a:pt x="4118926" y="3343823"/>
-                  </a:lnTo>
-                  <a:lnTo>
-                    <a:pt x="4196560" y="3351285"/>
-                  </a:lnTo>
-                  <a:lnTo>
-                    <a:pt x="4274195" y="3358567"/>
-                  </a:lnTo>
-                  <a:lnTo>
-                    <a:pt x="4351829" y="3365673"/>
-                  </a:lnTo>
-                  <a:lnTo>
-                    <a:pt x="4429463" y="3372607"/>
-                  </a:lnTo>
-                  <a:lnTo>
-                    <a:pt x="4507097" y="3379374"/>
-                  </a:lnTo>
-                  <a:lnTo>
-                    <a:pt x="4584731" y="3385977"/>
-                  </a:lnTo>
-                  <a:lnTo>
-                    <a:pt x="4662365" y="3392421"/>
-                  </a:lnTo>
-                  <a:lnTo>
-                    <a:pt x="4739999" y="3398709"/>
-                  </a:lnTo>
-                  <a:lnTo>
-                    <a:pt x="4817633" y="3404845"/>
+                    <a:pt x="4322" y="27534"/>
+                  </a:lnTo>
+                  <a:lnTo>
+                    <a:pt x="81956" y="460165"/>
+                  </a:lnTo>
+                  <a:lnTo>
+                    <a:pt x="159590" y="838641"/>
+                  </a:lnTo>
+                  <a:lnTo>
+                    <a:pt x="237224" y="1169741"/>
+                  </a:lnTo>
+                  <a:lnTo>
+                    <a:pt x="314858" y="1459397"/>
+                  </a:lnTo>
+                  <a:lnTo>
+                    <a:pt x="392492" y="1712794"/>
+                  </a:lnTo>
+                  <a:lnTo>
+                    <a:pt x="470126" y="1934473"/>
+                  </a:lnTo>
+                  <a:lnTo>
+                    <a:pt x="547760" y="2128403"/>
+                  </a:lnTo>
+                  <a:lnTo>
+                    <a:pt x="625394" y="2298057"/>
+                  </a:lnTo>
+                  <a:lnTo>
+                    <a:pt x="703028" y="2446476"/>
+                  </a:lnTo>
+                  <a:lnTo>
+                    <a:pt x="780662" y="2576316"/>
+                  </a:lnTo>
+                  <a:lnTo>
+                    <a:pt x="858297" y="2660915"/>
+                  </a:lnTo>
+                  <a:lnTo>
+                    <a:pt x="935931" y="2680798"/>
+                  </a:lnTo>
+                  <a:lnTo>
+                    <a:pt x="1013565" y="2700200"/>
+                  </a:lnTo>
+                  <a:lnTo>
+                    <a:pt x="1091199" y="2719133"/>
+                  </a:lnTo>
+                  <a:lnTo>
+                    <a:pt x="1168833" y="2737609"/>
+                  </a:lnTo>
+                  <a:lnTo>
+                    <a:pt x="1246467" y="2755639"/>
+                  </a:lnTo>
+                  <a:lnTo>
+                    <a:pt x="1324101" y="2773232"/>
+                  </a:lnTo>
+                  <a:lnTo>
+                    <a:pt x="1401735" y="2790401"/>
+                  </a:lnTo>
+                  <a:lnTo>
+                    <a:pt x="1479369" y="2807155"/>
+                  </a:lnTo>
+                  <a:lnTo>
+                    <a:pt x="1557003" y="2823504"/>
+                  </a:lnTo>
+                  <a:lnTo>
+                    <a:pt x="1634637" y="2839457"/>
+                  </a:lnTo>
+                  <a:lnTo>
+                    <a:pt x="1712271" y="2855026"/>
+                  </a:lnTo>
+                  <a:lnTo>
+                    <a:pt x="1789905" y="2870218"/>
+                  </a:lnTo>
+                  <a:lnTo>
+                    <a:pt x="1867539" y="2885043"/>
+                  </a:lnTo>
+                  <a:lnTo>
+                    <a:pt x="1945173" y="2899510"/>
+                  </a:lnTo>
+                  <a:lnTo>
+                    <a:pt x="2022807" y="2913627"/>
+                  </a:lnTo>
+                  <a:lnTo>
+                    <a:pt x="2100441" y="2927403"/>
+                  </a:lnTo>
+                  <a:lnTo>
+                    <a:pt x="2178075" y="2940847"/>
+                  </a:lnTo>
+                  <a:lnTo>
+                    <a:pt x="2255709" y="2953965"/>
+                  </a:lnTo>
+                  <a:lnTo>
+                    <a:pt x="2333343" y="2966766"/>
+                  </a:lnTo>
+                  <a:lnTo>
+                    <a:pt x="2410977" y="2979259"/>
+                  </a:lnTo>
+                  <a:lnTo>
+                    <a:pt x="2488611" y="2991449"/>
+                  </a:lnTo>
+                  <a:lnTo>
+                    <a:pt x="2566246" y="3003344"/>
+                  </a:lnTo>
+                  <a:lnTo>
+                    <a:pt x="2643880" y="3014953"/>
+                  </a:lnTo>
+                  <a:lnTo>
+                    <a:pt x="2721514" y="3026280"/>
+                  </a:lnTo>
+                  <a:lnTo>
+                    <a:pt x="2799148" y="3037335"/>
+                  </a:lnTo>
+                  <a:lnTo>
+                    <a:pt x="2876782" y="3048121"/>
+                  </a:lnTo>
+                  <a:lnTo>
+                    <a:pt x="2954416" y="3058648"/>
+                  </a:lnTo>
+                  <a:lnTo>
+                    <a:pt x="3032050" y="3068920"/>
+                  </a:lnTo>
+                  <a:lnTo>
+                    <a:pt x="3109684" y="3078943"/>
+                  </a:lnTo>
+                  <a:lnTo>
+                    <a:pt x="3187318" y="3088725"/>
+                  </a:lnTo>
+                  <a:lnTo>
+                    <a:pt x="3264952" y="3098270"/>
+                  </a:lnTo>
+                  <a:lnTo>
+                    <a:pt x="3342586" y="3107585"/>
+                  </a:lnTo>
+                  <a:lnTo>
+                    <a:pt x="3420220" y="3116674"/>
+                  </a:lnTo>
+                  <a:lnTo>
+                    <a:pt x="3497854" y="3125544"/>
+                  </a:lnTo>
+                  <a:lnTo>
+                    <a:pt x="3575488" y="3134199"/>
+                  </a:lnTo>
+                  <a:lnTo>
+                    <a:pt x="3653122" y="3142646"/>
+                  </a:lnTo>
+                  <a:lnTo>
+                    <a:pt x="3730756" y="3150888"/>
+                  </a:lnTo>
+                  <a:lnTo>
+                    <a:pt x="3808390" y="3158931"/>
+                  </a:lnTo>
+                  <a:lnTo>
+                    <a:pt x="3886024" y="3166780"/>
+                  </a:lnTo>
+                  <a:lnTo>
+                    <a:pt x="3963658" y="3174439"/>
+                  </a:lnTo>
+                  <a:lnTo>
+                    <a:pt x="4041292" y="3181913"/>
+                  </a:lnTo>
+                  <a:lnTo>
+                    <a:pt x="4118926" y="3189206"/>
+                  </a:lnTo>
+                  <a:lnTo>
+                    <a:pt x="4196560" y="3196323"/>
+                  </a:lnTo>
+                  <a:lnTo>
+                    <a:pt x="4274195" y="3203268"/>
+                  </a:lnTo>
+                  <a:lnTo>
+                    <a:pt x="4351829" y="3210046"/>
+                  </a:lnTo>
+                  <a:lnTo>
+                    <a:pt x="4429463" y="3216659"/>
+                  </a:lnTo>
+                  <a:lnTo>
+                    <a:pt x="4507097" y="3223113"/>
+                  </a:lnTo>
+                  <a:lnTo>
+                    <a:pt x="4584731" y="3229411"/>
+                  </a:lnTo>
+                  <a:lnTo>
+                    <a:pt x="4662365" y="3235557"/>
+                  </a:lnTo>
+                  <a:lnTo>
+                    <a:pt x="4739999" y="3241554"/>
+                  </a:lnTo>
+                  <a:lnTo>
+                    <a:pt x="4817633" y="3247406"/>
                   </a:lnTo>
                 </a:path>
               </a:pathLst>
@@ -3730,297 +3730,297 @@
           </p:nvSpPr>
           <p:spPr>
             <a:xfrm>
-              <a:off x="817517" y="3021617"/>
-              <a:ext cx="7370972" cy="2526681"/>
+              <a:off x="817517" y="3146534"/>
+              <a:ext cx="7370972" cy="2409848"/>
             </a:xfrm>
             <a:custGeom>
               <a:avLst/>
               <a:pathLst>
-                <a:path w="7370972" h="2526681">
+                <a:path w="7370972" h="2409848">
                   <a:moveTo>
-                    <a:pt x="7370972" y="2526681"/>
+                    <a:pt x="7370972" y="2409848"/>
                   </a:moveTo>
                   <a:lnTo>
-                    <a:pt x="7293338" y="2526551"/>
-                  </a:lnTo>
-                  <a:lnTo>
-                    <a:pt x="7215704" y="2526403"/>
-                  </a:lnTo>
-                  <a:lnTo>
-                    <a:pt x="7138070" y="2526233"/>
-                  </a:lnTo>
-                  <a:lnTo>
-                    <a:pt x="7060436" y="2526039"/>
-                  </a:lnTo>
-                  <a:lnTo>
-                    <a:pt x="6982802" y="2525817"/>
-                  </a:lnTo>
-                  <a:lnTo>
-                    <a:pt x="6905168" y="2525563"/>
-                  </a:lnTo>
-                  <a:lnTo>
-                    <a:pt x="6827534" y="2525273"/>
-                  </a:lnTo>
-                  <a:lnTo>
-                    <a:pt x="6749900" y="2524942"/>
-                  </a:lnTo>
-                  <a:lnTo>
-                    <a:pt x="6672266" y="2524563"/>
-                  </a:lnTo>
-                  <a:lnTo>
-                    <a:pt x="6594632" y="2524130"/>
-                  </a:lnTo>
-                  <a:lnTo>
-                    <a:pt x="6516998" y="2523635"/>
-                  </a:lnTo>
-                  <a:lnTo>
-                    <a:pt x="6439364" y="2523069"/>
-                  </a:lnTo>
-                  <a:lnTo>
-                    <a:pt x="6361730" y="2522422"/>
-                  </a:lnTo>
-                  <a:lnTo>
-                    <a:pt x="6284096" y="2521683"/>
-                  </a:lnTo>
-                  <a:lnTo>
-                    <a:pt x="6206462" y="2520837"/>
-                  </a:lnTo>
-                  <a:lnTo>
-                    <a:pt x="6128827" y="2519871"/>
-                  </a:lnTo>
-                  <a:lnTo>
-                    <a:pt x="6051193" y="2518767"/>
-                  </a:lnTo>
-                  <a:lnTo>
-                    <a:pt x="5973559" y="2517504"/>
-                  </a:lnTo>
-                  <a:lnTo>
-                    <a:pt x="5895925" y="2516061"/>
-                  </a:lnTo>
-                  <a:lnTo>
-                    <a:pt x="5818291" y="2514412"/>
-                  </a:lnTo>
-                  <a:lnTo>
-                    <a:pt x="5740657" y="2512526"/>
-                  </a:lnTo>
-                  <a:lnTo>
-                    <a:pt x="5663023" y="2510371"/>
-                  </a:lnTo>
-                  <a:lnTo>
-                    <a:pt x="5585389" y="2507907"/>
-                  </a:lnTo>
-                  <a:lnTo>
-                    <a:pt x="5507755" y="2505090"/>
-                  </a:lnTo>
-                  <a:lnTo>
-                    <a:pt x="5430121" y="2501871"/>
-                  </a:lnTo>
-                  <a:lnTo>
-                    <a:pt x="5352487" y="2498191"/>
-                  </a:lnTo>
-                  <a:lnTo>
-                    <a:pt x="5274853" y="2493985"/>
-                  </a:lnTo>
-                  <a:lnTo>
-                    <a:pt x="5197219" y="2489176"/>
-                  </a:lnTo>
-                  <a:lnTo>
-                    <a:pt x="5119585" y="2483680"/>
-                  </a:lnTo>
-                  <a:lnTo>
-                    <a:pt x="5041951" y="2477397"/>
-                  </a:lnTo>
-                  <a:lnTo>
-                    <a:pt x="4964317" y="2470215"/>
-                  </a:lnTo>
-                  <a:lnTo>
-                    <a:pt x="4886683" y="2462005"/>
-                  </a:lnTo>
-                  <a:lnTo>
-                    <a:pt x="4809049" y="2452621"/>
-                  </a:lnTo>
-                  <a:lnTo>
-                    <a:pt x="4731415" y="2441894"/>
-                  </a:lnTo>
-                  <a:lnTo>
-                    <a:pt x="4653781" y="2429633"/>
-                  </a:lnTo>
-                  <a:lnTo>
-                    <a:pt x="4576147" y="2415616"/>
-                  </a:lnTo>
-                  <a:lnTo>
-                    <a:pt x="4498513" y="2399595"/>
-                  </a:lnTo>
-                  <a:lnTo>
-                    <a:pt x="4420879" y="2381280"/>
-                  </a:lnTo>
-                  <a:lnTo>
-                    <a:pt x="4343244" y="2360346"/>
-                  </a:lnTo>
-                  <a:lnTo>
-                    <a:pt x="4265610" y="2336415"/>
-                  </a:lnTo>
-                  <a:lnTo>
-                    <a:pt x="4187976" y="2309061"/>
-                  </a:lnTo>
-                  <a:lnTo>
-                    <a:pt x="4110342" y="2277793"/>
-                  </a:lnTo>
-                  <a:lnTo>
-                    <a:pt x="4032708" y="2242051"/>
-                  </a:lnTo>
-                  <a:lnTo>
-                    <a:pt x="3955074" y="2201194"/>
-                  </a:lnTo>
-                  <a:lnTo>
-                    <a:pt x="3877440" y="2154492"/>
-                  </a:lnTo>
-                  <a:lnTo>
-                    <a:pt x="3799806" y="2101107"/>
-                  </a:lnTo>
-                  <a:lnTo>
-                    <a:pt x="3722172" y="2040083"/>
-                  </a:lnTo>
-                  <a:lnTo>
-                    <a:pt x="3644538" y="1970328"/>
-                  </a:lnTo>
-                  <a:lnTo>
-                    <a:pt x="3566904" y="1890592"/>
-                  </a:lnTo>
-                  <a:lnTo>
-                    <a:pt x="3489270" y="1799447"/>
-                  </a:lnTo>
-                  <a:lnTo>
-                    <a:pt x="3411636" y="1695260"/>
-                  </a:lnTo>
-                  <a:lnTo>
-                    <a:pt x="3334002" y="1643504"/>
-                  </a:lnTo>
-                  <a:lnTo>
-                    <a:pt x="3256368" y="1621612"/>
-                  </a:lnTo>
-                  <a:lnTo>
-                    <a:pt x="3178734" y="1599179"/>
-                  </a:lnTo>
-                  <a:lnTo>
-                    <a:pt x="3101100" y="1576189"/>
-                  </a:lnTo>
-                  <a:lnTo>
-                    <a:pt x="3023466" y="1552631"/>
-                  </a:lnTo>
-                  <a:lnTo>
-                    <a:pt x="2945832" y="1528489"/>
-                  </a:lnTo>
-                  <a:lnTo>
-                    <a:pt x="2868198" y="1503749"/>
-                  </a:lnTo>
-                  <a:lnTo>
-                    <a:pt x="2790564" y="1478397"/>
-                  </a:lnTo>
-                  <a:lnTo>
-                    <a:pt x="2712930" y="1452417"/>
-                  </a:lnTo>
-                  <a:lnTo>
-                    <a:pt x="2635295" y="1425793"/>
-                  </a:lnTo>
-                  <a:lnTo>
-                    <a:pt x="2557661" y="1398511"/>
-                  </a:lnTo>
-                  <a:lnTo>
-                    <a:pt x="2480027" y="1370553"/>
-                  </a:lnTo>
-                  <a:lnTo>
-                    <a:pt x="2402393" y="1341902"/>
-                  </a:lnTo>
-                  <a:lnTo>
-                    <a:pt x="2324759" y="1312542"/>
-                  </a:lnTo>
-                  <a:lnTo>
-                    <a:pt x="2247125" y="1282455"/>
-                  </a:lnTo>
-                  <a:lnTo>
-                    <a:pt x="2169491" y="1251623"/>
-                  </a:lnTo>
-                  <a:lnTo>
-                    <a:pt x="2091857" y="1220028"/>
-                  </a:lnTo>
-                  <a:lnTo>
-                    <a:pt x="2014223" y="1187650"/>
-                  </a:lnTo>
-                  <a:lnTo>
-                    <a:pt x="1936589" y="1154471"/>
-                  </a:lnTo>
-                  <a:lnTo>
-                    <a:pt x="1858955" y="1120469"/>
-                  </a:lnTo>
-                  <a:lnTo>
-                    <a:pt x="1781321" y="1085626"/>
-                  </a:lnTo>
-                  <a:lnTo>
-                    <a:pt x="1703687" y="1049921"/>
-                  </a:lnTo>
-                  <a:lnTo>
-                    <a:pt x="1626053" y="1013331"/>
-                  </a:lnTo>
-                  <a:lnTo>
-                    <a:pt x="1548419" y="975835"/>
-                  </a:lnTo>
-                  <a:lnTo>
-                    <a:pt x="1470785" y="937410"/>
-                  </a:lnTo>
-                  <a:lnTo>
-                    <a:pt x="1393151" y="898034"/>
-                  </a:lnTo>
-                  <a:lnTo>
-                    <a:pt x="1315517" y="857683"/>
-                  </a:lnTo>
-                  <a:lnTo>
-                    <a:pt x="1237883" y="816333"/>
-                  </a:lnTo>
-                  <a:lnTo>
-                    <a:pt x="1160249" y="773959"/>
-                  </a:lnTo>
-                  <a:lnTo>
-                    <a:pt x="1082615" y="730536"/>
-                  </a:lnTo>
-                  <a:lnTo>
-                    <a:pt x="1004981" y="686037"/>
-                  </a:lnTo>
-                  <a:lnTo>
-                    <a:pt x="927346" y="640436"/>
-                  </a:lnTo>
-                  <a:lnTo>
-                    <a:pt x="849712" y="593707"/>
-                  </a:lnTo>
-                  <a:lnTo>
-                    <a:pt x="772078" y="545820"/>
-                  </a:lnTo>
-                  <a:lnTo>
-                    <a:pt x="694444" y="496748"/>
-                  </a:lnTo>
-                  <a:lnTo>
-                    <a:pt x="616810" y="446460"/>
-                  </a:lnTo>
-                  <a:lnTo>
-                    <a:pt x="539176" y="394927"/>
-                  </a:lnTo>
-                  <a:lnTo>
-                    <a:pt x="461542" y="342118"/>
-                  </a:lnTo>
-                  <a:lnTo>
-                    <a:pt x="383908" y="288002"/>
-                  </a:lnTo>
-                  <a:lnTo>
-                    <a:pt x="306274" y="232545"/>
-                  </a:lnTo>
-                  <a:lnTo>
-                    <a:pt x="228640" y="175715"/>
-                  </a:lnTo>
-                  <a:lnTo>
-                    <a:pt x="151006" y="117478"/>
-                  </a:lnTo>
-                  <a:lnTo>
-                    <a:pt x="73372" y="57799"/>
+                    <a:pt x="7293338" y="2409725"/>
+                  </a:lnTo>
+                  <a:lnTo>
+                    <a:pt x="7215704" y="2409583"/>
+                  </a:lnTo>
+                  <a:lnTo>
+                    <a:pt x="7138070" y="2409421"/>
+                  </a:lnTo>
+                  <a:lnTo>
+                    <a:pt x="7060436" y="2409236"/>
+                  </a:lnTo>
+                  <a:lnTo>
+                    <a:pt x="6982802" y="2409024"/>
+                  </a:lnTo>
+                  <a:lnTo>
+                    <a:pt x="6905168" y="2408782"/>
+                  </a:lnTo>
+                  <a:lnTo>
+                    <a:pt x="6827534" y="2408506"/>
+                  </a:lnTo>
+                  <a:lnTo>
+                    <a:pt x="6749900" y="2408189"/>
+                  </a:lnTo>
+                  <a:lnTo>
+                    <a:pt x="6672266" y="2407828"/>
+                  </a:lnTo>
+                  <a:lnTo>
+                    <a:pt x="6594632" y="2407415"/>
+                  </a:lnTo>
+                  <a:lnTo>
+                    <a:pt x="6516998" y="2406943"/>
+                  </a:lnTo>
+                  <a:lnTo>
+                    <a:pt x="6439364" y="2406403"/>
+                  </a:lnTo>
+                  <a:lnTo>
+                    <a:pt x="6361730" y="2405786"/>
+                  </a:lnTo>
+                  <a:lnTo>
+                    <a:pt x="6284096" y="2405081"/>
+                  </a:lnTo>
+                  <a:lnTo>
+                    <a:pt x="6206462" y="2404275"/>
+                  </a:lnTo>
+                  <a:lnTo>
+                    <a:pt x="6128827" y="2403353"/>
+                  </a:lnTo>
+                  <a:lnTo>
+                    <a:pt x="6051193" y="2402300"/>
+                  </a:lnTo>
+                  <a:lnTo>
+                    <a:pt x="5973559" y="2401096"/>
+                  </a:lnTo>
+                  <a:lnTo>
+                    <a:pt x="5895925" y="2399719"/>
+                  </a:lnTo>
+                  <a:lnTo>
+                    <a:pt x="5818291" y="2398146"/>
+                  </a:lnTo>
+                  <a:lnTo>
+                    <a:pt x="5740657" y="2396348"/>
+                  </a:lnTo>
+                  <a:lnTo>
+                    <a:pt x="5663023" y="2394292"/>
+                  </a:lnTo>
+                  <a:lnTo>
+                    <a:pt x="5585389" y="2391942"/>
+                  </a:lnTo>
+                  <a:lnTo>
+                    <a:pt x="5507755" y="2389256"/>
+                  </a:lnTo>
+                  <a:lnTo>
+                    <a:pt x="5430121" y="2386185"/>
+                  </a:lnTo>
+                  <a:lnTo>
+                    <a:pt x="5352487" y="2382676"/>
+                  </a:lnTo>
+                  <a:lnTo>
+                    <a:pt x="5274853" y="2378664"/>
+                  </a:lnTo>
+                  <a:lnTo>
+                    <a:pt x="5197219" y="2374078"/>
+                  </a:lnTo>
+                  <a:lnTo>
+                    <a:pt x="5119585" y="2368835"/>
+                  </a:lnTo>
+                  <a:lnTo>
+                    <a:pt x="5041951" y="2362843"/>
+                  </a:lnTo>
+                  <a:lnTo>
+                    <a:pt x="4964317" y="2355993"/>
+                  </a:lnTo>
+                  <a:lnTo>
+                    <a:pt x="4886683" y="2348163"/>
+                  </a:lnTo>
+                  <a:lnTo>
+                    <a:pt x="4809049" y="2339213"/>
+                  </a:lnTo>
+                  <a:lnTo>
+                    <a:pt x="4731415" y="2328982"/>
+                  </a:lnTo>
+                  <a:lnTo>
+                    <a:pt x="4653781" y="2317287"/>
+                  </a:lnTo>
+                  <a:lnTo>
+                    <a:pt x="4576147" y="2303919"/>
+                  </a:lnTo>
+                  <a:lnTo>
+                    <a:pt x="4498513" y="2288638"/>
+                  </a:lnTo>
+                  <a:lnTo>
+                    <a:pt x="4420879" y="2271171"/>
+                  </a:lnTo>
+                  <a:lnTo>
+                    <a:pt x="4343244" y="2251204"/>
+                  </a:lnTo>
+                  <a:lnTo>
+                    <a:pt x="4265610" y="2228380"/>
+                  </a:lnTo>
+                  <a:lnTo>
+                    <a:pt x="4187976" y="2202291"/>
+                  </a:lnTo>
+                  <a:lnTo>
+                    <a:pt x="4110342" y="2172469"/>
+                  </a:lnTo>
+                  <a:lnTo>
+                    <a:pt x="4032708" y="2138379"/>
+                  </a:lnTo>
+                  <a:lnTo>
+                    <a:pt x="3955074" y="2099412"/>
+                  </a:lnTo>
+                  <a:lnTo>
+                    <a:pt x="3877440" y="2054869"/>
+                  </a:lnTo>
+                  <a:lnTo>
+                    <a:pt x="3799806" y="2003952"/>
+                  </a:lnTo>
+                  <a:lnTo>
+                    <a:pt x="3722172" y="1945750"/>
+                  </a:lnTo>
+                  <a:lnTo>
+                    <a:pt x="3644538" y="1879221"/>
+                  </a:lnTo>
+                  <a:lnTo>
+                    <a:pt x="3566904" y="1803172"/>
+                  </a:lnTo>
+                  <a:lnTo>
+                    <a:pt x="3489270" y="1716241"/>
+                  </a:lnTo>
+                  <a:lnTo>
+                    <a:pt x="3411636" y="1616872"/>
+                  </a:lnTo>
+                  <a:lnTo>
+                    <a:pt x="3334002" y="1567509"/>
+                  </a:lnTo>
+                  <a:lnTo>
+                    <a:pt x="3256368" y="1546630"/>
+                  </a:lnTo>
+                  <a:lnTo>
+                    <a:pt x="3178734" y="1525233"/>
+                  </a:lnTo>
+                  <a:lnTo>
+                    <a:pt x="3101100" y="1503307"/>
+                  </a:lnTo>
+                  <a:lnTo>
+                    <a:pt x="3023466" y="1480838"/>
+                  </a:lnTo>
+                  <a:lnTo>
+                    <a:pt x="2945832" y="1457812"/>
+                  </a:lnTo>
+                  <a:lnTo>
+                    <a:pt x="2868198" y="1434216"/>
+                  </a:lnTo>
+                  <a:lnTo>
+                    <a:pt x="2790564" y="1410036"/>
+                  </a:lnTo>
+                  <a:lnTo>
+                    <a:pt x="2712930" y="1385258"/>
+                  </a:lnTo>
+                  <a:lnTo>
+                    <a:pt x="2635295" y="1359865"/>
+                  </a:lnTo>
+                  <a:lnTo>
+                    <a:pt x="2557661" y="1333844"/>
+                  </a:lnTo>
+                  <a:lnTo>
+                    <a:pt x="2480027" y="1307179"/>
+                  </a:lnTo>
+                  <a:lnTo>
+                    <a:pt x="2402393" y="1279853"/>
+                  </a:lnTo>
+                  <a:lnTo>
+                    <a:pt x="2324759" y="1251851"/>
+                  </a:lnTo>
+                  <a:lnTo>
+                    <a:pt x="2247125" y="1223155"/>
+                  </a:lnTo>
+                  <a:lnTo>
+                    <a:pt x="2169491" y="1193749"/>
+                  </a:lnTo>
+                  <a:lnTo>
+                    <a:pt x="2091857" y="1163614"/>
+                  </a:lnTo>
+                  <a:lnTo>
+                    <a:pt x="2014223" y="1132734"/>
+                  </a:lnTo>
+                  <a:lnTo>
+                    <a:pt x="1936589" y="1101088"/>
+                  </a:lnTo>
+                  <a:lnTo>
+                    <a:pt x="1858955" y="1068659"/>
+                  </a:lnTo>
+                  <a:lnTo>
+                    <a:pt x="1781321" y="1035427"/>
+                  </a:lnTo>
+                  <a:lnTo>
+                    <a:pt x="1703687" y="1001373"/>
+                  </a:lnTo>
+                  <a:lnTo>
+                    <a:pt x="1626053" y="966474"/>
+                  </a:lnTo>
+                  <a:lnTo>
+                    <a:pt x="1548419" y="930712"/>
+                  </a:lnTo>
+                  <a:lnTo>
+                    <a:pt x="1470785" y="894065"/>
+                  </a:lnTo>
+                  <a:lnTo>
+                    <a:pt x="1393151" y="856509"/>
+                  </a:lnTo>
+                  <a:lnTo>
+                    <a:pt x="1315517" y="818024"/>
+                  </a:lnTo>
+                  <a:lnTo>
+                    <a:pt x="1237883" y="778586"/>
+                  </a:lnTo>
+                  <a:lnTo>
+                    <a:pt x="1160249" y="738171"/>
+                  </a:lnTo>
+                  <a:lnTo>
+                    <a:pt x="1082615" y="696756"/>
+                  </a:lnTo>
+                  <a:lnTo>
+                    <a:pt x="1004981" y="654315"/>
+                  </a:lnTo>
+                  <a:lnTo>
+                    <a:pt x="927346" y="610823"/>
+                  </a:lnTo>
+                  <a:lnTo>
+                    <a:pt x="849712" y="566254"/>
+                  </a:lnTo>
+                  <a:lnTo>
+                    <a:pt x="772078" y="520582"/>
+                  </a:lnTo>
+                  <a:lnTo>
+                    <a:pt x="694444" y="473778"/>
+                  </a:lnTo>
+                  <a:lnTo>
+                    <a:pt x="616810" y="425816"/>
+                  </a:lnTo>
+                  <a:lnTo>
+                    <a:pt x="539176" y="376666"/>
+                  </a:lnTo>
+                  <a:lnTo>
+                    <a:pt x="461542" y="326299"/>
+                  </a:lnTo>
+                  <a:lnTo>
+                    <a:pt x="383908" y="274685"/>
+                  </a:lnTo>
+                  <a:lnTo>
+                    <a:pt x="306274" y="221792"/>
+                  </a:lnTo>
+                  <a:lnTo>
+                    <a:pt x="228640" y="167590"/>
+                  </a:lnTo>
+                  <a:lnTo>
+                    <a:pt x="151006" y="112046"/>
+                  </a:lnTo>
+                  <a:lnTo>
+                    <a:pt x="73372" y="55127"/>
                   </a:lnTo>
                   <a:lnTo>
                     <a:pt x="0" y="0"/>
@@ -4043,225 +4043,225 @@
           </p:nvSpPr>
           <p:spPr>
             <a:xfrm>
-              <a:off x="2795873" y="1896563"/>
-              <a:ext cx="5392616" cy="3637640"/>
+              <a:off x="2795873" y="2073503"/>
+              <a:ext cx="5392616" cy="3469437"/>
             </a:xfrm>
             <a:custGeom>
               <a:avLst/>
               <a:pathLst>
-                <a:path w="5392616" h="3637640">
+                <a:path w="5392616" h="3469437">
                   <a:moveTo>
                     <a:pt x="0" y="0"/>
                   </a:moveTo>
                   <a:lnTo>
-                    <a:pt x="35867" y="133810"/>
-                  </a:lnTo>
-                  <a:lnTo>
-                    <a:pt x="113501" y="401413"/>
-                  </a:lnTo>
-                  <a:lnTo>
-                    <a:pt x="191135" y="648664"/>
-                  </a:lnTo>
-                  <a:lnTo>
-                    <a:pt x="268769" y="877112"/>
-                  </a:lnTo>
-                  <a:lnTo>
-                    <a:pt x="346403" y="1088187"/>
-                  </a:lnTo>
-                  <a:lnTo>
-                    <a:pt x="424037" y="1283211"/>
-                  </a:lnTo>
-                  <a:lnTo>
-                    <a:pt x="501671" y="1463402"/>
-                  </a:lnTo>
-                  <a:lnTo>
-                    <a:pt x="579306" y="1629891"/>
-                  </a:lnTo>
-                  <a:lnTo>
-                    <a:pt x="656940" y="1783718"/>
-                  </a:lnTo>
-                  <a:lnTo>
-                    <a:pt x="734574" y="1925847"/>
-                  </a:lnTo>
-                  <a:lnTo>
-                    <a:pt x="812208" y="2057168"/>
-                  </a:lnTo>
-                  <a:lnTo>
-                    <a:pt x="889842" y="2178501"/>
-                  </a:lnTo>
-                  <a:lnTo>
-                    <a:pt x="967476" y="2290608"/>
-                  </a:lnTo>
-                  <a:lnTo>
-                    <a:pt x="1045110" y="2394189"/>
-                  </a:lnTo>
-                  <a:lnTo>
-                    <a:pt x="1122744" y="2489892"/>
-                  </a:lnTo>
-                  <a:lnTo>
-                    <a:pt x="1200378" y="2578318"/>
-                  </a:lnTo>
-                  <a:lnTo>
-                    <a:pt x="1278012" y="2660019"/>
-                  </a:lnTo>
-                  <a:lnTo>
-                    <a:pt x="1355646" y="2735506"/>
-                  </a:lnTo>
-                  <a:lnTo>
-                    <a:pt x="1433280" y="2805253"/>
-                  </a:lnTo>
-                  <a:lnTo>
-                    <a:pt x="1510914" y="2869696"/>
-                  </a:lnTo>
-                  <a:lnTo>
-                    <a:pt x="1588548" y="2929238"/>
-                  </a:lnTo>
-                  <a:lnTo>
-                    <a:pt x="1666182" y="2984252"/>
-                  </a:lnTo>
-                  <a:lnTo>
-                    <a:pt x="1743816" y="3035082"/>
-                  </a:lnTo>
-                  <a:lnTo>
-                    <a:pt x="1821450" y="3082047"/>
-                  </a:lnTo>
-                  <a:lnTo>
-                    <a:pt x="1899084" y="3125440"/>
-                  </a:lnTo>
-                  <a:lnTo>
-                    <a:pt x="1976718" y="3165533"/>
-                  </a:lnTo>
-                  <a:lnTo>
-                    <a:pt x="2054352" y="3202577"/>
-                  </a:lnTo>
-                  <a:lnTo>
-                    <a:pt x="2131986" y="3236804"/>
-                  </a:lnTo>
-                  <a:lnTo>
-                    <a:pt x="2209620" y="3268428"/>
-                  </a:lnTo>
-                  <a:lnTo>
-                    <a:pt x="2287255" y="3297647"/>
-                  </a:lnTo>
-                  <a:lnTo>
-                    <a:pt x="2364889" y="3324644"/>
-                  </a:lnTo>
-                  <a:lnTo>
-                    <a:pt x="2442523" y="3349588"/>
-                  </a:lnTo>
-                  <a:lnTo>
-                    <a:pt x="2520157" y="3372635"/>
-                  </a:lnTo>
-                  <a:lnTo>
-                    <a:pt x="2597791" y="3393929"/>
-                  </a:lnTo>
-                  <a:lnTo>
-                    <a:pt x="2675425" y="3413604"/>
-                  </a:lnTo>
-                  <a:lnTo>
-                    <a:pt x="2753059" y="3431782"/>
-                  </a:lnTo>
-                  <a:lnTo>
-                    <a:pt x="2830693" y="3448578"/>
-                  </a:lnTo>
-                  <a:lnTo>
-                    <a:pt x="2908327" y="3464097"/>
-                  </a:lnTo>
-                  <a:lnTo>
-                    <a:pt x="2985961" y="3478436"/>
-                  </a:lnTo>
-                  <a:lnTo>
-                    <a:pt x="3063595" y="3491684"/>
-                  </a:lnTo>
-                  <a:lnTo>
-                    <a:pt x="3141229" y="3503925"/>
-                  </a:lnTo>
-                  <a:lnTo>
-                    <a:pt x="3218863" y="3515235"/>
-                  </a:lnTo>
-                  <a:lnTo>
-                    <a:pt x="3296497" y="3525684"/>
-                  </a:lnTo>
-                  <a:lnTo>
-                    <a:pt x="3374131" y="3535339"/>
-                  </a:lnTo>
-                  <a:lnTo>
-                    <a:pt x="3451765" y="3544260"/>
-                  </a:lnTo>
-                  <a:lnTo>
-                    <a:pt x="3529399" y="3552503"/>
-                  </a:lnTo>
-                  <a:lnTo>
-                    <a:pt x="3607033" y="3560118"/>
-                  </a:lnTo>
-                  <a:lnTo>
-                    <a:pt x="3684667" y="3567155"/>
-                  </a:lnTo>
-                  <a:lnTo>
-                    <a:pt x="3762301" y="3573656"/>
-                  </a:lnTo>
-                  <a:lnTo>
-                    <a:pt x="3839935" y="3579663"/>
-                  </a:lnTo>
-                  <a:lnTo>
-                    <a:pt x="3917569" y="3585213"/>
-                  </a:lnTo>
-                  <a:lnTo>
-                    <a:pt x="3995203" y="3590341"/>
-                  </a:lnTo>
-                  <a:lnTo>
-                    <a:pt x="4072838" y="3595079"/>
-                  </a:lnTo>
-                  <a:lnTo>
-                    <a:pt x="4150472" y="3599457"/>
-                  </a:lnTo>
-                  <a:lnTo>
-                    <a:pt x="4228106" y="3603501"/>
-                  </a:lnTo>
-                  <a:lnTo>
-                    <a:pt x="4305740" y="3607238"/>
-                  </a:lnTo>
-                  <a:lnTo>
-                    <a:pt x="4383374" y="3610691"/>
-                  </a:lnTo>
-                  <a:lnTo>
-                    <a:pt x="4461008" y="3613882"/>
-                  </a:lnTo>
-                  <a:lnTo>
-                    <a:pt x="4538642" y="3616830"/>
-                  </a:lnTo>
-                  <a:lnTo>
-                    <a:pt x="4616276" y="3619553"/>
-                  </a:lnTo>
-                  <a:lnTo>
-                    <a:pt x="4693910" y="3622070"/>
-                  </a:lnTo>
-                  <a:lnTo>
-                    <a:pt x="4771544" y="3624395"/>
-                  </a:lnTo>
-                  <a:lnTo>
-                    <a:pt x="4849178" y="3626543"/>
-                  </a:lnTo>
-                  <a:lnTo>
-                    <a:pt x="4926812" y="3628528"/>
-                  </a:lnTo>
-                  <a:lnTo>
-                    <a:pt x="5004446" y="3630362"/>
-                  </a:lnTo>
-                  <a:lnTo>
-                    <a:pt x="5082080" y="3632056"/>
-                  </a:lnTo>
-                  <a:lnTo>
-                    <a:pt x="5159714" y="3633622"/>
-                  </a:lnTo>
-                  <a:lnTo>
-                    <a:pt x="5237348" y="3635068"/>
-                  </a:lnTo>
-                  <a:lnTo>
-                    <a:pt x="5314982" y="3636405"/>
-                  </a:lnTo>
-                  <a:lnTo>
-                    <a:pt x="5392616" y="3637640"/>
+                    <a:pt x="35867" y="127623"/>
+                  </a:lnTo>
+                  <a:lnTo>
+                    <a:pt x="113501" y="382851"/>
+                  </a:lnTo>
+                  <a:lnTo>
+                    <a:pt x="191135" y="618670"/>
+                  </a:lnTo>
+                  <a:lnTo>
+                    <a:pt x="268769" y="836555"/>
+                  </a:lnTo>
+                  <a:lnTo>
+                    <a:pt x="346403" y="1037870"/>
+                  </a:lnTo>
+                  <a:lnTo>
+                    <a:pt x="424037" y="1223875"/>
+                  </a:lnTo>
+                  <a:lnTo>
+                    <a:pt x="501671" y="1395735"/>
+                  </a:lnTo>
+                  <a:lnTo>
+                    <a:pt x="579306" y="1554525"/>
+                  </a:lnTo>
+                  <a:lnTo>
+                    <a:pt x="656940" y="1701240"/>
+                  </a:lnTo>
+                  <a:lnTo>
+                    <a:pt x="734574" y="1836797"/>
+                  </a:lnTo>
+                  <a:lnTo>
+                    <a:pt x="812208" y="1962045"/>
+                  </a:lnTo>
+                  <a:lnTo>
+                    <a:pt x="889842" y="2077768"/>
+                  </a:lnTo>
+                  <a:lnTo>
+                    <a:pt x="967476" y="2184691"/>
+                  </a:lnTo>
+                  <a:lnTo>
+                    <a:pt x="1045110" y="2283482"/>
+                  </a:lnTo>
+                  <a:lnTo>
+                    <a:pt x="1122744" y="2374760"/>
+                  </a:lnTo>
+                  <a:lnTo>
+                    <a:pt x="1200378" y="2459097"/>
+                  </a:lnTo>
+                  <a:lnTo>
+                    <a:pt x="1278012" y="2537020"/>
+                  </a:lnTo>
+                  <a:lnTo>
+                    <a:pt x="1355646" y="2609017"/>
+                  </a:lnTo>
+                  <a:lnTo>
+                    <a:pt x="1433280" y="2675539"/>
+                  </a:lnTo>
+                  <a:lnTo>
+                    <a:pt x="1510914" y="2737002"/>
+                  </a:lnTo>
+                  <a:lnTo>
+                    <a:pt x="1588548" y="2793791"/>
+                  </a:lnTo>
+                  <a:lnTo>
+                    <a:pt x="1666182" y="2846261"/>
+                  </a:lnTo>
+                  <a:lnTo>
+                    <a:pt x="1743816" y="2894741"/>
+                  </a:lnTo>
+                  <a:lnTo>
+                    <a:pt x="1821450" y="2939534"/>
+                  </a:lnTo>
+                  <a:lnTo>
+                    <a:pt x="1899084" y="2980921"/>
+                  </a:lnTo>
+                  <a:lnTo>
+                    <a:pt x="1976718" y="3019160"/>
+                  </a:lnTo>
+                  <a:lnTo>
+                    <a:pt x="2054352" y="3054491"/>
+                  </a:lnTo>
+                  <a:lnTo>
+                    <a:pt x="2131986" y="3087135"/>
+                  </a:lnTo>
+                  <a:lnTo>
+                    <a:pt x="2209620" y="3117297"/>
+                  </a:lnTo>
+                  <a:lnTo>
+                    <a:pt x="2287255" y="3145165"/>
+                  </a:lnTo>
+                  <a:lnTo>
+                    <a:pt x="2364889" y="3170913"/>
+                  </a:lnTo>
+                  <a:lnTo>
+                    <a:pt x="2442523" y="3194704"/>
+                  </a:lnTo>
+                  <a:lnTo>
+                    <a:pt x="2520157" y="3216685"/>
+                  </a:lnTo>
+                  <a:lnTo>
+                    <a:pt x="2597791" y="3236995"/>
+                  </a:lnTo>
+                  <a:lnTo>
+                    <a:pt x="2675425" y="3255760"/>
+                  </a:lnTo>
+                  <a:lnTo>
+                    <a:pt x="2753059" y="3273098"/>
+                  </a:lnTo>
+                  <a:lnTo>
+                    <a:pt x="2830693" y="3289117"/>
+                  </a:lnTo>
+                  <a:lnTo>
+                    <a:pt x="2908327" y="3303919"/>
+                  </a:lnTo>
+                  <a:lnTo>
+                    <a:pt x="2985961" y="3317594"/>
+                  </a:lnTo>
+                  <a:lnTo>
+                    <a:pt x="3063595" y="3330230"/>
+                  </a:lnTo>
+                  <a:lnTo>
+                    <a:pt x="3141229" y="3341905"/>
+                  </a:lnTo>
+                  <a:lnTo>
+                    <a:pt x="3218863" y="3352692"/>
+                  </a:lnTo>
+                  <a:lnTo>
+                    <a:pt x="3296497" y="3362658"/>
+                  </a:lnTo>
+                  <a:lnTo>
+                    <a:pt x="3374131" y="3371867"/>
+                  </a:lnTo>
+                  <a:lnTo>
+                    <a:pt x="3451765" y="3380375"/>
+                  </a:lnTo>
+                  <a:lnTo>
+                    <a:pt x="3529399" y="3388236"/>
+                  </a:lnTo>
+                  <a:lnTo>
+                    <a:pt x="3607033" y="3395500"/>
+                  </a:lnTo>
+                  <a:lnTo>
+                    <a:pt x="3684667" y="3402211"/>
+                  </a:lnTo>
+                  <a:lnTo>
+                    <a:pt x="3762301" y="3408411"/>
+                  </a:lnTo>
+                  <a:lnTo>
+                    <a:pt x="3839935" y="3414140"/>
+                  </a:lnTo>
+                  <a:lnTo>
+                    <a:pt x="3917569" y="3419434"/>
+                  </a:lnTo>
+                  <a:lnTo>
+                    <a:pt x="3995203" y="3424325"/>
+                  </a:lnTo>
+                  <a:lnTo>
+                    <a:pt x="4072838" y="3428844"/>
+                  </a:lnTo>
+                  <a:lnTo>
+                    <a:pt x="4150472" y="3433019"/>
+                  </a:lnTo>
+                  <a:lnTo>
+                    <a:pt x="4228106" y="3436877"/>
+                  </a:lnTo>
+                  <a:lnTo>
+                    <a:pt x="4305740" y="3440441"/>
+                  </a:lnTo>
+                  <a:lnTo>
+                    <a:pt x="4383374" y="3443734"/>
+                  </a:lnTo>
+                  <a:lnTo>
+                    <a:pt x="4461008" y="3446777"/>
+                  </a:lnTo>
+                  <a:lnTo>
+                    <a:pt x="4538642" y="3449589"/>
+                  </a:lnTo>
+                  <a:lnTo>
+                    <a:pt x="4616276" y="3452186"/>
+                  </a:lnTo>
+                  <a:lnTo>
+                    <a:pt x="4693910" y="3454586"/>
+                  </a:lnTo>
+                  <a:lnTo>
+                    <a:pt x="4771544" y="3456804"/>
+                  </a:lnTo>
+                  <a:lnTo>
+                    <a:pt x="4849178" y="3458853"/>
+                  </a:lnTo>
+                  <a:lnTo>
+                    <a:pt x="4926812" y="3460746"/>
+                  </a:lnTo>
+                  <a:lnTo>
+                    <a:pt x="5004446" y="3462495"/>
+                  </a:lnTo>
+                  <a:lnTo>
+                    <a:pt x="5082080" y="3464111"/>
+                  </a:lnTo>
+                  <a:lnTo>
+                    <a:pt x="5159714" y="3465605"/>
+                  </a:lnTo>
+                  <a:lnTo>
+                    <a:pt x="5237348" y="3466984"/>
+                  </a:lnTo>
+                  <a:lnTo>
+                    <a:pt x="5314982" y="3468259"/>
+                  </a:lnTo>
+                  <a:lnTo>
+                    <a:pt x="5392616" y="3469437"/>
                   </a:lnTo>
                 </a:path>
               </a:pathLst>
@@ -4290,7 +4290,7 @@
           </p:nvSpPr>
           <p:spPr>
             <a:xfrm>
-              <a:off x="817517" y="4679530"/>
+              <a:off x="817517" y="4727786"/>
               <a:ext cx="7799693" cy="0"/>
             </a:xfrm>
             <a:custGeom>
@@ -4333,15 +4333,15 @@
           </p:nvSpPr>
           <p:spPr>
             <a:xfrm>
-              <a:off x="4203673" y="1896563"/>
-              <a:ext cx="0" cy="3826579"/>
+              <a:off x="4203673" y="2073503"/>
+              <a:ext cx="0" cy="3649639"/>
             </a:xfrm>
             <a:custGeom>
               <a:avLst/>
               <a:pathLst>
-                <a:path w="0" h="3826579">
+                <a:path w="0" h="3649639">
                   <a:moveTo>
-                    <a:pt x="0" y="3826579"/>
+                    <a:pt x="0" y="3649639"/>
                   </a:moveTo>
                   <a:lnTo>
                     <a:pt x="0" y="0"/>
@@ -4376,7 +4376,7 @@
           </p:nvSpPr>
           <p:spPr>
             <a:xfrm>
-              <a:off x="692708" y="5509156"/>
+              <a:off x="692708" y="5517199"/>
               <a:ext cx="62179" cy="80101"/>
             </a:xfrm>
             <a:prstGeom prst="rect">
@@ -4422,7 +4422,7 @@
           </p:nvSpPr>
           <p:spPr>
             <a:xfrm>
-              <a:off x="692708" y="4639479"/>
+              <a:off x="692708" y="4687735"/>
               <a:ext cx="62179" cy="80101"/>
             </a:xfrm>
             <a:prstGeom prst="rect">
@@ -4468,7 +4468,7 @@
           </p:nvSpPr>
           <p:spPr>
             <a:xfrm>
-              <a:off x="692708" y="3769802"/>
+              <a:off x="692708" y="3858272"/>
               <a:ext cx="62179" cy="80101"/>
             </a:xfrm>
             <a:prstGeom prst="rect">
@@ -4514,7 +4514,7 @@
           </p:nvSpPr>
           <p:spPr>
             <a:xfrm>
-              <a:off x="692708" y="2900125"/>
+              <a:off x="692708" y="3028808"/>
               <a:ext cx="62179" cy="80101"/>
             </a:xfrm>
             <a:prstGeom prst="rect">
@@ -4560,7 +4560,7 @@
           </p:nvSpPr>
           <p:spPr>
             <a:xfrm>
-              <a:off x="692708" y="2030448"/>
+              <a:off x="692708" y="2199345"/>
               <a:ext cx="62179" cy="80101"/>
             </a:xfrm>
             <a:prstGeom prst="rect">
@@ -4836,7 +4836,7 @@
           </p:nvSpPr>
           <p:spPr>
             <a:xfrm rot="-5400000">
-              <a:off x="68446" y="3759743"/>
+              <a:off x="68446" y="3848213"/>
               <a:ext cx="1016904" cy="100218"/>
             </a:xfrm>
             <a:prstGeom prst="rect">
@@ -4877,6 +4877,52 @@
         <p:sp>
           <p:nvSpPr>
             <p:cNvPr id="38" name="tx38"/>
+            <p:cNvSpPr/>
+            <p:nvPr/>
+          </p:nvSpPr>
+          <p:spPr>
+            <a:xfrm>
+              <a:off x="817517" y="1896563"/>
+              <a:ext cx="4166463" cy="82021"/>
+            </a:xfrm>
+            <a:prstGeom prst="rect">
+              <a:avLst/>
+            </a:prstGeom>
+            <a:noFill/>
+          </p:spPr>
+          <p:txBody>
+            <a:bodyPr lIns="0" rIns="0" tIns="0" bIns="0" anchorCtr="1" anchor="ctr" wrap="none"/>
+            <a:lstStyle/>
+            <a:p>
+              <a:pPr algn="l" marL="0" marR="0" indent="0">
+                <a:lnSpc>
+                  <a:spcPts val="900"/>
+                </a:lnSpc>
+                <a:spcBef>
+                  <a:spcPts val="0"/>
+                </a:spcBef>
+                <a:spcAft>
+                  <a:spcPts val="0"/>
+                </a:spcAft>
+              </a:pPr>
+              <a:r>
+                <a:rPr sz="900">
+                  <a:solidFill>
+                    <a:srgbClr val="404040">
+                      <a:alpha val="100000"/>
+                    </a:srgbClr>
+                  </a:solidFill>
+                  <a:latin typeface="Helvetica"/>
+                  <a:cs typeface="Helvetica"/>
+                </a:rPr>
+                <a:t>subHR = 0.41 (95% CI 0.22-0.76), p = 0.005   (per 0.1-unit increase in eGFR ratio)</a:t>
+              </a:r>
+            </a:p>
+          </p:txBody>
+        </p:sp>
+        <p:sp>
+          <p:nvSpPr>
+            <p:cNvPr id="39" name="tx39"/>
             <p:cNvSpPr/>
             <p:nvPr/>
           </p:nvSpPr>

--- a/docs/plots/carbo/jx_carbo_linsubhr_ratio_throm3.pptx
+++ b/docs/plots/carbo/jx_carbo_linsubhr_ratio_throm3.pptx
@@ -2271,26 +2271,26 @@
           </p:nvSpPr>
           <p:spPr>
             <a:xfrm>
-              <a:off x="817517" y="5142518"/>
-              <a:ext cx="7799693" cy="0"/>
+              <a:off x="915645" y="5071743"/>
+              <a:ext cx="7682587" cy="0"/>
             </a:xfrm>
             <a:custGeom>
               <a:avLst/>
               <a:pathLst>
-                <a:path w="7799693" h="0">
+                <a:path w="7682587" h="0">
                   <a:moveTo>
                     <a:pt x="0" y="0"/>
                   </a:moveTo>
                   <a:lnTo>
-                    <a:pt x="7799693" y="0"/>
-                  </a:lnTo>
-                  <a:lnTo>
-                    <a:pt x="7799693" y="0"/>
+                    <a:pt x="7682587" y="0"/>
+                  </a:lnTo>
+                  <a:lnTo>
+                    <a:pt x="7682587" y="0"/>
                   </a:lnTo>
                 </a:path>
               </a:pathLst>
             </a:custGeom>
-            <a:ln w="6775" cap="flat">
+            <a:ln w="8623" cap="flat">
               <a:solidFill>
                 <a:srgbClr val="EBEBEB">
                   <a:alpha val="100000"/>
@@ -2314,26 +2314,26 @@
           </p:nvSpPr>
           <p:spPr>
             <a:xfrm>
-              <a:off x="817517" y="4313054"/>
-              <a:ext cx="7799693" cy="0"/>
+              <a:off x="915645" y="4298074"/>
+              <a:ext cx="7682587" cy="0"/>
             </a:xfrm>
             <a:custGeom>
               <a:avLst/>
               <a:pathLst>
-                <a:path w="7799693" h="0">
+                <a:path w="7682587" h="0">
                   <a:moveTo>
                     <a:pt x="0" y="0"/>
                   </a:moveTo>
                   <a:lnTo>
-                    <a:pt x="7799693" y="0"/>
-                  </a:lnTo>
-                  <a:lnTo>
-                    <a:pt x="7799693" y="0"/>
+                    <a:pt x="7682587" y="0"/>
+                  </a:lnTo>
+                  <a:lnTo>
+                    <a:pt x="7682587" y="0"/>
                   </a:lnTo>
                 </a:path>
               </a:pathLst>
             </a:custGeom>
-            <a:ln w="6775" cap="flat">
+            <a:ln w="8623" cap="flat">
               <a:solidFill>
                 <a:srgbClr val="EBEBEB">
                   <a:alpha val="100000"/>
@@ -2357,26 +2357,26 @@
           </p:nvSpPr>
           <p:spPr>
             <a:xfrm>
-              <a:off x="817517" y="3483591"/>
-              <a:ext cx="7799693" cy="0"/>
+              <a:off x="915645" y="3524405"/>
+              <a:ext cx="7682587" cy="0"/>
             </a:xfrm>
             <a:custGeom>
               <a:avLst/>
               <a:pathLst>
-                <a:path w="7799693" h="0">
+                <a:path w="7682587" h="0">
                   <a:moveTo>
                     <a:pt x="0" y="0"/>
                   </a:moveTo>
                   <a:lnTo>
-                    <a:pt x="7799693" y="0"/>
-                  </a:lnTo>
-                  <a:lnTo>
-                    <a:pt x="7799693" y="0"/>
+                    <a:pt x="7682587" y="0"/>
+                  </a:lnTo>
+                  <a:lnTo>
+                    <a:pt x="7682587" y="0"/>
                   </a:lnTo>
                 </a:path>
               </a:pathLst>
             </a:custGeom>
-            <a:ln w="6775" cap="flat">
+            <a:ln w="8623" cap="flat">
               <a:solidFill>
                 <a:srgbClr val="EBEBEB">
                   <a:alpha val="100000"/>
@@ -2400,26 +2400,26 @@
           </p:nvSpPr>
           <p:spPr>
             <a:xfrm>
-              <a:off x="817517" y="2654127"/>
-              <a:ext cx="7799693" cy="0"/>
+              <a:off x="915645" y="2750737"/>
+              <a:ext cx="7682587" cy="0"/>
             </a:xfrm>
             <a:custGeom>
               <a:avLst/>
               <a:pathLst>
-                <a:path w="7799693" h="0">
+                <a:path w="7682587" h="0">
                   <a:moveTo>
                     <a:pt x="0" y="0"/>
                   </a:moveTo>
                   <a:lnTo>
-                    <a:pt x="7799693" y="0"/>
-                  </a:lnTo>
-                  <a:lnTo>
-                    <a:pt x="7799693" y="0"/>
+                    <a:pt x="7682587" y="0"/>
+                  </a:lnTo>
+                  <a:lnTo>
+                    <a:pt x="7682587" y="0"/>
                   </a:lnTo>
                 </a:path>
               </a:pathLst>
             </a:custGeom>
-            <a:ln w="6775" cap="flat">
+            <a:ln w="8623" cap="flat">
               <a:solidFill>
                 <a:srgbClr val="EBEBEB">
                   <a:alpha val="100000"/>
@@ -2443,15 +2443,15 @@
           </p:nvSpPr>
           <p:spPr>
             <a:xfrm>
-              <a:off x="1615213" y="2073503"/>
-              <a:ext cx="0" cy="3649639"/>
+              <a:off x="1701364" y="2209169"/>
+              <a:ext cx="0" cy="3404141"/>
             </a:xfrm>
             <a:custGeom>
               <a:avLst/>
               <a:pathLst>
-                <a:path w="0" h="3649639">
+                <a:path w="0" h="3404141">
                   <a:moveTo>
-                    <a:pt x="0" y="3649639"/>
+                    <a:pt x="0" y="3404141"/>
                   </a:moveTo>
                   <a:lnTo>
                     <a:pt x="0" y="0"/>
@@ -2462,7 +2462,7 @@
                 </a:path>
               </a:pathLst>
             </a:custGeom>
-            <a:ln w="6775" cap="flat">
+            <a:ln w="8623" cap="flat">
               <a:solidFill>
                 <a:srgbClr val="EBEBEB">
                   <a:alpha val="100000"/>
@@ -2486,15 +2486,15 @@
           </p:nvSpPr>
           <p:spPr>
             <a:xfrm>
-              <a:off x="3387871" y="2073503"/>
-              <a:ext cx="0" cy="3649639"/>
+              <a:off x="3447406" y="2209169"/>
+              <a:ext cx="0" cy="3404141"/>
             </a:xfrm>
             <a:custGeom>
               <a:avLst/>
               <a:pathLst>
-                <a:path w="0" h="3649639">
+                <a:path w="0" h="3404141">
                   <a:moveTo>
-                    <a:pt x="0" y="3649639"/>
+                    <a:pt x="0" y="3404141"/>
                   </a:moveTo>
                   <a:lnTo>
                     <a:pt x="0" y="0"/>
@@ -2505,7 +2505,7 @@
                 </a:path>
               </a:pathLst>
             </a:custGeom>
-            <a:ln w="6775" cap="flat">
+            <a:ln w="8623" cap="flat">
               <a:solidFill>
                 <a:srgbClr val="EBEBEB">
                   <a:alpha val="100000"/>
@@ -2529,15 +2529,15 @@
           </p:nvSpPr>
           <p:spPr>
             <a:xfrm>
-              <a:off x="5160528" y="2073503"/>
-              <a:ext cx="0" cy="3649639"/>
+              <a:off x="5193449" y="2209169"/>
+              <a:ext cx="0" cy="3404141"/>
             </a:xfrm>
             <a:custGeom>
               <a:avLst/>
               <a:pathLst>
-                <a:path w="0" h="3649639">
+                <a:path w="0" h="3404141">
                   <a:moveTo>
-                    <a:pt x="0" y="3649639"/>
+                    <a:pt x="0" y="3404141"/>
                   </a:moveTo>
                   <a:lnTo>
                     <a:pt x="0" y="0"/>
@@ -2548,7 +2548,7 @@
                 </a:path>
               </a:pathLst>
             </a:custGeom>
-            <a:ln w="6775" cap="flat">
+            <a:ln w="8623" cap="flat">
               <a:solidFill>
                 <a:srgbClr val="EBEBEB">
                   <a:alpha val="100000"/>
@@ -2572,15 +2572,15 @@
           </p:nvSpPr>
           <p:spPr>
             <a:xfrm>
-              <a:off x="6933186" y="2073503"/>
-              <a:ext cx="0" cy="3649639"/>
+              <a:off x="6939491" y="2209169"/>
+              <a:ext cx="0" cy="3404141"/>
             </a:xfrm>
             <a:custGeom>
               <a:avLst/>
               <a:pathLst>
-                <a:path w="0" h="3649639">
+                <a:path w="0" h="3404141">
                   <a:moveTo>
-                    <a:pt x="0" y="3649639"/>
+                    <a:pt x="0" y="3404141"/>
                   </a:moveTo>
                   <a:lnTo>
                     <a:pt x="0" y="0"/>
@@ -2591,7 +2591,7 @@
                 </a:path>
               </a:pathLst>
             </a:custGeom>
-            <a:ln w="6775" cap="flat">
+            <a:ln w="8623" cap="flat">
               <a:solidFill>
                 <a:srgbClr val="EBEBEB">
                   <a:alpha val="100000"/>
@@ -2615,26 +2615,26 @@
           </p:nvSpPr>
           <p:spPr>
             <a:xfrm>
-              <a:off x="817517" y="5557249"/>
-              <a:ext cx="7799693" cy="0"/>
+              <a:off x="915645" y="5458577"/>
+              <a:ext cx="7682587" cy="0"/>
             </a:xfrm>
             <a:custGeom>
               <a:avLst/>
               <a:pathLst>
-                <a:path w="7799693" h="0">
+                <a:path w="7682587" h="0">
                   <a:moveTo>
                     <a:pt x="0" y="0"/>
                   </a:moveTo>
                   <a:lnTo>
-                    <a:pt x="7799693" y="0"/>
-                  </a:lnTo>
-                  <a:lnTo>
-                    <a:pt x="7799693" y="0"/>
+                    <a:pt x="7682587" y="0"/>
+                  </a:lnTo>
+                  <a:lnTo>
+                    <a:pt x="7682587" y="0"/>
                   </a:lnTo>
                 </a:path>
               </a:pathLst>
             </a:custGeom>
-            <a:ln w="13550" cap="flat">
+            <a:ln w="17246" cap="flat">
               <a:solidFill>
                 <a:srgbClr val="EBEBEB">
                   <a:alpha val="100000"/>
@@ -2658,26 +2658,26 @@
           </p:nvSpPr>
           <p:spPr>
             <a:xfrm>
-              <a:off x="817517" y="4727786"/>
-              <a:ext cx="7799693" cy="0"/>
+              <a:off x="915645" y="4684908"/>
+              <a:ext cx="7682587" cy="0"/>
             </a:xfrm>
             <a:custGeom>
               <a:avLst/>
               <a:pathLst>
-                <a:path w="7799693" h="0">
+                <a:path w="7682587" h="0">
                   <a:moveTo>
                     <a:pt x="0" y="0"/>
                   </a:moveTo>
                   <a:lnTo>
-                    <a:pt x="7799693" y="0"/>
-                  </a:lnTo>
-                  <a:lnTo>
-                    <a:pt x="7799693" y="0"/>
+                    <a:pt x="7682587" y="0"/>
+                  </a:lnTo>
+                  <a:lnTo>
+                    <a:pt x="7682587" y="0"/>
                   </a:lnTo>
                 </a:path>
               </a:pathLst>
             </a:custGeom>
-            <a:ln w="13550" cap="flat">
+            <a:ln w="17246" cap="flat">
               <a:solidFill>
                 <a:srgbClr val="EBEBEB">
                   <a:alpha val="100000"/>
@@ -2701,26 +2701,26 @@
           </p:nvSpPr>
           <p:spPr>
             <a:xfrm>
-              <a:off x="817517" y="3898322"/>
-              <a:ext cx="7799693" cy="0"/>
+              <a:off x="915645" y="3911240"/>
+              <a:ext cx="7682587" cy="0"/>
             </a:xfrm>
             <a:custGeom>
               <a:avLst/>
               <a:pathLst>
-                <a:path w="7799693" h="0">
+                <a:path w="7682587" h="0">
                   <a:moveTo>
                     <a:pt x="0" y="0"/>
                   </a:moveTo>
                   <a:lnTo>
-                    <a:pt x="7799693" y="0"/>
-                  </a:lnTo>
-                  <a:lnTo>
-                    <a:pt x="7799693" y="0"/>
+                    <a:pt x="7682587" y="0"/>
+                  </a:lnTo>
+                  <a:lnTo>
+                    <a:pt x="7682587" y="0"/>
                   </a:lnTo>
                 </a:path>
               </a:pathLst>
             </a:custGeom>
-            <a:ln w="13550" cap="flat">
+            <a:ln w="17246" cap="flat">
               <a:solidFill>
                 <a:srgbClr val="EBEBEB">
                   <a:alpha val="100000"/>
@@ -2744,26 +2744,26 @@
           </p:nvSpPr>
           <p:spPr>
             <a:xfrm>
-              <a:off x="817517" y="3068859"/>
-              <a:ext cx="7799693" cy="0"/>
+              <a:off x="915645" y="3137571"/>
+              <a:ext cx="7682587" cy="0"/>
             </a:xfrm>
             <a:custGeom>
               <a:avLst/>
               <a:pathLst>
-                <a:path w="7799693" h="0">
+                <a:path w="7682587" h="0">
                   <a:moveTo>
                     <a:pt x="0" y="0"/>
                   </a:moveTo>
                   <a:lnTo>
-                    <a:pt x="7799693" y="0"/>
-                  </a:lnTo>
-                  <a:lnTo>
-                    <a:pt x="7799693" y="0"/>
+                    <a:pt x="7682587" y="0"/>
+                  </a:lnTo>
+                  <a:lnTo>
+                    <a:pt x="7682587" y="0"/>
                   </a:lnTo>
                 </a:path>
               </a:pathLst>
             </a:custGeom>
-            <a:ln w="13550" cap="flat">
+            <a:ln w="17246" cap="flat">
               <a:solidFill>
                 <a:srgbClr val="EBEBEB">
                   <a:alpha val="100000"/>
@@ -2787,26 +2787,26 @@
           </p:nvSpPr>
           <p:spPr>
             <a:xfrm>
-              <a:off x="817517" y="2239395"/>
-              <a:ext cx="7799693" cy="0"/>
+              <a:off x="915645" y="2363903"/>
+              <a:ext cx="7682587" cy="0"/>
             </a:xfrm>
             <a:custGeom>
               <a:avLst/>
               <a:pathLst>
-                <a:path w="7799693" h="0">
+                <a:path w="7682587" h="0">
                   <a:moveTo>
                     <a:pt x="0" y="0"/>
                   </a:moveTo>
                   <a:lnTo>
-                    <a:pt x="7799693" y="0"/>
-                  </a:lnTo>
-                  <a:lnTo>
-                    <a:pt x="7799693" y="0"/>
+                    <a:pt x="7682587" y="0"/>
+                  </a:lnTo>
+                  <a:lnTo>
+                    <a:pt x="7682587" y="0"/>
                   </a:lnTo>
                 </a:path>
               </a:pathLst>
             </a:custGeom>
-            <a:ln w="13550" cap="flat">
+            <a:ln w="17246" cap="flat">
               <a:solidFill>
                 <a:srgbClr val="EBEBEB">
                   <a:alpha val="100000"/>
@@ -2830,15 +2830,15 @@
           </p:nvSpPr>
           <p:spPr>
             <a:xfrm>
-              <a:off x="2501542" y="2073503"/>
-              <a:ext cx="0" cy="3649639"/>
+              <a:off x="2574385" y="2209169"/>
+              <a:ext cx="0" cy="3404141"/>
             </a:xfrm>
             <a:custGeom>
               <a:avLst/>
               <a:pathLst>
-                <a:path w="0" h="3649639">
+                <a:path w="0" h="3404141">
                   <a:moveTo>
-                    <a:pt x="0" y="3649639"/>
+                    <a:pt x="0" y="3404141"/>
                   </a:moveTo>
                   <a:lnTo>
                     <a:pt x="0" y="0"/>
@@ -2849,7 +2849,7 @@
                 </a:path>
               </a:pathLst>
             </a:custGeom>
-            <a:ln w="13550" cap="flat">
+            <a:ln w="17246" cap="flat">
               <a:solidFill>
                 <a:srgbClr val="EBEBEB">
                   <a:alpha val="100000"/>
@@ -2873,15 +2873,15 @@
           </p:nvSpPr>
           <p:spPr>
             <a:xfrm>
-              <a:off x="4274200" y="2073503"/>
-              <a:ext cx="0" cy="3649639"/>
+              <a:off x="4320427" y="2209169"/>
+              <a:ext cx="0" cy="3404141"/>
             </a:xfrm>
             <a:custGeom>
               <a:avLst/>
               <a:pathLst>
-                <a:path w="0" h="3649639">
+                <a:path w="0" h="3404141">
                   <a:moveTo>
-                    <a:pt x="0" y="3649639"/>
+                    <a:pt x="0" y="3404141"/>
                   </a:moveTo>
                   <a:lnTo>
                     <a:pt x="0" y="0"/>
@@ -2892,7 +2892,7 @@
                 </a:path>
               </a:pathLst>
             </a:custGeom>
-            <a:ln w="13550" cap="flat">
+            <a:ln w="17246" cap="flat">
               <a:solidFill>
                 <a:srgbClr val="EBEBEB">
                   <a:alpha val="100000"/>
@@ -2916,15 +2916,15 @@
           </p:nvSpPr>
           <p:spPr>
             <a:xfrm>
-              <a:off x="6046857" y="2073503"/>
-              <a:ext cx="0" cy="3649639"/>
+              <a:off x="6066470" y="2209169"/>
+              <a:ext cx="0" cy="3404141"/>
             </a:xfrm>
             <a:custGeom>
               <a:avLst/>
               <a:pathLst>
-                <a:path w="0" h="3649639">
+                <a:path w="0" h="3404141">
                   <a:moveTo>
-                    <a:pt x="0" y="3649639"/>
+                    <a:pt x="0" y="3404141"/>
                   </a:moveTo>
                   <a:lnTo>
                     <a:pt x="0" y="0"/>
@@ -2935,7 +2935,7 @@
                 </a:path>
               </a:pathLst>
             </a:custGeom>
-            <a:ln w="13550" cap="flat">
+            <a:ln w="17246" cap="flat">
               <a:solidFill>
                 <a:srgbClr val="EBEBEB">
                   <a:alpha val="100000"/>
@@ -2959,15 +2959,15 @@
           </p:nvSpPr>
           <p:spPr>
             <a:xfrm>
-              <a:off x="7819515" y="2073503"/>
-              <a:ext cx="0" cy="3649639"/>
+              <a:off x="7812512" y="2209169"/>
+              <a:ext cx="0" cy="3404141"/>
             </a:xfrm>
             <a:custGeom>
               <a:avLst/>
               <a:pathLst>
-                <a:path w="0" h="3649639">
+                <a:path w="0" h="3404141">
                   <a:moveTo>
-                    <a:pt x="0" y="3649639"/>
+                    <a:pt x="0" y="3404141"/>
                   </a:moveTo>
                   <a:lnTo>
                     <a:pt x="0" y="0"/>
@@ -2978,7 +2978,7 @@
                 </a:path>
               </a:pathLst>
             </a:custGeom>
-            <a:ln w="13550" cap="flat">
+            <a:ln w="17246" cap="flat">
               <a:solidFill>
                 <a:srgbClr val="EBEBEB">
                   <a:alpha val="100000"/>
@@ -3002,492 +3002,492 @@
           </p:nvSpPr>
           <p:spPr>
             <a:xfrm>
-              <a:off x="817517" y="2073503"/>
-              <a:ext cx="7370972" cy="3482880"/>
+              <a:off x="915645" y="2209169"/>
+              <a:ext cx="7260303" cy="3248599"/>
             </a:xfrm>
             <a:custGeom>
               <a:avLst/>
               <a:pathLst>
-                <a:path w="7370972" h="3482880">
+                <a:path w="7260303" h="3248599">
                   <a:moveTo>
-                    <a:pt x="2553339" y="0"/>
+                    <a:pt x="2515003" y="0"/>
                   </a:moveTo>
                   <a:lnTo>
-                    <a:pt x="2557661" y="27534"/>
-                  </a:lnTo>
-                  <a:lnTo>
-                    <a:pt x="2635295" y="460165"/>
-                  </a:lnTo>
-                  <a:lnTo>
-                    <a:pt x="2712930" y="838641"/>
-                  </a:lnTo>
-                  <a:lnTo>
-                    <a:pt x="2790564" y="1169741"/>
-                  </a:lnTo>
-                  <a:lnTo>
-                    <a:pt x="2868198" y="1459397"/>
-                  </a:lnTo>
-                  <a:lnTo>
-                    <a:pt x="2945832" y="1712794"/>
-                  </a:lnTo>
-                  <a:lnTo>
-                    <a:pt x="3023466" y="1934473"/>
-                  </a:lnTo>
-                  <a:lnTo>
-                    <a:pt x="3101100" y="2128403"/>
-                  </a:lnTo>
-                  <a:lnTo>
-                    <a:pt x="3178734" y="2298057"/>
-                  </a:lnTo>
-                  <a:lnTo>
-                    <a:pt x="3256368" y="2446476"/>
-                  </a:lnTo>
-                  <a:lnTo>
-                    <a:pt x="3334002" y="2576316"/>
-                  </a:lnTo>
-                  <a:lnTo>
-                    <a:pt x="3411636" y="2660915"/>
-                  </a:lnTo>
-                  <a:lnTo>
-                    <a:pt x="3489270" y="2680798"/>
-                  </a:lnTo>
-                  <a:lnTo>
-                    <a:pt x="3566904" y="2700200"/>
-                  </a:lnTo>
-                  <a:lnTo>
-                    <a:pt x="3644538" y="2719133"/>
-                  </a:lnTo>
-                  <a:lnTo>
-                    <a:pt x="3722172" y="2737609"/>
-                  </a:lnTo>
-                  <a:lnTo>
-                    <a:pt x="3799806" y="2755639"/>
-                  </a:lnTo>
-                  <a:lnTo>
-                    <a:pt x="3877440" y="2773232"/>
-                  </a:lnTo>
-                  <a:lnTo>
-                    <a:pt x="3955074" y="2790401"/>
-                  </a:lnTo>
-                  <a:lnTo>
-                    <a:pt x="4032708" y="2807155"/>
-                  </a:lnTo>
-                  <a:lnTo>
-                    <a:pt x="4110342" y="2823504"/>
-                  </a:lnTo>
-                  <a:lnTo>
-                    <a:pt x="4187976" y="2839457"/>
-                  </a:lnTo>
-                  <a:lnTo>
-                    <a:pt x="4265610" y="2855026"/>
-                  </a:lnTo>
-                  <a:lnTo>
-                    <a:pt x="4343244" y="2870218"/>
-                  </a:lnTo>
-                  <a:lnTo>
-                    <a:pt x="4420879" y="2885043"/>
-                  </a:lnTo>
-                  <a:lnTo>
-                    <a:pt x="4498513" y="2899510"/>
-                  </a:lnTo>
-                  <a:lnTo>
-                    <a:pt x="4576147" y="2913627"/>
-                  </a:lnTo>
-                  <a:lnTo>
-                    <a:pt x="4653781" y="2927403"/>
-                  </a:lnTo>
-                  <a:lnTo>
-                    <a:pt x="4731415" y="2940847"/>
-                  </a:lnTo>
-                  <a:lnTo>
-                    <a:pt x="4809049" y="2953965"/>
-                  </a:lnTo>
-                  <a:lnTo>
-                    <a:pt x="4886683" y="2966766"/>
-                  </a:lnTo>
-                  <a:lnTo>
-                    <a:pt x="4964317" y="2979259"/>
-                  </a:lnTo>
-                  <a:lnTo>
-                    <a:pt x="5041951" y="2991449"/>
-                  </a:lnTo>
-                  <a:lnTo>
-                    <a:pt x="5119585" y="3003344"/>
-                  </a:lnTo>
-                  <a:lnTo>
-                    <a:pt x="5197219" y="3014953"/>
-                  </a:lnTo>
-                  <a:lnTo>
-                    <a:pt x="5274853" y="3026280"/>
-                  </a:lnTo>
-                  <a:lnTo>
-                    <a:pt x="5352487" y="3037335"/>
-                  </a:lnTo>
-                  <a:lnTo>
-                    <a:pt x="5430121" y="3048121"/>
-                  </a:lnTo>
-                  <a:lnTo>
-                    <a:pt x="5507755" y="3058648"/>
-                  </a:lnTo>
-                  <a:lnTo>
-                    <a:pt x="5585389" y="3068920"/>
-                  </a:lnTo>
-                  <a:lnTo>
-                    <a:pt x="5663023" y="3078943"/>
-                  </a:lnTo>
-                  <a:lnTo>
-                    <a:pt x="5740657" y="3088725"/>
-                  </a:lnTo>
-                  <a:lnTo>
-                    <a:pt x="5818291" y="3098270"/>
-                  </a:lnTo>
-                  <a:lnTo>
-                    <a:pt x="5895925" y="3107585"/>
-                  </a:lnTo>
-                  <a:lnTo>
-                    <a:pt x="5973559" y="3116674"/>
-                  </a:lnTo>
-                  <a:lnTo>
-                    <a:pt x="6051193" y="3125544"/>
-                  </a:lnTo>
-                  <a:lnTo>
-                    <a:pt x="6128827" y="3134199"/>
-                  </a:lnTo>
-                  <a:lnTo>
-                    <a:pt x="6206462" y="3142646"/>
-                  </a:lnTo>
-                  <a:lnTo>
-                    <a:pt x="6284096" y="3150888"/>
-                  </a:lnTo>
-                  <a:lnTo>
-                    <a:pt x="6361730" y="3158931"/>
-                  </a:lnTo>
-                  <a:lnTo>
-                    <a:pt x="6439364" y="3166780"/>
-                  </a:lnTo>
-                  <a:lnTo>
-                    <a:pt x="6516998" y="3174439"/>
-                  </a:lnTo>
-                  <a:lnTo>
-                    <a:pt x="6594632" y="3181913"/>
-                  </a:lnTo>
-                  <a:lnTo>
-                    <a:pt x="6672266" y="3189206"/>
-                  </a:lnTo>
-                  <a:lnTo>
-                    <a:pt x="6749900" y="3196323"/>
-                  </a:lnTo>
-                  <a:lnTo>
-                    <a:pt x="6827534" y="3203268"/>
-                  </a:lnTo>
-                  <a:lnTo>
-                    <a:pt x="6905168" y="3210046"/>
-                  </a:lnTo>
-                  <a:lnTo>
-                    <a:pt x="6982802" y="3216659"/>
-                  </a:lnTo>
-                  <a:lnTo>
-                    <a:pt x="7060436" y="3223113"/>
-                  </a:lnTo>
-                  <a:lnTo>
-                    <a:pt x="7138070" y="3229411"/>
-                  </a:lnTo>
-                  <a:lnTo>
-                    <a:pt x="7215704" y="3235557"/>
-                  </a:lnTo>
-                  <a:lnTo>
-                    <a:pt x="7293338" y="3241554"/>
-                  </a:lnTo>
-                  <a:lnTo>
-                    <a:pt x="7370972" y="3247406"/>
-                  </a:lnTo>
-                  <a:lnTo>
-                    <a:pt x="7370972" y="3482880"/>
-                  </a:lnTo>
-                  <a:lnTo>
-                    <a:pt x="7293338" y="3482756"/>
-                  </a:lnTo>
-                  <a:lnTo>
-                    <a:pt x="7215704" y="3482614"/>
-                  </a:lnTo>
-                  <a:lnTo>
-                    <a:pt x="7138070" y="3482452"/>
-                  </a:lnTo>
-                  <a:lnTo>
-                    <a:pt x="7060436" y="3482267"/>
-                  </a:lnTo>
-                  <a:lnTo>
-                    <a:pt x="6982802" y="3482056"/>
-                  </a:lnTo>
-                  <a:lnTo>
-                    <a:pt x="6905168" y="3481814"/>
-                  </a:lnTo>
-                  <a:lnTo>
-                    <a:pt x="6827534" y="3481537"/>
-                  </a:lnTo>
-                  <a:lnTo>
-                    <a:pt x="6749900" y="3481221"/>
-                  </a:lnTo>
-                  <a:lnTo>
-                    <a:pt x="6672266" y="3480860"/>
-                  </a:lnTo>
-                  <a:lnTo>
-                    <a:pt x="6594632" y="3480446"/>
-                  </a:lnTo>
-                  <a:lnTo>
-                    <a:pt x="6516998" y="3479974"/>
-                  </a:lnTo>
-                  <a:lnTo>
-                    <a:pt x="6439364" y="3479435"/>
-                  </a:lnTo>
-                  <a:lnTo>
-                    <a:pt x="6361730" y="3478818"/>
-                  </a:lnTo>
-                  <a:lnTo>
-                    <a:pt x="6284096" y="3478112"/>
-                  </a:lnTo>
-                  <a:lnTo>
-                    <a:pt x="6206462" y="3477306"/>
-                  </a:lnTo>
-                  <a:lnTo>
-                    <a:pt x="6128827" y="3476385"/>
-                  </a:lnTo>
-                  <a:lnTo>
-                    <a:pt x="6051193" y="3475331"/>
-                  </a:lnTo>
-                  <a:lnTo>
-                    <a:pt x="5973559" y="3474127"/>
-                  </a:lnTo>
-                  <a:lnTo>
-                    <a:pt x="5895925" y="3472751"/>
-                  </a:lnTo>
-                  <a:lnTo>
-                    <a:pt x="5818291" y="3471178"/>
-                  </a:lnTo>
-                  <a:lnTo>
-                    <a:pt x="5740657" y="3469379"/>
-                  </a:lnTo>
-                  <a:lnTo>
-                    <a:pt x="5663023" y="3467323"/>
-                  </a:lnTo>
-                  <a:lnTo>
-                    <a:pt x="5585389" y="3464974"/>
-                  </a:lnTo>
-                  <a:lnTo>
-                    <a:pt x="5507755" y="3462287"/>
-                  </a:lnTo>
-                  <a:lnTo>
-                    <a:pt x="5430121" y="3459217"/>
-                  </a:lnTo>
-                  <a:lnTo>
-                    <a:pt x="5352487" y="3455707"/>
-                  </a:lnTo>
-                  <a:lnTo>
-                    <a:pt x="5274853" y="3451695"/>
-                  </a:lnTo>
-                  <a:lnTo>
-                    <a:pt x="5197219" y="3447109"/>
-                  </a:lnTo>
-                  <a:lnTo>
-                    <a:pt x="5119585" y="3441867"/>
-                  </a:lnTo>
-                  <a:lnTo>
-                    <a:pt x="5041951" y="3435874"/>
-                  </a:lnTo>
-                  <a:lnTo>
-                    <a:pt x="4964317" y="3429025"/>
-                  </a:lnTo>
-                  <a:lnTo>
-                    <a:pt x="4886683" y="3421195"/>
-                  </a:lnTo>
-                  <a:lnTo>
-                    <a:pt x="4809049" y="3412244"/>
-                  </a:lnTo>
-                  <a:lnTo>
-                    <a:pt x="4731415" y="3402014"/>
-                  </a:lnTo>
-                  <a:lnTo>
-                    <a:pt x="4653781" y="3390319"/>
-                  </a:lnTo>
-                  <a:lnTo>
-                    <a:pt x="4576147" y="3376951"/>
-                  </a:lnTo>
-                  <a:lnTo>
-                    <a:pt x="4498513" y="3361670"/>
-                  </a:lnTo>
-                  <a:lnTo>
-                    <a:pt x="4420879" y="3344202"/>
-                  </a:lnTo>
-                  <a:lnTo>
-                    <a:pt x="4343244" y="3324236"/>
-                  </a:lnTo>
-                  <a:lnTo>
-                    <a:pt x="4265610" y="3301412"/>
-                  </a:lnTo>
-                  <a:lnTo>
-                    <a:pt x="4187976" y="3275322"/>
-                  </a:lnTo>
-                  <a:lnTo>
-                    <a:pt x="4110342" y="3245500"/>
-                  </a:lnTo>
-                  <a:lnTo>
-                    <a:pt x="4032708" y="3211410"/>
-                  </a:lnTo>
-                  <a:lnTo>
-                    <a:pt x="3955074" y="3172443"/>
-                  </a:lnTo>
-                  <a:lnTo>
-                    <a:pt x="3877440" y="3127900"/>
-                  </a:lnTo>
-                  <a:lnTo>
-                    <a:pt x="3799806" y="3076984"/>
-                  </a:lnTo>
-                  <a:lnTo>
-                    <a:pt x="3722172" y="3018782"/>
-                  </a:lnTo>
-                  <a:lnTo>
-                    <a:pt x="3644538" y="2952252"/>
-                  </a:lnTo>
-                  <a:lnTo>
-                    <a:pt x="3566904" y="2876203"/>
-                  </a:lnTo>
-                  <a:lnTo>
-                    <a:pt x="3489270" y="2789272"/>
-                  </a:lnTo>
-                  <a:lnTo>
-                    <a:pt x="3411636" y="2689903"/>
-                  </a:lnTo>
-                  <a:lnTo>
-                    <a:pt x="3334002" y="2640541"/>
-                  </a:lnTo>
-                  <a:lnTo>
-                    <a:pt x="3256368" y="2619661"/>
-                  </a:lnTo>
-                  <a:lnTo>
-                    <a:pt x="3178734" y="2598265"/>
-                  </a:lnTo>
-                  <a:lnTo>
-                    <a:pt x="3101100" y="2576338"/>
-                  </a:lnTo>
-                  <a:lnTo>
-                    <a:pt x="3023466" y="2553869"/>
-                  </a:lnTo>
-                  <a:lnTo>
-                    <a:pt x="2945832" y="2530844"/>
-                  </a:lnTo>
-                  <a:lnTo>
-                    <a:pt x="2868198" y="2507248"/>
-                  </a:lnTo>
-                  <a:lnTo>
-                    <a:pt x="2790564" y="2483068"/>
-                  </a:lnTo>
-                  <a:lnTo>
-                    <a:pt x="2712930" y="2458289"/>
-                  </a:lnTo>
-                  <a:lnTo>
-                    <a:pt x="2635295" y="2432897"/>
-                  </a:lnTo>
-                  <a:lnTo>
-                    <a:pt x="2557661" y="2406876"/>
-                  </a:lnTo>
-                  <a:lnTo>
-                    <a:pt x="2480027" y="2380210"/>
-                  </a:lnTo>
-                  <a:lnTo>
-                    <a:pt x="2402393" y="2352885"/>
-                  </a:lnTo>
-                  <a:lnTo>
-                    <a:pt x="2324759" y="2324882"/>
-                  </a:lnTo>
-                  <a:lnTo>
-                    <a:pt x="2247125" y="2296186"/>
-                  </a:lnTo>
-                  <a:lnTo>
-                    <a:pt x="2169491" y="2266780"/>
-                  </a:lnTo>
-                  <a:lnTo>
-                    <a:pt x="2091857" y="2236646"/>
-                  </a:lnTo>
-                  <a:lnTo>
-                    <a:pt x="2014223" y="2205765"/>
-                  </a:lnTo>
-                  <a:lnTo>
-                    <a:pt x="1936589" y="2174120"/>
-                  </a:lnTo>
-                  <a:lnTo>
-                    <a:pt x="1858955" y="2141691"/>
-                  </a:lnTo>
-                  <a:lnTo>
-                    <a:pt x="1781321" y="2108459"/>
-                  </a:lnTo>
-                  <a:lnTo>
-                    <a:pt x="1703687" y="2074404"/>
-                  </a:lnTo>
-                  <a:lnTo>
-                    <a:pt x="1626053" y="2039506"/>
-                  </a:lnTo>
-                  <a:lnTo>
-                    <a:pt x="1548419" y="2003744"/>
-                  </a:lnTo>
-                  <a:lnTo>
-                    <a:pt x="1470785" y="1967096"/>
-                  </a:lnTo>
-                  <a:lnTo>
-                    <a:pt x="1393151" y="1929541"/>
-                  </a:lnTo>
-                  <a:lnTo>
-                    <a:pt x="1315517" y="1891056"/>
-                  </a:lnTo>
-                  <a:lnTo>
-                    <a:pt x="1237883" y="1851617"/>
-                  </a:lnTo>
-                  <a:lnTo>
-                    <a:pt x="1160249" y="1811203"/>
-                  </a:lnTo>
-                  <a:lnTo>
-                    <a:pt x="1082615" y="1769787"/>
-                  </a:lnTo>
-                  <a:lnTo>
-                    <a:pt x="1004981" y="1727346"/>
-                  </a:lnTo>
-                  <a:lnTo>
-                    <a:pt x="927346" y="1683854"/>
-                  </a:lnTo>
-                  <a:lnTo>
-                    <a:pt x="849712" y="1639286"/>
-                  </a:lnTo>
-                  <a:lnTo>
-                    <a:pt x="772078" y="1593613"/>
-                  </a:lnTo>
-                  <a:lnTo>
-                    <a:pt x="694444" y="1546810"/>
-                  </a:lnTo>
-                  <a:lnTo>
-                    <a:pt x="616810" y="1498847"/>
-                  </a:lnTo>
-                  <a:lnTo>
-                    <a:pt x="539176" y="1449697"/>
-                  </a:lnTo>
-                  <a:lnTo>
-                    <a:pt x="461542" y="1399330"/>
-                  </a:lnTo>
-                  <a:lnTo>
-                    <a:pt x="383908" y="1347716"/>
-                  </a:lnTo>
-                  <a:lnTo>
-                    <a:pt x="306274" y="1294824"/>
-                  </a:lnTo>
-                  <a:lnTo>
-                    <a:pt x="228640" y="1240622"/>
-                  </a:lnTo>
-                  <a:lnTo>
-                    <a:pt x="151006" y="1185078"/>
-                  </a:lnTo>
-                  <a:lnTo>
-                    <a:pt x="73372" y="1128158"/>
-                  </a:lnTo>
-                  <a:lnTo>
-                    <a:pt x="0" y="1073031"/>
+                    <a:pt x="2519260" y="25682"/>
+                  </a:lnTo>
+                  <a:lnTo>
+                    <a:pt x="2595729" y="429211"/>
+                  </a:lnTo>
+                  <a:lnTo>
+                    <a:pt x="2672197" y="782229"/>
+                  </a:lnTo>
+                  <a:lnTo>
+                    <a:pt x="2748666" y="1091057"/>
+                  </a:lnTo>
+                  <a:lnTo>
+                    <a:pt x="2825134" y="1361228"/>
+                  </a:lnTo>
+                  <a:lnTo>
+                    <a:pt x="2901602" y="1597581"/>
+                  </a:lnTo>
+                  <a:lnTo>
+                    <a:pt x="2978071" y="1804348"/>
+                  </a:lnTo>
+                  <a:lnTo>
+                    <a:pt x="3054539" y="1985233"/>
+                  </a:lnTo>
+                  <a:lnTo>
+                    <a:pt x="3131008" y="2143476"/>
+                  </a:lnTo>
+                  <a:lnTo>
+                    <a:pt x="3207476" y="2281910"/>
+                  </a:lnTo>
+                  <a:lnTo>
+                    <a:pt x="3283945" y="2403017"/>
+                  </a:lnTo>
+                  <a:lnTo>
+                    <a:pt x="3360413" y="2481925"/>
+                  </a:lnTo>
+                  <a:lnTo>
+                    <a:pt x="3436881" y="2500471"/>
+                  </a:lnTo>
+                  <a:lnTo>
+                    <a:pt x="3513350" y="2518568"/>
+                  </a:lnTo>
+                  <a:lnTo>
+                    <a:pt x="3589818" y="2536227"/>
+                  </a:lnTo>
+                  <a:lnTo>
+                    <a:pt x="3666287" y="2553460"/>
+                  </a:lnTo>
+                  <a:lnTo>
+                    <a:pt x="3742755" y="2570277"/>
+                  </a:lnTo>
+                  <a:lnTo>
+                    <a:pt x="3819224" y="2586687"/>
+                  </a:lnTo>
+                  <a:lnTo>
+                    <a:pt x="3895692" y="2602701"/>
+                  </a:lnTo>
+                  <a:lnTo>
+                    <a:pt x="3972160" y="2618328"/>
+                  </a:lnTo>
+                  <a:lnTo>
+                    <a:pt x="4048629" y="2633577"/>
+                  </a:lnTo>
+                  <a:lnTo>
+                    <a:pt x="4125097" y="2648458"/>
+                  </a:lnTo>
+                  <a:lnTo>
+                    <a:pt x="4201566" y="2662979"/>
+                  </a:lnTo>
+                  <a:lnTo>
+                    <a:pt x="4278034" y="2677149"/>
+                  </a:lnTo>
+                  <a:lnTo>
+                    <a:pt x="4354503" y="2690977"/>
+                  </a:lnTo>
+                  <a:lnTo>
+                    <a:pt x="4430971" y="2704470"/>
+                  </a:lnTo>
+                  <a:lnTo>
+                    <a:pt x="4507439" y="2717638"/>
+                  </a:lnTo>
+                  <a:lnTo>
+                    <a:pt x="4583908" y="2730488"/>
+                  </a:lnTo>
+                  <a:lnTo>
+                    <a:pt x="4660376" y="2743027"/>
+                  </a:lnTo>
+                  <a:lnTo>
+                    <a:pt x="4736845" y="2755263"/>
+                  </a:lnTo>
+                  <a:lnTo>
+                    <a:pt x="4813313" y="2767203"/>
+                  </a:lnTo>
+                  <a:lnTo>
+                    <a:pt x="4889782" y="2778855"/>
+                  </a:lnTo>
+                  <a:lnTo>
+                    <a:pt x="4966250" y="2790225"/>
+                  </a:lnTo>
+                  <a:lnTo>
+                    <a:pt x="5042719" y="2801321"/>
+                  </a:lnTo>
+                  <a:lnTo>
+                    <a:pt x="5119187" y="2812148"/>
+                  </a:lnTo>
+                  <a:lnTo>
+                    <a:pt x="5195655" y="2822714"/>
+                  </a:lnTo>
+                  <a:lnTo>
+                    <a:pt x="5272124" y="2833024"/>
+                  </a:lnTo>
+                  <a:lnTo>
+                    <a:pt x="5348592" y="2843085"/>
+                  </a:lnTo>
+                  <a:lnTo>
+                    <a:pt x="5425061" y="2852904"/>
+                  </a:lnTo>
+                  <a:lnTo>
+                    <a:pt x="5501529" y="2862485"/>
+                  </a:lnTo>
+                  <a:lnTo>
+                    <a:pt x="5577998" y="2871834"/>
+                  </a:lnTo>
+                  <a:lnTo>
+                    <a:pt x="5654466" y="2880958"/>
+                  </a:lnTo>
+                  <a:lnTo>
+                    <a:pt x="5730934" y="2889861"/>
+                  </a:lnTo>
+                  <a:lnTo>
+                    <a:pt x="5807403" y="2898549"/>
+                  </a:lnTo>
+                  <a:lnTo>
+                    <a:pt x="5883871" y="2907027"/>
+                  </a:lnTo>
+                  <a:lnTo>
+                    <a:pt x="5960340" y="2915300"/>
+                  </a:lnTo>
+                  <a:lnTo>
+                    <a:pt x="6036808" y="2923373"/>
+                  </a:lnTo>
+                  <a:lnTo>
+                    <a:pt x="6113277" y="2931251"/>
+                  </a:lnTo>
+                  <a:lnTo>
+                    <a:pt x="6189745" y="2938939"/>
+                  </a:lnTo>
+                  <a:lnTo>
+                    <a:pt x="6266213" y="2946441"/>
+                  </a:lnTo>
+                  <a:lnTo>
+                    <a:pt x="6342682" y="2953762"/>
+                  </a:lnTo>
+                  <a:lnTo>
+                    <a:pt x="6419150" y="2960906"/>
+                  </a:lnTo>
+                  <a:lnTo>
+                    <a:pt x="6495619" y="2967877"/>
+                  </a:lnTo>
+                  <a:lnTo>
+                    <a:pt x="6572087" y="2974680"/>
+                  </a:lnTo>
+                  <a:lnTo>
+                    <a:pt x="6648556" y="2981318"/>
+                  </a:lnTo>
+                  <a:lnTo>
+                    <a:pt x="6725024" y="2987796"/>
+                  </a:lnTo>
+                  <a:lnTo>
+                    <a:pt x="6801492" y="2994118"/>
+                  </a:lnTo>
+                  <a:lnTo>
+                    <a:pt x="6877961" y="3000286"/>
+                  </a:lnTo>
+                  <a:lnTo>
+                    <a:pt x="6954429" y="3006306"/>
+                  </a:lnTo>
+                  <a:lnTo>
+                    <a:pt x="7030898" y="3012180"/>
+                  </a:lnTo>
+                  <a:lnTo>
+                    <a:pt x="7107366" y="3017913"/>
+                  </a:lnTo>
+                  <a:lnTo>
+                    <a:pt x="7183835" y="3023506"/>
+                  </a:lnTo>
+                  <a:lnTo>
+                    <a:pt x="7260303" y="3028965"/>
+                  </a:lnTo>
+                  <a:lnTo>
+                    <a:pt x="7260303" y="3248599"/>
+                  </a:lnTo>
+                  <a:lnTo>
+                    <a:pt x="7183835" y="3248484"/>
+                  </a:lnTo>
+                  <a:lnTo>
+                    <a:pt x="7107366" y="3248352"/>
+                  </a:lnTo>
+                  <a:lnTo>
+                    <a:pt x="7030898" y="3248201"/>
+                  </a:lnTo>
+                  <a:lnTo>
+                    <a:pt x="6954429" y="3248028"/>
+                  </a:lnTo>
+                  <a:lnTo>
+                    <a:pt x="6877961" y="3247830"/>
+                  </a:lnTo>
+                  <a:lnTo>
+                    <a:pt x="6801492" y="3247605"/>
+                  </a:lnTo>
+                  <a:lnTo>
+                    <a:pt x="6725024" y="3247347"/>
+                  </a:lnTo>
+                  <a:lnTo>
+                    <a:pt x="6648556" y="3247052"/>
+                  </a:lnTo>
+                  <a:lnTo>
+                    <a:pt x="6572087" y="3246715"/>
+                  </a:lnTo>
+                  <a:lnTo>
+                    <a:pt x="6495619" y="3246330"/>
+                  </a:lnTo>
+                  <a:lnTo>
+                    <a:pt x="6419150" y="3245889"/>
+                  </a:lnTo>
+                  <a:lnTo>
+                    <a:pt x="6342682" y="3245386"/>
+                  </a:lnTo>
+                  <a:lnTo>
+                    <a:pt x="6266213" y="3244810"/>
+                  </a:lnTo>
+                  <a:lnTo>
+                    <a:pt x="6189745" y="3244152"/>
+                  </a:lnTo>
+                  <a:lnTo>
+                    <a:pt x="6113277" y="3243401"/>
+                  </a:lnTo>
+                  <a:lnTo>
+                    <a:pt x="6036808" y="3242541"/>
+                  </a:lnTo>
+                  <a:lnTo>
+                    <a:pt x="5960340" y="3241559"/>
+                  </a:lnTo>
+                  <a:lnTo>
+                    <a:pt x="5883871" y="3240435"/>
+                  </a:lnTo>
+                  <a:lnTo>
+                    <a:pt x="5807403" y="3239152"/>
+                  </a:lnTo>
+                  <a:lnTo>
+                    <a:pt x="5730934" y="3237684"/>
+                  </a:lnTo>
+                  <a:lnTo>
+                    <a:pt x="5654466" y="3236007"/>
+                  </a:lnTo>
+                  <a:lnTo>
+                    <a:pt x="5577998" y="3234089"/>
+                  </a:lnTo>
+                  <a:lnTo>
+                    <a:pt x="5501529" y="3231897"/>
+                  </a:lnTo>
+                  <a:lnTo>
+                    <a:pt x="5425061" y="3229392"/>
+                  </a:lnTo>
+                  <a:lnTo>
+                    <a:pt x="5348592" y="3226528"/>
+                  </a:lnTo>
+                  <a:lnTo>
+                    <a:pt x="5272124" y="3223254"/>
+                  </a:lnTo>
+                  <a:lnTo>
+                    <a:pt x="5195655" y="3219512"/>
+                  </a:lnTo>
+                  <a:lnTo>
+                    <a:pt x="5119187" y="3215235"/>
+                  </a:lnTo>
+                  <a:lnTo>
+                    <a:pt x="5042719" y="3210345"/>
+                  </a:lnTo>
+                  <a:lnTo>
+                    <a:pt x="4966250" y="3204756"/>
+                  </a:lnTo>
+                  <a:lnTo>
+                    <a:pt x="4889782" y="3198367"/>
+                  </a:lnTo>
+                  <a:lnTo>
+                    <a:pt x="4813313" y="3191063"/>
+                  </a:lnTo>
+                  <a:lnTo>
+                    <a:pt x="4736845" y="3182715"/>
+                  </a:lnTo>
+                  <a:lnTo>
+                    <a:pt x="4660376" y="3173173"/>
+                  </a:lnTo>
+                  <a:lnTo>
+                    <a:pt x="4583908" y="3162264"/>
+                  </a:lnTo>
+                  <a:lnTo>
+                    <a:pt x="4507439" y="3149796"/>
+                  </a:lnTo>
+                  <a:lnTo>
+                    <a:pt x="4430971" y="3135542"/>
+                  </a:lnTo>
+                  <a:lnTo>
+                    <a:pt x="4354503" y="3119250"/>
+                  </a:lnTo>
+                  <a:lnTo>
+                    <a:pt x="4278034" y="3100626"/>
+                  </a:lnTo>
+                  <a:lnTo>
+                    <a:pt x="4201566" y="3079338"/>
+                  </a:lnTo>
+                  <a:lnTo>
+                    <a:pt x="4125097" y="3055004"/>
+                  </a:lnTo>
+                  <a:lnTo>
+                    <a:pt x="4048629" y="3027187"/>
+                  </a:lnTo>
+                  <a:lnTo>
+                    <a:pt x="3972160" y="2995391"/>
+                  </a:lnTo>
+                  <a:lnTo>
+                    <a:pt x="3895692" y="2959044"/>
+                  </a:lnTo>
+                  <a:lnTo>
+                    <a:pt x="3819224" y="2917498"/>
+                  </a:lnTo>
+                  <a:lnTo>
+                    <a:pt x="3742755" y="2870006"/>
+                  </a:lnTo>
+                  <a:lnTo>
+                    <a:pt x="3666287" y="2815719"/>
+                  </a:lnTo>
+                  <a:lnTo>
+                    <a:pt x="3589818" y="2753665"/>
+                  </a:lnTo>
+                  <a:lnTo>
+                    <a:pt x="3513350" y="2682731"/>
+                  </a:lnTo>
+                  <a:lnTo>
+                    <a:pt x="3436881" y="2601648"/>
+                  </a:lnTo>
+                  <a:lnTo>
+                    <a:pt x="3360413" y="2508963"/>
+                  </a:lnTo>
+                  <a:lnTo>
+                    <a:pt x="3283945" y="2462921"/>
+                  </a:lnTo>
+                  <a:lnTo>
+                    <a:pt x="3207476" y="2443446"/>
+                  </a:lnTo>
+                  <a:lnTo>
+                    <a:pt x="3131008" y="2423489"/>
+                  </a:lnTo>
+                  <a:lnTo>
+                    <a:pt x="3054539" y="2403038"/>
+                  </a:lnTo>
+                  <a:lnTo>
+                    <a:pt x="2978071" y="2382080"/>
+                  </a:lnTo>
+                  <a:lnTo>
+                    <a:pt x="2901602" y="2360603"/>
+                  </a:lnTo>
+                  <a:lnTo>
+                    <a:pt x="2825134" y="2338595"/>
+                  </a:lnTo>
+                  <a:lnTo>
+                    <a:pt x="2748666" y="2316041"/>
+                  </a:lnTo>
+                  <a:lnTo>
+                    <a:pt x="2672197" y="2292929"/>
+                  </a:lnTo>
+                  <a:lnTo>
+                    <a:pt x="2595729" y="2269245"/>
+                  </a:lnTo>
+                  <a:lnTo>
+                    <a:pt x="2519260" y="2244974"/>
+                  </a:lnTo>
+                  <a:lnTo>
+                    <a:pt x="2442792" y="2220102"/>
+                  </a:lnTo>
+                  <a:lnTo>
+                    <a:pt x="2366323" y="2194615"/>
+                  </a:lnTo>
+                  <a:lnTo>
+                    <a:pt x="2289855" y="2168496"/>
+                  </a:lnTo>
+                  <a:lnTo>
+                    <a:pt x="2213386" y="2141730"/>
+                  </a:lnTo>
+                  <a:lnTo>
+                    <a:pt x="2136918" y="2114302"/>
+                  </a:lnTo>
+                  <a:lnTo>
+                    <a:pt x="2060450" y="2086195"/>
+                  </a:lnTo>
+                  <a:lnTo>
+                    <a:pt x="1983981" y="2057391"/>
+                  </a:lnTo>
+                  <a:lnTo>
+                    <a:pt x="1907513" y="2027875"/>
+                  </a:lnTo>
+                  <a:lnTo>
+                    <a:pt x="1831044" y="1997627"/>
+                  </a:lnTo>
+                  <a:lnTo>
+                    <a:pt x="1754576" y="1966631"/>
+                  </a:lnTo>
+                  <a:lnTo>
+                    <a:pt x="1678107" y="1934867"/>
+                  </a:lnTo>
+                  <a:lnTo>
+                    <a:pt x="1601639" y="1902316"/>
+                  </a:lnTo>
+                  <a:lnTo>
+                    <a:pt x="1525171" y="1868959"/>
+                  </a:lnTo>
+                  <a:lnTo>
+                    <a:pt x="1448702" y="1834777"/>
+                  </a:lnTo>
+                  <a:lnTo>
+                    <a:pt x="1372234" y="1799748"/>
+                  </a:lnTo>
+                  <a:lnTo>
+                    <a:pt x="1295765" y="1763851"/>
+                  </a:lnTo>
+                  <a:lnTo>
+                    <a:pt x="1219297" y="1727066"/>
+                  </a:lnTo>
+                  <a:lnTo>
+                    <a:pt x="1142828" y="1689370"/>
+                  </a:lnTo>
+                  <a:lnTo>
+                    <a:pt x="1066360" y="1650740"/>
+                  </a:lnTo>
+                  <a:lnTo>
+                    <a:pt x="989892" y="1611154"/>
+                  </a:lnTo>
+                  <a:lnTo>
+                    <a:pt x="913423" y="1570588"/>
+                  </a:lnTo>
+                  <a:lnTo>
+                    <a:pt x="836955" y="1529017"/>
+                  </a:lnTo>
+                  <a:lnTo>
+                    <a:pt x="760486" y="1486417"/>
+                  </a:lnTo>
+                  <a:lnTo>
+                    <a:pt x="684018" y="1442761"/>
+                  </a:lnTo>
+                  <a:lnTo>
+                    <a:pt x="607549" y="1398025"/>
+                  </a:lnTo>
+                  <a:lnTo>
+                    <a:pt x="531081" y="1352182"/>
+                  </a:lnTo>
+                  <a:lnTo>
+                    <a:pt x="454613" y="1305203"/>
+                  </a:lnTo>
+                  <a:lnTo>
+                    <a:pt x="378144" y="1257060"/>
+                  </a:lnTo>
+                  <a:lnTo>
+                    <a:pt x="301676" y="1207726"/>
+                  </a:lnTo>
+                  <a:lnTo>
+                    <a:pt x="225207" y="1157170"/>
+                  </a:lnTo>
+                  <a:lnTo>
+                    <a:pt x="148739" y="1105362"/>
+                  </a:lnTo>
+                  <a:lnTo>
+                    <a:pt x="72270" y="1052271"/>
+                  </a:lnTo>
+                  <a:lnTo>
+                    <a:pt x="0" y="1000852"/>
                   </a:lnTo>
                   <a:close/>
                 </a:path>
@@ -3513,204 +3513,204 @@
           </p:nvSpPr>
           <p:spPr>
             <a:xfrm>
-              <a:off x="3370857" y="2073503"/>
-              <a:ext cx="4817633" cy="3247406"/>
+              <a:off x="3430648" y="2209169"/>
+              <a:ext cx="4745300" cy="3028965"/>
             </a:xfrm>
             <a:custGeom>
               <a:avLst/>
               <a:pathLst>
-                <a:path w="4817633" h="3247406">
+                <a:path w="4745300" h="3028965">
                   <a:moveTo>
                     <a:pt x="0" y="0"/>
                   </a:moveTo>
                   <a:lnTo>
-                    <a:pt x="4322" y="27534"/>
-                  </a:lnTo>
-                  <a:lnTo>
-                    <a:pt x="81956" y="460165"/>
-                  </a:lnTo>
-                  <a:lnTo>
-                    <a:pt x="159590" y="838641"/>
-                  </a:lnTo>
-                  <a:lnTo>
-                    <a:pt x="237224" y="1169741"/>
-                  </a:lnTo>
-                  <a:lnTo>
-                    <a:pt x="314858" y="1459397"/>
-                  </a:lnTo>
-                  <a:lnTo>
-                    <a:pt x="392492" y="1712794"/>
-                  </a:lnTo>
-                  <a:lnTo>
-                    <a:pt x="470126" y="1934473"/>
-                  </a:lnTo>
-                  <a:lnTo>
-                    <a:pt x="547760" y="2128403"/>
-                  </a:lnTo>
-                  <a:lnTo>
-                    <a:pt x="625394" y="2298057"/>
-                  </a:lnTo>
-                  <a:lnTo>
-                    <a:pt x="703028" y="2446476"/>
-                  </a:lnTo>
-                  <a:lnTo>
-                    <a:pt x="780662" y="2576316"/>
-                  </a:lnTo>
-                  <a:lnTo>
-                    <a:pt x="858297" y="2660915"/>
-                  </a:lnTo>
-                  <a:lnTo>
-                    <a:pt x="935931" y="2680798"/>
-                  </a:lnTo>
-                  <a:lnTo>
-                    <a:pt x="1013565" y="2700200"/>
-                  </a:lnTo>
-                  <a:lnTo>
-                    <a:pt x="1091199" y="2719133"/>
-                  </a:lnTo>
-                  <a:lnTo>
-                    <a:pt x="1168833" y="2737609"/>
-                  </a:lnTo>
-                  <a:lnTo>
-                    <a:pt x="1246467" y="2755639"/>
-                  </a:lnTo>
-                  <a:lnTo>
-                    <a:pt x="1324101" y="2773232"/>
-                  </a:lnTo>
-                  <a:lnTo>
-                    <a:pt x="1401735" y="2790401"/>
-                  </a:lnTo>
-                  <a:lnTo>
-                    <a:pt x="1479369" y="2807155"/>
-                  </a:lnTo>
-                  <a:lnTo>
-                    <a:pt x="1557003" y="2823504"/>
-                  </a:lnTo>
-                  <a:lnTo>
-                    <a:pt x="1634637" y="2839457"/>
-                  </a:lnTo>
-                  <a:lnTo>
-                    <a:pt x="1712271" y="2855026"/>
-                  </a:lnTo>
-                  <a:lnTo>
-                    <a:pt x="1789905" y="2870218"/>
-                  </a:lnTo>
-                  <a:lnTo>
-                    <a:pt x="1867539" y="2885043"/>
-                  </a:lnTo>
-                  <a:lnTo>
-                    <a:pt x="1945173" y="2899510"/>
-                  </a:lnTo>
-                  <a:lnTo>
-                    <a:pt x="2022807" y="2913627"/>
-                  </a:lnTo>
-                  <a:lnTo>
-                    <a:pt x="2100441" y="2927403"/>
-                  </a:lnTo>
-                  <a:lnTo>
-                    <a:pt x="2178075" y="2940847"/>
-                  </a:lnTo>
-                  <a:lnTo>
-                    <a:pt x="2255709" y="2953965"/>
-                  </a:lnTo>
-                  <a:lnTo>
-                    <a:pt x="2333343" y="2966766"/>
-                  </a:lnTo>
-                  <a:lnTo>
-                    <a:pt x="2410977" y="2979259"/>
-                  </a:lnTo>
-                  <a:lnTo>
-                    <a:pt x="2488611" y="2991449"/>
-                  </a:lnTo>
-                  <a:lnTo>
-                    <a:pt x="2566246" y="3003344"/>
-                  </a:lnTo>
-                  <a:lnTo>
-                    <a:pt x="2643880" y="3014953"/>
-                  </a:lnTo>
-                  <a:lnTo>
-                    <a:pt x="2721514" y="3026280"/>
-                  </a:lnTo>
-                  <a:lnTo>
-                    <a:pt x="2799148" y="3037335"/>
-                  </a:lnTo>
-                  <a:lnTo>
-                    <a:pt x="2876782" y="3048121"/>
-                  </a:lnTo>
-                  <a:lnTo>
-                    <a:pt x="2954416" y="3058648"/>
-                  </a:lnTo>
-                  <a:lnTo>
-                    <a:pt x="3032050" y="3068920"/>
-                  </a:lnTo>
-                  <a:lnTo>
-                    <a:pt x="3109684" y="3078943"/>
-                  </a:lnTo>
-                  <a:lnTo>
-                    <a:pt x="3187318" y="3088725"/>
-                  </a:lnTo>
-                  <a:lnTo>
-                    <a:pt x="3264952" y="3098270"/>
-                  </a:lnTo>
-                  <a:lnTo>
-                    <a:pt x="3342586" y="3107585"/>
-                  </a:lnTo>
-                  <a:lnTo>
-                    <a:pt x="3420220" y="3116674"/>
-                  </a:lnTo>
-                  <a:lnTo>
-                    <a:pt x="3497854" y="3125544"/>
-                  </a:lnTo>
-                  <a:lnTo>
-                    <a:pt x="3575488" y="3134199"/>
-                  </a:lnTo>
-                  <a:lnTo>
-                    <a:pt x="3653122" y="3142646"/>
-                  </a:lnTo>
-                  <a:lnTo>
-                    <a:pt x="3730756" y="3150888"/>
-                  </a:lnTo>
-                  <a:lnTo>
-                    <a:pt x="3808390" y="3158931"/>
-                  </a:lnTo>
-                  <a:lnTo>
-                    <a:pt x="3886024" y="3166780"/>
-                  </a:lnTo>
-                  <a:lnTo>
-                    <a:pt x="3963658" y="3174439"/>
-                  </a:lnTo>
-                  <a:lnTo>
-                    <a:pt x="4041292" y="3181913"/>
-                  </a:lnTo>
-                  <a:lnTo>
-                    <a:pt x="4118926" y="3189206"/>
-                  </a:lnTo>
-                  <a:lnTo>
-                    <a:pt x="4196560" y="3196323"/>
-                  </a:lnTo>
-                  <a:lnTo>
-                    <a:pt x="4274195" y="3203268"/>
-                  </a:lnTo>
-                  <a:lnTo>
-                    <a:pt x="4351829" y="3210046"/>
-                  </a:lnTo>
-                  <a:lnTo>
-                    <a:pt x="4429463" y="3216659"/>
-                  </a:lnTo>
-                  <a:lnTo>
-                    <a:pt x="4507097" y="3223113"/>
-                  </a:lnTo>
-                  <a:lnTo>
-                    <a:pt x="4584731" y="3229411"/>
-                  </a:lnTo>
-                  <a:lnTo>
-                    <a:pt x="4662365" y="3235557"/>
-                  </a:lnTo>
-                  <a:lnTo>
-                    <a:pt x="4739999" y="3241554"/>
-                  </a:lnTo>
-                  <a:lnTo>
-                    <a:pt x="4817633" y="3247406"/>
+                    <a:pt x="4257" y="25682"/>
+                  </a:lnTo>
+                  <a:lnTo>
+                    <a:pt x="80726" y="429211"/>
+                  </a:lnTo>
+                  <a:lnTo>
+                    <a:pt x="157194" y="782229"/>
+                  </a:lnTo>
+                  <a:lnTo>
+                    <a:pt x="233662" y="1091057"/>
+                  </a:lnTo>
+                  <a:lnTo>
+                    <a:pt x="310131" y="1361228"/>
+                  </a:lnTo>
+                  <a:lnTo>
+                    <a:pt x="386599" y="1597581"/>
+                  </a:lnTo>
+                  <a:lnTo>
+                    <a:pt x="463068" y="1804348"/>
+                  </a:lnTo>
+                  <a:lnTo>
+                    <a:pt x="539536" y="1985233"/>
+                  </a:lnTo>
+                  <a:lnTo>
+                    <a:pt x="616005" y="2143476"/>
+                  </a:lnTo>
+                  <a:lnTo>
+                    <a:pt x="692473" y="2281910"/>
+                  </a:lnTo>
+                  <a:lnTo>
+                    <a:pt x="768941" y="2403017"/>
+                  </a:lnTo>
+                  <a:lnTo>
+                    <a:pt x="845410" y="2481925"/>
+                  </a:lnTo>
+                  <a:lnTo>
+                    <a:pt x="921878" y="2500471"/>
+                  </a:lnTo>
+                  <a:lnTo>
+                    <a:pt x="998347" y="2518568"/>
+                  </a:lnTo>
+                  <a:lnTo>
+                    <a:pt x="1074815" y="2536227"/>
+                  </a:lnTo>
+                  <a:lnTo>
+                    <a:pt x="1151284" y="2553460"/>
+                  </a:lnTo>
+                  <a:lnTo>
+                    <a:pt x="1227752" y="2570277"/>
+                  </a:lnTo>
+                  <a:lnTo>
+                    <a:pt x="1304220" y="2586687"/>
+                  </a:lnTo>
+                  <a:lnTo>
+                    <a:pt x="1380689" y="2602701"/>
+                  </a:lnTo>
+                  <a:lnTo>
+                    <a:pt x="1457157" y="2618328"/>
+                  </a:lnTo>
+                  <a:lnTo>
+                    <a:pt x="1533626" y="2633577"/>
+                  </a:lnTo>
+                  <a:lnTo>
+                    <a:pt x="1610094" y="2648458"/>
+                  </a:lnTo>
+                  <a:lnTo>
+                    <a:pt x="1686563" y="2662979"/>
+                  </a:lnTo>
+                  <a:lnTo>
+                    <a:pt x="1763031" y="2677149"/>
+                  </a:lnTo>
+                  <a:lnTo>
+                    <a:pt x="1839500" y="2690977"/>
+                  </a:lnTo>
+                  <a:lnTo>
+                    <a:pt x="1915968" y="2704470"/>
+                  </a:lnTo>
+                  <a:lnTo>
+                    <a:pt x="1992436" y="2717638"/>
+                  </a:lnTo>
+                  <a:lnTo>
+                    <a:pt x="2068905" y="2730488"/>
+                  </a:lnTo>
+                  <a:lnTo>
+                    <a:pt x="2145373" y="2743027"/>
+                  </a:lnTo>
+                  <a:lnTo>
+                    <a:pt x="2221842" y="2755263"/>
+                  </a:lnTo>
+                  <a:lnTo>
+                    <a:pt x="2298310" y="2767203"/>
+                  </a:lnTo>
+                  <a:lnTo>
+                    <a:pt x="2374779" y="2778855"/>
+                  </a:lnTo>
+                  <a:lnTo>
+                    <a:pt x="2451247" y="2790225"/>
+                  </a:lnTo>
+                  <a:lnTo>
+                    <a:pt x="2527715" y="2801321"/>
+                  </a:lnTo>
+                  <a:lnTo>
+                    <a:pt x="2604184" y="2812148"/>
+                  </a:lnTo>
+                  <a:lnTo>
+                    <a:pt x="2680652" y="2822714"/>
+                  </a:lnTo>
+                  <a:lnTo>
+                    <a:pt x="2757121" y="2833024"/>
+                  </a:lnTo>
+                  <a:lnTo>
+                    <a:pt x="2833589" y="2843085"/>
+                  </a:lnTo>
+                  <a:lnTo>
+                    <a:pt x="2910058" y="2852904"/>
+                  </a:lnTo>
+                  <a:lnTo>
+                    <a:pt x="2986526" y="2862485"/>
+                  </a:lnTo>
+                  <a:lnTo>
+                    <a:pt x="3062994" y="2871834"/>
+                  </a:lnTo>
+                  <a:lnTo>
+                    <a:pt x="3139463" y="2880958"/>
+                  </a:lnTo>
+                  <a:lnTo>
+                    <a:pt x="3215931" y="2889861"/>
+                  </a:lnTo>
+                  <a:lnTo>
+                    <a:pt x="3292400" y="2898549"/>
+                  </a:lnTo>
+                  <a:lnTo>
+                    <a:pt x="3368868" y="2907027"/>
+                  </a:lnTo>
+                  <a:lnTo>
+                    <a:pt x="3445337" y="2915300"/>
+                  </a:lnTo>
+                  <a:lnTo>
+                    <a:pt x="3521805" y="2923373"/>
+                  </a:lnTo>
+                  <a:lnTo>
+                    <a:pt x="3598273" y="2931251"/>
+                  </a:lnTo>
+                  <a:lnTo>
+                    <a:pt x="3674742" y="2938939"/>
+                  </a:lnTo>
+                  <a:lnTo>
+                    <a:pt x="3751210" y="2946441"/>
+                  </a:lnTo>
+                  <a:lnTo>
+                    <a:pt x="3827679" y="2953762"/>
+                  </a:lnTo>
+                  <a:lnTo>
+                    <a:pt x="3904147" y="2960906"/>
+                  </a:lnTo>
+                  <a:lnTo>
+                    <a:pt x="3980616" y="2967877"/>
+                  </a:lnTo>
+                  <a:lnTo>
+                    <a:pt x="4057084" y="2974680"/>
+                  </a:lnTo>
+                  <a:lnTo>
+                    <a:pt x="4133553" y="2981318"/>
+                  </a:lnTo>
+                  <a:lnTo>
+                    <a:pt x="4210021" y="2987796"/>
+                  </a:lnTo>
+                  <a:lnTo>
+                    <a:pt x="4286489" y="2994118"/>
+                  </a:lnTo>
+                  <a:lnTo>
+                    <a:pt x="4362958" y="3000286"/>
+                  </a:lnTo>
+                  <a:lnTo>
+                    <a:pt x="4439426" y="3006306"/>
+                  </a:lnTo>
+                  <a:lnTo>
+                    <a:pt x="4515895" y="3012180"/>
+                  </a:lnTo>
+                  <a:lnTo>
+                    <a:pt x="4592363" y="3017913"/>
+                  </a:lnTo>
+                  <a:lnTo>
+                    <a:pt x="4668832" y="3023506"/>
+                  </a:lnTo>
+                  <a:lnTo>
+                    <a:pt x="4745300" y="3028965"/>
                   </a:lnTo>
                 </a:path>
               </a:pathLst>
@@ -3730,297 +3730,297 @@
           </p:nvSpPr>
           <p:spPr>
             <a:xfrm>
-              <a:off x="817517" y="3146534"/>
-              <a:ext cx="7370972" cy="2409848"/>
+              <a:off x="915645" y="3210021"/>
+              <a:ext cx="7260303" cy="2247747"/>
             </a:xfrm>
             <a:custGeom>
               <a:avLst/>
               <a:pathLst>
-                <a:path w="7370972" h="2409848">
+                <a:path w="7260303" h="2247747">
                   <a:moveTo>
-                    <a:pt x="7370972" y="2409848"/>
+                    <a:pt x="7260303" y="2247747"/>
                   </a:moveTo>
                   <a:lnTo>
-                    <a:pt x="7293338" y="2409725"/>
-                  </a:lnTo>
-                  <a:lnTo>
-                    <a:pt x="7215704" y="2409583"/>
-                  </a:lnTo>
-                  <a:lnTo>
-                    <a:pt x="7138070" y="2409421"/>
-                  </a:lnTo>
-                  <a:lnTo>
-                    <a:pt x="7060436" y="2409236"/>
-                  </a:lnTo>
-                  <a:lnTo>
-                    <a:pt x="6982802" y="2409024"/>
-                  </a:lnTo>
-                  <a:lnTo>
-                    <a:pt x="6905168" y="2408782"/>
-                  </a:lnTo>
-                  <a:lnTo>
-                    <a:pt x="6827534" y="2408506"/>
-                  </a:lnTo>
-                  <a:lnTo>
-                    <a:pt x="6749900" y="2408189"/>
-                  </a:lnTo>
-                  <a:lnTo>
-                    <a:pt x="6672266" y="2407828"/>
-                  </a:lnTo>
-                  <a:lnTo>
-                    <a:pt x="6594632" y="2407415"/>
-                  </a:lnTo>
-                  <a:lnTo>
-                    <a:pt x="6516998" y="2406943"/>
-                  </a:lnTo>
-                  <a:lnTo>
-                    <a:pt x="6439364" y="2406403"/>
-                  </a:lnTo>
-                  <a:lnTo>
-                    <a:pt x="6361730" y="2405786"/>
-                  </a:lnTo>
-                  <a:lnTo>
-                    <a:pt x="6284096" y="2405081"/>
-                  </a:lnTo>
-                  <a:lnTo>
-                    <a:pt x="6206462" y="2404275"/>
-                  </a:lnTo>
-                  <a:lnTo>
-                    <a:pt x="6128827" y="2403353"/>
-                  </a:lnTo>
-                  <a:lnTo>
-                    <a:pt x="6051193" y="2402300"/>
-                  </a:lnTo>
-                  <a:lnTo>
-                    <a:pt x="5973559" y="2401096"/>
-                  </a:lnTo>
-                  <a:lnTo>
-                    <a:pt x="5895925" y="2399719"/>
-                  </a:lnTo>
-                  <a:lnTo>
-                    <a:pt x="5818291" y="2398146"/>
-                  </a:lnTo>
-                  <a:lnTo>
-                    <a:pt x="5740657" y="2396348"/>
-                  </a:lnTo>
-                  <a:lnTo>
-                    <a:pt x="5663023" y="2394292"/>
-                  </a:lnTo>
-                  <a:lnTo>
-                    <a:pt x="5585389" y="2391942"/>
-                  </a:lnTo>
-                  <a:lnTo>
-                    <a:pt x="5507755" y="2389256"/>
-                  </a:lnTo>
-                  <a:lnTo>
-                    <a:pt x="5430121" y="2386185"/>
-                  </a:lnTo>
-                  <a:lnTo>
-                    <a:pt x="5352487" y="2382676"/>
-                  </a:lnTo>
-                  <a:lnTo>
-                    <a:pt x="5274853" y="2378664"/>
-                  </a:lnTo>
-                  <a:lnTo>
-                    <a:pt x="5197219" y="2374078"/>
-                  </a:lnTo>
-                  <a:lnTo>
-                    <a:pt x="5119585" y="2368835"/>
-                  </a:lnTo>
-                  <a:lnTo>
-                    <a:pt x="5041951" y="2362843"/>
-                  </a:lnTo>
-                  <a:lnTo>
-                    <a:pt x="4964317" y="2355993"/>
-                  </a:lnTo>
-                  <a:lnTo>
-                    <a:pt x="4886683" y="2348163"/>
-                  </a:lnTo>
-                  <a:lnTo>
-                    <a:pt x="4809049" y="2339213"/>
-                  </a:lnTo>
-                  <a:lnTo>
-                    <a:pt x="4731415" y="2328982"/>
-                  </a:lnTo>
-                  <a:lnTo>
-                    <a:pt x="4653781" y="2317287"/>
-                  </a:lnTo>
-                  <a:lnTo>
-                    <a:pt x="4576147" y="2303919"/>
-                  </a:lnTo>
-                  <a:lnTo>
-                    <a:pt x="4498513" y="2288638"/>
-                  </a:lnTo>
-                  <a:lnTo>
-                    <a:pt x="4420879" y="2271171"/>
-                  </a:lnTo>
-                  <a:lnTo>
-                    <a:pt x="4343244" y="2251204"/>
-                  </a:lnTo>
-                  <a:lnTo>
-                    <a:pt x="4265610" y="2228380"/>
-                  </a:lnTo>
-                  <a:lnTo>
-                    <a:pt x="4187976" y="2202291"/>
-                  </a:lnTo>
-                  <a:lnTo>
-                    <a:pt x="4110342" y="2172469"/>
-                  </a:lnTo>
-                  <a:lnTo>
-                    <a:pt x="4032708" y="2138379"/>
-                  </a:lnTo>
-                  <a:lnTo>
-                    <a:pt x="3955074" y="2099412"/>
-                  </a:lnTo>
-                  <a:lnTo>
-                    <a:pt x="3877440" y="2054869"/>
-                  </a:lnTo>
-                  <a:lnTo>
-                    <a:pt x="3799806" y="2003952"/>
-                  </a:lnTo>
-                  <a:lnTo>
-                    <a:pt x="3722172" y="1945750"/>
-                  </a:lnTo>
-                  <a:lnTo>
-                    <a:pt x="3644538" y="1879221"/>
-                  </a:lnTo>
-                  <a:lnTo>
-                    <a:pt x="3566904" y="1803172"/>
-                  </a:lnTo>
-                  <a:lnTo>
-                    <a:pt x="3489270" y="1716241"/>
-                  </a:lnTo>
-                  <a:lnTo>
-                    <a:pt x="3411636" y="1616872"/>
-                  </a:lnTo>
-                  <a:lnTo>
-                    <a:pt x="3334002" y="1567509"/>
-                  </a:lnTo>
-                  <a:lnTo>
-                    <a:pt x="3256368" y="1546630"/>
-                  </a:lnTo>
-                  <a:lnTo>
-                    <a:pt x="3178734" y="1525233"/>
-                  </a:lnTo>
-                  <a:lnTo>
-                    <a:pt x="3101100" y="1503307"/>
-                  </a:lnTo>
-                  <a:lnTo>
-                    <a:pt x="3023466" y="1480838"/>
-                  </a:lnTo>
-                  <a:lnTo>
-                    <a:pt x="2945832" y="1457812"/>
-                  </a:lnTo>
-                  <a:lnTo>
-                    <a:pt x="2868198" y="1434216"/>
-                  </a:lnTo>
-                  <a:lnTo>
-                    <a:pt x="2790564" y="1410036"/>
-                  </a:lnTo>
-                  <a:lnTo>
-                    <a:pt x="2712930" y="1385258"/>
-                  </a:lnTo>
-                  <a:lnTo>
-                    <a:pt x="2635295" y="1359865"/>
-                  </a:lnTo>
-                  <a:lnTo>
-                    <a:pt x="2557661" y="1333844"/>
-                  </a:lnTo>
-                  <a:lnTo>
-                    <a:pt x="2480027" y="1307179"/>
-                  </a:lnTo>
-                  <a:lnTo>
-                    <a:pt x="2402393" y="1279853"/>
-                  </a:lnTo>
-                  <a:lnTo>
-                    <a:pt x="2324759" y="1251851"/>
-                  </a:lnTo>
-                  <a:lnTo>
-                    <a:pt x="2247125" y="1223155"/>
-                  </a:lnTo>
-                  <a:lnTo>
-                    <a:pt x="2169491" y="1193749"/>
-                  </a:lnTo>
-                  <a:lnTo>
-                    <a:pt x="2091857" y="1163614"/>
-                  </a:lnTo>
-                  <a:lnTo>
-                    <a:pt x="2014223" y="1132734"/>
-                  </a:lnTo>
-                  <a:lnTo>
-                    <a:pt x="1936589" y="1101088"/>
-                  </a:lnTo>
-                  <a:lnTo>
-                    <a:pt x="1858955" y="1068659"/>
-                  </a:lnTo>
-                  <a:lnTo>
-                    <a:pt x="1781321" y="1035427"/>
-                  </a:lnTo>
-                  <a:lnTo>
-                    <a:pt x="1703687" y="1001373"/>
-                  </a:lnTo>
-                  <a:lnTo>
-                    <a:pt x="1626053" y="966474"/>
-                  </a:lnTo>
-                  <a:lnTo>
-                    <a:pt x="1548419" y="930712"/>
-                  </a:lnTo>
-                  <a:lnTo>
-                    <a:pt x="1470785" y="894065"/>
-                  </a:lnTo>
-                  <a:lnTo>
-                    <a:pt x="1393151" y="856509"/>
-                  </a:lnTo>
-                  <a:lnTo>
-                    <a:pt x="1315517" y="818024"/>
-                  </a:lnTo>
-                  <a:lnTo>
-                    <a:pt x="1237883" y="778586"/>
-                  </a:lnTo>
-                  <a:lnTo>
-                    <a:pt x="1160249" y="738171"/>
-                  </a:lnTo>
-                  <a:lnTo>
-                    <a:pt x="1082615" y="696756"/>
-                  </a:lnTo>
-                  <a:lnTo>
-                    <a:pt x="1004981" y="654315"/>
-                  </a:lnTo>
-                  <a:lnTo>
-                    <a:pt x="927346" y="610823"/>
-                  </a:lnTo>
-                  <a:lnTo>
-                    <a:pt x="849712" y="566254"/>
-                  </a:lnTo>
-                  <a:lnTo>
-                    <a:pt x="772078" y="520582"/>
-                  </a:lnTo>
-                  <a:lnTo>
-                    <a:pt x="694444" y="473778"/>
-                  </a:lnTo>
-                  <a:lnTo>
-                    <a:pt x="616810" y="425816"/>
-                  </a:lnTo>
-                  <a:lnTo>
-                    <a:pt x="539176" y="376666"/>
-                  </a:lnTo>
-                  <a:lnTo>
-                    <a:pt x="461542" y="326299"/>
-                  </a:lnTo>
-                  <a:lnTo>
-                    <a:pt x="383908" y="274685"/>
-                  </a:lnTo>
-                  <a:lnTo>
-                    <a:pt x="306274" y="221792"/>
-                  </a:lnTo>
-                  <a:lnTo>
-                    <a:pt x="228640" y="167590"/>
-                  </a:lnTo>
-                  <a:lnTo>
-                    <a:pt x="151006" y="112046"/>
-                  </a:lnTo>
-                  <a:lnTo>
-                    <a:pt x="73372" y="55127"/>
+                    <a:pt x="7183835" y="2247631"/>
+                  </a:lnTo>
+                  <a:lnTo>
+                    <a:pt x="7107366" y="2247499"/>
+                  </a:lnTo>
+                  <a:lnTo>
+                    <a:pt x="7030898" y="2247348"/>
+                  </a:lnTo>
+                  <a:lnTo>
+                    <a:pt x="6954429" y="2247175"/>
+                  </a:lnTo>
+                  <a:lnTo>
+                    <a:pt x="6877961" y="2246978"/>
+                  </a:lnTo>
+                  <a:lnTo>
+                    <a:pt x="6801492" y="2246752"/>
+                  </a:lnTo>
+                  <a:lnTo>
+                    <a:pt x="6725024" y="2246494"/>
+                  </a:lnTo>
+                  <a:lnTo>
+                    <a:pt x="6648556" y="2246199"/>
+                  </a:lnTo>
+                  <a:lnTo>
+                    <a:pt x="6572087" y="2245862"/>
+                  </a:lnTo>
+                  <a:lnTo>
+                    <a:pt x="6495619" y="2245477"/>
+                  </a:lnTo>
+                  <a:lnTo>
+                    <a:pt x="6419150" y="2245037"/>
+                  </a:lnTo>
+                  <a:lnTo>
+                    <a:pt x="6342682" y="2244533"/>
+                  </a:lnTo>
+                  <a:lnTo>
+                    <a:pt x="6266213" y="2243958"/>
+                  </a:lnTo>
+                  <a:lnTo>
+                    <a:pt x="6189745" y="2243300"/>
+                  </a:lnTo>
+                  <a:lnTo>
+                    <a:pt x="6113277" y="2242548"/>
+                  </a:lnTo>
+                  <a:lnTo>
+                    <a:pt x="6036808" y="2241688"/>
+                  </a:lnTo>
+                  <a:lnTo>
+                    <a:pt x="5960340" y="2240706"/>
+                  </a:lnTo>
+                  <a:lnTo>
+                    <a:pt x="5883871" y="2239583"/>
+                  </a:lnTo>
+                  <a:lnTo>
+                    <a:pt x="5807403" y="2238299"/>
+                  </a:lnTo>
+                  <a:lnTo>
+                    <a:pt x="5730934" y="2236832"/>
+                  </a:lnTo>
+                  <a:lnTo>
+                    <a:pt x="5654466" y="2235154"/>
+                  </a:lnTo>
+                  <a:lnTo>
+                    <a:pt x="5577998" y="2233237"/>
+                  </a:lnTo>
+                  <a:lnTo>
+                    <a:pt x="5501529" y="2231045"/>
+                  </a:lnTo>
+                  <a:lnTo>
+                    <a:pt x="5425061" y="2228539"/>
+                  </a:lnTo>
+                  <a:lnTo>
+                    <a:pt x="5348592" y="2225675"/>
+                  </a:lnTo>
+                  <a:lnTo>
+                    <a:pt x="5272124" y="2222402"/>
+                  </a:lnTo>
+                  <a:lnTo>
+                    <a:pt x="5195655" y="2218660"/>
+                  </a:lnTo>
+                  <a:lnTo>
+                    <a:pt x="5119187" y="2214382"/>
+                  </a:lnTo>
+                  <a:lnTo>
+                    <a:pt x="5042719" y="2209492"/>
+                  </a:lnTo>
+                  <a:lnTo>
+                    <a:pt x="4966250" y="2203903"/>
+                  </a:lnTo>
+                  <a:lnTo>
+                    <a:pt x="4889782" y="2197514"/>
+                  </a:lnTo>
+                  <a:lnTo>
+                    <a:pt x="4813313" y="2190211"/>
+                  </a:lnTo>
+                  <a:lnTo>
+                    <a:pt x="4736845" y="2181863"/>
+                  </a:lnTo>
+                  <a:lnTo>
+                    <a:pt x="4660376" y="2172320"/>
+                  </a:lnTo>
+                  <a:lnTo>
+                    <a:pt x="4583908" y="2161412"/>
+                  </a:lnTo>
+                  <a:lnTo>
+                    <a:pt x="4507439" y="2148943"/>
+                  </a:lnTo>
+                  <a:lnTo>
+                    <a:pt x="4430971" y="2134690"/>
+                  </a:lnTo>
+                  <a:lnTo>
+                    <a:pt x="4354503" y="2118397"/>
+                  </a:lnTo>
+                  <a:lnTo>
+                    <a:pt x="4278034" y="2099774"/>
+                  </a:lnTo>
+                  <a:lnTo>
+                    <a:pt x="4201566" y="2078485"/>
+                  </a:lnTo>
+                  <a:lnTo>
+                    <a:pt x="4125097" y="2054151"/>
+                  </a:lnTo>
+                  <a:lnTo>
+                    <a:pt x="4048629" y="2026335"/>
+                  </a:lnTo>
+                  <a:lnTo>
+                    <a:pt x="3972160" y="1994538"/>
+                  </a:lnTo>
+                  <a:lnTo>
+                    <a:pt x="3895692" y="1958192"/>
+                  </a:lnTo>
+                  <a:lnTo>
+                    <a:pt x="3819224" y="1916645"/>
+                  </a:lnTo>
+                  <a:lnTo>
+                    <a:pt x="3742755" y="1869154"/>
+                  </a:lnTo>
+                  <a:lnTo>
+                    <a:pt x="3666287" y="1814867"/>
+                  </a:lnTo>
+                  <a:lnTo>
+                    <a:pt x="3589818" y="1752812"/>
+                  </a:lnTo>
+                  <a:lnTo>
+                    <a:pt x="3513350" y="1681879"/>
+                  </a:lnTo>
+                  <a:lnTo>
+                    <a:pt x="3436881" y="1600796"/>
+                  </a:lnTo>
+                  <a:lnTo>
+                    <a:pt x="3360413" y="1508111"/>
+                  </a:lnTo>
+                  <a:lnTo>
+                    <a:pt x="3283945" y="1462068"/>
+                  </a:lnTo>
+                  <a:lnTo>
+                    <a:pt x="3207476" y="1442594"/>
+                  </a:lnTo>
+                  <a:lnTo>
+                    <a:pt x="3131008" y="1422636"/>
+                  </a:lnTo>
+                  <a:lnTo>
+                    <a:pt x="3054539" y="1402185"/>
+                  </a:lnTo>
+                  <a:lnTo>
+                    <a:pt x="2978071" y="1381227"/>
+                  </a:lnTo>
+                  <a:lnTo>
+                    <a:pt x="2901602" y="1359750"/>
+                  </a:lnTo>
+                  <a:lnTo>
+                    <a:pt x="2825134" y="1337742"/>
+                  </a:lnTo>
+                  <a:lnTo>
+                    <a:pt x="2748666" y="1315188"/>
+                  </a:lnTo>
+                  <a:lnTo>
+                    <a:pt x="2672197" y="1292076"/>
+                  </a:lnTo>
+                  <a:lnTo>
+                    <a:pt x="2595729" y="1268392"/>
+                  </a:lnTo>
+                  <a:lnTo>
+                    <a:pt x="2519260" y="1244121"/>
+                  </a:lnTo>
+                  <a:lnTo>
+                    <a:pt x="2442792" y="1219250"/>
+                  </a:lnTo>
+                  <a:lnTo>
+                    <a:pt x="2366323" y="1193762"/>
+                  </a:lnTo>
+                  <a:lnTo>
+                    <a:pt x="2289855" y="1167643"/>
+                  </a:lnTo>
+                  <a:lnTo>
+                    <a:pt x="2213386" y="1140878"/>
+                  </a:lnTo>
+                  <a:lnTo>
+                    <a:pt x="2136918" y="1113450"/>
+                  </a:lnTo>
+                  <a:lnTo>
+                    <a:pt x="2060450" y="1085342"/>
+                  </a:lnTo>
+                  <a:lnTo>
+                    <a:pt x="1983981" y="1056539"/>
+                  </a:lnTo>
+                  <a:lnTo>
+                    <a:pt x="1907513" y="1027022"/>
+                  </a:lnTo>
+                  <a:lnTo>
+                    <a:pt x="1831044" y="996774"/>
+                  </a:lnTo>
+                  <a:lnTo>
+                    <a:pt x="1754576" y="965778"/>
+                  </a:lnTo>
+                  <a:lnTo>
+                    <a:pt x="1678107" y="934014"/>
+                  </a:lnTo>
+                  <a:lnTo>
+                    <a:pt x="1601639" y="901463"/>
+                  </a:lnTo>
+                  <a:lnTo>
+                    <a:pt x="1525171" y="868107"/>
+                  </a:lnTo>
+                  <a:lnTo>
+                    <a:pt x="1448702" y="833924"/>
+                  </a:lnTo>
+                  <a:lnTo>
+                    <a:pt x="1372234" y="798895"/>
+                  </a:lnTo>
+                  <a:lnTo>
+                    <a:pt x="1295765" y="762999"/>
+                  </a:lnTo>
+                  <a:lnTo>
+                    <a:pt x="1219297" y="726213"/>
+                  </a:lnTo>
+                  <a:lnTo>
+                    <a:pt x="1142828" y="688517"/>
+                  </a:lnTo>
+                  <a:lnTo>
+                    <a:pt x="1066360" y="649888"/>
+                  </a:lnTo>
+                  <a:lnTo>
+                    <a:pt x="989892" y="610301"/>
+                  </a:lnTo>
+                  <a:lnTo>
+                    <a:pt x="913423" y="569735"/>
+                  </a:lnTo>
+                  <a:lnTo>
+                    <a:pt x="836955" y="528164"/>
+                  </a:lnTo>
+                  <a:lnTo>
+                    <a:pt x="760486" y="485564"/>
+                  </a:lnTo>
+                  <a:lnTo>
+                    <a:pt x="684018" y="441909"/>
+                  </a:lnTo>
+                  <a:lnTo>
+                    <a:pt x="607549" y="397173"/>
+                  </a:lnTo>
+                  <a:lnTo>
+                    <a:pt x="531081" y="351329"/>
+                  </a:lnTo>
+                  <a:lnTo>
+                    <a:pt x="454613" y="304350"/>
+                  </a:lnTo>
+                  <a:lnTo>
+                    <a:pt x="378144" y="256208"/>
+                  </a:lnTo>
+                  <a:lnTo>
+                    <a:pt x="301676" y="206873"/>
+                  </a:lnTo>
+                  <a:lnTo>
+                    <a:pt x="225207" y="156317"/>
+                  </a:lnTo>
+                  <a:lnTo>
+                    <a:pt x="148739" y="104509"/>
+                  </a:lnTo>
+                  <a:lnTo>
+                    <a:pt x="72270" y="51418"/>
                   </a:lnTo>
                   <a:lnTo>
                     <a:pt x="0" y="0"/>
@@ -4043,225 +4043,225 @@
           </p:nvSpPr>
           <p:spPr>
             <a:xfrm>
-              <a:off x="2795873" y="2073503"/>
-              <a:ext cx="5392616" cy="3469437"/>
+              <a:off x="2864297" y="2209169"/>
+              <a:ext cx="5311651" cy="3236060"/>
             </a:xfrm>
             <a:custGeom>
               <a:avLst/>
               <a:pathLst>
-                <a:path w="5392616" h="3469437">
+                <a:path w="5311651" h="3236060">
                   <a:moveTo>
                     <a:pt x="0" y="0"/>
                   </a:moveTo>
                   <a:lnTo>
-                    <a:pt x="35867" y="127623"/>
-                  </a:lnTo>
-                  <a:lnTo>
-                    <a:pt x="113501" y="382851"/>
-                  </a:lnTo>
-                  <a:lnTo>
-                    <a:pt x="191135" y="618670"/>
-                  </a:lnTo>
-                  <a:lnTo>
-                    <a:pt x="268769" y="836555"/>
-                  </a:lnTo>
-                  <a:lnTo>
-                    <a:pt x="346403" y="1037870"/>
-                  </a:lnTo>
-                  <a:lnTo>
-                    <a:pt x="424037" y="1223875"/>
-                  </a:lnTo>
-                  <a:lnTo>
-                    <a:pt x="501671" y="1395735"/>
-                  </a:lnTo>
-                  <a:lnTo>
-                    <a:pt x="579306" y="1554525"/>
-                  </a:lnTo>
-                  <a:lnTo>
-                    <a:pt x="656940" y="1701240"/>
-                  </a:lnTo>
-                  <a:lnTo>
-                    <a:pt x="734574" y="1836797"/>
-                  </a:lnTo>
-                  <a:lnTo>
-                    <a:pt x="812208" y="1962045"/>
-                  </a:lnTo>
-                  <a:lnTo>
-                    <a:pt x="889842" y="2077768"/>
-                  </a:lnTo>
-                  <a:lnTo>
-                    <a:pt x="967476" y="2184691"/>
-                  </a:lnTo>
-                  <a:lnTo>
-                    <a:pt x="1045110" y="2283482"/>
-                  </a:lnTo>
-                  <a:lnTo>
-                    <a:pt x="1122744" y="2374760"/>
-                  </a:lnTo>
-                  <a:lnTo>
-                    <a:pt x="1200378" y="2459097"/>
-                  </a:lnTo>
-                  <a:lnTo>
-                    <a:pt x="1278012" y="2537020"/>
-                  </a:lnTo>
-                  <a:lnTo>
-                    <a:pt x="1355646" y="2609017"/>
-                  </a:lnTo>
-                  <a:lnTo>
-                    <a:pt x="1433280" y="2675539"/>
-                  </a:lnTo>
-                  <a:lnTo>
-                    <a:pt x="1510914" y="2737002"/>
-                  </a:lnTo>
-                  <a:lnTo>
-                    <a:pt x="1588548" y="2793791"/>
-                  </a:lnTo>
-                  <a:lnTo>
-                    <a:pt x="1666182" y="2846261"/>
-                  </a:lnTo>
-                  <a:lnTo>
-                    <a:pt x="1743816" y="2894741"/>
-                  </a:lnTo>
-                  <a:lnTo>
-                    <a:pt x="1821450" y="2939534"/>
-                  </a:lnTo>
-                  <a:lnTo>
-                    <a:pt x="1899084" y="2980921"/>
-                  </a:lnTo>
-                  <a:lnTo>
-                    <a:pt x="1976718" y="3019160"/>
-                  </a:lnTo>
-                  <a:lnTo>
-                    <a:pt x="2054352" y="3054491"/>
-                  </a:lnTo>
-                  <a:lnTo>
-                    <a:pt x="2131986" y="3087135"/>
-                  </a:lnTo>
-                  <a:lnTo>
-                    <a:pt x="2209620" y="3117297"/>
-                  </a:lnTo>
-                  <a:lnTo>
-                    <a:pt x="2287255" y="3145165"/>
-                  </a:lnTo>
-                  <a:lnTo>
-                    <a:pt x="2364889" y="3170913"/>
-                  </a:lnTo>
-                  <a:lnTo>
-                    <a:pt x="2442523" y="3194704"/>
-                  </a:lnTo>
-                  <a:lnTo>
-                    <a:pt x="2520157" y="3216685"/>
-                  </a:lnTo>
-                  <a:lnTo>
-                    <a:pt x="2597791" y="3236995"/>
-                  </a:lnTo>
-                  <a:lnTo>
-                    <a:pt x="2675425" y="3255760"/>
-                  </a:lnTo>
-                  <a:lnTo>
-                    <a:pt x="2753059" y="3273098"/>
-                  </a:lnTo>
-                  <a:lnTo>
-                    <a:pt x="2830693" y="3289117"/>
-                  </a:lnTo>
-                  <a:lnTo>
-                    <a:pt x="2908327" y="3303919"/>
-                  </a:lnTo>
-                  <a:lnTo>
-                    <a:pt x="2985961" y="3317594"/>
-                  </a:lnTo>
-                  <a:lnTo>
-                    <a:pt x="3063595" y="3330230"/>
-                  </a:lnTo>
-                  <a:lnTo>
-                    <a:pt x="3141229" y="3341905"/>
-                  </a:lnTo>
-                  <a:lnTo>
-                    <a:pt x="3218863" y="3352692"/>
-                  </a:lnTo>
-                  <a:lnTo>
-                    <a:pt x="3296497" y="3362658"/>
-                  </a:lnTo>
-                  <a:lnTo>
-                    <a:pt x="3374131" y="3371867"/>
-                  </a:lnTo>
-                  <a:lnTo>
-                    <a:pt x="3451765" y="3380375"/>
-                  </a:lnTo>
-                  <a:lnTo>
-                    <a:pt x="3529399" y="3388236"/>
-                  </a:lnTo>
-                  <a:lnTo>
-                    <a:pt x="3607033" y="3395500"/>
-                  </a:lnTo>
-                  <a:lnTo>
-                    <a:pt x="3684667" y="3402211"/>
-                  </a:lnTo>
-                  <a:lnTo>
-                    <a:pt x="3762301" y="3408411"/>
-                  </a:lnTo>
-                  <a:lnTo>
-                    <a:pt x="3839935" y="3414140"/>
-                  </a:lnTo>
-                  <a:lnTo>
-                    <a:pt x="3917569" y="3419434"/>
-                  </a:lnTo>
-                  <a:lnTo>
-                    <a:pt x="3995203" y="3424325"/>
-                  </a:lnTo>
-                  <a:lnTo>
-                    <a:pt x="4072838" y="3428844"/>
-                  </a:lnTo>
-                  <a:lnTo>
-                    <a:pt x="4150472" y="3433019"/>
-                  </a:lnTo>
-                  <a:lnTo>
-                    <a:pt x="4228106" y="3436877"/>
-                  </a:lnTo>
-                  <a:lnTo>
-                    <a:pt x="4305740" y="3440441"/>
-                  </a:lnTo>
-                  <a:lnTo>
-                    <a:pt x="4383374" y="3443734"/>
-                  </a:lnTo>
-                  <a:lnTo>
-                    <a:pt x="4461008" y="3446777"/>
-                  </a:lnTo>
-                  <a:lnTo>
-                    <a:pt x="4538642" y="3449589"/>
-                  </a:lnTo>
-                  <a:lnTo>
-                    <a:pt x="4616276" y="3452186"/>
-                  </a:lnTo>
-                  <a:lnTo>
-                    <a:pt x="4693910" y="3454586"/>
-                  </a:lnTo>
-                  <a:lnTo>
-                    <a:pt x="4771544" y="3456804"/>
-                  </a:lnTo>
-                  <a:lnTo>
-                    <a:pt x="4849178" y="3458853"/>
-                  </a:lnTo>
-                  <a:lnTo>
-                    <a:pt x="4926812" y="3460746"/>
-                  </a:lnTo>
-                  <a:lnTo>
-                    <a:pt x="5004446" y="3462495"/>
-                  </a:lnTo>
-                  <a:lnTo>
-                    <a:pt x="5082080" y="3464111"/>
-                  </a:lnTo>
-                  <a:lnTo>
-                    <a:pt x="5159714" y="3465605"/>
-                  </a:lnTo>
-                  <a:lnTo>
-                    <a:pt x="5237348" y="3466984"/>
-                  </a:lnTo>
-                  <a:lnTo>
-                    <a:pt x="5314982" y="3468259"/>
-                  </a:lnTo>
-                  <a:lnTo>
-                    <a:pt x="5392616" y="3469437"/>
+                    <a:pt x="35329" y="119038"/>
+                  </a:lnTo>
+                  <a:lnTo>
+                    <a:pt x="111797" y="357098"/>
+                  </a:lnTo>
+                  <a:lnTo>
+                    <a:pt x="188266" y="577054"/>
+                  </a:lnTo>
+                  <a:lnTo>
+                    <a:pt x="264734" y="780283"/>
+                  </a:lnTo>
+                  <a:lnTo>
+                    <a:pt x="341202" y="968056"/>
+                  </a:lnTo>
+                  <a:lnTo>
+                    <a:pt x="417671" y="1141550"/>
+                  </a:lnTo>
+                  <a:lnTo>
+                    <a:pt x="494139" y="1301849"/>
+                  </a:lnTo>
+                  <a:lnTo>
+                    <a:pt x="570608" y="1449958"/>
+                  </a:lnTo>
+                  <a:lnTo>
+                    <a:pt x="647076" y="1586804"/>
+                  </a:lnTo>
+                  <a:lnTo>
+                    <a:pt x="723545" y="1713242"/>
+                  </a:lnTo>
+                  <a:lnTo>
+                    <a:pt x="800013" y="1830065"/>
+                  </a:lnTo>
+                  <a:lnTo>
+                    <a:pt x="876481" y="1938004"/>
+                  </a:lnTo>
+                  <a:lnTo>
+                    <a:pt x="952950" y="2037735"/>
+                  </a:lnTo>
+                  <a:lnTo>
+                    <a:pt x="1029418" y="2129881"/>
+                  </a:lnTo>
+                  <a:lnTo>
+                    <a:pt x="1105887" y="2215019"/>
+                  </a:lnTo>
+                  <a:lnTo>
+                    <a:pt x="1182355" y="2293683"/>
+                  </a:lnTo>
+                  <a:lnTo>
+                    <a:pt x="1258824" y="2366364"/>
+                  </a:lnTo>
+                  <a:lnTo>
+                    <a:pt x="1335292" y="2433518"/>
+                  </a:lnTo>
+                  <a:lnTo>
+                    <a:pt x="1411760" y="2495566"/>
+                  </a:lnTo>
+                  <a:lnTo>
+                    <a:pt x="1488229" y="2552894"/>
+                  </a:lnTo>
+                  <a:lnTo>
+                    <a:pt x="1564697" y="2605863"/>
+                  </a:lnTo>
+                  <a:lnTo>
+                    <a:pt x="1641166" y="2654804"/>
+                  </a:lnTo>
+                  <a:lnTo>
+                    <a:pt x="1717634" y="2700022"/>
+                  </a:lnTo>
+                  <a:lnTo>
+                    <a:pt x="1794103" y="2741802"/>
+                  </a:lnTo>
+                  <a:lnTo>
+                    <a:pt x="1870571" y="2780405"/>
+                  </a:lnTo>
+                  <a:lnTo>
+                    <a:pt x="1947040" y="2816072"/>
+                  </a:lnTo>
+                  <a:lnTo>
+                    <a:pt x="2023508" y="2849027"/>
+                  </a:lnTo>
+                  <a:lnTo>
+                    <a:pt x="2099976" y="2879475"/>
+                  </a:lnTo>
+                  <a:lnTo>
+                    <a:pt x="2176445" y="2907608"/>
+                  </a:lnTo>
+                  <a:lnTo>
+                    <a:pt x="2252913" y="2933601"/>
+                  </a:lnTo>
+                  <a:lnTo>
+                    <a:pt x="2329382" y="2957618"/>
+                  </a:lnTo>
+                  <a:lnTo>
+                    <a:pt x="2405850" y="2979808"/>
+                  </a:lnTo>
+                  <a:lnTo>
+                    <a:pt x="2482319" y="3000311"/>
+                  </a:lnTo>
+                  <a:lnTo>
+                    <a:pt x="2558787" y="3019254"/>
+                  </a:lnTo>
+                  <a:lnTo>
+                    <a:pt x="2635255" y="3036757"/>
+                  </a:lnTo>
+                  <a:lnTo>
+                    <a:pt x="2711724" y="3052929"/>
+                  </a:lnTo>
+                  <a:lnTo>
+                    <a:pt x="2788192" y="3067871"/>
+                  </a:lnTo>
+                  <a:lnTo>
+                    <a:pt x="2864661" y="3081676"/>
+                  </a:lnTo>
+                  <a:lnTo>
+                    <a:pt x="2941129" y="3094432"/>
+                  </a:lnTo>
+                  <a:lnTo>
+                    <a:pt x="3017598" y="3106218"/>
+                  </a:lnTo>
+                  <a:lnTo>
+                    <a:pt x="3094066" y="3117107"/>
+                  </a:lnTo>
+                  <a:lnTo>
+                    <a:pt x="3170534" y="3127168"/>
+                  </a:lnTo>
+                  <a:lnTo>
+                    <a:pt x="3247003" y="3136464"/>
+                  </a:lnTo>
+                  <a:lnTo>
+                    <a:pt x="3323471" y="3145054"/>
+                  </a:lnTo>
+                  <a:lnTo>
+                    <a:pt x="3399940" y="3152990"/>
+                  </a:lnTo>
+                  <a:lnTo>
+                    <a:pt x="3476408" y="3160322"/>
+                  </a:lnTo>
+                  <a:lnTo>
+                    <a:pt x="3552877" y="3167097"/>
+                  </a:lnTo>
+                  <a:lnTo>
+                    <a:pt x="3629345" y="3173356"/>
+                  </a:lnTo>
+                  <a:lnTo>
+                    <a:pt x="3705813" y="3179140"/>
+                  </a:lnTo>
+                  <a:lnTo>
+                    <a:pt x="3782282" y="3184484"/>
+                  </a:lnTo>
+                  <a:lnTo>
+                    <a:pt x="3858750" y="3189421"/>
+                  </a:lnTo>
+                  <a:lnTo>
+                    <a:pt x="3935219" y="3193983"/>
+                  </a:lnTo>
+                  <a:lnTo>
+                    <a:pt x="4011687" y="3198198"/>
+                  </a:lnTo>
+                  <a:lnTo>
+                    <a:pt x="4088156" y="3202092"/>
+                  </a:lnTo>
+                  <a:lnTo>
+                    <a:pt x="4164624" y="3205691"/>
+                  </a:lnTo>
+                  <a:lnTo>
+                    <a:pt x="4241092" y="3209015"/>
+                  </a:lnTo>
+                  <a:lnTo>
+                    <a:pt x="4317561" y="3212087"/>
+                  </a:lnTo>
+                  <a:lnTo>
+                    <a:pt x="4394029" y="3214925"/>
+                  </a:lnTo>
+                  <a:lnTo>
+                    <a:pt x="4470498" y="3217548"/>
+                  </a:lnTo>
+                  <a:lnTo>
+                    <a:pt x="4546966" y="3219970"/>
+                  </a:lnTo>
+                  <a:lnTo>
+                    <a:pt x="4623435" y="3222209"/>
+                  </a:lnTo>
+                  <a:lnTo>
+                    <a:pt x="4699903" y="3224277"/>
+                  </a:lnTo>
+                  <a:lnTo>
+                    <a:pt x="4776372" y="3226189"/>
+                  </a:lnTo>
+                  <a:lnTo>
+                    <a:pt x="4852840" y="3227954"/>
+                  </a:lnTo>
+                  <a:lnTo>
+                    <a:pt x="4929308" y="3229586"/>
+                  </a:lnTo>
+                  <a:lnTo>
+                    <a:pt x="5005777" y="3231093"/>
+                  </a:lnTo>
+                  <a:lnTo>
+                    <a:pt x="5082245" y="3232486"/>
+                  </a:lnTo>
+                  <a:lnTo>
+                    <a:pt x="5158714" y="3233773"/>
+                  </a:lnTo>
+                  <a:lnTo>
+                    <a:pt x="5235182" y="3234962"/>
+                  </a:lnTo>
+                  <a:lnTo>
+                    <a:pt x="5311651" y="3236060"/>
                   </a:lnTo>
                 </a:path>
               </a:pathLst>
@@ -4290,21 +4290,21 @@
           </p:nvSpPr>
           <p:spPr>
             <a:xfrm>
-              <a:off x="817517" y="4727786"/>
-              <a:ext cx="7799693" cy="0"/>
+              <a:off x="915645" y="4684908"/>
+              <a:ext cx="7682587" cy="0"/>
             </a:xfrm>
             <a:custGeom>
               <a:avLst/>
               <a:pathLst>
-                <a:path w="7799693" h="0">
+                <a:path w="7682587" h="0">
                   <a:moveTo>
                     <a:pt x="0" y="0"/>
                   </a:moveTo>
                   <a:lnTo>
-                    <a:pt x="7799693" y="0"/>
-                  </a:lnTo>
-                  <a:lnTo>
-                    <a:pt x="7799693" y="0"/>
+                    <a:pt x="7682587" y="0"/>
+                  </a:lnTo>
+                  <a:lnTo>
+                    <a:pt x="7682587" y="0"/>
                   </a:lnTo>
                 </a:path>
               </a:pathLst>
@@ -4333,15 +4333,15 @@
           </p:nvSpPr>
           <p:spPr>
             <a:xfrm>
-              <a:off x="4203673" y="2073503"/>
-              <a:ext cx="0" cy="3649639"/>
+              <a:off x="4250960" y="2209169"/>
+              <a:ext cx="0" cy="3404141"/>
             </a:xfrm>
             <a:custGeom>
               <a:avLst/>
               <a:pathLst>
-                <a:path w="0" h="3649639">
+                <a:path w="0" h="3404141">
                   <a:moveTo>
-                    <a:pt x="0" y="3649639"/>
+                    <a:pt x="0" y="3404141"/>
                   </a:moveTo>
                   <a:lnTo>
                     <a:pt x="0" y="0"/>
@@ -4376,8 +4376,8 @@
           </p:nvSpPr>
           <p:spPr>
             <a:xfrm>
-              <a:off x="692708" y="5517199"/>
-              <a:ext cx="62179" cy="80101"/>
+              <a:off x="756929" y="5407599"/>
+              <a:ext cx="79004" cy="101955"/>
             </a:xfrm>
             <a:prstGeom prst="rect">
               <a:avLst/>
@@ -4390,7 +4390,7 @@
             <a:p>
               <a:pPr algn="l" marL="0" marR="0" indent="0">
                 <a:lnSpc>
-                  <a:spcPts val="880"/>
+                  <a:spcPts val="1120"/>
                 </a:lnSpc>
                 <a:spcBef>
                   <a:spcPts val="0"/>
@@ -4400,7 +4400,7 @@
                 </a:spcAft>
               </a:pPr>
               <a:r>
-                <a:rPr sz="880">
+                <a:rPr sz="1120">
                   <a:solidFill>
                     <a:srgbClr val="4D4D4D">
                       <a:alpha val="100000"/>
@@ -4422,8 +4422,8 @@
           </p:nvSpPr>
           <p:spPr>
             <a:xfrm>
-              <a:off x="692708" y="4687735"/>
-              <a:ext cx="62179" cy="80101"/>
+              <a:off x="756929" y="4633931"/>
+              <a:ext cx="79004" cy="101955"/>
             </a:xfrm>
             <a:prstGeom prst="rect">
               <a:avLst/>
@@ -4436,7 +4436,7 @@
             <a:p>
               <a:pPr algn="l" marL="0" marR="0" indent="0">
                 <a:lnSpc>
-                  <a:spcPts val="880"/>
+                  <a:spcPts val="1120"/>
                 </a:lnSpc>
                 <a:spcBef>
                   <a:spcPts val="0"/>
@@ -4446,7 +4446,7 @@
                 </a:spcAft>
               </a:pPr>
               <a:r>
-                <a:rPr sz="880">
+                <a:rPr sz="1120">
                   <a:solidFill>
                     <a:srgbClr val="4D4D4D">
                       <a:alpha val="100000"/>
@@ -4468,8 +4468,8 @@
           </p:nvSpPr>
           <p:spPr>
             <a:xfrm>
-              <a:off x="692708" y="3858272"/>
-              <a:ext cx="62179" cy="80101"/>
+              <a:off x="756929" y="3860262"/>
+              <a:ext cx="79004" cy="101955"/>
             </a:xfrm>
             <a:prstGeom prst="rect">
               <a:avLst/>
@@ -4482,7 +4482,7 @@
             <a:p>
               <a:pPr algn="l" marL="0" marR="0" indent="0">
                 <a:lnSpc>
-                  <a:spcPts val="880"/>
+                  <a:spcPts val="1120"/>
                 </a:lnSpc>
                 <a:spcBef>
                   <a:spcPts val="0"/>
@@ -4492,7 +4492,7 @@
                 </a:spcAft>
               </a:pPr>
               <a:r>
-                <a:rPr sz="880">
+                <a:rPr sz="1120">
                   <a:solidFill>
                     <a:srgbClr val="4D4D4D">
                       <a:alpha val="100000"/>
@@ -4514,8 +4514,8 @@
           </p:nvSpPr>
           <p:spPr>
             <a:xfrm>
-              <a:off x="692708" y="3028808"/>
-              <a:ext cx="62179" cy="80101"/>
+              <a:off x="756929" y="3086593"/>
+              <a:ext cx="79004" cy="101955"/>
             </a:xfrm>
             <a:prstGeom prst="rect">
               <a:avLst/>
@@ -4528,7 +4528,7 @@
             <a:p>
               <a:pPr algn="l" marL="0" marR="0" indent="0">
                 <a:lnSpc>
-                  <a:spcPts val="880"/>
+                  <a:spcPts val="1120"/>
                 </a:lnSpc>
                 <a:spcBef>
                   <a:spcPts val="0"/>
@@ -4538,7 +4538,7 @@
                 </a:spcAft>
               </a:pPr>
               <a:r>
-                <a:rPr sz="880">
+                <a:rPr sz="1120">
                   <a:solidFill>
                     <a:srgbClr val="4D4D4D">
                       <a:alpha val="100000"/>
@@ -4560,8 +4560,8 @@
           </p:nvSpPr>
           <p:spPr>
             <a:xfrm>
-              <a:off x="692708" y="2199345"/>
-              <a:ext cx="62179" cy="80101"/>
+              <a:off x="756929" y="2312925"/>
+              <a:ext cx="79004" cy="101955"/>
             </a:xfrm>
             <a:prstGeom prst="rect">
               <a:avLst/>
@@ -4574,7 +4574,7 @@
             <a:p>
               <a:pPr algn="l" marL="0" marR="0" indent="0">
                 <a:lnSpc>
-                  <a:spcPts val="880"/>
+                  <a:spcPts val="1120"/>
                 </a:lnSpc>
                 <a:spcBef>
                   <a:spcPts val="0"/>
@@ -4584,7 +4584,7 @@
                 </a:spcAft>
               </a:pPr>
               <a:r>
-                <a:rPr sz="880">
+                <a:rPr sz="1120">
                   <a:solidFill>
                     <a:srgbClr val="4D4D4D">
                       <a:alpha val="100000"/>
@@ -4606,8 +4606,8 @@
           </p:nvSpPr>
           <p:spPr>
             <a:xfrm>
-              <a:off x="2423864" y="5785772"/>
-              <a:ext cx="155356" cy="80101"/>
+              <a:off x="2475630" y="5693022"/>
+              <a:ext cx="197510" cy="101955"/>
             </a:xfrm>
             <a:prstGeom prst="rect">
               <a:avLst/>
@@ -4620,7 +4620,7 @@
             <a:p>
               <a:pPr algn="l" marL="0" marR="0" indent="0">
                 <a:lnSpc>
-                  <a:spcPts val="880"/>
+                  <a:spcPts val="1120"/>
                 </a:lnSpc>
                 <a:spcBef>
                   <a:spcPts val="0"/>
@@ -4630,7 +4630,7 @@
                 </a:spcAft>
               </a:pPr>
               <a:r>
-                <a:rPr sz="880">
+                <a:rPr sz="1120">
                   <a:solidFill>
                     <a:srgbClr val="4D4D4D">
                       <a:alpha val="100000"/>
@@ -4652,8 +4652,8 @@
           </p:nvSpPr>
           <p:spPr>
             <a:xfrm>
-              <a:off x="4196521" y="5785772"/>
-              <a:ext cx="155356" cy="80101"/>
+              <a:off x="4221672" y="5693022"/>
+              <a:ext cx="197510" cy="101955"/>
             </a:xfrm>
             <a:prstGeom prst="rect">
               <a:avLst/>
@@ -4666,7 +4666,7 @@
             <a:p>
               <a:pPr algn="l" marL="0" marR="0" indent="0">
                 <a:lnSpc>
-                  <a:spcPts val="880"/>
+                  <a:spcPts val="1120"/>
                 </a:lnSpc>
                 <a:spcBef>
                   <a:spcPts val="0"/>
@@ -4676,7 +4676,7 @@
                 </a:spcAft>
               </a:pPr>
               <a:r>
-                <a:rPr sz="880">
+                <a:rPr sz="1120">
                   <a:solidFill>
                     <a:srgbClr val="4D4D4D">
                       <a:alpha val="100000"/>
@@ -4698,8 +4698,8 @@
           </p:nvSpPr>
           <p:spPr>
             <a:xfrm>
-              <a:off x="5969179" y="5785772"/>
-              <a:ext cx="155356" cy="80101"/>
+              <a:off x="5967715" y="5693022"/>
+              <a:ext cx="197510" cy="101955"/>
             </a:xfrm>
             <a:prstGeom prst="rect">
               <a:avLst/>
@@ -4712,7 +4712,7 @@
             <a:p>
               <a:pPr algn="l" marL="0" marR="0" indent="0">
                 <a:lnSpc>
-                  <a:spcPts val="880"/>
+                  <a:spcPts val="1120"/>
                 </a:lnSpc>
                 <a:spcBef>
                   <a:spcPts val="0"/>
@@ -4722,7 +4722,7 @@
                 </a:spcAft>
               </a:pPr>
               <a:r>
-                <a:rPr sz="880">
+                <a:rPr sz="1120">
                   <a:solidFill>
                     <a:srgbClr val="4D4D4D">
                       <a:alpha val="100000"/>
@@ -4744,8 +4744,8 @@
           </p:nvSpPr>
           <p:spPr>
             <a:xfrm>
-              <a:off x="7741836" y="5785772"/>
-              <a:ext cx="155356" cy="80101"/>
+              <a:off x="7713757" y="5693022"/>
+              <a:ext cx="197510" cy="101955"/>
             </a:xfrm>
             <a:prstGeom prst="rect">
               <a:avLst/>
@@ -4758,7 +4758,7 @@
             <a:p>
               <a:pPr algn="l" marL="0" marR="0" indent="0">
                 <a:lnSpc>
-                  <a:spcPts val="880"/>
+                  <a:spcPts val="1120"/>
                 </a:lnSpc>
                 <a:spcBef>
                   <a:spcPts val="0"/>
@@ -4768,7 +4768,7 @@
                 </a:spcAft>
               </a:pPr>
               <a:r>
-                <a:rPr sz="880">
+                <a:rPr sz="1120">
                   <a:solidFill>
                     <a:srgbClr val="4D4D4D">
                       <a:alpha val="100000"/>
@@ -4790,8 +4790,8 @@
           </p:nvSpPr>
           <p:spPr>
             <a:xfrm>
-              <a:off x="3879271" y="5925448"/>
-              <a:ext cx="1676186" cy="100218"/>
+              <a:off x="3690153" y="5870717"/>
+              <a:ext cx="2133569" cy="127558"/>
             </a:xfrm>
             <a:prstGeom prst="rect">
               <a:avLst/>
@@ -4804,7 +4804,7 @@
             <a:p>
               <a:pPr algn="l" marL="0" marR="0" indent="0">
                 <a:lnSpc>
-                  <a:spcPts val="1100"/>
+                  <a:spcPts val="1400"/>
                 </a:lnSpc>
                 <a:spcBef>
                   <a:spcPts val="0"/>
@@ -4814,7 +4814,7 @@
                 </a:spcAft>
               </a:pPr>
               <a:r>
-                <a:rPr sz="1100">
+                <a:rPr sz="1400">
                   <a:solidFill>
                     <a:srgbClr val="000000">
                       <a:alpha val="100000"/>
@@ -4836,8 +4836,8 @@
           </p:nvSpPr>
           <p:spPr>
             <a:xfrm rot="-5400000">
-              <a:off x="68446" y="3848213"/>
-              <a:ext cx="1016904" cy="100218"/>
+              <a:off x="-37527" y="3847460"/>
+              <a:ext cx="1294150" cy="127558"/>
             </a:xfrm>
             <a:prstGeom prst="rect">
               <a:avLst/>
@@ -4850,7 +4850,7 @@
             <a:p>
               <a:pPr algn="l" marL="0" marR="0" indent="0">
                 <a:lnSpc>
-                  <a:spcPts val="1100"/>
+                  <a:spcPts val="1400"/>
                 </a:lnSpc>
                 <a:spcBef>
                   <a:spcPts val="0"/>
@@ -4860,7 +4860,7 @@
                 </a:spcAft>
               </a:pPr>
               <a:r>
-                <a:rPr sz="1100">
+                <a:rPr sz="1400">
                   <a:solidFill>
                     <a:srgbClr val="000000">
                       <a:alpha val="100000"/>
@@ -4882,8 +4882,8 @@
           </p:nvSpPr>
           <p:spPr>
             <a:xfrm>
-              <a:off x="817517" y="1896563"/>
-              <a:ext cx="4166463" cy="82021"/>
+              <a:off x="915645" y="1977589"/>
+              <a:ext cx="5556900" cy="109362"/>
             </a:xfrm>
             <a:prstGeom prst="rect">
               <a:avLst/>
@@ -4896,7 +4896,7 @@
             <a:p>
               <a:pPr algn="l" marL="0" marR="0" indent="0">
                 <a:lnSpc>
-                  <a:spcPts val="900"/>
+                  <a:spcPts val="1200"/>
                 </a:lnSpc>
                 <a:spcBef>
                   <a:spcPts val="0"/>
@@ -4906,7 +4906,7 @@
                 </a:spcAft>
               </a:pPr>
               <a:r>
-                <a:rPr sz="900">
+                <a:rPr sz="1200">
                   <a:solidFill>
                     <a:srgbClr val="404040">
                       <a:alpha val="100000"/>
@@ -4928,8 +4928,8 @@
           </p:nvSpPr>
           <p:spPr>
             <a:xfrm>
-              <a:off x="817517" y="1669789"/>
-              <a:ext cx="3054278" cy="120152"/>
+              <a:off x="915645" y="1688767"/>
+              <a:ext cx="3888211" cy="153070"/>
             </a:xfrm>
             <a:prstGeom prst="rect">
               <a:avLst/>
@@ -4942,7 +4942,7 @@
             <a:p>
               <a:pPr algn="l" marL="0" marR="0" indent="0">
                 <a:lnSpc>
-                  <a:spcPts val="1320"/>
+                  <a:spcPts val="1680"/>
                 </a:lnSpc>
                 <a:spcBef>
                   <a:spcPts val="0"/>
@@ -4952,7 +4952,7 @@
                 </a:spcAft>
               </a:pPr>
               <a:r>
-                <a:rPr sz="1320">
+                <a:rPr sz="1680">
                   <a:solidFill>
                     <a:srgbClr val="000000">
                       <a:alpha val="100000"/>
